--- a/Identifikácia vzorov v časových radoch pre komparáciu volatility.pptx
+++ b/Identifikácia vzorov v časových radoch pre komparáciu volatility.pptx
@@ -15,7 +15,6 @@
     <p:sldId id="263" r:id="rId9"/>
     <p:sldId id="264" r:id="rId10"/>
     <p:sldId id="265" r:id="rId11"/>
-    <p:sldId id="267" r:id="rId12"/>
   </p:sldIdLst>
   <p:sldSz cx="12192000" cy="6858000"/>
   <p:notesSz cx="6858000" cy="9144000"/>
@@ -114,6 +113,11 @@
       </a:defRPr>
     </a:lvl9pPr>
   </p:defaultTextStyle>
+  <p:extLst>
+    <p:ext uri="{EFAFB233-063F-42B5-8137-9DF3F51BA10A}">
+      <p15:sldGuideLst xmlns:p15="http://schemas.microsoft.com/office/powerpoint/2012/main"/>
+    </p:ext>
+  </p:extLst>
 </p:presentation>
 </file>
 
@@ -5296,89 +5300,6 @@
 </p:sld>
 </file>
 
-<file path=ppt/slides/slide11.xml><?xml version="1.0" encoding="utf-8"?>
-<p:sld xmlns:a="http://schemas.openxmlformats.org/drawingml/2006/main" xmlns:r="http://schemas.openxmlformats.org/officeDocument/2006/relationships" xmlns:p="http://schemas.openxmlformats.org/presentationml/2006/main">
-  <p:cSld>
-    <p:spTree>
-      <p:nvGrpSpPr>
-        <p:cNvPr id="1" name=""/>
-        <p:cNvGrpSpPr/>
-        <p:nvPr/>
-      </p:nvGrpSpPr>
-      <p:grpSpPr>
-        <a:xfrm>
-          <a:off x="0" y="0"/>
-          <a:ext cx="0" cy="0"/>
-          <a:chOff x="0" y="0"/>
-          <a:chExt cx="0" cy="0"/>
-        </a:xfrm>
-      </p:grpSpPr>
-      <p:sp>
-        <p:nvSpPr>
-          <p:cNvPr id="2" name="Nadpis 1">
-            <a:extLst>
-              <a:ext uri="{FF2B5EF4-FFF2-40B4-BE49-F238E27FC236}">
-                <a16:creationId xmlns:a16="http://schemas.microsoft.com/office/drawing/2014/main" id="{92BCF468-DBAB-6699-63A4-279F119AAF81}"/>
-              </a:ext>
-            </a:extLst>
-          </p:cNvPr>
-          <p:cNvSpPr>
-            <a:spLocks noGrp="1"/>
-          </p:cNvSpPr>
-          <p:nvPr>
-            <p:ph type="title"/>
-          </p:nvPr>
-        </p:nvSpPr>
-        <p:spPr/>
-        <p:txBody>
-          <a:bodyPr/>
-          <a:lstStyle/>
-          <a:p>
-            <a:r>
-              <a:rPr lang="sk-SK" dirty="0"/>
-              <a:t>Zdroje</a:t>
-            </a:r>
-          </a:p>
-        </p:txBody>
-      </p:sp>
-      <p:sp>
-        <p:nvSpPr>
-          <p:cNvPr id="3" name="Zástupný objekt pre obsah 2">
-            <a:extLst>
-              <a:ext uri="{FF2B5EF4-FFF2-40B4-BE49-F238E27FC236}">
-                <a16:creationId xmlns:a16="http://schemas.microsoft.com/office/drawing/2014/main" id="{6CA83222-6BB6-CEE6-99B5-F79D7688B82D}"/>
-              </a:ext>
-            </a:extLst>
-          </p:cNvPr>
-          <p:cNvSpPr>
-            <a:spLocks noGrp="1"/>
-          </p:cNvSpPr>
-          <p:nvPr>
-            <p:ph idx="1"/>
-          </p:nvPr>
-        </p:nvSpPr>
-        <p:spPr/>
-        <p:txBody>
-          <a:bodyPr/>
-          <a:lstStyle/>
-          <a:p>
-            <a:endParaRPr lang="sk-SK" dirty="0"/>
-          </a:p>
-        </p:txBody>
-      </p:sp>
-    </p:spTree>
-    <p:extLst>
-      <p:ext uri="{BB962C8B-B14F-4D97-AF65-F5344CB8AC3E}">
-        <p14:creationId xmlns:p14="http://schemas.microsoft.com/office/powerpoint/2010/main" val="4186765228"/>
-      </p:ext>
-    </p:extLst>
-  </p:cSld>
-  <p:clrMapOvr>
-    <a:masterClrMapping/>
-  </p:clrMapOvr>
-</p:sld>
-</file>
-
 <file path=ppt/slides/slide2.xml><?xml version="1.0" encoding="utf-8"?>
 <p:sld xmlns:a="http://schemas.openxmlformats.org/drawingml/2006/main" xmlns:r="http://schemas.openxmlformats.org/officeDocument/2006/relationships" xmlns:p="http://schemas.openxmlformats.org/presentationml/2006/main">
   <p:cSld>
@@ -5442,13 +5363,13 @@
         </p:nvSpPr>
         <p:spPr>
           <a:xfrm>
-            <a:off x="1115568" y="2458528"/>
-            <a:ext cx="10168128" cy="3850832"/>
+            <a:off x="1115568" y="2286000"/>
+            <a:ext cx="10168128" cy="4023360"/>
           </a:xfrm>
         </p:spPr>
         <p:txBody>
           <a:bodyPr>
-            <a:normAutofit lnSpcReduction="10000"/>
+            <a:normAutofit/>
           </a:bodyPr>
           <a:lstStyle/>
           <a:p>
@@ -5713,12 +5634,58 @@
             <p:ph idx="1"/>
           </p:nvPr>
         </p:nvSpPr>
-        <p:spPr/>
+        <p:spPr>
+          <a:xfrm>
+            <a:off x="1115568" y="2478024"/>
+            <a:ext cx="10168128" cy="3284421"/>
+          </a:xfrm>
+        </p:spPr>
         <p:txBody>
           <a:bodyPr/>
           <a:lstStyle/>
           <a:p>
-            <a:endParaRPr lang="sk-SK" dirty="0"/>
+            <a:r>
+              <a:rPr lang="sk-SK" sz="1800" dirty="0"/>
+              <a:t>Empirické porovnanie modelov strojového učenia s ekonometrickými riešeniami,</a:t>
+            </a:r>
+          </a:p>
+          <a:p>
+            <a:r>
+              <a:rPr lang="sk-SK" sz="1800" dirty="0"/>
+              <a:t>Praktické poznatky o správaní akciových trhov počas období so zvýšeným rizikom </a:t>
+            </a:r>
+            <a:r>
+              <a:rPr lang="en-GB" sz="1800" dirty="0"/>
+              <a:t>(COVID-19)</a:t>
+            </a:r>
+            <a:r>
+              <a:rPr lang="sk-SK" sz="1800" dirty="0"/>
+              <a:t>,</a:t>
+            </a:r>
+          </a:p>
+          <a:p>
+            <a:r>
+              <a:rPr lang="sk-SK" sz="1800" dirty="0"/>
+              <a:t>Komparatívna analýza volatility akciových trhov USA, Európy a Číny,</a:t>
+            </a:r>
+          </a:p>
+          <a:p>
+            <a:r>
+              <a:rPr lang="sk-SK" sz="1800" dirty="0"/>
+              <a:t>Identifikácia faktorov, ktoré vplývajú na dynamiku volatility,</a:t>
+            </a:r>
+          </a:p>
+          <a:p>
+            <a:r>
+              <a:rPr lang="sk-SK" sz="1800" dirty="0"/>
+              <a:t>Definícia metodiky pre identifikáciu vzorov v časových radoch akciových trhov s dôrazom na metódy umelej inteligencie,</a:t>
+            </a:r>
+          </a:p>
+          <a:p>
+            <a:r>
+              <a:rPr lang="sk-SK" sz="1800" dirty="0"/>
+              <a:t>Poznatky o robustnosti definovanej metodiky vzhľadom na zdroj dát akciových indexov.</a:t>
+            </a:r>
           </a:p>
         </p:txBody>
       </p:sp>
@@ -5798,10 +5765,66 @@
         </p:nvSpPr>
         <p:spPr/>
         <p:txBody>
-          <a:bodyPr/>
-          <a:lstStyle/>
-          <a:p>
-            <a:endParaRPr lang="sk-SK" dirty="0"/>
+          <a:bodyPr>
+            <a:normAutofit/>
+          </a:bodyPr>
+          <a:lstStyle/>
+          <a:p>
+            <a:pPr marL="0" indent="0">
+              <a:buNone/>
+            </a:pPr>
+            <a:r>
+              <a:rPr lang="sk-SK" sz="1800" b="1" dirty="0"/>
+              <a:t>Príprava dát</a:t>
+            </a:r>
+          </a:p>
+          <a:p>
+            <a:r>
+              <a:rPr lang="sk-SK" sz="1800" dirty="0"/>
+              <a:t>Získanie a predspracovanie dát,</a:t>
+            </a:r>
+          </a:p>
+          <a:p>
+            <a:pPr marL="0" indent="0">
+              <a:buNone/>
+            </a:pPr>
+            <a:r>
+              <a:rPr lang="sk-SK" sz="1800" b="1" dirty="0"/>
+              <a:t>Modelovanie</a:t>
+            </a:r>
+          </a:p>
+          <a:p>
+            <a:r>
+              <a:rPr lang="sk-SK" sz="1800" dirty="0"/>
+              <a:t>Ekonometrické modely volatility,</a:t>
+            </a:r>
+          </a:p>
+          <a:p>
+            <a:r>
+              <a:rPr lang="sk-SK" sz="1800" dirty="0"/>
+              <a:t>Modely strojového učenia,</a:t>
+            </a:r>
+          </a:p>
+          <a:p>
+            <a:pPr marL="0" indent="0">
+              <a:buNone/>
+            </a:pPr>
+            <a:r>
+              <a:rPr lang="sk-SK" sz="1800" b="1" dirty="0"/>
+              <a:t>Testovanie</a:t>
+            </a:r>
+          </a:p>
+          <a:p>
+            <a:r>
+              <a:rPr lang="sk-SK" sz="1800" dirty="0"/>
+              <a:t>Vyhodnotenie a porovnanie výsledkov odlišných zdrojov dát</a:t>
+            </a:r>
+          </a:p>
+          <a:p>
+            <a:pPr marL="0" indent="0">
+              <a:buNone/>
+            </a:pPr>
+            <a:endParaRPr lang="sk-SK" sz="1800" dirty="0"/>
           </a:p>
         </p:txBody>
       </p:sp>
@@ -5881,10 +5904,81 @@
         </p:nvSpPr>
         <p:spPr/>
         <p:txBody>
-          <a:bodyPr/>
-          <a:lstStyle/>
-          <a:p>
-            <a:endParaRPr lang="sk-SK" dirty="0"/>
+          <a:bodyPr>
+            <a:normAutofit/>
+          </a:bodyPr>
+          <a:lstStyle/>
+          <a:p>
+            <a:pPr marL="0" indent="0">
+              <a:buNone/>
+            </a:pPr>
+            <a:r>
+              <a:rPr lang="sk-SK" sz="1800" b="1" dirty="0"/>
+              <a:t>Zdroje dát</a:t>
+            </a:r>
+          </a:p>
+          <a:p>
+            <a:r>
+              <a:rPr lang="sk-SK" sz="1800" dirty="0"/>
+              <a:t>Stooq.pl a Yahoo </a:t>
+            </a:r>
+            <a:r>
+              <a:rPr lang="sk-SK" sz="1800" dirty="0" err="1"/>
+              <a:t>Finance</a:t>
+            </a:r>
+            <a:endParaRPr lang="sk-SK" sz="1800" dirty="0"/>
+          </a:p>
+          <a:p>
+            <a:pPr marL="0" indent="0">
+              <a:buNone/>
+            </a:pPr>
+            <a:r>
+              <a:rPr lang="sk-SK" sz="1800" b="1" dirty="0"/>
+              <a:t>Vybrané akciové indexy</a:t>
+            </a:r>
+          </a:p>
+          <a:p>
+            <a:r>
+              <a:rPr lang="sk-SK" sz="1800" dirty="0"/>
+              <a:t>S</a:t>
+            </a:r>
+            <a:r>
+              <a:rPr lang="en-GB" sz="1800" dirty="0"/>
+              <a:t>&amp;P </a:t>
+            </a:r>
+            <a:r>
+              <a:rPr lang="sk-SK" sz="1800" dirty="0"/>
+              <a:t>500, Nemecký DAX, SSE </a:t>
+            </a:r>
+            <a:r>
+              <a:rPr lang="sk-SK" sz="1800" dirty="0" err="1"/>
+              <a:t>Composite</a:t>
+            </a:r>
+            <a:endParaRPr lang="sk-SK" sz="1800" dirty="0"/>
+          </a:p>
+          <a:p>
+            <a:pPr marL="0" indent="0">
+              <a:buNone/>
+            </a:pPr>
+            <a:r>
+              <a:rPr lang="en-GB" sz="1800" b="1" dirty="0" err="1"/>
+              <a:t>Predspracovanie</a:t>
+            </a:r>
+            <a:r>
+              <a:rPr lang="en-GB" sz="1800" b="1" dirty="0"/>
+              <a:t> d</a:t>
+            </a:r>
+            <a:r>
+              <a:rPr lang="sk-SK" sz="1800" b="1" dirty="0" err="1"/>
+              <a:t>át</a:t>
+            </a:r>
+            <a:endParaRPr lang="sk-SK" sz="1800" b="1" dirty="0"/>
+          </a:p>
+          <a:p>
+            <a:pPr marL="0" indent="0">
+              <a:buNone/>
+            </a:pPr>
+            <a:endParaRPr lang="sk-SK" sz="1800" dirty="0"/>
           </a:p>
         </p:txBody>
       </p:sp>
@@ -5964,10 +6058,32 @@
         </p:nvSpPr>
         <p:spPr/>
         <p:txBody>
-          <a:bodyPr/>
-          <a:lstStyle/>
-          <a:p>
-            <a:endParaRPr lang="sk-SK" dirty="0"/>
+          <a:bodyPr>
+            <a:normAutofit/>
+          </a:bodyPr>
+          <a:lstStyle/>
+          <a:p>
+            <a:r>
+              <a:rPr lang="sk-SK" sz="1800" dirty="0"/>
+              <a:t>GARCH </a:t>
+            </a:r>
+            <a:r>
+              <a:rPr lang="en-GB" sz="1800" dirty="0"/>
+              <a:t>(1,1)</a:t>
+            </a:r>
+          </a:p>
+          <a:p>
+            <a:r>
+              <a:rPr lang="en-GB" sz="1800" dirty="0"/>
+              <a:t>GJR-GARCH</a:t>
+            </a:r>
+          </a:p>
+          <a:p>
+            <a:r>
+              <a:rPr lang="en-GB" sz="1800" dirty="0"/>
+              <a:t>HAR</a:t>
+            </a:r>
+            <a:endParaRPr lang="sk-SK" sz="1800" dirty="0"/>
           </a:p>
         </p:txBody>
       </p:sp>
@@ -6047,10 +6163,46 @@
         </p:nvSpPr>
         <p:spPr/>
         <p:txBody>
-          <a:bodyPr/>
-          <a:lstStyle/>
-          <a:p>
-            <a:endParaRPr lang="sk-SK" dirty="0"/>
+          <a:bodyPr>
+            <a:normAutofit/>
+          </a:bodyPr>
+          <a:lstStyle/>
+          <a:p>
+            <a:r>
+              <a:rPr lang="en-GB" sz="1800" dirty="0" err="1"/>
+              <a:t>XGBoost</a:t>
+            </a:r>
+            <a:r>
+              <a:rPr lang="en-GB" sz="1800" dirty="0"/>
+              <a:t>,</a:t>
+            </a:r>
+          </a:p>
+          <a:p>
+            <a:r>
+              <a:rPr lang="en-GB" sz="1800" dirty="0"/>
+              <a:t>LSTM</a:t>
+            </a:r>
+            <a:r>
+              <a:rPr lang="sk-SK" sz="1800"/>
+              <a:t>.</a:t>
+            </a:r>
+            <a:endParaRPr lang="sk-SK" sz="1800" dirty="0"/>
+          </a:p>
+          <a:p>
+            <a:pPr marL="0" indent="0">
+              <a:buNone/>
+            </a:pPr>
+            <a:r>
+              <a:rPr lang="sk-SK" sz="1800" b="1" dirty="0"/>
+              <a:t>Trénovanie</a:t>
+            </a:r>
+          </a:p>
+          <a:p>
+            <a:r>
+              <a:rPr lang="sk-SK" sz="1800" dirty="0" err="1"/>
+              <a:t>Rolling-window</a:t>
+            </a:r>
+            <a:endParaRPr lang="sk-SK" sz="1800" dirty="0"/>
           </a:p>
         </p:txBody>
       </p:sp>
@@ -6130,10 +6282,38 @@
         </p:nvSpPr>
         <p:spPr/>
         <p:txBody>
-          <a:bodyPr/>
-          <a:lstStyle/>
-          <a:p>
-            <a:endParaRPr lang="sk-SK" dirty="0"/>
+          <a:bodyPr>
+            <a:normAutofit/>
+          </a:bodyPr>
+          <a:lstStyle/>
+          <a:p>
+            <a:pPr marL="0" indent="0">
+              <a:buNone/>
+            </a:pPr>
+            <a:r>
+              <a:rPr lang="sk-SK" sz="1800" b="1" dirty="0"/>
+              <a:t>Testovanie</a:t>
+            </a:r>
+          </a:p>
+          <a:p>
+            <a:r>
+              <a:rPr lang="sk-SK" sz="1800" dirty="0"/>
+              <a:t>Metriky RMSE a QLIKE,</a:t>
+            </a:r>
+          </a:p>
+          <a:p>
+            <a:r>
+              <a:rPr lang="sk-SK" sz="1800" dirty="0"/>
+              <a:t>Porovnanie výsledkov Stooq.pl a Yahoo </a:t>
+            </a:r>
+            <a:r>
+              <a:rPr lang="sk-SK" sz="1800" dirty="0" err="1"/>
+              <a:t>Finance</a:t>
+            </a:r>
+            <a:r>
+              <a:rPr lang="sk-SK" sz="1800" dirty="0"/>
+              <a:t>.</a:t>
+            </a:r>
           </a:p>
         </p:txBody>
       </p:sp>

--- a/Identifikácia vzorov v časových radoch pre komparáciu volatility.pptx
+++ b/Identifikácia vzorov v časových radoch pre komparáciu volatility.pptx
@@ -12,9 +12,8 @@
     <p:sldId id="260" r:id="rId6"/>
     <p:sldId id="261" r:id="rId7"/>
     <p:sldId id="262" r:id="rId8"/>
-    <p:sldId id="263" r:id="rId9"/>
-    <p:sldId id="264" r:id="rId10"/>
-    <p:sldId id="265" r:id="rId11"/>
+    <p:sldId id="264" r:id="rId9"/>
+    <p:sldId id="265" r:id="rId10"/>
   </p:sldIdLst>
   <p:sldSz cx="12192000" cy="6858000"/>
   <p:notesSz cx="6858000" cy="9144000"/>
@@ -279,7 +278,7 @@
           <a:p>
             <a:fld id="{02AC24A9-CCB6-4F8D-B8DB-C2F3692CFA5A}" type="datetimeFigureOut">
               <a:rPr lang="en-US" smtClean="0"/>
-              <a:t>6/1/2026</a:t>
+              <a:t>6/2/2026</a:t>
             </a:fld>
             <a:endParaRPr lang="en-US" dirty="0"/>
           </a:p>
@@ -650,7 +649,7 @@
           <a:p>
             <a:fld id="{02AC24A9-CCB6-4F8D-B8DB-C2F3692CFA5A}" type="datetimeFigureOut">
               <a:rPr lang="en-US" smtClean="0"/>
-              <a:t>6/1/2026</a:t>
+              <a:t>6/2/2026</a:t>
             </a:fld>
             <a:endParaRPr lang="en-US" dirty="0"/>
           </a:p>
@@ -860,7 +859,7 @@
           <a:p>
             <a:fld id="{02AC24A9-CCB6-4F8D-B8DB-C2F3692CFA5A}" type="datetimeFigureOut">
               <a:rPr lang="en-US" smtClean="0"/>
-              <a:t>6/1/2026</a:t>
+              <a:t>6/2/2026</a:t>
             </a:fld>
             <a:endParaRPr lang="en-US" dirty="0"/>
           </a:p>
@@ -1332,7 +1331,7 @@
           <a:p>
             <a:fld id="{02AC24A9-CCB6-4F8D-B8DB-C2F3692CFA5A}" type="datetimeFigureOut">
               <a:rPr lang="en-US" smtClean="0"/>
-              <a:t>6/1/2026</a:t>
+              <a:t>6/2/2026</a:t>
             </a:fld>
             <a:endParaRPr lang="en-US" dirty="0"/>
           </a:p>
@@ -1787,7 +1786,7 @@
           <a:p>
             <a:fld id="{02AC24A9-CCB6-4F8D-B8DB-C2F3692CFA5A}" type="datetimeFigureOut">
               <a:rPr lang="en-US" smtClean="0"/>
-              <a:t>6/1/2026</a:t>
+              <a:t>6/2/2026</a:t>
             </a:fld>
             <a:endParaRPr lang="en-US" dirty="0"/>
           </a:p>
@@ -2322,7 +2321,7 @@
           <a:p>
             <a:fld id="{02AC24A9-CCB6-4F8D-B8DB-C2F3692CFA5A}" type="datetimeFigureOut">
               <a:rPr lang="en-US" smtClean="0"/>
-              <a:t>6/1/2026</a:t>
+              <a:t>6/2/2026</a:t>
             </a:fld>
             <a:endParaRPr lang="en-US" dirty="0"/>
           </a:p>
@@ -3024,7 +3023,7 @@
           <a:p>
             <a:fld id="{02AC24A9-CCB6-4F8D-B8DB-C2F3692CFA5A}" type="datetimeFigureOut">
               <a:rPr lang="en-US" smtClean="0"/>
-              <a:t>6/1/2026</a:t>
+              <a:t>6/2/2026</a:t>
             </a:fld>
             <a:endParaRPr lang="en-US" dirty="0"/>
           </a:p>
@@ -3354,7 +3353,7 @@
           <a:p>
             <a:fld id="{02AC24A9-CCB6-4F8D-B8DB-C2F3692CFA5A}" type="datetimeFigureOut">
               <a:rPr lang="en-US" smtClean="0"/>
-              <a:t>6/1/2026</a:t>
+              <a:t>6/2/2026</a:t>
             </a:fld>
             <a:endParaRPr lang="en-US" dirty="0"/>
           </a:p>
@@ -3467,7 +3466,7 @@
           <a:p>
             <a:fld id="{02AC24A9-CCB6-4F8D-B8DB-C2F3692CFA5A}" type="datetimeFigureOut">
               <a:rPr lang="en-US" smtClean="0"/>
-              <a:t>6/1/2026</a:t>
+              <a:t>6/2/2026</a:t>
             </a:fld>
             <a:endParaRPr lang="en-US" dirty="0"/>
           </a:p>
@@ -3964,7 +3963,7 @@
           <a:p>
             <a:fld id="{02AC24A9-CCB6-4F8D-B8DB-C2F3692CFA5A}" type="datetimeFigureOut">
               <a:rPr lang="en-US" smtClean="0"/>
-              <a:t>6/1/2026</a:t>
+              <a:t>6/2/2026</a:t>
             </a:fld>
             <a:endParaRPr lang="en-US" dirty="0"/>
           </a:p>
@@ -4443,7 +4442,7 @@
           <a:p>
             <a:fld id="{02AC24A9-CCB6-4F8D-B8DB-C2F3692CFA5A}" type="datetimeFigureOut">
               <a:rPr lang="en-US" smtClean="0"/>
-              <a:t>6/1/2026</a:t>
+              <a:t>6/2/2026</a:t>
             </a:fld>
             <a:endParaRPr lang="en-US" dirty="0"/>
           </a:p>
@@ -4686,7 +4685,7 @@
           <a:p>
             <a:fld id="{02AC24A9-CCB6-4F8D-B8DB-C2F3692CFA5A}" type="datetimeFigureOut">
               <a:rPr lang="en-US" smtClean="0"/>
-              <a:t>6/1/2026</a:t>
+              <a:t>6/2/2026</a:t>
             </a:fld>
             <a:endParaRPr lang="en-US" dirty="0"/>
           </a:p>
@@ -5227,79 +5226,6 @@
 </p:sld>
 </file>
 
-<file path=ppt/slides/slide10.xml><?xml version="1.0" encoding="utf-8"?>
-<p:sld xmlns:a="http://schemas.openxmlformats.org/drawingml/2006/main" xmlns:r="http://schemas.openxmlformats.org/officeDocument/2006/relationships" xmlns:p="http://schemas.openxmlformats.org/presentationml/2006/main">
-  <p:cSld>
-    <p:spTree>
-      <p:nvGrpSpPr>
-        <p:cNvPr id="1" name="">
-          <a:extLst>
-            <a:ext uri="{FF2B5EF4-FFF2-40B4-BE49-F238E27FC236}">
-              <a16:creationId xmlns:a16="http://schemas.microsoft.com/office/drawing/2014/main" id="{36A5DC40-1B9C-EF0C-7017-A509948CAC5B}"/>
-            </a:ext>
-          </a:extLst>
-        </p:cNvPr>
-        <p:cNvGrpSpPr/>
-        <p:nvPr/>
-      </p:nvGrpSpPr>
-      <p:grpSpPr>
-        <a:xfrm>
-          <a:off x="0" y="0"/>
-          <a:ext cx="0" cy="0"/>
-          <a:chOff x="0" y="0"/>
-          <a:chExt cx="0" cy="0"/>
-        </a:xfrm>
-      </p:grpSpPr>
-      <p:sp>
-        <p:nvSpPr>
-          <p:cNvPr id="2" name="Nadpis 1">
-            <a:extLst>
-              <a:ext uri="{FF2B5EF4-FFF2-40B4-BE49-F238E27FC236}">
-                <a16:creationId xmlns:a16="http://schemas.microsoft.com/office/drawing/2014/main" id="{19C20C6E-B821-876F-7644-9262D463D1B0}"/>
-              </a:ext>
-            </a:extLst>
-          </p:cNvPr>
-          <p:cNvSpPr>
-            <a:spLocks noGrp="1"/>
-          </p:cNvSpPr>
-          <p:nvPr>
-            <p:ph type="ctrTitle"/>
-          </p:nvPr>
-        </p:nvSpPr>
-        <p:spPr>
-          <a:xfrm>
-            <a:off x="576072" y="1124712"/>
-            <a:ext cx="11036808" cy="3386903"/>
-          </a:xfrm>
-        </p:spPr>
-        <p:txBody>
-          <a:bodyPr>
-            <a:noAutofit/>
-          </a:bodyPr>
-          <a:lstStyle/>
-          <a:p>
-            <a:pPr algn="ctr"/>
-            <a:r>
-              <a:rPr lang="sk-SK" sz="4400" b="1" dirty="0"/>
-              <a:t>Ďakujem za pozornosť</a:t>
-            </a:r>
-            <a:endParaRPr lang="sk-SK" sz="4400" dirty="0"/>
-          </a:p>
-        </p:txBody>
-      </p:sp>
-    </p:spTree>
-    <p:extLst>
-      <p:ext uri="{BB962C8B-B14F-4D97-AF65-F5344CB8AC3E}">
-        <p14:creationId xmlns:p14="http://schemas.microsoft.com/office/powerpoint/2010/main" val="4155612937"/>
-      </p:ext>
-    </p:extLst>
-  </p:cSld>
-  <p:clrMapOvr>
-    <a:masterClrMapping/>
-  </p:clrMapOvr>
-</p:sld>
-</file>
-
 <file path=ppt/slides/slide2.xml><?xml version="1.0" encoding="utf-8"?>
 <p:sld xmlns:a="http://schemas.openxmlformats.org/drawingml/2006/main" xmlns:r="http://schemas.openxmlformats.org/officeDocument/2006/relationships" xmlns:p="http://schemas.openxmlformats.org/presentationml/2006/main">
   <p:cSld>
@@ -5913,7 +5839,7 @@
               <a:buNone/>
             </a:pPr>
             <a:r>
-              <a:rPr lang="sk-SK" sz="1800" b="1" dirty="0"/>
+              <a:rPr lang="sk-SK" sz="1900" b="1" dirty="0"/>
               <a:t>Zdroje dát</a:t>
             </a:r>
           </a:p>
@@ -5961,24 +5887,118 @@
               <a:buNone/>
             </a:pPr>
             <a:r>
-              <a:rPr lang="en-GB" sz="1800" b="1" dirty="0" err="1"/>
-              <a:t>Predspracovanie</a:t>
-            </a:r>
-            <a:r>
-              <a:rPr lang="en-GB" sz="1800" b="1" dirty="0"/>
-              <a:t> d</a:t>
-            </a:r>
-            <a:r>
-              <a:rPr lang="sk-SK" sz="1800" b="1" dirty="0" err="1"/>
-              <a:t>át</a:t>
-            </a:r>
-            <a:endParaRPr lang="sk-SK" sz="1800" b="1" dirty="0"/>
+              <a:rPr lang="sk-SK" sz="1800" b="1" dirty="0"/>
+              <a:t>Rozdelenie dát</a:t>
+            </a:r>
+          </a:p>
+          <a:p>
+            <a:pPr lvl="0"/>
+            <a:r>
+              <a:rPr lang="sk-SK" sz="1800" dirty="0"/>
+              <a:t>Obdobie pred pandémiou (2016-2019),</a:t>
+            </a:r>
+          </a:p>
+          <a:p>
+            <a:pPr lvl="0"/>
+            <a:r>
+              <a:rPr lang="sk-SK" sz="1800" dirty="0"/>
+              <a:t>Obdobie COVID-19 (2020-2022),</a:t>
+            </a:r>
+          </a:p>
+          <a:p>
+            <a:pPr lvl="0"/>
+            <a:r>
+              <a:rPr lang="sk-SK" sz="1800" dirty="0" err="1"/>
+              <a:t>Postpandemické</a:t>
+            </a:r>
+            <a:r>
+              <a:rPr lang="sk-SK" sz="1800" dirty="0"/>
+              <a:t> obdobie (2023-2026).</a:t>
+            </a:r>
+          </a:p>
+          <a:p>
+            <a:endParaRPr lang="sk-SK" sz="1900" dirty="0"/>
           </a:p>
           <a:p>
             <a:pPr marL="0" indent="0">
               <a:buNone/>
             </a:pPr>
             <a:endParaRPr lang="sk-SK" sz="1800" dirty="0"/>
+          </a:p>
+        </p:txBody>
+      </p:sp>
+      <p:pic>
+        <p:nvPicPr>
+          <p:cNvPr id="5" name="Obrázok 4">
+            <a:extLst>
+              <a:ext uri="{FF2B5EF4-FFF2-40B4-BE49-F238E27FC236}">
+                <a16:creationId xmlns:a16="http://schemas.microsoft.com/office/drawing/2014/main" id="{E856B261-0408-EC85-F891-513298EDF796}"/>
+              </a:ext>
+            </a:extLst>
+          </p:cNvPr>
+          <p:cNvPicPr>
+            <a:picLocks noChangeAspect="1"/>
+          </p:cNvPicPr>
+          <p:nvPr/>
+        </p:nvPicPr>
+        <p:blipFill>
+          <a:blip r:embed="rId2"/>
+          <a:stretch>
+            <a:fillRect/>
+          </a:stretch>
+        </p:blipFill>
+        <p:spPr>
+          <a:xfrm>
+            <a:off x="6546570" y="3305182"/>
+            <a:ext cx="5001323" cy="1943371"/>
+          </a:xfrm>
+          <a:prstGeom prst="rect">
+            <a:avLst/>
+          </a:prstGeom>
+          <a:ln>
+            <a:noFill/>
+          </a:ln>
+          <a:effectLst>
+            <a:outerShdw blurRad="292100" dist="139700" dir="2700000" algn="tl" rotWithShape="0">
+              <a:srgbClr val="333333">
+                <a:alpha val="65000"/>
+              </a:srgbClr>
+            </a:outerShdw>
+          </a:effectLst>
+        </p:spPr>
+      </p:pic>
+      <p:sp>
+        <p:nvSpPr>
+          <p:cNvPr id="6" name="BlokTextu 5">
+            <a:extLst>
+              <a:ext uri="{FF2B5EF4-FFF2-40B4-BE49-F238E27FC236}">
+                <a16:creationId xmlns:a16="http://schemas.microsoft.com/office/drawing/2014/main" id="{3FA578DD-26C9-26FC-9385-A2FFADA90708}"/>
+              </a:ext>
+            </a:extLst>
+          </p:cNvPr>
+          <p:cNvSpPr txBox="1"/>
+          <p:nvPr/>
+        </p:nvSpPr>
+        <p:spPr>
+          <a:xfrm>
+            <a:off x="6546570" y="2935850"/>
+            <a:ext cx="4451230" cy="369332"/>
+          </a:xfrm>
+          <a:prstGeom prst="rect">
+            <a:avLst/>
+          </a:prstGeom>
+          <a:noFill/>
+        </p:spPr>
+        <p:txBody>
+          <a:bodyPr wrap="square" rtlCol="0">
+            <a:spAutoFit/>
+          </a:bodyPr>
+          <a:lstStyle/>
+          <a:p>
+            <a:r>
+              <a:rPr lang="sk-SK" dirty="0"/>
+              <a:t>Nemecký DAX Stooq.pl</a:t>
+            </a:r>
           </a:p>
         </p:txBody>
       </p:sp>
@@ -6035,33 +6055,42 @@
           <a:p>
             <a:r>
               <a:rPr lang="sk-SK" dirty="0"/>
+              <a:t>Modelovanie</a:t>
+            </a:r>
+          </a:p>
+        </p:txBody>
+      </p:sp>
+      <p:sp>
+        <p:nvSpPr>
+          <p:cNvPr id="3" name="Zástupný objekt pre obsah 2">
+            <a:extLst>
+              <a:ext uri="{FF2B5EF4-FFF2-40B4-BE49-F238E27FC236}">
+                <a16:creationId xmlns:a16="http://schemas.microsoft.com/office/drawing/2014/main" id="{077493ED-6217-122B-0465-474AD139CF8B}"/>
+              </a:ext>
+            </a:extLst>
+          </p:cNvPr>
+          <p:cNvSpPr>
+            <a:spLocks noGrp="1"/>
+          </p:cNvSpPr>
+          <p:nvPr>
+            <p:ph idx="1"/>
+          </p:nvPr>
+        </p:nvSpPr>
+        <p:spPr/>
+        <p:txBody>
+          <a:bodyPr>
+            <a:normAutofit lnSpcReduction="10000"/>
+          </a:bodyPr>
+          <a:lstStyle/>
+          <a:p>
+            <a:pPr marL="0" indent="0">
+              <a:buNone/>
+            </a:pPr>
+            <a:r>
+              <a:rPr lang="sk-SK" sz="1800" b="1" dirty="0"/>
               <a:t>Ekonometrické modely volatility</a:t>
             </a:r>
           </a:p>
-        </p:txBody>
-      </p:sp>
-      <p:sp>
-        <p:nvSpPr>
-          <p:cNvPr id="3" name="Zástupný objekt pre obsah 2">
-            <a:extLst>
-              <a:ext uri="{FF2B5EF4-FFF2-40B4-BE49-F238E27FC236}">
-                <a16:creationId xmlns:a16="http://schemas.microsoft.com/office/drawing/2014/main" id="{077493ED-6217-122B-0465-474AD139CF8B}"/>
-              </a:ext>
-            </a:extLst>
-          </p:cNvPr>
-          <p:cNvSpPr>
-            <a:spLocks noGrp="1"/>
-          </p:cNvSpPr>
-          <p:nvPr>
-            <p:ph idx="1"/>
-          </p:nvPr>
-        </p:nvSpPr>
-        <p:spPr/>
-        <p:txBody>
-          <a:bodyPr>
-            <a:normAutofit/>
-          </a:bodyPr>
-          <a:lstStyle/>
           <a:p>
             <a:r>
               <a:rPr lang="sk-SK" sz="1800" dirty="0"/>
@@ -6080,9 +6109,68 @@
           </a:p>
           <a:p>
             <a:r>
+              <a:rPr lang="sk-SK" sz="1800" dirty="0"/>
+              <a:t>Asymetrický </a:t>
+            </a:r>
+            <a:r>
               <a:rPr lang="en-GB" sz="1800" dirty="0"/>
               <a:t>HAR</a:t>
             </a:r>
+            <a:r>
+              <a:rPr lang="sk-SK" sz="1800"/>
+              <a:t> model</a:t>
+            </a:r>
+            <a:endParaRPr lang="sk-SK" sz="1800" dirty="0"/>
+          </a:p>
+          <a:p>
+            <a:pPr marL="0" indent="0">
+              <a:buNone/>
+            </a:pPr>
+            <a:r>
+              <a:rPr lang="sk-SK" sz="1800" b="1" dirty="0"/>
+              <a:t>Modely strojového učenia</a:t>
+            </a:r>
+          </a:p>
+          <a:p>
+            <a:r>
+              <a:rPr lang="en-GB" sz="1800" dirty="0" err="1"/>
+              <a:t>XGBoost</a:t>
+            </a:r>
+            <a:r>
+              <a:rPr lang="en-GB" sz="1800" dirty="0"/>
+              <a:t>,</a:t>
+            </a:r>
+          </a:p>
+          <a:p>
+            <a:r>
+              <a:rPr lang="en-GB" sz="1800" dirty="0"/>
+              <a:t>LSTM</a:t>
+            </a:r>
+            <a:r>
+              <a:rPr lang="sk-SK" sz="1800" dirty="0"/>
+              <a:t>.</a:t>
+            </a:r>
+          </a:p>
+          <a:p>
+            <a:pPr marL="0" indent="0">
+              <a:buNone/>
+            </a:pPr>
+            <a:r>
+              <a:rPr lang="sk-SK" sz="1800" b="1" dirty="0"/>
+              <a:t>Trénovanie</a:t>
+            </a:r>
+          </a:p>
+          <a:p>
+            <a:r>
+              <a:rPr lang="sk-SK" sz="1800" dirty="0" err="1"/>
+              <a:t>Rolling-window</a:t>
+            </a:r>
+            <a:r>
+              <a:rPr lang="sk-SK" sz="1800" dirty="0"/>
+              <a:t> prístup</a:t>
+            </a:r>
+          </a:p>
+          <a:p>
             <a:endParaRPr lang="sk-SK" sz="1800" dirty="0"/>
           </a:p>
         </p:txBody>
@@ -6122,7 +6210,7 @@
           <p:cNvPr id="2" name="Nadpis 1">
             <a:extLst>
               <a:ext uri="{FF2B5EF4-FFF2-40B4-BE49-F238E27FC236}">
-                <a16:creationId xmlns:a16="http://schemas.microsoft.com/office/drawing/2014/main" id="{9279A626-0957-A7B7-7474-1B36ABEBABEA}"/>
+                <a16:creationId xmlns:a16="http://schemas.microsoft.com/office/drawing/2014/main" id="{2D317A53-DDDD-3907-2C30-AD0DDB920616}"/>
               </a:ext>
             </a:extLst>
           </p:cNvPr>
@@ -6140,7 +6228,7 @@
           <a:p>
             <a:r>
               <a:rPr lang="sk-SK" dirty="0"/>
-              <a:t>Modely strojového učenia</a:t>
+              <a:t>Vyhodnotenie výsledkov</a:t>
             </a:r>
           </a:p>
         </p:txBody>
@@ -6150,7 +6238,7 @@
           <p:cNvPr id="3" name="Zástupný objekt pre obsah 2">
             <a:extLst>
               <a:ext uri="{FF2B5EF4-FFF2-40B4-BE49-F238E27FC236}">
-                <a16:creationId xmlns:a16="http://schemas.microsoft.com/office/drawing/2014/main" id="{DF3C74A6-60FF-5A06-5333-1F6C590115CB}"/>
+                <a16:creationId xmlns:a16="http://schemas.microsoft.com/office/drawing/2014/main" id="{85D8F990-BE82-27A7-BC5E-2C3A5A01D293}"/>
               </a:ext>
             </a:extLst>
           </p:cNvPr>
@@ -6168,48 +6256,40 @@
           </a:bodyPr>
           <a:lstStyle/>
           <a:p>
-            <a:r>
-              <a:rPr lang="en-GB" sz="1800" dirty="0" err="1"/>
-              <a:t>XGBoost</a:t>
-            </a:r>
-            <a:r>
-              <a:rPr lang="en-GB" sz="1800" dirty="0"/>
-              <a:t>,</a:t>
-            </a:r>
-          </a:p>
-          <a:p>
-            <a:r>
-              <a:rPr lang="en-GB" sz="1800" dirty="0"/>
-              <a:t>LSTM</a:t>
-            </a:r>
-            <a:r>
-              <a:rPr lang="sk-SK" sz="1800"/>
+            <a:pPr marL="0" indent="0">
+              <a:buNone/>
+            </a:pPr>
+            <a:r>
+              <a:rPr lang="sk-SK" sz="1800" b="1" dirty="0"/>
+              <a:t>Testovanie</a:t>
+            </a:r>
+          </a:p>
+          <a:p>
+            <a:r>
+              <a:rPr lang="sk-SK" sz="1800" dirty="0"/>
+              <a:t>Metriky RMSE a QLIKE,</a:t>
+            </a:r>
+          </a:p>
+          <a:p>
+            <a:r>
+              <a:rPr lang="sk-SK" sz="1800" dirty="0"/>
+              <a:t>Porovnanie výsledkov Stooq.pl a Yahoo </a:t>
+            </a:r>
+            <a:r>
+              <a:rPr lang="sk-SK" sz="1800" dirty="0" err="1"/>
+              <a:t>Finance</a:t>
+            </a:r>
+            <a:r>
+              <a:rPr lang="sk-SK" sz="1800" dirty="0"/>
               <a:t>.</a:t>
             </a:r>
-            <a:endParaRPr lang="sk-SK" sz="1800" dirty="0"/>
-          </a:p>
-          <a:p>
-            <a:pPr marL="0" indent="0">
-              <a:buNone/>
-            </a:pPr>
-            <a:r>
-              <a:rPr lang="sk-SK" sz="1800" b="1" dirty="0"/>
-              <a:t>Trénovanie</a:t>
-            </a:r>
-          </a:p>
-          <a:p>
-            <a:r>
-              <a:rPr lang="sk-SK" sz="1800" dirty="0" err="1"/>
-              <a:t>Rolling-window</a:t>
-            </a:r>
-            <a:endParaRPr lang="sk-SK" sz="1800" dirty="0"/>
           </a:p>
         </p:txBody>
       </p:sp>
     </p:spTree>
     <p:extLst>
       <p:ext uri="{BB962C8B-B14F-4D97-AF65-F5344CB8AC3E}">
-        <p14:creationId xmlns:p14="http://schemas.microsoft.com/office/powerpoint/2010/main" val="1242375492"/>
+        <p14:creationId xmlns:p14="http://schemas.microsoft.com/office/powerpoint/2010/main" val="1107223945"/>
       </p:ext>
     </p:extLst>
   </p:cSld>
@@ -6224,7 +6304,13 @@
   <p:cSld>
     <p:spTree>
       <p:nvGrpSpPr>
-        <p:cNvPr id="1" name=""/>
+        <p:cNvPr id="1" name="">
+          <a:extLst>
+            <a:ext uri="{FF2B5EF4-FFF2-40B4-BE49-F238E27FC236}">
+              <a16:creationId xmlns:a16="http://schemas.microsoft.com/office/drawing/2014/main" id="{36A5DC40-1B9C-EF0C-7017-A509948CAC5B}"/>
+            </a:ext>
+          </a:extLst>
+        </p:cNvPr>
         <p:cNvGrpSpPr/>
         <p:nvPr/>
       </p:nvGrpSpPr>
@@ -6241,86 +6327,42 @@
           <p:cNvPr id="2" name="Nadpis 1">
             <a:extLst>
               <a:ext uri="{FF2B5EF4-FFF2-40B4-BE49-F238E27FC236}">
-                <a16:creationId xmlns:a16="http://schemas.microsoft.com/office/drawing/2014/main" id="{2D317A53-DDDD-3907-2C30-AD0DDB920616}"/>
-              </a:ext>
-            </a:extLst>
-          </p:cNvPr>
-          <p:cNvSpPr>
-            <a:spLocks noGrp="1"/>
-          </p:cNvSpPr>
-          <p:nvPr>
-            <p:ph type="title"/>
-          </p:nvPr>
-        </p:nvSpPr>
-        <p:spPr/>
-        <p:txBody>
-          <a:bodyPr/>
-          <a:lstStyle/>
-          <a:p>
-            <a:r>
-              <a:rPr lang="sk-SK" dirty="0"/>
-              <a:t>Vyhodnotenie výsledkov</a:t>
-            </a:r>
-          </a:p>
-        </p:txBody>
-      </p:sp>
-      <p:sp>
-        <p:nvSpPr>
-          <p:cNvPr id="3" name="Zástupný objekt pre obsah 2">
-            <a:extLst>
-              <a:ext uri="{FF2B5EF4-FFF2-40B4-BE49-F238E27FC236}">
-                <a16:creationId xmlns:a16="http://schemas.microsoft.com/office/drawing/2014/main" id="{85D8F990-BE82-27A7-BC5E-2C3A5A01D293}"/>
-              </a:ext>
-            </a:extLst>
-          </p:cNvPr>
-          <p:cNvSpPr>
-            <a:spLocks noGrp="1"/>
-          </p:cNvSpPr>
-          <p:nvPr>
-            <p:ph idx="1"/>
-          </p:nvPr>
-        </p:nvSpPr>
-        <p:spPr/>
+                <a16:creationId xmlns:a16="http://schemas.microsoft.com/office/drawing/2014/main" id="{19C20C6E-B821-876F-7644-9262D463D1B0}"/>
+              </a:ext>
+            </a:extLst>
+          </p:cNvPr>
+          <p:cNvSpPr>
+            <a:spLocks noGrp="1"/>
+          </p:cNvSpPr>
+          <p:nvPr>
+            <p:ph type="ctrTitle"/>
+          </p:nvPr>
+        </p:nvSpPr>
+        <p:spPr>
+          <a:xfrm>
+            <a:off x="576072" y="1124712"/>
+            <a:ext cx="11036808" cy="3386903"/>
+          </a:xfrm>
+        </p:spPr>
         <p:txBody>
           <a:bodyPr>
-            <a:normAutofit/>
+            <a:noAutofit/>
           </a:bodyPr>
           <a:lstStyle/>
           <a:p>
-            <a:pPr marL="0" indent="0">
-              <a:buNone/>
-            </a:pPr>
-            <a:r>
-              <a:rPr lang="sk-SK" sz="1800" b="1" dirty="0"/>
-              <a:t>Testovanie</a:t>
-            </a:r>
-          </a:p>
-          <a:p>
-            <a:r>
-              <a:rPr lang="sk-SK" sz="1800" dirty="0"/>
-              <a:t>Metriky RMSE a QLIKE,</a:t>
-            </a:r>
-          </a:p>
-          <a:p>
-            <a:r>
-              <a:rPr lang="sk-SK" sz="1800" dirty="0"/>
-              <a:t>Porovnanie výsledkov Stooq.pl a Yahoo </a:t>
-            </a:r>
-            <a:r>
-              <a:rPr lang="sk-SK" sz="1800" dirty="0" err="1"/>
-              <a:t>Finance</a:t>
-            </a:r>
-            <a:r>
-              <a:rPr lang="sk-SK" sz="1800" dirty="0"/>
-              <a:t>.</a:t>
-            </a:r>
+            <a:pPr algn="ctr"/>
+            <a:r>
+              <a:rPr lang="sk-SK" sz="4400" b="1" dirty="0"/>
+              <a:t>Ďakujem za pozornosť</a:t>
+            </a:r>
+            <a:endParaRPr lang="sk-SK" sz="4400" dirty="0"/>
           </a:p>
         </p:txBody>
       </p:sp>
     </p:spTree>
     <p:extLst>
       <p:ext uri="{BB962C8B-B14F-4D97-AF65-F5344CB8AC3E}">
-        <p14:creationId xmlns:p14="http://schemas.microsoft.com/office/powerpoint/2010/main" val="1107223945"/>
+        <p14:creationId xmlns:p14="http://schemas.microsoft.com/office/powerpoint/2010/main" val="4155612937"/>
       </p:ext>
     </p:extLst>
   </p:cSld>

--- a/Identifikácia vzorov v časových radoch pre komparáciu volatility.pptx
+++ b/Identifikácia vzorov v časových radoch pre komparáciu volatility.pptx
@@ -278,7 +278,7 @@
           <a:p>
             <a:fld id="{02AC24A9-CCB6-4F8D-B8DB-C2F3692CFA5A}" type="datetimeFigureOut">
               <a:rPr lang="en-US" smtClean="0"/>
-              <a:t>6/2/2026</a:t>
+              <a:t>6/4/2026</a:t>
             </a:fld>
             <a:endParaRPr lang="en-US" dirty="0"/>
           </a:p>
@@ -649,7 +649,7 @@
           <a:p>
             <a:fld id="{02AC24A9-CCB6-4F8D-B8DB-C2F3692CFA5A}" type="datetimeFigureOut">
               <a:rPr lang="en-US" smtClean="0"/>
-              <a:t>6/2/2026</a:t>
+              <a:t>6/4/2026</a:t>
             </a:fld>
             <a:endParaRPr lang="en-US" dirty="0"/>
           </a:p>
@@ -859,7 +859,7 @@
           <a:p>
             <a:fld id="{02AC24A9-CCB6-4F8D-B8DB-C2F3692CFA5A}" type="datetimeFigureOut">
               <a:rPr lang="en-US" smtClean="0"/>
-              <a:t>6/2/2026</a:t>
+              <a:t>6/4/2026</a:t>
             </a:fld>
             <a:endParaRPr lang="en-US" dirty="0"/>
           </a:p>
@@ -1331,7 +1331,7 @@
           <a:p>
             <a:fld id="{02AC24A9-CCB6-4F8D-B8DB-C2F3692CFA5A}" type="datetimeFigureOut">
               <a:rPr lang="en-US" smtClean="0"/>
-              <a:t>6/2/2026</a:t>
+              <a:t>6/4/2026</a:t>
             </a:fld>
             <a:endParaRPr lang="en-US" dirty="0"/>
           </a:p>
@@ -1786,7 +1786,7 @@
           <a:p>
             <a:fld id="{02AC24A9-CCB6-4F8D-B8DB-C2F3692CFA5A}" type="datetimeFigureOut">
               <a:rPr lang="en-US" smtClean="0"/>
-              <a:t>6/2/2026</a:t>
+              <a:t>6/4/2026</a:t>
             </a:fld>
             <a:endParaRPr lang="en-US" dirty="0"/>
           </a:p>
@@ -2321,7 +2321,7 @@
           <a:p>
             <a:fld id="{02AC24A9-CCB6-4F8D-B8DB-C2F3692CFA5A}" type="datetimeFigureOut">
               <a:rPr lang="en-US" smtClean="0"/>
-              <a:t>6/2/2026</a:t>
+              <a:t>6/4/2026</a:t>
             </a:fld>
             <a:endParaRPr lang="en-US" dirty="0"/>
           </a:p>
@@ -3023,7 +3023,7 @@
           <a:p>
             <a:fld id="{02AC24A9-CCB6-4F8D-B8DB-C2F3692CFA5A}" type="datetimeFigureOut">
               <a:rPr lang="en-US" smtClean="0"/>
-              <a:t>6/2/2026</a:t>
+              <a:t>6/4/2026</a:t>
             </a:fld>
             <a:endParaRPr lang="en-US" dirty="0"/>
           </a:p>
@@ -3353,7 +3353,7 @@
           <a:p>
             <a:fld id="{02AC24A9-CCB6-4F8D-B8DB-C2F3692CFA5A}" type="datetimeFigureOut">
               <a:rPr lang="en-US" smtClean="0"/>
-              <a:t>6/2/2026</a:t>
+              <a:t>6/4/2026</a:t>
             </a:fld>
             <a:endParaRPr lang="en-US" dirty="0"/>
           </a:p>
@@ -3466,7 +3466,7 @@
           <a:p>
             <a:fld id="{02AC24A9-CCB6-4F8D-B8DB-C2F3692CFA5A}" type="datetimeFigureOut">
               <a:rPr lang="en-US" smtClean="0"/>
-              <a:t>6/2/2026</a:t>
+              <a:t>6/4/2026</a:t>
             </a:fld>
             <a:endParaRPr lang="en-US" dirty="0"/>
           </a:p>
@@ -3963,7 +3963,7 @@
           <a:p>
             <a:fld id="{02AC24A9-CCB6-4F8D-B8DB-C2F3692CFA5A}" type="datetimeFigureOut">
               <a:rPr lang="en-US" smtClean="0"/>
-              <a:t>6/2/2026</a:t>
+              <a:t>6/4/2026</a:t>
             </a:fld>
             <a:endParaRPr lang="en-US" dirty="0"/>
           </a:p>
@@ -4442,7 +4442,7 @@
           <a:p>
             <a:fld id="{02AC24A9-CCB6-4F8D-B8DB-C2F3692CFA5A}" type="datetimeFigureOut">
               <a:rPr lang="en-US" smtClean="0"/>
-              <a:t>6/2/2026</a:t>
+              <a:t>6/4/2026</a:t>
             </a:fld>
             <a:endParaRPr lang="en-US" dirty="0"/>
           </a:p>
@@ -4685,7 +4685,7 @@
           <a:p>
             <a:fld id="{02AC24A9-CCB6-4F8D-B8DB-C2F3692CFA5A}" type="datetimeFigureOut">
               <a:rPr lang="en-US" smtClean="0"/>
-              <a:t>6/2/2026</a:t>
+              <a:t>6/4/2026</a:t>
             </a:fld>
             <a:endParaRPr lang="en-US" dirty="0"/>
           </a:p>
@@ -5266,7 +5266,7 @@
           <a:p>
             <a:r>
               <a:rPr lang="sk-SK" dirty="0"/>
-              <a:t>Ciele práce</a:t>
+              <a:t>Ciele výskumu</a:t>
             </a:r>
           </a:p>
         </p:txBody>
@@ -5539,7 +5539,7 @@
           <a:p>
             <a:r>
               <a:rPr lang="sk-SK" dirty="0"/>
-              <a:t>Očakávané prínosy práce</a:t>
+              <a:t>Očakávané prínosy výskumu</a:t>
             </a:r>
           </a:p>
         </p:txBody>
@@ -5997,7 +5997,7 @@
           <a:p>
             <a:r>
               <a:rPr lang="sk-SK" dirty="0"/>
-              <a:t>Nemecký DAX Stooq.pl</a:t>
+              <a:t>Nemecký DAX, Stooq.pl</a:t>
             </a:r>
           </a:p>
         </p:txBody>
@@ -6261,7 +6261,7 @@
             </a:pPr>
             <a:r>
               <a:rPr lang="sk-SK" sz="1800" b="1" dirty="0"/>
-              <a:t>Testovanie</a:t>
+              <a:t>Testovanie modelov</a:t>
             </a:r>
           </a:p>
           <a:p>
@@ -6280,8 +6280,38 @@
               <a:t>Finance</a:t>
             </a:r>
             <a:r>
+              <a:rPr lang="en-US" sz="1800" dirty="0"/>
+              <a:t>,</a:t>
+            </a:r>
+            <a:endParaRPr lang="sk-SK" sz="1800" dirty="0"/>
+          </a:p>
+          <a:p>
+            <a:pPr marL="0" indent="0">
+              <a:buNone/>
+            </a:pPr>
+            <a:r>
+              <a:rPr lang="en-US" sz="1800" b="1" dirty="0"/>
+              <a:t>V</a:t>
+            </a:r>
+            <a:r>
+              <a:rPr lang="sk-SK" sz="1800" b="1" dirty="0" err="1"/>
+              <a:t>yhodnotenie</a:t>
+            </a:r>
+            <a:r>
+              <a:rPr lang="sk-SK" sz="1800" b="1" dirty="0"/>
+              <a:t> volatility</a:t>
+            </a:r>
+          </a:p>
+          <a:p>
+            <a:r>
               <a:rPr lang="sk-SK" sz="1800" dirty="0"/>
-              <a:t>.</a:t>
+              <a:t>Empirické porovnanie správania volatility trhov,</a:t>
+            </a:r>
+          </a:p>
+          <a:p>
+            <a:r>
+              <a:rPr lang="sk-SK" sz="1800" dirty="0"/>
+              <a:t>Identifikácia vplyvu geopolitických šokov na volatilitu trhov.</a:t>
             </a:r>
           </a:p>
         </p:txBody>

--- a/Identifikácia vzorov v časových radoch pre komparáciu volatility.pptx
+++ b/Identifikácia vzorov v časových radoch pre komparáciu volatility.pptx
@@ -5852,7 +5852,10 @@
               <a:rPr lang="sk-SK" sz="1800" dirty="0" err="1"/>
               <a:t>Finance</a:t>
             </a:r>
-            <a:endParaRPr lang="sk-SK" sz="1800" dirty="0"/>
+            <a:r>
+              <a:rPr lang="sk-SK" sz="1800" dirty="0"/>
+              <a:t>.</a:t>
+            </a:r>
           </a:p>
           <a:p>
             <a:pPr marL="0" indent="0">
@@ -5862,25 +5865,13 @@
               <a:rPr lang="sk-SK" sz="1800" b="1" dirty="0"/>
               <a:t>Vybrané akciové indexy</a:t>
             </a:r>
+            <a:endParaRPr lang="sk-SK" sz="1800" dirty="0"/>
           </a:p>
           <a:p>
             <a:r>
               <a:rPr lang="sk-SK" sz="1800" dirty="0"/>
-              <a:t>S</a:t>
-            </a:r>
-            <a:r>
-              <a:rPr lang="en-GB" sz="1800" dirty="0"/>
-              <a:t>&amp;P </a:t>
-            </a:r>
-            <a:r>
-              <a:rPr lang="sk-SK" sz="1800" dirty="0"/>
-              <a:t>500, Nemecký DAX, SSE </a:t>
-            </a:r>
-            <a:r>
-              <a:rPr lang="sk-SK" sz="1800" dirty="0" err="1"/>
-              <a:t>Composite</a:t>
-            </a:r>
-            <a:endParaRPr lang="sk-SK" sz="1800" dirty="0"/>
+              <a:t>Indexy top firiem pre daný trh.</a:t>
+            </a:r>
           </a:p>
           <a:p>
             <a:pPr marL="0" indent="0">
@@ -5982,7 +5973,7 @@
         <p:spPr>
           <a:xfrm>
             <a:off x="6546570" y="2935850"/>
-            <a:ext cx="4451230" cy="369332"/>
+            <a:ext cx="4451230" cy="307777"/>
           </a:xfrm>
           <a:prstGeom prst="rect">
             <a:avLst/>
@@ -5996,9 +5987,22 @@
           <a:lstStyle/>
           <a:p>
             <a:r>
-              <a:rPr lang="sk-SK" dirty="0"/>
+              <a:rPr lang="sk-SK" sz="1400" dirty="0"/>
+              <a:t>Príklad časového radu </a:t>
+            </a:r>
+            <a:r>
+              <a:rPr lang="en-US" sz="1400" dirty="0"/>
+              <a:t>(</a:t>
+            </a:r>
+            <a:r>
+              <a:rPr lang="sk-SK" sz="1400" dirty="0"/>
               <a:t>Nemecký DAX, Stooq.pl</a:t>
             </a:r>
+            <a:r>
+              <a:rPr lang="en-US" sz="1400" dirty="0"/>
+              <a:t>)</a:t>
+            </a:r>
+            <a:endParaRPr lang="sk-SK" sz="1400" dirty="0"/>
           </a:p>
         </p:txBody>
       </p:sp>
@@ -6311,7 +6315,13 @@
           <a:p>
             <a:r>
               <a:rPr lang="sk-SK" sz="1800" dirty="0"/>
-              <a:t>Identifikácia vplyvu geopolitických šokov na volatilitu trhov.</a:t>
+              <a:t>Identifikácia vplyvu geopolitických šokov na volatilitu trhov,</a:t>
+            </a:r>
+          </a:p>
+          <a:p>
+            <a:r>
+              <a:rPr lang="sk-SK" sz="1800" dirty="0"/>
+              <a:t>Identifikácia faktorov vplývajúcich na volatilitu trhov.</a:t>
             </a:r>
           </a:p>
         </p:txBody>

--- a/Identifikácia vzorov v časových radoch pre komparáciu volatility.pptx
+++ b/Identifikácia vzorov v časových radoch pre komparáciu volatility.pptx
@@ -278,7 +278,7 @@
           <a:p>
             <a:fld id="{02AC24A9-CCB6-4F8D-B8DB-C2F3692CFA5A}" type="datetimeFigureOut">
               <a:rPr lang="en-US" smtClean="0"/>
-              <a:t>6/4/2026</a:t>
+              <a:t>6/10/2026</a:t>
             </a:fld>
             <a:endParaRPr lang="en-US" dirty="0"/>
           </a:p>
@@ -649,7 +649,7 @@
           <a:p>
             <a:fld id="{02AC24A9-CCB6-4F8D-B8DB-C2F3692CFA5A}" type="datetimeFigureOut">
               <a:rPr lang="en-US" smtClean="0"/>
-              <a:t>6/4/2026</a:t>
+              <a:t>6/10/2026</a:t>
             </a:fld>
             <a:endParaRPr lang="en-US" dirty="0"/>
           </a:p>
@@ -859,7 +859,7 @@
           <a:p>
             <a:fld id="{02AC24A9-CCB6-4F8D-B8DB-C2F3692CFA5A}" type="datetimeFigureOut">
               <a:rPr lang="en-US" smtClean="0"/>
-              <a:t>6/4/2026</a:t>
+              <a:t>6/10/2026</a:t>
             </a:fld>
             <a:endParaRPr lang="en-US" dirty="0"/>
           </a:p>
@@ -1331,7 +1331,7 @@
           <a:p>
             <a:fld id="{02AC24A9-CCB6-4F8D-B8DB-C2F3692CFA5A}" type="datetimeFigureOut">
               <a:rPr lang="en-US" smtClean="0"/>
-              <a:t>6/4/2026</a:t>
+              <a:t>6/10/2026</a:t>
             </a:fld>
             <a:endParaRPr lang="en-US" dirty="0"/>
           </a:p>
@@ -1786,7 +1786,7 @@
           <a:p>
             <a:fld id="{02AC24A9-CCB6-4F8D-B8DB-C2F3692CFA5A}" type="datetimeFigureOut">
               <a:rPr lang="en-US" smtClean="0"/>
-              <a:t>6/4/2026</a:t>
+              <a:t>6/10/2026</a:t>
             </a:fld>
             <a:endParaRPr lang="en-US" dirty="0"/>
           </a:p>
@@ -2321,7 +2321,7 @@
           <a:p>
             <a:fld id="{02AC24A9-CCB6-4F8D-B8DB-C2F3692CFA5A}" type="datetimeFigureOut">
               <a:rPr lang="en-US" smtClean="0"/>
-              <a:t>6/4/2026</a:t>
+              <a:t>6/10/2026</a:t>
             </a:fld>
             <a:endParaRPr lang="en-US" dirty="0"/>
           </a:p>
@@ -3023,7 +3023,7 @@
           <a:p>
             <a:fld id="{02AC24A9-CCB6-4F8D-B8DB-C2F3692CFA5A}" type="datetimeFigureOut">
               <a:rPr lang="en-US" smtClean="0"/>
-              <a:t>6/4/2026</a:t>
+              <a:t>6/10/2026</a:t>
             </a:fld>
             <a:endParaRPr lang="en-US" dirty="0"/>
           </a:p>
@@ -3353,7 +3353,7 @@
           <a:p>
             <a:fld id="{02AC24A9-CCB6-4F8D-B8DB-C2F3692CFA5A}" type="datetimeFigureOut">
               <a:rPr lang="en-US" smtClean="0"/>
-              <a:t>6/4/2026</a:t>
+              <a:t>6/10/2026</a:t>
             </a:fld>
             <a:endParaRPr lang="en-US" dirty="0"/>
           </a:p>
@@ -3466,7 +3466,7 @@
           <a:p>
             <a:fld id="{02AC24A9-CCB6-4F8D-B8DB-C2F3692CFA5A}" type="datetimeFigureOut">
               <a:rPr lang="en-US" smtClean="0"/>
-              <a:t>6/4/2026</a:t>
+              <a:t>6/10/2026</a:t>
             </a:fld>
             <a:endParaRPr lang="en-US" dirty="0"/>
           </a:p>
@@ -3963,7 +3963,7 @@
           <a:p>
             <a:fld id="{02AC24A9-CCB6-4F8D-B8DB-C2F3692CFA5A}" type="datetimeFigureOut">
               <a:rPr lang="en-US" smtClean="0"/>
-              <a:t>6/4/2026</a:t>
+              <a:t>6/10/2026</a:t>
             </a:fld>
             <a:endParaRPr lang="en-US" dirty="0"/>
           </a:p>
@@ -4442,7 +4442,7 @@
           <a:p>
             <a:fld id="{02AC24A9-CCB6-4F8D-B8DB-C2F3692CFA5A}" type="datetimeFigureOut">
               <a:rPr lang="en-US" smtClean="0"/>
-              <a:t>6/4/2026</a:t>
+              <a:t>6/10/2026</a:t>
             </a:fld>
             <a:endParaRPr lang="en-US" dirty="0"/>
           </a:p>
@@ -4685,7 +4685,7 @@
           <a:p>
             <a:fld id="{02AC24A9-CCB6-4F8D-B8DB-C2F3692CFA5A}" type="datetimeFigureOut">
               <a:rPr lang="en-US" smtClean="0"/>
-              <a:t>6/4/2026</a:t>
+              <a:t>6/10/2026</a:t>
             </a:fld>
             <a:endParaRPr lang="en-US" dirty="0"/>
           </a:p>
@@ -5728,7 +5728,7 @@
           <a:p>
             <a:r>
               <a:rPr lang="sk-SK" sz="1800" dirty="0"/>
-              <a:t>Modely strojového učenia,</a:t>
+              <a:t>Modely strojového učenia.</a:t>
             </a:r>
           </a:p>
           <a:p>
@@ -5742,9 +5742,32 @@
           </a:p>
           <a:p>
             <a:r>
-              <a:rPr lang="sk-SK" sz="1800" dirty="0"/>
-              <a:t>Vyhodnotenie a porovnanie výsledkov odlišných zdrojov dát</a:t>
-            </a:r>
+              <a:rPr lang="en-US" sz="1800" dirty="0" err="1"/>
+              <a:t>Testovanie</a:t>
+            </a:r>
+            <a:r>
+              <a:rPr lang="en-US" sz="1800" dirty="0"/>
+              <a:t> </a:t>
+            </a:r>
+            <a:r>
+              <a:rPr lang="en-US" sz="1800" dirty="0" err="1"/>
+              <a:t>modelov</a:t>
+            </a:r>
+            <a:r>
+              <a:rPr lang="en-US" sz="1800" dirty="0"/>
+              <a:t>,</a:t>
+            </a:r>
+          </a:p>
+          <a:p>
+            <a:r>
+              <a:rPr lang="en-US" sz="1800" dirty="0" err="1"/>
+              <a:t>Vyhodnotenie</a:t>
+            </a:r>
+            <a:r>
+              <a:rPr lang="en-US" sz="1800" dirty="0"/>
+              <a:t> volatility.</a:t>
+            </a:r>
+            <a:endParaRPr lang="sk-SK" sz="1800" dirty="0"/>
           </a:p>
           <a:p>
             <a:pPr marL="0" indent="0">
@@ -6104,12 +6127,22 @@
               <a:rPr lang="en-GB" sz="1800" dirty="0"/>
               <a:t>(1,1)</a:t>
             </a:r>
+            <a:r>
+              <a:rPr lang="sk-SK" sz="1800" dirty="0"/>
+              <a:t>,</a:t>
+            </a:r>
+            <a:endParaRPr lang="en-GB" sz="1800" dirty="0"/>
           </a:p>
           <a:p>
             <a:r>
               <a:rPr lang="en-GB" sz="1800" dirty="0"/>
               <a:t>GJR-GARCH</a:t>
             </a:r>
+            <a:r>
+              <a:rPr lang="sk-SK" sz="1800" dirty="0"/>
+              <a:t>,</a:t>
+            </a:r>
+            <a:endParaRPr lang="en-GB" sz="1800" dirty="0"/>
           </a:p>
           <a:p>
             <a:r>
@@ -6121,10 +6154,9 @@
               <a:t>HAR</a:t>
             </a:r>
             <a:r>
-              <a:rPr lang="sk-SK" sz="1800"/>
-              <a:t> model</a:t>
-            </a:r>
-            <a:endParaRPr lang="sk-SK" sz="1800" dirty="0"/>
+              <a:rPr lang="sk-SK" sz="1800" dirty="0"/>
+              <a:t> model.</a:t>
+            </a:r>
           </a:p>
           <a:p>
             <a:pPr marL="0" indent="0">
@@ -6171,7 +6203,7 @@
             </a:r>
             <a:r>
               <a:rPr lang="sk-SK" sz="1800" dirty="0"/>
-              <a:t> prístup</a:t>
+              <a:t> prístup.</a:t>
             </a:r>
           </a:p>
           <a:p>
@@ -6284,10 +6316,9 @@
               <a:t>Finance</a:t>
             </a:r>
             <a:r>
-              <a:rPr lang="en-US" sz="1800" dirty="0"/>
-              <a:t>,</a:t>
-            </a:r>
-            <a:endParaRPr lang="sk-SK" sz="1800" dirty="0"/>
+              <a:rPr lang="sk-SK" sz="1800" dirty="0"/>
+              <a:t>.</a:t>
+            </a:r>
           </a:p>
           <a:p>
             <a:pPr marL="0" indent="0">

--- a/Identifikácia vzorov v časových radoch pre komparáciu volatility.pptx
+++ b/Identifikácia vzorov v časových radoch pre komparáciu volatility.pptx
@@ -120,6 +120,4624 @@
 </p:presentation>
 </file>
 
+<file path=ppt/diagrams/colors1.xml><?xml version="1.0" encoding="utf-8"?>
+<dgm:colorsDef xmlns:dgm="http://schemas.openxmlformats.org/drawingml/2006/diagram" xmlns:a="http://schemas.openxmlformats.org/drawingml/2006/main" uniqueId="urn:microsoft.com/office/officeart/2005/8/colors/accent1_2">
+  <dgm:title val=""/>
+  <dgm:desc val=""/>
+  <dgm:catLst>
+    <dgm:cat type="accent1" pri="11200"/>
+  </dgm:catLst>
+  <dgm:styleLbl name="node0">
+    <dgm:fillClrLst meth="repeat">
+      <a:schemeClr val="accent1"/>
+    </dgm:fillClrLst>
+    <dgm:linClrLst meth="repeat">
+      <a:schemeClr val="lt1"/>
+    </dgm:linClrLst>
+    <dgm:effectClrLst/>
+    <dgm:txLinClrLst/>
+    <dgm:txFillClrLst/>
+    <dgm:txEffectClrLst/>
+  </dgm:styleLbl>
+  <dgm:styleLbl name="alignNode1">
+    <dgm:fillClrLst meth="repeat">
+      <a:schemeClr val="accent1"/>
+    </dgm:fillClrLst>
+    <dgm:linClrLst meth="repeat">
+      <a:schemeClr val="accent1"/>
+    </dgm:linClrLst>
+    <dgm:effectClrLst/>
+    <dgm:txLinClrLst/>
+    <dgm:txFillClrLst/>
+    <dgm:txEffectClrLst/>
+  </dgm:styleLbl>
+  <dgm:styleLbl name="node1">
+    <dgm:fillClrLst meth="repeat">
+      <a:schemeClr val="accent1"/>
+    </dgm:fillClrLst>
+    <dgm:linClrLst meth="repeat">
+      <a:schemeClr val="lt1"/>
+    </dgm:linClrLst>
+    <dgm:effectClrLst/>
+    <dgm:txLinClrLst/>
+    <dgm:txFillClrLst/>
+    <dgm:txEffectClrLst/>
+  </dgm:styleLbl>
+  <dgm:styleLbl name="lnNode1">
+    <dgm:fillClrLst meth="repeat">
+      <a:schemeClr val="accent1"/>
+    </dgm:fillClrLst>
+    <dgm:linClrLst meth="repeat">
+      <a:schemeClr val="lt1"/>
+    </dgm:linClrLst>
+    <dgm:effectClrLst/>
+    <dgm:txLinClrLst/>
+    <dgm:txFillClrLst/>
+    <dgm:txEffectClrLst/>
+  </dgm:styleLbl>
+  <dgm:styleLbl name="vennNode1">
+    <dgm:fillClrLst meth="repeat">
+      <a:schemeClr val="accent1">
+        <a:alpha val="50000"/>
+      </a:schemeClr>
+    </dgm:fillClrLst>
+    <dgm:linClrLst meth="repeat">
+      <a:schemeClr val="lt1"/>
+    </dgm:linClrLst>
+    <dgm:effectClrLst/>
+    <dgm:txLinClrLst/>
+    <dgm:txFillClrLst/>
+    <dgm:txEffectClrLst/>
+  </dgm:styleLbl>
+  <dgm:styleLbl name="node2">
+    <dgm:fillClrLst meth="repeat">
+      <a:schemeClr val="accent1"/>
+    </dgm:fillClrLst>
+    <dgm:linClrLst meth="repeat">
+      <a:schemeClr val="lt1"/>
+    </dgm:linClrLst>
+    <dgm:effectClrLst/>
+    <dgm:txLinClrLst/>
+    <dgm:txFillClrLst/>
+    <dgm:txEffectClrLst/>
+  </dgm:styleLbl>
+  <dgm:styleLbl name="node3">
+    <dgm:fillClrLst meth="repeat">
+      <a:schemeClr val="accent1"/>
+    </dgm:fillClrLst>
+    <dgm:linClrLst meth="repeat">
+      <a:schemeClr val="lt1"/>
+    </dgm:linClrLst>
+    <dgm:effectClrLst/>
+    <dgm:txLinClrLst/>
+    <dgm:txFillClrLst/>
+    <dgm:txEffectClrLst/>
+  </dgm:styleLbl>
+  <dgm:styleLbl name="node4">
+    <dgm:fillClrLst meth="repeat">
+      <a:schemeClr val="accent1"/>
+    </dgm:fillClrLst>
+    <dgm:linClrLst meth="repeat">
+      <a:schemeClr val="lt1"/>
+    </dgm:linClrLst>
+    <dgm:effectClrLst/>
+    <dgm:txLinClrLst/>
+    <dgm:txFillClrLst/>
+    <dgm:txEffectClrLst/>
+  </dgm:styleLbl>
+  <dgm:styleLbl name="fgImgPlace1">
+    <dgm:fillClrLst meth="repeat">
+      <a:schemeClr val="accent1">
+        <a:tint val="50000"/>
+      </a:schemeClr>
+    </dgm:fillClrLst>
+    <dgm:linClrLst meth="repeat">
+      <a:schemeClr val="lt1"/>
+    </dgm:linClrLst>
+    <dgm:effectClrLst/>
+    <dgm:txLinClrLst/>
+    <dgm:txFillClrLst meth="repeat">
+      <a:schemeClr val="lt1"/>
+    </dgm:txFillClrLst>
+    <dgm:txEffectClrLst/>
+  </dgm:styleLbl>
+  <dgm:styleLbl name="alignImgPlace1">
+    <dgm:fillClrLst meth="repeat">
+      <a:schemeClr val="accent1">
+        <a:tint val="50000"/>
+      </a:schemeClr>
+    </dgm:fillClrLst>
+    <dgm:linClrLst meth="repeat">
+      <a:schemeClr val="lt1"/>
+    </dgm:linClrLst>
+    <dgm:effectClrLst/>
+    <dgm:txLinClrLst/>
+    <dgm:txFillClrLst meth="repeat">
+      <a:schemeClr val="lt1"/>
+    </dgm:txFillClrLst>
+    <dgm:txEffectClrLst/>
+  </dgm:styleLbl>
+  <dgm:styleLbl name="bgImgPlace1">
+    <dgm:fillClrLst meth="repeat">
+      <a:schemeClr val="accent1">
+        <a:tint val="50000"/>
+      </a:schemeClr>
+    </dgm:fillClrLst>
+    <dgm:linClrLst meth="repeat">
+      <a:schemeClr val="lt1"/>
+    </dgm:linClrLst>
+    <dgm:effectClrLst/>
+    <dgm:txLinClrLst/>
+    <dgm:txFillClrLst meth="repeat">
+      <a:schemeClr val="lt1"/>
+    </dgm:txFillClrLst>
+    <dgm:txEffectClrLst/>
+  </dgm:styleLbl>
+  <dgm:styleLbl name="sibTrans2D1">
+    <dgm:fillClrLst meth="repeat">
+      <a:schemeClr val="accent1">
+        <a:tint val="60000"/>
+      </a:schemeClr>
+    </dgm:fillClrLst>
+    <dgm:linClrLst meth="repeat">
+      <a:schemeClr val="accent1">
+        <a:tint val="60000"/>
+      </a:schemeClr>
+    </dgm:linClrLst>
+    <dgm:effectClrLst/>
+    <dgm:txLinClrLst/>
+    <dgm:txFillClrLst/>
+    <dgm:txEffectClrLst/>
+  </dgm:styleLbl>
+  <dgm:styleLbl name="fgSibTrans2D1">
+    <dgm:fillClrLst meth="repeat">
+      <a:schemeClr val="accent1">
+        <a:tint val="60000"/>
+      </a:schemeClr>
+    </dgm:fillClrLst>
+    <dgm:linClrLst meth="repeat">
+      <a:schemeClr val="accent1">
+        <a:tint val="60000"/>
+      </a:schemeClr>
+    </dgm:linClrLst>
+    <dgm:effectClrLst/>
+    <dgm:txLinClrLst/>
+    <dgm:txFillClrLst/>
+    <dgm:txEffectClrLst/>
+  </dgm:styleLbl>
+  <dgm:styleLbl name="bgSibTrans2D1">
+    <dgm:fillClrLst meth="repeat">
+      <a:schemeClr val="accent1">
+        <a:tint val="60000"/>
+      </a:schemeClr>
+    </dgm:fillClrLst>
+    <dgm:linClrLst meth="repeat">
+      <a:schemeClr val="accent1">
+        <a:tint val="60000"/>
+      </a:schemeClr>
+    </dgm:linClrLst>
+    <dgm:effectClrLst/>
+    <dgm:txLinClrLst/>
+    <dgm:txFillClrLst/>
+    <dgm:txEffectClrLst/>
+  </dgm:styleLbl>
+  <dgm:styleLbl name="sibTrans1D1">
+    <dgm:fillClrLst meth="repeat">
+      <a:schemeClr val="accent1"/>
+    </dgm:fillClrLst>
+    <dgm:linClrLst meth="repeat">
+      <a:schemeClr val="accent1"/>
+    </dgm:linClrLst>
+    <dgm:effectClrLst/>
+    <dgm:txLinClrLst/>
+    <dgm:txFillClrLst meth="repeat">
+      <a:schemeClr val="tx1"/>
+    </dgm:txFillClrLst>
+    <dgm:txEffectClrLst/>
+  </dgm:styleLbl>
+  <dgm:styleLbl name="callout">
+    <dgm:fillClrLst meth="repeat">
+      <a:schemeClr val="accent1"/>
+    </dgm:fillClrLst>
+    <dgm:linClrLst meth="repeat">
+      <a:schemeClr val="accent1">
+        <a:tint val="50000"/>
+      </a:schemeClr>
+    </dgm:linClrLst>
+    <dgm:effectClrLst/>
+    <dgm:txLinClrLst/>
+    <dgm:txFillClrLst meth="repeat">
+      <a:schemeClr val="tx1"/>
+    </dgm:txFillClrLst>
+    <dgm:txEffectClrLst/>
+  </dgm:styleLbl>
+  <dgm:styleLbl name="asst0">
+    <dgm:fillClrLst meth="repeat">
+      <a:schemeClr val="accent1"/>
+    </dgm:fillClrLst>
+    <dgm:linClrLst meth="repeat">
+      <a:schemeClr val="lt1"/>
+    </dgm:linClrLst>
+    <dgm:effectClrLst/>
+    <dgm:txLinClrLst/>
+    <dgm:txFillClrLst/>
+    <dgm:txEffectClrLst/>
+  </dgm:styleLbl>
+  <dgm:styleLbl name="asst1">
+    <dgm:fillClrLst meth="repeat">
+      <a:schemeClr val="accent1"/>
+    </dgm:fillClrLst>
+    <dgm:linClrLst meth="repeat">
+      <a:schemeClr val="lt1"/>
+    </dgm:linClrLst>
+    <dgm:effectClrLst/>
+    <dgm:txLinClrLst/>
+    <dgm:txFillClrLst/>
+    <dgm:txEffectClrLst/>
+  </dgm:styleLbl>
+  <dgm:styleLbl name="asst2">
+    <dgm:fillClrLst meth="repeat">
+      <a:schemeClr val="accent1"/>
+    </dgm:fillClrLst>
+    <dgm:linClrLst meth="repeat">
+      <a:schemeClr val="lt1"/>
+    </dgm:linClrLst>
+    <dgm:effectClrLst/>
+    <dgm:txLinClrLst/>
+    <dgm:txFillClrLst/>
+    <dgm:txEffectClrLst/>
+  </dgm:styleLbl>
+  <dgm:styleLbl name="asst3">
+    <dgm:fillClrLst meth="repeat">
+      <a:schemeClr val="accent1"/>
+    </dgm:fillClrLst>
+    <dgm:linClrLst meth="repeat">
+      <a:schemeClr val="lt1"/>
+    </dgm:linClrLst>
+    <dgm:effectClrLst/>
+    <dgm:txLinClrLst/>
+    <dgm:txFillClrLst/>
+    <dgm:txEffectClrLst/>
+  </dgm:styleLbl>
+  <dgm:styleLbl name="asst4">
+    <dgm:fillClrLst meth="repeat">
+      <a:schemeClr val="accent1"/>
+    </dgm:fillClrLst>
+    <dgm:linClrLst meth="repeat">
+      <a:schemeClr val="lt1"/>
+    </dgm:linClrLst>
+    <dgm:effectClrLst/>
+    <dgm:txLinClrLst/>
+    <dgm:txFillClrLst/>
+    <dgm:txEffectClrLst/>
+  </dgm:styleLbl>
+  <dgm:styleLbl name="parChTrans2D1">
+    <dgm:fillClrLst meth="repeat">
+      <a:schemeClr val="accent1">
+        <a:tint val="60000"/>
+      </a:schemeClr>
+    </dgm:fillClrLst>
+    <dgm:linClrLst meth="repeat">
+      <a:schemeClr val="accent1">
+        <a:tint val="60000"/>
+      </a:schemeClr>
+    </dgm:linClrLst>
+    <dgm:effectClrLst/>
+    <dgm:txLinClrLst/>
+    <dgm:txFillClrLst meth="repeat">
+      <a:schemeClr val="lt1"/>
+    </dgm:txFillClrLst>
+    <dgm:txEffectClrLst/>
+  </dgm:styleLbl>
+  <dgm:styleLbl name="parChTrans2D2">
+    <dgm:fillClrLst meth="repeat">
+      <a:schemeClr val="accent1"/>
+    </dgm:fillClrLst>
+    <dgm:linClrLst meth="repeat">
+      <a:schemeClr val="accent1"/>
+    </dgm:linClrLst>
+    <dgm:effectClrLst/>
+    <dgm:txLinClrLst/>
+    <dgm:txFillClrLst meth="repeat">
+      <a:schemeClr val="lt1"/>
+    </dgm:txFillClrLst>
+    <dgm:txEffectClrLst/>
+  </dgm:styleLbl>
+  <dgm:styleLbl name="parChTrans2D3">
+    <dgm:fillClrLst meth="repeat">
+      <a:schemeClr val="accent1"/>
+    </dgm:fillClrLst>
+    <dgm:linClrLst meth="repeat">
+      <a:schemeClr val="accent1"/>
+    </dgm:linClrLst>
+    <dgm:effectClrLst/>
+    <dgm:txLinClrLst/>
+    <dgm:txFillClrLst meth="repeat">
+      <a:schemeClr val="lt1"/>
+    </dgm:txFillClrLst>
+    <dgm:txEffectClrLst/>
+  </dgm:styleLbl>
+  <dgm:styleLbl name="parChTrans2D4">
+    <dgm:fillClrLst meth="repeat">
+      <a:schemeClr val="accent1"/>
+    </dgm:fillClrLst>
+    <dgm:linClrLst meth="repeat">
+      <a:schemeClr val="accent1"/>
+    </dgm:linClrLst>
+    <dgm:effectClrLst/>
+    <dgm:txLinClrLst/>
+    <dgm:txFillClrLst meth="repeat">
+      <a:schemeClr val="lt1"/>
+    </dgm:txFillClrLst>
+    <dgm:txEffectClrLst/>
+  </dgm:styleLbl>
+  <dgm:styleLbl name="parChTrans1D1">
+    <dgm:fillClrLst meth="repeat">
+      <a:schemeClr val="accent1"/>
+    </dgm:fillClrLst>
+    <dgm:linClrLst meth="repeat">
+      <a:schemeClr val="accent1">
+        <a:shade val="60000"/>
+      </a:schemeClr>
+    </dgm:linClrLst>
+    <dgm:effectClrLst/>
+    <dgm:txLinClrLst/>
+    <dgm:txFillClrLst meth="repeat">
+      <a:schemeClr val="tx1"/>
+    </dgm:txFillClrLst>
+    <dgm:txEffectClrLst/>
+  </dgm:styleLbl>
+  <dgm:styleLbl name="parChTrans1D2">
+    <dgm:fillClrLst meth="repeat">
+      <a:schemeClr val="accent1"/>
+    </dgm:fillClrLst>
+    <dgm:linClrLst meth="repeat">
+      <a:schemeClr val="accent1">
+        <a:shade val="60000"/>
+      </a:schemeClr>
+    </dgm:linClrLst>
+    <dgm:effectClrLst/>
+    <dgm:txLinClrLst/>
+    <dgm:txFillClrLst meth="repeat">
+      <a:schemeClr val="tx1"/>
+    </dgm:txFillClrLst>
+    <dgm:txEffectClrLst/>
+  </dgm:styleLbl>
+  <dgm:styleLbl name="parChTrans1D3">
+    <dgm:fillClrLst meth="repeat">
+      <a:schemeClr val="accent1"/>
+    </dgm:fillClrLst>
+    <dgm:linClrLst meth="repeat">
+      <a:schemeClr val="accent1">
+        <a:shade val="80000"/>
+      </a:schemeClr>
+    </dgm:linClrLst>
+    <dgm:effectClrLst/>
+    <dgm:txLinClrLst/>
+    <dgm:txFillClrLst meth="repeat">
+      <a:schemeClr val="tx1"/>
+    </dgm:txFillClrLst>
+    <dgm:txEffectClrLst/>
+  </dgm:styleLbl>
+  <dgm:styleLbl name="parChTrans1D4">
+    <dgm:fillClrLst meth="repeat">
+      <a:schemeClr val="accent1"/>
+    </dgm:fillClrLst>
+    <dgm:linClrLst meth="repeat">
+      <a:schemeClr val="accent1">
+        <a:shade val="80000"/>
+      </a:schemeClr>
+    </dgm:linClrLst>
+    <dgm:effectClrLst/>
+    <dgm:txLinClrLst/>
+    <dgm:txFillClrLst meth="repeat">
+      <a:schemeClr val="tx1"/>
+    </dgm:txFillClrLst>
+    <dgm:txEffectClrLst/>
+  </dgm:styleLbl>
+  <dgm:styleLbl name="fgAcc1">
+    <dgm:fillClrLst meth="repeat">
+      <a:schemeClr val="lt1">
+        <a:alpha val="90000"/>
+      </a:schemeClr>
+    </dgm:fillClrLst>
+    <dgm:linClrLst meth="repeat">
+      <a:schemeClr val="accent1"/>
+    </dgm:linClrLst>
+    <dgm:effectClrLst/>
+    <dgm:txLinClrLst/>
+    <dgm:txFillClrLst meth="repeat">
+      <a:schemeClr val="dk1"/>
+    </dgm:txFillClrLst>
+    <dgm:txEffectClrLst/>
+  </dgm:styleLbl>
+  <dgm:styleLbl name="conFgAcc1">
+    <dgm:fillClrLst meth="repeat">
+      <a:schemeClr val="lt1">
+        <a:alpha val="90000"/>
+      </a:schemeClr>
+    </dgm:fillClrLst>
+    <dgm:linClrLst meth="repeat">
+      <a:schemeClr val="accent1"/>
+    </dgm:linClrLst>
+    <dgm:effectClrLst/>
+    <dgm:txLinClrLst/>
+    <dgm:txFillClrLst meth="repeat">
+      <a:schemeClr val="dk1"/>
+    </dgm:txFillClrLst>
+    <dgm:txEffectClrLst/>
+  </dgm:styleLbl>
+  <dgm:styleLbl name="alignAcc1">
+    <dgm:fillClrLst meth="repeat">
+      <a:schemeClr val="lt1">
+        <a:alpha val="90000"/>
+      </a:schemeClr>
+    </dgm:fillClrLst>
+    <dgm:linClrLst meth="repeat">
+      <a:schemeClr val="accent1"/>
+    </dgm:linClrLst>
+    <dgm:effectClrLst/>
+    <dgm:txLinClrLst/>
+    <dgm:txFillClrLst meth="repeat">
+      <a:schemeClr val="dk1"/>
+    </dgm:txFillClrLst>
+    <dgm:txEffectClrLst/>
+  </dgm:styleLbl>
+  <dgm:styleLbl name="trAlignAcc1">
+    <dgm:fillClrLst meth="repeat">
+      <a:schemeClr val="lt1">
+        <a:alpha val="40000"/>
+      </a:schemeClr>
+    </dgm:fillClrLst>
+    <dgm:linClrLst meth="repeat">
+      <a:schemeClr val="accent1"/>
+    </dgm:linClrLst>
+    <dgm:effectClrLst/>
+    <dgm:txLinClrLst/>
+    <dgm:txFillClrLst meth="repeat">
+      <a:schemeClr val="dk1"/>
+    </dgm:txFillClrLst>
+    <dgm:txEffectClrLst/>
+  </dgm:styleLbl>
+  <dgm:styleLbl name="bgAcc1">
+    <dgm:fillClrLst meth="repeat">
+      <a:schemeClr val="lt1">
+        <a:alpha val="90000"/>
+      </a:schemeClr>
+    </dgm:fillClrLst>
+    <dgm:linClrLst meth="repeat">
+      <a:schemeClr val="accent1"/>
+    </dgm:linClrLst>
+    <dgm:effectClrLst/>
+    <dgm:txLinClrLst/>
+    <dgm:txFillClrLst meth="repeat">
+      <a:schemeClr val="dk1"/>
+    </dgm:txFillClrLst>
+    <dgm:txEffectClrLst/>
+  </dgm:styleLbl>
+  <dgm:styleLbl name="solidFgAcc1">
+    <dgm:fillClrLst meth="repeat">
+      <a:schemeClr val="lt1"/>
+    </dgm:fillClrLst>
+    <dgm:linClrLst meth="repeat">
+      <a:schemeClr val="accent1"/>
+    </dgm:linClrLst>
+    <dgm:effectClrLst/>
+    <dgm:txLinClrLst/>
+    <dgm:txFillClrLst meth="repeat">
+      <a:schemeClr val="dk1"/>
+    </dgm:txFillClrLst>
+    <dgm:txEffectClrLst/>
+  </dgm:styleLbl>
+  <dgm:styleLbl name="solidAlignAcc1">
+    <dgm:fillClrLst meth="repeat">
+      <a:schemeClr val="lt1"/>
+    </dgm:fillClrLst>
+    <dgm:linClrLst meth="repeat">
+      <a:schemeClr val="accent1"/>
+    </dgm:linClrLst>
+    <dgm:effectClrLst/>
+    <dgm:txLinClrLst/>
+    <dgm:txFillClrLst meth="repeat">
+      <a:schemeClr val="dk1"/>
+    </dgm:txFillClrLst>
+    <dgm:txEffectClrLst/>
+  </dgm:styleLbl>
+  <dgm:styleLbl name="solidBgAcc1">
+    <dgm:fillClrLst meth="repeat">
+      <a:schemeClr val="lt1"/>
+    </dgm:fillClrLst>
+    <dgm:linClrLst meth="repeat">
+      <a:schemeClr val="accent1"/>
+    </dgm:linClrLst>
+    <dgm:effectClrLst/>
+    <dgm:txLinClrLst/>
+    <dgm:txFillClrLst meth="repeat">
+      <a:schemeClr val="dk1"/>
+    </dgm:txFillClrLst>
+    <dgm:txEffectClrLst/>
+  </dgm:styleLbl>
+  <dgm:styleLbl name="fgAccFollowNode1">
+    <dgm:fillClrLst meth="repeat">
+      <a:schemeClr val="accent1">
+        <a:alpha val="90000"/>
+        <a:tint val="40000"/>
+      </a:schemeClr>
+    </dgm:fillClrLst>
+    <dgm:linClrLst meth="repeat">
+      <a:schemeClr val="accent1">
+        <a:alpha val="90000"/>
+        <a:tint val="40000"/>
+      </a:schemeClr>
+    </dgm:linClrLst>
+    <dgm:effectClrLst/>
+    <dgm:txLinClrLst/>
+    <dgm:txFillClrLst meth="repeat">
+      <a:schemeClr val="dk1"/>
+    </dgm:txFillClrLst>
+    <dgm:txEffectClrLst/>
+  </dgm:styleLbl>
+  <dgm:styleLbl name="alignAccFollowNode1">
+    <dgm:fillClrLst meth="repeat">
+      <a:schemeClr val="accent1">
+        <a:alpha val="90000"/>
+        <a:tint val="40000"/>
+      </a:schemeClr>
+    </dgm:fillClrLst>
+    <dgm:linClrLst meth="repeat">
+      <a:schemeClr val="accent1">
+        <a:alpha val="90000"/>
+        <a:tint val="40000"/>
+      </a:schemeClr>
+    </dgm:linClrLst>
+    <dgm:effectClrLst/>
+    <dgm:txLinClrLst/>
+    <dgm:txFillClrLst meth="repeat">
+      <a:schemeClr val="dk1"/>
+    </dgm:txFillClrLst>
+    <dgm:txEffectClrLst/>
+  </dgm:styleLbl>
+  <dgm:styleLbl name="bgAccFollowNode1">
+    <dgm:fillClrLst meth="repeat">
+      <a:schemeClr val="accent1">
+        <a:alpha val="90000"/>
+        <a:tint val="40000"/>
+      </a:schemeClr>
+    </dgm:fillClrLst>
+    <dgm:linClrLst meth="repeat">
+      <a:schemeClr val="accent1">
+        <a:alpha val="90000"/>
+        <a:tint val="40000"/>
+      </a:schemeClr>
+    </dgm:linClrLst>
+    <dgm:effectClrLst/>
+    <dgm:txLinClrLst/>
+    <dgm:txFillClrLst meth="repeat">
+      <a:schemeClr val="dk1"/>
+    </dgm:txFillClrLst>
+    <dgm:txEffectClrLst/>
+  </dgm:styleLbl>
+  <dgm:styleLbl name="fgAcc0">
+    <dgm:fillClrLst meth="repeat">
+      <a:schemeClr val="lt1">
+        <a:alpha val="90000"/>
+      </a:schemeClr>
+    </dgm:fillClrLst>
+    <dgm:linClrLst meth="repeat">
+      <a:schemeClr val="accent1"/>
+    </dgm:linClrLst>
+    <dgm:effectClrLst/>
+    <dgm:txLinClrLst/>
+    <dgm:txFillClrLst meth="repeat">
+      <a:schemeClr val="dk1"/>
+    </dgm:txFillClrLst>
+    <dgm:txEffectClrLst/>
+  </dgm:styleLbl>
+  <dgm:styleLbl name="fgAcc2">
+    <dgm:fillClrLst meth="repeat">
+      <a:schemeClr val="lt1">
+        <a:alpha val="90000"/>
+      </a:schemeClr>
+    </dgm:fillClrLst>
+    <dgm:linClrLst meth="repeat">
+      <a:schemeClr val="accent1"/>
+    </dgm:linClrLst>
+    <dgm:effectClrLst/>
+    <dgm:txLinClrLst/>
+    <dgm:txFillClrLst meth="repeat">
+      <a:schemeClr val="dk1"/>
+    </dgm:txFillClrLst>
+    <dgm:txEffectClrLst/>
+  </dgm:styleLbl>
+  <dgm:styleLbl name="fgAcc3">
+    <dgm:fillClrLst meth="repeat">
+      <a:schemeClr val="lt1">
+        <a:alpha val="90000"/>
+      </a:schemeClr>
+    </dgm:fillClrLst>
+    <dgm:linClrLst meth="repeat">
+      <a:schemeClr val="accent1"/>
+    </dgm:linClrLst>
+    <dgm:effectClrLst/>
+    <dgm:txLinClrLst/>
+    <dgm:txFillClrLst meth="repeat">
+      <a:schemeClr val="dk1"/>
+    </dgm:txFillClrLst>
+    <dgm:txEffectClrLst/>
+  </dgm:styleLbl>
+  <dgm:styleLbl name="fgAcc4">
+    <dgm:fillClrLst meth="repeat">
+      <a:schemeClr val="lt1">
+        <a:alpha val="90000"/>
+      </a:schemeClr>
+    </dgm:fillClrLst>
+    <dgm:linClrLst meth="repeat">
+      <a:schemeClr val="accent1"/>
+    </dgm:linClrLst>
+    <dgm:effectClrLst/>
+    <dgm:txLinClrLst/>
+    <dgm:txFillClrLst meth="repeat">
+      <a:schemeClr val="dk1"/>
+    </dgm:txFillClrLst>
+    <dgm:txEffectClrLst/>
+  </dgm:styleLbl>
+  <dgm:styleLbl name="bgShp">
+    <dgm:fillClrLst meth="repeat">
+      <a:schemeClr val="accent1">
+        <a:tint val="40000"/>
+      </a:schemeClr>
+    </dgm:fillClrLst>
+    <dgm:linClrLst meth="repeat">
+      <a:schemeClr val="accent1"/>
+    </dgm:linClrLst>
+    <dgm:effectClrLst/>
+    <dgm:txLinClrLst/>
+    <dgm:txFillClrLst meth="repeat">
+      <a:schemeClr val="dk1"/>
+    </dgm:txFillClrLst>
+    <dgm:txEffectClrLst/>
+  </dgm:styleLbl>
+  <dgm:styleLbl name="dkBgShp">
+    <dgm:fillClrLst meth="repeat">
+      <a:schemeClr val="accent1">
+        <a:shade val="80000"/>
+      </a:schemeClr>
+    </dgm:fillClrLst>
+    <dgm:linClrLst meth="repeat">
+      <a:schemeClr val="accent1"/>
+    </dgm:linClrLst>
+    <dgm:effectClrLst/>
+    <dgm:txLinClrLst/>
+    <dgm:txFillClrLst meth="repeat">
+      <a:schemeClr val="lt1"/>
+    </dgm:txFillClrLst>
+    <dgm:txEffectClrLst/>
+  </dgm:styleLbl>
+  <dgm:styleLbl name="trBgShp">
+    <dgm:fillClrLst meth="repeat">
+      <a:schemeClr val="accent1">
+        <a:tint val="50000"/>
+        <a:alpha val="40000"/>
+      </a:schemeClr>
+    </dgm:fillClrLst>
+    <dgm:linClrLst meth="repeat">
+      <a:schemeClr val="accent1"/>
+    </dgm:linClrLst>
+    <dgm:effectClrLst/>
+    <dgm:txLinClrLst/>
+    <dgm:txFillClrLst meth="repeat">
+      <a:schemeClr val="lt1"/>
+    </dgm:txFillClrLst>
+    <dgm:txEffectClrLst/>
+  </dgm:styleLbl>
+  <dgm:styleLbl name="fgShp">
+    <dgm:fillClrLst meth="repeat">
+      <a:schemeClr val="accent1">
+        <a:tint val="60000"/>
+      </a:schemeClr>
+    </dgm:fillClrLst>
+    <dgm:linClrLst meth="repeat">
+      <a:schemeClr val="lt1"/>
+    </dgm:linClrLst>
+    <dgm:effectClrLst/>
+    <dgm:txLinClrLst/>
+    <dgm:txFillClrLst meth="repeat">
+      <a:schemeClr val="dk1"/>
+    </dgm:txFillClrLst>
+    <dgm:txEffectClrLst/>
+  </dgm:styleLbl>
+  <dgm:styleLbl name="revTx">
+    <dgm:fillClrLst meth="repeat">
+      <a:schemeClr val="lt1">
+        <a:alpha val="0"/>
+      </a:schemeClr>
+    </dgm:fillClrLst>
+    <dgm:linClrLst meth="repeat">
+      <a:schemeClr val="dk1">
+        <a:alpha val="0"/>
+      </a:schemeClr>
+    </dgm:linClrLst>
+    <dgm:effectClrLst/>
+    <dgm:txLinClrLst/>
+    <dgm:txFillClrLst meth="repeat">
+      <a:schemeClr val="tx1"/>
+    </dgm:txFillClrLst>
+    <dgm:txEffectClrLst/>
+  </dgm:styleLbl>
+</dgm:colorsDef>
+</file>
+
+<file path=ppt/diagrams/data1.xml><?xml version="1.0" encoding="utf-8"?>
+<dgm:dataModel xmlns:dgm="http://schemas.openxmlformats.org/drawingml/2006/diagram" xmlns:a="http://schemas.openxmlformats.org/drawingml/2006/main">
+  <dgm:ptLst>
+    <dgm:pt modelId="{B665338B-645B-41AE-983D-65FFD2CDBEFF}" type="doc">
+      <dgm:prSet loTypeId="urn:microsoft.com/office/officeart/2005/8/layout/hProcess4" loCatId="process" qsTypeId="urn:microsoft.com/office/officeart/2005/8/quickstyle/simple1" qsCatId="simple" csTypeId="urn:microsoft.com/office/officeart/2005/8/colors/accent1_2" csCatId="accent1" phldr="1"/>
+      <dgm:spPr/>
+      <dgm:t>
+        <a:bodyPr/>
+        <a:lstStyle/>
+        <a:p>
+          <a:endParaRPr lang="sk-SK"/>
+        </a:p>
+      </dgm:t>
+    </dgm:pt>
+    <dgm:pt modelId="{D6FB274B-FC90-4E83-AEF4-3C4FAD353500}">
+      <dgm:prSet phldrT="[Text]" phldr="0" custT="1"/>
+      <dgm:spPr/>
+      <dgm:t>
+        <a:bodyPr/>
+        <a:lstStyle/>
+        <a:p>
+          <a:r>
+            <a:rPr lang="sk-SK" sz="2000" b="1" dirty="0">
+              <a:effectLst>
+                <a:outerShdw blurRad="38100" dist="38100" dir="2700000" algn="tl">
+                  <a:srgbClr val="000000">
+                    <a:alpha val="43137"/>
+                  </a:srgbClr>
+                </a:outerShdw>
+              </a:effectLst>
+            </a:rPr>
+            <a:t>Dáta</a:t>
+          </a:r>
+        </a:p>
+      </dgm:t>
+    </dgm:pt>
+    <dgm:pt modelId="{5A19F18F-4921-423D-81BF-A1FD0D5AC97B}" type="parTrans" cxnId="{A76D05C4-A12A-4B98-9194-3F92D8D6E43A}">
+      <dgm:prSet/>
+      <dgm:spPr/>
+      <dgm:t>
+        <a:bodyPr/>
+        <a:lstStyle/>
+        <a:p>
+          <a:endParaRPr lang="sk-SK"/>
+        </a:p>
+      </dgm:t>
+    </dgm:pt>
+    <dgm:pt modelId="{8B704CD4-C4A3-4CA8-9E6D-3F5A58FB5A6E}" type="sibTrans" cxnId="{A76D05C4-A12A-4B98-9194-3F92D8D6E43A}">
+      <dgm:prSet/>
+      <dgm:spPr/>
+      <dgm:t>
+        <a:bodyPr/>
+        <a:lstStyle/>
+        <a:p>
+          <a:endParaRPr lang="sk-SK"/>
+        </a:p>
+      </dgm:t>
+    </dgm:pt>
+    <dgm:pt modelId="{8D030EC8-A772-4D56-8F07-0AE23381547A}">
+      <dgm:prSet phldrT="[Text]" phldr="0" custT="1"/>
+      <dgm:spPr/>
+      <dgm:t>
+        <a:bodyPr/>
+        <a:lstStyle/>
+        <a:p>
+          <a:pPr>
+            <a:lnSpc>
+              <a:spcPct val="100000"/>
+            </a:lnSpc>
+          </a:pPr>
+          <a:r>
+            <a:rPr lang="sk-SK" sz="1400" dirty="0"/>
+            <a:t>Denné ceny akcií</a:t>
+          </a:r>
+        </a:p>
+      </dgm:t>
+    </dgm:pt>
+    <dgm:pt modelId="{56A50F41-90CC-4204-BD46-5BCD743A617F}" type="parTrans" cxnId="{1A5E9831-AA81-46C6-A3CF-EE502DBFA388}">
+      <dgm:prSet/>
+      <dgm:spPr/>
+      <dgm:t>
+        <a:bodyPr/>
+        <a:lstStyle/>
+        <a:p>
+          <a:endParaRPr lang="sk-SK"/>
+        </a:p>
+      </dgm:t>
+    </dgm:pt>
+    <dgm:pt modelId="{DFF0C2CB-6DE0-4245-BB0D-46B347A9190B}" type="sibTrans" cxnId="{1A5E9831-AA81-46C6-A3CF-EE502DBFA388}">
+      <dgm:prSet/>
+      <dgm:spPr/>
+      <dgm:t>
+        <a:bodyPr/>
+        <a:lstStyle/>
+        <a:p>
+          <a:endParaRPr lang="sk-SK"/>
+        </a:p>
+      </dgm:t>
+    </dgm:pt>
+    <dgm:pt modelId="{0B006AC3-28C8-4288-AFED-91FA3D0A00F9}">
+      <dgm:prSet phldrT="[Text]" phldr="0" custT="1"/>
+      <dgm:spPr/>
+      <dgm:t>
+        <a:bodyPr/>
+        <a:lstStyle/>
+        <a:p>
+          <a:pPr>
+            <a:lnSpc>
+              <a:spcPct val="100000"/>
+            </a:lnSpc>
+          </a:pPr>
+          <a:r>
+            <a:rPr lang="sk-SK" sz="1400" dirty="0" err="1"/>
+            <a:t>Exploračná</a:t>
+          </a:r>
+          <a:r>
+            <a:rPr lang="sk-SK" sz="1400" dirty="0"/>
+            <a:t> analýza</a:t>
+          </a:r>
+        </a:p>
+      </dgm:t>
+    </dgm:pt>
+    <dgm:pt modelId="{3666285E-AE42-426B-A018-E0BA7E841619}" type="parTrans" cxnId="{3CB867B9-6F43-4AB6-9530-DB6C5EF59301}">
+      <dgm:prSet/>
+      <dgm:spPr/>
+      <dgm:t>
+        <a:bodyPr/>
+        <a:lstStyle/>
+        <a:p>
+          <a:endParaRPr lang="sk-SK"/>
+        </a:p>
+      </dgm:t>
+    </dgm:pt>
+    <dgm:pt modelId="{80AA56DF-E813-4B21-A7F1-6FEC4A8ABA5B}" type="sibTrans" cxnId="{3CB867B9-6F43-4AB6-9530-DB6C5EF59301}">
+      <dgm:prSet/>
+      <dgm:spPr/>
+      <dgm:t>
+        <a:bodyPr/>
+        <a:lstStyle/>
+        <a:p>
+          <a:endParaRPr lang="sk-SK"/>
+        </a:p>
+      </dgm:t>
+    </dgm:pt>
+    <dgm:pt modelId="{2207399F-F7A9-4246-825E-CB2F59081A8E}">
+      <dgm:prSet phldrT="[Text]" phldr="0" custT="1"/>
+      <dgm:spPr/>
+      <dgm:t>
+        <a:bodyPr/>
+        <a:lstStyle/>
+        <a:p>
+          <a:r>
+            <a:rPr lang="sk-SK" sz="2000" b="1" dirty="0">
+              <a:effectLst>
+                <a:outerShdw blurRad="38100" dist="38100" dir="2700000" algn="tl">
+                  <a:srgbClr val="000000">
+                    <a:alpha val="43137"/>
+                  </a:srgbClr>
+                </a:outerShdw>
+              </a:effectLst>
+            </a:rPr>
+            <a:t>Volatilita</a:t>
+          </a:r>
+        </a:p>
+      </dgm:t>
+    </dgm:pt>
+    <dgm:pt modelId="{0BBDA673-1136-4713-8084-109E95915A75}" type="parTrans" cxnId="{E51FFEC5-0C48-4BFD-9DD2-0E5F0D9F9B63}">
+      <dgm:prSet/>
+      <dgm:spPr/>
+      <dgm:t>
+        <a:bodyPr/>
+        <a:lstStyle/>
+        <a:p>
+          <a:endParaRPr lang="sk-SK"/>
+        </a:p>
+      </dgm:t>
+    </dgm:pt>
+    <dgm:pt modelId="{4151D506-449B-4309-95E1-51332BF9EED7}" type="sibTrans" cxnId="{E51FFEC5-0C48-4BFD-9DD2-0E5F0D9F9B63}">
+      <dgm:prSet/>
+      <dgm:spPr/>
+      <dgm:t>
+        <a:bodyPr/>
+        <a:lstStyle/>
+        <a:p>
+          <a:endParaRPr lang="sk-SK">
+            <a:solidFill>
+              <a:schemeClr val="tx1"/>
+            </a:solidFill>
+          </a:endParaRPr>
+        </a:p>
+      </dgm:t>
+    </dgm:pt>
+    <dgm:pt modelId="{3ED2CA7C-8CF3-4C7D-B586-70BE48490C21}">
+      <dgm:prSet phldrT="[Text]" phldr="0" custT="1"/>
+      <dgm:spPr/>
+      <dgm:t>
+        <a:bodyPr/>
+        <a:lstStyle/>
+        <a:p>
+          <a:pPr>
+            <a:lnSpc>
+              <a:spcPct val="100000"/>
+            </a:lnSpc>
+          </a:pPr>
+          <a:r>
+            <a:rPr lang="sk-SK" sz="1400" dirty="0"/>
+            <a:t>Log výnosy</a:t>
+          </a:r>
+        </a:p>
+      </dgm:t>
+    </dgm:pt>
+    <dgm:pt modelId="{30A02569-3B28-4898-83E1-9F52CF2D5DF7}" type="parTrans" cxnId="{BEB58F67-6203-4934-ACB6-24E5DE29A637}">
+      <dgm:prSet/>
+      <dgm:spPr/>
+      <dgm:t>
+        <a:bodyPr/>
+        <a:lstStyle/>
+        <a:p>
+          <a:endParaRPr lang="sk-SK"/>
+        </a:p>
+      </dgm:t>
+    </dgm:pt>
+    <dgm:pt modelId="{65491649-8A43-4755-8BC5-745B3DE7A686}" type="sibTrans" cxnId="{BEB58F67-6203-4934-ACB6-24E5DE29A637}">
+      <dgm:prSet/>
+      <dgm:spPr/>
+      <dgm:t>
+        <a:bodyPr/>
+        <a:lstStyle/>
+        <a:p>
+          <a:endParaRPr lang="sk-SK"/>
+        </a:p>
+      </dgm:t>
+    </dgm:pt>
+    <dgm:pt modelId="{9979E402-2F88-436A-8282-66EF53786664}">
+      <dgm:prSet phldrT="[Text]" phldr="0" custT="1"/>
+      <dgm:spPr/>
+      <dgm:t>
+        <a:bodyPr/>
+        <a:lstStyle/>
+        <a:p>
+          <a:r>
+            <a:rPr lang="sk-SK" sz="2000" b="1" dirty="0">
+              <a:effectLst>
+                <a:outerShdw blurRad="38100" dist="38100" dir="2700000" algn="tl">
+                  <a:srgbClr val="000000">
+                    <a:alpha val="43137"/>
+                  </a:srgbClr>
+                </a:outerShdw>
+              </a:effectLst>
+            </a:rPr>
+            <a:t>Modely</a:t>
+          </a:r>
+        </a:p>
+      </dgm:t>
+    </dgm:pt>
+    <dgm:pt modelId="{FB82CA8F-FAAE-4338-B42D-411B71A393D0}" type="parTrans" cxnId="{2D59BF9B-C353-4A4E-B246-09D813F235CA}">
+      <dgm:prSet/>
+      <dgm:spPr/>
+      <dgm:t>
+        <a:bodyPr/>
+        <a:lstStyle/>
+        <a:p>
+          <a:endParaRPr lang="sk-SK"/>
+        </a:p>
+      </dgm:t>
+    </dgm:pt>
+    <dgm:pt modelId="{9847EFBA-07E4-4A28-9C1A-E7667B923BB5}" type="sibTrans" cxnId="{2D59BF9B-C353-4A4E-B246-09D813F235CA}">
+      <dgm:prSet/>
+      <dgm:spPr/>
+      <dgm:t>
+        <a:bodyPr/>
+        <a:lstStyle/>
+        <a:p>
+          <a:endParaRPr lang="sk-SK"/>
+        </a:p>
+      </dgm:t>
+    </dgm:pt>
+    <dgm:pt modelId="{5A9B94D9-D4F7-4D1D-B7A5-E4EBAEBE5076}">
+      <dgm:prSet phldrT="[Text]" phldr="0" custT="1"/>
+      <dgm:spPr/>
+      <dgm:t>
+        <a:bodyPr/>
+        <a:lstStyle/>
+        <a:p>
+          <a:pPr>
+            <a:lnSpc>
+              <a:spcPct val="100000"/>
+            </a:lnSpc>
+          </a:pPr>
+          <a:r>
+            <a:rPr lang="sk-SK" sz="1400" dirty="0"/>
+            <a:t>GARCH</a:t>
+          </a:r>
+        </a:p>
+      </dgm:t>
+    </dgm:pt>
+    <dgm:pt modelId="{BAD23372-F2AF-4BF7-A979-8D9FAEE57D3A}" type="parTrans" cxnId="{3E119E09-AE81-48A6-B93C-6FD844523A68}">
+      <dgm:prSet/>
+      <dgm:spPr/>
+      <dgm:t>
+        <a:bodyPr/>
+        <a:lstStyle/>
+        <a:p>
+          <a:endParaRPr lang="sk-SK"/>
+        </a:p>
+      </dgm:t>
+    </dgm:pt>
+    <dgm:pt modelId="{8F05E88D-BAF4-44CE-AB90-79A6305EB9DD}" type="sibTrans" cxnId="{3E119E09-AE81-48A6-B93C-6FD844523A68}">
+      <dgm:prSet/>
+      <dgm:spPr/>
+      <dgm:t>
+        <a:bodyPr/>
+        <a:lstStyle/>
+        <a:p>
+          <a:endParaRPr lang="sk-SK"/>
+        </a:p>
+      </dgm:t>
+    </dgm:pt>
+    <dgm:pt modelId="{4EF5B21F-0522-4B37-85D6-CEB430CCB426}">
+      <dgm:prSet phldrT="[Text]" phldr="0" custT="1"/>
+      <dgm:spPr/>
+      <dgm:t>
+        <a:bodyPr/>
+        <a:lstStyle/>
+        <a:p>
+          <a:r>
+            <a:rPr lang="sk-SK" sz="2000" b="1" dirty="0">
+              <a:effectLst>
+                <a:outerShdw blurRad="38100" dist="38100" dir="2700000" algn="tl">
+                  <a:srgbClr val="000000">
+                    <a:alpha val="43137"/>
+                  </a:srgbClr>
+                </a:outerShdw>
+              </a:effectLst>
+            </a:rPr>
+            <a:t>Validácia</a:t>
+          </a:r>
+        </a:p>
+      </dgm:t>
+    </dgm:pt>
+    <dgm:pt modelId="{06D2B8CE-436D-4AFF-82EB-8E83CF98C990}" type="parTrans" cxnId="{A70050AC-16C3-4796-B1D0-E0E254CCE140}">
+      <dgm:prSet/>
+      <dgm:spPr/>
+      <dgm:t>
+        <a:bodyPr/>
+        <a:lstStyle/>
+        <a:p>
+          <a:endParaRPr lang="sk-SK"/>
+        </a:p>
+      </dgm:t>
+    </dgm:pt>
+    <dgm:pt modelId="{8AE8FF60-82A8-45AF-820F-8DF44D12B158}" type="sibTrans" cxnId="{A70050AC-16C3-4796-B1D0-E0E254CCE140}">
+      <dgm:prSet/>
+      <dgm:spPr/>
+      <dgm:t>
+        <a:bodyPr/>
+        <a:lstStyle/>
+        <a:p>
+          <a:endParaRPr lang="sk-SK"/>
+        </a:p>
+      </dgm:t>
+    </dgm:pt>
+    <dgm:pt modelId="{C29477DB-93CB-41C5-979C-064DF5F4039B}">
+      <dgm:prSet phldrT="[Text]" phldr="0" custT="1"/>
+      <dgm:spPr/>
+      <dgm:t>
+        <a:bodyPr/>
+        <a:lstStyle/>
+        <a:p>
+          <a:r>
+            <a:rPr lang="sk-SK" sz="2000" b="1" dirty="0">
+              <a:effectLst>
+                <a:outerShdw blurRad="38100" dist="38100" dir="2700000" algn="tl">
+                  <a:srgbClr val="000000">
+                    <a:alpha val="43137"/>
+                  </a:srgbClr>
+                </a:outerShdw>
+              </a:effectLst>
+            </a:rPr>
+            <a:t>Výsledky</a:t>
+          </a:r>
+        </a:p>
+      </dgm:t>
+    </dgm:pt>
+    <dgm:pt modelId="{146D272C-43EF-4C36-BDDC-49E2C0F2BD02}" type="parTrans" cxnId="{92BD74CD-A52D-439A-B938-51B066954595}">
+      <dgm:prSet/>
+      <dgm:spPr/>
+      <dgm:t>
+        <a:bodyPr/>
+        <a:lstStyle/>
+        <a:p>
+          <a:endParaRPr lang="sk-SK"/>
+        </a:p>
+      </dgm:t>
+    </dgm:pt>
+    <dgm:pt modelId="{D3BF079C-D04F-4E30-9314-BE8D4456213A}" type="sibTrans" cxnId="{92BD74CD-A52D-439A-B938-51B066954595}">
+      <dgm:prSet/>
+      <dgm:spPr/>
+      <dgm:t>
+        <a:bodyPr/>
+        <a:lstStyle/>
+        <a:p>
+          <a:endParaRPr lang="sk-SK"/>
+        </a:p>
+      </dgm:t>
+    </dgm:pt>
+    <dgm:pt modelId="{39031FE6-9489-43E5-BCCE-9368A5102F41}">
+      <dgm:prSet phldrT="[Text]" phldr="0" custT="1"/>
+      <dgm:spPr/>
+      <dgm:t>
+        <a:bodyPr/>
+        <a:lstStyle/>
+        <a:p>
+          <a:pPr>
+            <a:lnSpc>
+              <a:spcPct val="100000"/>
+            </a:lnSpc>
+          </a:pPr>
+          <a:r>
+            <a:rPr lang="sk-SK" sz="1400" dirty="0"/>
+            <a:t>Časové obdobia</a:t>
+          </a:r>
+        </a:p>
+      </dgm:t>
+    </dgm:pt>
+    <dgm:pt modelId="{8B494894-2007-4090-BB37-185754316FE5}" type="parTrans" cxnId="{CA233CC6-92B2-4A88-BEFC-46B83D41E595}">
+      <dgm:prSet/>
+      <dgm:spPr/>
+      <dgm:t>
+        <a:bodyPr/>
+        <a:lstStyle/>
+        <a:p>
+          <a:endParaRPr lang="sk-SK"/>
+        </a:p>
+      </dgm:t>
+    </dgm:pt>
+    <dgm:pt modelId="{894F75BD-961D-4E6E-8B14-1223A8001890}" type="sibTrans" cxnId="{CA233CC6-92B2-4A88-BEFC-46B83D41E595}">
+      <dgm:prSet/>
+      <dgm:spPr/>
+      <dgm:t>
+        <a:bodyPr/>
+        <a:lstStyle/>
+        <a:p>
+          <a:endParaRPr lang="sk-SK"/>
+        </a:p>
+      </dgm:t>
+    </dgm:pt>
+    <dgm:pt modelId="{73AD1036-9A58-4EFE-A690-768795CB6028}">
+      <dgm:prSet phldrT="[Text]" phldr="0" custT="1"/>
+      <dgm:spPr/>
+      <dgm:t>
+        <a:bodyPr/>
+        <a:lstStyle/>
+        <a:p>
+          <a:pPr>
+            <a:lnSpc>
+              <a:spcPct val="100000"/>
+            </a:lnSpc>
+          </a:pPr>
+          <a:r>
+            <a:rPr lang="sk-SK" sz="1400" dirty="0"/>
+            <a:t>HAR</a:t>
+          </a:r>
+        </a:p>
+      </dgm:t>
+    </dgm:pt>
+    <dgm:pt modelId="{D74B432F-AB74-4B64-BFA2-E32BDA98B222}" type="parTrans" cxnId="{EF930D35-4B86-4E80-85DC-7B6BC7AA9496}">
+      <dgm:prSet/>
+      <dgm:spPr/>
+      <dgm:t>
+        <a:bodyPr/>
+        <a:lstStyle/>
+        <a:p>
+          <a:endParaRPr lang="sk-SK"/>
+        </a:p>
+      </dgm:t>
+    </dgm:pt>
+    <dgm:pt modelId="{408C3476-FF68-4201-93EA-3E782D733A5A}" type="sibTrans" cxnId="{EF930D35-4B86-4E80-85DC-7B6BC7AA9496}">
+      <dgm:prSet/>
+      <dgm:spPr/>
+      <dgm:t>
+        <a:bodyPr/>
+        <a:lstStyle/>
+        <a:p>
+          <a:endParaRPr lang="sk-SK"/>
+        </a:p>
+      </dgm:t>
+    </dgm:pt>
+    <dgm:pt modelId="{59B08BBC-3ABB-47D1-B928-7D3326411A7C}">
+      <dgm:prSet custT="1"/>
+      <dgm:spPr/>
+      <dgm:t>
+        <a:bodyPr/>
+        <a:lstStyle/>
+        <a:p>
+          <a:pPr>
+            <a:lnSpc>
+              <a:spcPct val="100000"/>
+            </a:lnSpc>
+          </a:pPr>
+          <a:r>
+            <a:rPr lang="sk-SK" sz="1400" dirty="0"/>
+            <a:t>Vzory volatility</a:t>
+          </a:r>
+        </a:p>
+      </dgm:t>
+    </dgm:pt>
+    <dgm:pt modelId="{2C89C11F-FB48-4895-93A6-508BD31F9034}" type="parTrans" cxnId="{BEB0FA00-7C37-44D2-B600-06F603EFB63E}">
+      <dgm:prSet/>
+      <dgm:spPr/>
+      <dgm:t>
+        <a:bodyPr/>
+        <a:lstStyle/>
+        <a:p>
+          <a:endParaRPr lang="sk-SK"/>
+        </a:p>
+      </dgm:t>
+    </dgm:pt>
+    <dgm:pt modelId="{9AFCCB99-882E-467A-B078-5718C2E7C25F}" type="sibTrans" cxnId="{BEB0FA00-7C37-44D2-B600-06F603EFB63E}">
+      <dgm:prSet/>
+      <dgm:spPr/>
+      <dgm:t>
+        <a:bodyPr/>
+        <a:lstStyle/>
+        <a:p>
+          <a:endParaRPr lang="sk-SK"/>
+        </a:p>
+      </dgm:t>
+    </dgm:pt>
+    <dgm:pt modelId="{DE3AD505-65C0-49B0-BBA3-107F8FE3DB83}">
+      <dgm:prSet custT="1"/>
+      <dgm:spPr/>
+      <dgm:t>
+        <a:bodyPr/>
+        <a:lstStyle/>
+        <a:p>
+          <a:pPr>
+            <a:lnSpc>
+              <a:spcPct val="100000"/>
+            </a:lnSpc>
+          </a:pPr>
+          <a:r>
+            <a:rPr lang="sk-SK" sz="1400" dirty="0"/>
+            <a:t>RMSE, QLIKE</a:t>
+          </a:r>
+        </a:p>
+      </dgm:t>
+    </dgm:pt>
+    <dgm:pt modelId="{3FB8894D-9D06-4462-954B-2CE4DB8E1B44}" type="parTrans" cxnId="{83FA1876-1988-4AA7-8772-424EBC865BEE}">
+      <dgm:prSet/>
+      <dgm:spPr/>
+      <dgm:t>
+        <a:bodyPr/>
+        <a:lstStyle/>
+        <a:p>
+          <a:endParaRPr lang="sk-SK"/>
+        </a:p>
+      </dgm:t>
+    </dgm:pt>
+    <dgm:pt modelId="{A4CBCBDC-32A9-4FEC-88AF-47A54C5CE209}" type="sibTrans" cxnId="{83FA1876-1988-4AA7-8772-424EBC865BEE}">
+      <dgm:prSet/>
+      <dgm:spPr/>
+      <dgm:t>
+        <a:bodyPr/>
+        <a:lstStyle/>
+        <a:p>
+          <a:endParaRPr lang="sk-SK"/>
+        </a:p>
+      </dgm:t>
+    </dgm:pt>
+    <dgm:pt modelId="{A3A0FADB-9E1C-46FA-9954-1A7B414B35B9}">
+      <dgm:prSet custT="1"/>
+      <dgm:spPr/>
+      <dgm:t>
+        <a:bodyPr/>
+        <a:lstStyle/>
+        <a:p>
+          <a:pPr>
+            <a:lnSpc>
+              <a:spcPct val="100000"/>
+            </a:lnSpc>
+          </a:pPr>
+          <a:r>
+            <a:rPr lang="sk-SK" sz="1400" dirty="0" err="1"/>
+            <a:t>Rolling-Window</a:t>
+          </a:r>
+          <a:endParaRPr lang="sk-SK" sz="1400" dirty="0"/>
+        </a:p>
+      </dgm:t>
+    </dgm:pt>
+    <dgm:pt modelId="{38FAC2C9-419E-4EF5-879C-35B6091251F6}" type="parTrans" cxnId="{47FFA8C6-5991-4EDA-8402-967CDCF06D51}">
+      <dgm:prSet/>
+      <dgm:spPr/>
+      <dgm:t>
+        <a:bodyPr/>
+        <a:lstStyle/>
+        <a:p>
+          <a:endParaRPr lang="sk-SK"/>
+        </a:p>
+      </dgm:t>
+    </dgm:pt>
+    <dgm:pt modelId="{F5341326-D575-46DC-A6B0-BD344AD6EE25}" type="sibTrans" cxnId="{47FFA8C6-5991-4EDA-8402-967CDCF06D51}">
+      <dgm:prSet/>
+      <dgm:spPr/>
+      <dgm:t>
+        <a:bodyPr/>
+        <a:lstStyle/>
+        <a:p>
+          <a:endParaRPr lang="sk-SK"/>
+        </a:p>
+      </dgm:t>
+    </dgm:pt>
+    <dgm:pt modelId="{9AACA625-023E-4357-97C3-04906BC41DD8}">
+      <dgm:prSet custT="1"/>
+      <dgm:spPr/>
+      <dgm:t>
+        <a:bodyPr/>
+        <a:lstStyle/>
+        <a:p>
+          <a:pPr>
+            <a:lnSpc>
+              <a:spcPct val="100000"/>
+            </a:lnSpc>
+          </a:pPr>
+          <a:r>
+            <a:rPr lang="sk-SK" sz="1400" dirty="0"/>
+            <a:t>Komparácia trhov a modelov</a:t>
+          </a:r>
+        </a:p>
+      </dgm:t>
+    </dgm:pt>
+    <dgm:pt modelId="{0AB24F2C-DCB6-41E0-8CF4-8B7B503E0D35}" type="parTrans" cxnId="{23328F69-7A3A-4E22-9E08-42F9C489C67F}">
+      <dgm:prSet/>
+      <dgm:spPr/>
+      <dgm:t>
+        <a:bodyPr/>
+        <a:lstStyle/>
+        <a:p>
+          <a:endParaRPr lang="sk-SK"/>
+        </a:p>
+      </dgm:t>
+    </dgm:pt>
+    <dgm:pt modelId="{9615B57A-14EC-4E34-ACAE-C271D4D87DE9}" type="sibTrans" cxnId="{23328F69-7A3A-4E22-9E08-42F9C489C67F}">
+      <dgm:prSet/>
+      <dgm:spPr/>
+      <dgm:t>
+        <a:bodyPr/>
+        <a:lstStyle/>
+        <a:p>
+          <a:endParaRPr lang="sk-SK"/>
+        </a:p>
+      </dgm:t>
+    </dgm:pt>
+    <dgm:pt modelId="{FBC92019-F9D6-44C7-8FEB-8E1D787D9847}">
+      <dgm:prSet phldrT="[Text]" phldr="0" custT="1"/>
+      <dgm:spPr/>
+      <dgm:t>
+        <a:bodyPr/>
+        <a:lstStyle/>
+        <a:p>
+          <a:pPr>
+            <a:lnSpc>
+              <a:spcPct val="100000"/>
+            </a:lnSpc>
+          </a:pPr>
+          <a:r>
+            <a:rPr lang="sk-SK" sz="1400" dirty="0"/>
+            <a:t>Volatilita</a:t>
+          </a:r>
+        </a:p>
+      </dgm:t>
+    </dgm:pt>
+    <dgm:pt modelId="{5EAB6389-7D50-4C94-99A4-37938FFC0698}" type="parTrans" cxnId="{92279661-C1E7-4D1F-9157-1BD84C41BF85}">
+      <dgm:prSet/>
+      <dgm:spPr/>
+      <dgm:t>
+        <a:bodyPr/>
+        <a:lstStyle/>
+        <a:p>
+          <a:endParaRPr lang="sk-SK"/>
+        </a:p>
+      </dgm:t>
+    </dgm:pt>
+    <dgm:pt modelId="{EE1255BA-5F89-4775-9AE5-613A99589471}" type="sibTrans" cxnId="{92279661-C1E7-4D1F-9157-1BD84C41BF85}">
+      <dgm:prSet/>
+      <dgm:spPr/>
+      <dgm:t>
+        <a:bodyPr/>
+        <a:lstStyle/>
+        <a:p>
+          <a:endParaRPr lang="sk-SK"/>
+        </a:p>
+      </dgm:t>
+    </dgm:pt>
+    <dgm:pt modelId="{609221ED-82FD-45D9-955E-69D98C9F9837}">
+      <dgm:prSet phldrT="[Text]" phldr="0" custT="1"/>
+      <dgm:spPr/>
+      <dgm:t>
+        <a:bodyPr/>
+        <a:lstStyle/>
+        <a:p>
+          <a:pPr>
+            <a:lnSpc>
+              <a:spcPct val="100000"/>
+            </a:lnSpc>
+          </a:pPr>
+          <a:r>
+            <a:rPr lang="sk-SK" sz="1400" dirty="0" err="1"/>
+            <a:t>XGBoost</a:t>
+          </a:r>
+          <a:endParaRPr lang="sk-SK" sz="1400" dirty="0"/>
+        </a:p>
+      </dgm:t>
+    </dgm:pt>
+    <dgm:pt modelId="{BC69F0BB-FCAC-4C59-BC95-502914E9680A}" type="parTrans" cxnId="{D0AFD104-1A21-452A-888C-07DCF849C062}">
+      <dgm:prSet/>
+      <dgm:spPr/>
+      <dgm:t>
+        <a:bodyPr/>
+        <a:lstStyle/>
+        <a:p>
+          <a:endParaRPr lang="sk-SK"/>
+        </a:p>
+      </dgm:t>
+    </dgm:pt>
+    <dgm:pt modelId="{55DEE8FD-EB0C-48ED-A831-58C09E216282}" type="sibTrans" cxnId="{D0AFD104-1A21-452A-888C-07DCF849C062}">
+      <dgm:prSet/>
+      <dgm:spPr/>
+      <dgm:t>
+        <a:bodyPr/>
+        <a:lstStyle/>
+        <a:p>
+          <a:endParaRPr lang="sk-SK"/>
+        </a:p>
+      </dgm:t>
+    </dgm:pt>
+    <dgm:pt modelId="{1B2331C3-4ED8-496E-B08D-D0298EC66B33}">
+      <dgm:prSet phldrT="[Text]" phldr="0" custT="1"/>
+      <dgm:spPr/>
+      <dgm:t>
+        <a:bodyPr/>
+        <a:lstStyle/>
+        <a:p>
+          <a:pPr>
+            <a:lnSpc>
+              <a:spcPct val="100000"/>
+            </a:lnSpc>
+          </a:pPr>
+          <a:r>
+            <a:rPr lang="sk-SK" sz="1400" dirty="0"/>
+            <a:t>LSTM</a:t>
+          </a:r>
+        </a:p>
+      </dgm:t>
+    </dgm:pt>
+    <dgm:pt modelId="{AC82ECB6-EA97-4655-832A-F7DBD845A327}" type="parTrans" cxnId="{485B4FA8-4B7A-41EE-805A-0A7F9B58C05F}">
+      <dgm:prSet/>
+      <dgm:spPr/>
+      <dgm:t>
+        <a:bodyPr/>
+        <a:lstStyle/>
+        <a:p>
+          <a:endParaRPr lang="sk-SK"/>
+        </a:p>
+      </dgm:t>
+    </dgm:pt>
+    <dgm:pt modelId="{DF074269-6B53-4585-A81D-788C397101BD}" type="sibTrans" cxnId="{485B4FA8-4B7A-41EE-805A-0A7F9B58C05F}">
+      <dgm:prSet/>
+      <dgm:spPr/>
+      <dgm:t>
+        <a:bodyPr/>
+        <a:lstStyle/>
+        <a:p>
+          <a:endParaRPr lang="sk-SK"/>
+        </a:p>
+      </dgm:t>
+    </dgm:pt>
+    <dgm:pt modelId="{0988CE5C-27CF-4DBE-A10F-ED07BCA1B13B}" type="pres">
+      <dgm:prSet presAssocID="{B665338B-645B-41AE-983D-65FFD2CDBEFF}" presName="Name0" presStyleCnt="0">
+        <dgm:presLayoutVars>
+          <dgm:dir/>
+          <dgm:animLvl val="lvl"/>
+          <dgm:resizeHandles val="exact"/>
+        </dgm:presLayoutVars>
+      </dgm:prSet>
+      <dgm:spPr/>
+    </dgm:pt>
+    <dgm:pt modelId="{3B42B861-20D8-4D43-90F3-4BC0C7641FEA}" type="pres">
+      <dgm:prSet presAssocID="{B665338B-645B-41AE-983D-65FFD2CDBEFF}" presName="tSp" presStyleCnt="0"/>
+      <dgm:spPr/>
+    </dgm:pt>
+    <dgm:pt modelId="{130535EF-3ED6-4707-8CDF-434B62E24FB2}" type="pres">
+      <dgm:prSet presAssocID="{B665338B-645B-41AE-983D-65FFD2CDBEFF}" presName="bSp" presStyleCnt="0"/>
+      <dgm:spPr/>
+    </dgm:pt>
+    <dgm:pt modelId="{1B16AE6F-9C06-44DE-B7B3-443002962661}" type="pres">
+      <dgm:prSet presAssocID="{B665338B-645B-41AE-983D-65FFD2CDBEFF}" presName="process" presStyleCnt="0"/>
+      <dgm:spPr/>
+    </dgm:pt>
+    <dgm:pt modelId="{47783FFD-6B7A-4B16-8B2D-C7BCF1A62BEB}" type="pres">
+      <dgm:prSet presAssocID="{D6FB274B-FC90-4E83-AEF4-3C4FAD353500}" presName="composite1" presStyleCnt="0"/>
+      <dgm:spPr/>
+    </dgm:pt>
+    <dgm:pt modelId="{DA10E415-6204-420F-80BD-B31B53E13273}" type="pres">
+      <dgm:prSet presAssocID="{D6FB274B-FC90-4E83-AEF4-3C4FAD353500}" presName="dummyNode1" presStyleLbl="node1" presStyleIdx="0" presStyleCnt="5"/>
+      <dgm:spPr/>
+    </dgm:pt>
+    <dgm:pt modelId="{7B6A1E41-DCFE-4AC5-8D88-041D7A647606}" type="pres">
+      <dgm:prSet presAssocID="{D6FB274B-FC90-4E83-AEF4-3C4FAD353500}" presName="childNode1" presStyleLbl="bgAcc1" presStyleIdx="0" presStyleCnt="5">
+        <dgm:presLayoutVars>
+          <dgm:bulletEnabled val="1"/>
+        </dgm:presLayoutVars>
+      </dgm:prSet>
+      <dgm:spPr/>
+    </dgm:pt>
+    <dgm:pt modelId="{B6E2E50B-E13E-4164-8844-C48D2241F28F}" type="pres">
+      <dgm:prSet presAssocID="{D6FB274B-FC90-4E83-AEF4-3C4FAD353500}" presName="childNode1tx" presStyleLbl="bgAcc1" presStyleIdx="0" presStyleCnt="5">
+        <dgm:presLayoutVars>
+          <dgm:bulletEnabled val="1"/>
+        </dgm:presLayoutVars>
+      </dgm:prSet>
+      <dgm:spPr/>
+    </dgm:pt>
+    <dgm:pt modelId="{B490D780-DC4A-4D63-9BE5-4D77B5D5EE7D}" type="pres">
+      <dgm:prSet presAssocID="{D6FB274B-FC90-4E83-AEF4-3C4FAD353500}" presName="parentNode1" presStyleLbl="node1" presStyleIdx="0" presStyleCnt="5">
+        <dgm:presLayoutVars>
+          <dgm:chMax val="1"/>
+          <dgm:bulletEnabled val="1"/>
+        </dgm:presLayoutVars>
+      </dgm:prSet>
+      <dgm:spPr/>
+    </dgm:pt>
+    <dgm:pt modelId="{87DD02B4-7C99-44ED-82C9-CCF60F0E4156}" type="pres">
+      <dgm:prSet presAssocID="{D6FB274B-FC90-4E83-AEF4-3C4FAD353500}" presName="connSite1" presStyleCnt="0"/>
+      <dgm:spPr/>
+    </dgm:pt>
+    <dgm:pt modelId="{850FA6B7-9A4F-4AA5-BDED-68AE9D7593C5}" type="pres">
+      <dgm:prSet presAssocID="{8B704CD4-C4A3-4CA8-9E6D-3F5A58FB5A6E}" presName="Name9" presStyleLbl="sibTrans2D1" presStyleIdx="0" presStyleCnt="4" custLinFactNeighborX="-3189" custLinFactNeighborY="-12755"/>
+      <dgm:spPr/>
+    </dgm:pt>
+    <dgm:pt modelId="{0328E4F2-55DB-49EF-9802-C730AABD0081}" type="pres">
+      <dgm:prSet presAssocID="{2207399F-F7A9-4246-825E-CB2F59081A8E}" presName="composite2" presStyleCnt="0"/>
+      <dgm:spPr/>
+    </dgm:pt>
+    <dgm:pt modelId="{AD0988AB-4656-45BA-92AB-034657C4B796}" type="pres">
+      <dgm:prSet presAssocID="{2207399F-F7A9-4246-825E-CB2F59081A8E}" presName="dummyNode2" presStyleLbl="node1" presStyleIdx="0" presStyleCnt="5"/>
+      <dgm:spPr/>
+    </dgm:pt>
+    <dgm:pt modelId="{46A5BD50-A357-43EB-900E-7628F4E860EB}" type="pres">
+      <dgm:prSet presAssocID="{2207399F-F7A9-4246-825E-CB2F59081A8E}" presName="childNode2" presStyleLbl="bgAcc1" presStyleIdx="1" presStyleCnt="5">
+        <dgm:presLayoutVars>
+          <dgm:bulletEnabled val="1"/>
+        </dgm:presLayoutVars>
+      </dgm:prSet>
+      <dgm:spPr/>
+    </dgm:pt>
+    <dgm:pt modelId="{0F7E9FD4-6D4A-4F6B-86E7-3179B41C32BE}" type="pres">
+      <dgm:prSet presAssocID="{2207399F-F7A9-4246-825E-CB2F59081A8E}" presName="childNode2tx" presStyleLbl="bgAcc1" presStyleIdx="1" presStyleCnt="5">
+        <dgm:presLayoutVars>
+          <dgm:bulletEnabled val="1"/>
+        </dgm:presLayoutVars>
+      </dgm:prSet>
+      <dgm:spPr/>
+    </dgm:pt>
+    <dgm:pt modelId="{DDA911AB-DE02-438A-8E06-1357C3CEF326}" type="pres">
+      <dgm:prSet presAssocID="{2207399F-F7A9-4246-825E-CB2F59081A8E}" presName="parentNode2" presStyleLbl="node1" presStyleIdx="1" presStyleCnt="5">
+        <dgm:presLayoutVars>
+          <dgm:chMax val="0"/>
+          <dgm:bulletEnabled val="1"/>
+        </dgm:presLayoutVars>
+      </dgm:prSet>
+      <dgm:spPr/>
+    </dgm:pt>
+    <dgm:pt modelId="{7804C83F-F9D9-4951-9D31-12A35D659178}" type="pres">
+      <dgm:prSet presAssocID="{2207399F-F7A9-4246-825E-CB2F59081A8E}" presName="connSite2" presStyleCnt="0"/>
+      <dgm:spPr/>
+    </dgm:pt>
+    <dgm:pt modelId="{DB00C555-2EA1-4D87-A59D-2B8C4B0D5343}" type="pres">
+      <dgm:prSet presAssocID="{4151D506-449B-4309-95E1-51332BF9EED7}" presName="Name18" presStyleLbl="sibTrans2D1" presStyleIdx="1" presStyleCnt="4" custLinFactNeighborX="-2841" custLinFactNeighborY="11000"/>
+      <dgm:spPr/>
+    </dgm:pt>
+    <dgm:pt modelId="{2117CB8B-B23D-45D5-9E33-38B69A7745CD}" type="pres">
+      <dgm:prSet presAssocID="{9979E402-2F88-436A-8282-66EF53786664}" presName="composite1" presStyleCnt="0"/>
+      <dgm:spPr/>
+    </dgm:pt>
+    <dgm:pt modelId="{C0FF3479-16E6-49BC-A8B8-4C9F990843A7}" type="pres">
+      <dgm:prSet presAssocID="{9979E402-2F88-436A-8282-66EF53786664}" presName="dummyNode1" presStyleLbl="node1" presStyleIdx="1" presStyleCnt="5"/>
+      <dgm:spPr/>
+    </dgm:pt>
+    <dgm:pt modelId="{F19BD381-30C3-4201-B50A-E41684C9478F}" type="pres">
+      <dgm:prSet presAssocID="{9979E402-2F88-436A-8282-66EF53786664}" presName="childNode1" presStyleLbl="bgAcc1" presStyleIdx="2" presStyleCnt="5">
+        <dgm:presLayoutVars>
+          <dgm:bulletEnabled val="1"/>
+        </dgm:presLayoutVars>
+      </dgm:prSet>
+      <dgm:spPr/>
+    </dgm:pt>
+    <dgm:pt modelId="{2B0884EC-019C-489D-80AA-7566A7966A30}" type="pres">
+      <dgm:prSet presAssocID="{9979E402-2F88-436A-8282-66EF53786664}" presName="childNode1tx" presStyleLbl="bgAcc1" presStyleIdx="2" presStyleCnt="5">
+        <dgm:presLayoutVars>
+          <dgm:bulletEnabled val="1"/>
+        </dgm:presLayoutVars>
+      </dgm:prSet>
+      <dgm:spPr/>
+    </dgm:pt>
+    <dgm:pt modelId="{E878FD4D-12B7-458B-BC0F-B75BEB791108}" type="pres">
+      <dgm:prSet presAssocID="{9979E402-2F88-436A-8282-66EF53786664}" presName="parentNode1" presStyleLbl="node1" presStyleIdx="2" presStyleCnt="5">
+        <dgm:presLayoutVars>
+          <dgm:chMax val="1"/>
+          <dgm:bulletEnabled val="1"/>
+        </dgm:presLayoutVars>
+      </dgm:prSet>
+      <dgm:spPr/>
+    </dgm:pt>
+    <dgm:pt modelId="{027CC7A2-E7F3-4B8D-9476-6FC0FC0D42B5}" type="pres">
+      <dgm:prSet presAssocID="{9979E402-2F88-436A-8282-66EF53786664}" presName="connSite1" presStyleCnt="0"/>
+      <dgm:spPr/>
+    </dgm:pt>
+    <dgm:pt modelId="{1578868B-2CAF-4820-BE2E-8D12F7F7A919}" type="pres">
+      <dgm:prSet presAssocID="{9847EFBA-07E4-4A28-9C1A-E7667B923BB5}" presName="Name9" presStyleLbl="sibTrans2D1" presStyleIdx="2" presStyleCnt="4" custLinFactNeighborX="-4347" custLinFactNeighborY="-11388"/>
+      <dgm:spPr/>
+    </dgm:pt>
+    <dgm:pt modelId="{578FD416-01AF-4BF7-8392-ADA912499F29}" type="pres">
+      <dgm:prSet presAssocID="{4EF5B21F-0522-4B37-85D6-CEB430CCB426}" presName="composite2" presStyleCnt="0"/>
+      <dgm:spPr/>
+    </dgm:pt>
+    <dgm:pt modelId="{7E780BE3-10E5-46D1-8004-1C601ECFD3D8}" type="pres">
+      <dgm:prSet presAssocID="{4EF5B21F-0522-4B37-85D6-CEB430CCB426}" presName="dummyNode2" presStyleLbl="node1" presStyleIdx="2" presStyleCnt="5"/>
+      <dgm:spPr/>
+    </dgm:pt>
+    <dgm:pt modelId="{F05C07F2-711F-4DDA-BF5D-F2D18D771FE6}" type="pres">
+      <dgm:prSet presAssocID="{4EF5B21F-0522-4B37-85D6-CEB430CCB426}" presName="childNode2" presStyleLbl="bgAcc1" presStyleIdx="3" presStyleCnt="5">
+        <dgm:presLayoutVars>
+          <dgm:bulletEnabled val="1"/>
+        </dgm:presLayoutVars>
+      </dgm:prSet>
+      <dgm:spPr/>
+    </dgm:pt>
+    <dgm:pt modelId="{D401E58F-260B-48C4-8ED1-6DB73FD4E661}" type="pres">
+      <dgm:prSet presAssocID="{4EF5B21F-0522-4B37-85D6-CEB430CCB426}" presName="childNode2tx" presStyleLbl="bgAcc1" presStyleIdx="3" presStyleCnt="5">
+        <dgm:presLayoutVars>
+          <dgm:bulletEnabled val="1"/>
+        </dgm:presLayoutVars>
+      </dgm:prSet>
+      <dgm:spPr/>
+    </dgm:pt>
+    <dgm:pt modelId="{3EA60A08-F209-4DFD-A8C0-33D58C80F67D}" type="pres">
+      <dgm:prSet presAssocID="{4EF5B21F-0522-4B37-85D6-CEB430CCB426}" presName="parentNode2" presStyleLbl="node1" presStyleIdx="3" presStyleCnt="5">
+        <dgm:presLayoutVars>
+          <dgm:chMax val="0"/>
+          <dgm:bulletEnabled val="1"/>
+        </dgm:presLayoutVars>
+      </dgm:prSet>
+      <dgm:spPr/>
+    </dgm:pt>
+    <dgm:pt modelId="{7817C187-EDC9-4BDB-8E07-5816A8486ADC}" type="pres">
+      <dgm:prSet presAssocID="{4EF5B21F-0522-4B37-85D6-CEB430CCB426}" presName="connSite2" presStyleCnt="0"/>
+      <dgm:spPr/>
+    </dgm:pt>
+    <dgm:pt modelId="{6D128CA8-FD42-4C08-9436-4EB380FD44D3}" type="pres">
+      <dgm:prSet presAssocID="{8AE8FF60-82A8-45AF-820F-8DF44D12B158}" presName="Name18" presStyleLbl="sibTrans2D1" presStyleIdx="3" presStyleCnt="4" custLinFactNeighborY="11000"/>
+      <dgm:spPr/>
+    </dgm:pt>
+    <dgm:pt modelId="{838A943B-5AF7-470A-AED0-8ACF9C66754C}" type="pres">
+      <dgm:prSet presAssocID="{C29477DB-93CB-41C5-979C-064DF5F4039B}" presName="composite1" presStyleCnt="0"/>
+      <dgm:spPr/>
+    </dgm:pt>
+    <dgm:pt modelId="{30F6E697-57B1-4870-BFC9-533B32FBD49C}" type="pres">
+      <dgm:prSet presAssocID="{C29477DB-93CB-41C5-979C-064DF5F4039B}" presName="dummyNode1" presStyleLbl="node1" presStyleIdx="3" presStyleCnt="5"/>
+      <dgm:spPr/>
+    </dgm:pt>
+    <dgm:pt modelId="{ADB04D02-A97C-4659-BAB1-BFD732875B6F}" type="pres">
+      <dgm:prSet presAssocID="{C29477DB-93CB-41C5-979C-064DF5F4039B}" presName="childNode1" presStyleLbl="bgAcc1" presStyleIdx="4" presStyleCnt="5">
+        <dgm:presLayoutVars>
+          <dgm:bulletEnabled val="1"/>
+        </dgm:presLayoutVars>
+      </dgm:prSet>
+      <dgm:spPr/>
+    </dgm:pt>
+    <dgm:pt modelId="{7AE20833-C756-4510-9EF0-F24DE50F50DA}" type="pres">
+      <dgm:prSet presAssocID="{C29477DB-93CB-41C5-979C-064DF5F4039B}" presName="childNode1tx" presStyleLbl="bgAcc1" presStyleIdx="4" presStyleCnt="5">
+        <dgm:presLayoutVars>
+          <dgm:bulletEnabled val="1"/>
+        </dgm:presLayoutVars>
+      </dgm:prSet>
+      <dgm:spPr/>
+    </dgm:pt>
+    <dgm:pt modelId="{6B4282B9-062B-41C5-898A-A66339751090}" type="pres">
+      <dgm:prSet presAssocID="{C29477DB-93CB-41C5-979C-064DF5F4039B}" presName="parentNode1" presStyleLbl="node1" presStyleIdx="4" presStyleCnt="5">
+        <dgm:presLayoutVars>
+          <dgm:chMax val="1"/>
+          <dgm:bulletEnabled val="1"/>
+        </dgm:presLayoutVars>
+      </dgm:prSet>
+      <dgm:spPr/>
+    </dgm:pt>
+    <dgm:pt modelId="{04B1D9E8-A2BC-4D6C-9BD0-5020C9F200A9}" type="pres">
+      <dgm:prSet presAssocID="{C29477DB-93CB-41C5-979C-064DF5F4039B}" presName="connSite1" presStyleCnt="0"/>
+      <dgm:spPr/>
+    </dgm:pt>
+  </dgm:ptLst>
+  <dgm:cxnLst>
+    <dgm:cxn modelId="{BEB0FA00-7C37-44D2-B600-06F603EFB63E}" srcId="{C29477DB-93CB-41C5-979C-064DF5F4039B}" destId="{59B08BBC-3ABB-47D1-B928-7D3326411A7C}" srcOrd="0" destOrd="0" parTransId="{2C89C11F-FB48-4895-93A6-508BD31F9034}" sibTransId="{9AFCCB99-882E-467A-B078-5718C2E7C25F}"/>
+    <dgm:cxn modelId="{D0AFD104-1A21-452A-888C-07DCF849C062}" srcId="{9979E402-2F88-436A-8282-66EF53786664}" destId="{609221ED-82FD-45D9-955E-69D98C9F9837}" srcOrd="2" destOrd="0" parTransId="{BC69F0BB-FCAC-4C59-BC95-502914E9680A}" sibTransId="{55DEE8FD-EB0C-48ED-A831-58C09E216282}"/>
+    <dgm:cxn modelId="{3E119E09-AE81-48A6-B93C-6FD844523A68}" srcId="{9979E402-2F88-436A-8282-66EF53786664}" destId="{5A9B94D9-D4F7-4D1D-B7A5-E4EBAEBE5076}" srcOrd="0" destOrd="0" parTransId="{BAD23372-F2AF-4BF7-A979-8D9FAEE57D3A}" sibTransId="{8F05E88D-BAF4-44CE-AB90-79A6305EB9DD}"/>
+    <dgm:cxn modelId="{151BC30B-6B5C-4B5A-B48B-FB1C2DD6E0D0}" type="presOf" srcId="{8AE8FF60-82A8-45AF-820F-8DF44D12B158}" destId="{6D128CA8-FD42-4C08-9436-4EB380FD44D3}" srcOrd="0" destOrd="0" presId="urn:microsoft.com/office/officeart/2005/8/layout/hProcess4"/>
+    <dgm:cxn modelId="{59015219-8354-4625-9EE6-748DEB87B1BC}" type="presOf" srcId="{2207399F-F7A9-4246-825E-CB2F59081A8E}" destId="{DDA911AB-DE02-438A-8E06-1357C3CEF326}" srcOrd="0" destOrd="0" presId="urn:microsoft.com/office/officeart/2005/8/layout/hProcess4"/>
+    <dgm:cxn modelId="{77918120-EC1A-4440-B0B7-2F969F15DD73}" type="presOf" srcId="{9AACA625-023E-4357-97C3-04906BC41DD8}" destId="{7AE20833-C756-4510-9EF0-F24DE50F50DA}" srcOrd="1" destOrd="1" presId="urn:microsoft.com/office/officeart/2005/8/layout/hProcess4"/>
+    <dgm:cxn modelId="{1A5E9831-AA81-46C6-A3CF-EE502DBFA388}" srcId="{D6FB274B-FC90-4E83-AEF4-3C4FAD353500}" destId="{8D030EC8-A772-4D56-8F07-0AE23381547A}" srcOrd="0" destOrd="0" parTransId="{56A50F41-90CC-4204-BD46-5BCD743A617F}" sibTransId="{DFF0C2CB-6DE0-4245-BB0D-46B347A9190B}"/>
+    <dgm:cxn modelId="{EF930D35-4B86-4E80-85DC-7B6BC7AA9496}" srcId="{9979E402-2F88-436A-8282-66EF53786664}" destId="{73AD1036-9A58-4EFE-A690-768795CB6028}" srcOrd="1" destOrd="0" parTransId="{D74B432F-AB74-4B64-BFA2-E32BDA98B222}" sibTransId="{408C3476-FF68-4201-93EA-3E782D733A5A}"/>
+    <dgm:cxn modelId="{5EA18F3F-8C95-4516-A78B-E998C72E980A}" type="presOf" srcId="{59B08BBC-3ABB-47D1-B928-7D3326411A7C}" destId="{ADB04D02-A97C-4659-BAB1-BFD732875B6F}" srcOrd="0" destOrd="0" presId="urn:microsoft.com/office/officeart/2005/8/layout/hProcess4"/>
+    <dgm:cxn modelId="{2F37565F-A296-488B-93B3-B1A833772821}" type="presOf" srcId="{5A9B94D9-D4F7-4D1D-B7A5-E4EBAEBE5076}" destId="{F19BD381-30C3-4201-B50A-E41684C9478F}" srcOrd="0" destOrd="0" presId="urn:microsoft.com/office/officeart/2005/8/layout/hProcess4"/>
+    <dgm:cxn modelId="{92279661-C1E7-4D1F-9157-1BD84C41BF85}" srcId="{2207399F-F7A9-4246-825E-CB2F59081A8E}" destId="{FBC92019-F9D6-44C7-8FEB-8E1D787D9847}" srcOrd="1" destOrd="0" parTransId="{5EAB6389-7D50-4C94-99A4-37938FFC0698}" sibTransId="{EE1255BA-5F89-4775-9AE5-613A99589471}"/>
+    <dgm:cxn modelId="{BEB58F67-6203-4934-ACB6-24E5DE29A637}" srcId="{2207399F-F7A9-4246-825E-CB2F59081A8E}" destId="{3ED2CA7C-8CF3-4C7D-B586-70BE48490C21}" srcOrd="0" destOrd="0" parTransId="{30A02569-3B28-4898-83E1-9F52CF2D5DF7}" sibTransId="{65491649-8A43-4755-8BC5-745B3DE7A686}"/>
+    <dgm:cxn modelId="{23328F69-7A3A-4E22-9E08-42F9C489C67F}" srcId="{C29477DB-93CB-41C5-979C-064DF5F4039B}" destId="{9AACA625-023E-4357-97C3-04906BC41DD8}" srcOrd="1" destOrd="0" parTransId="{0AB24F2C-DCB6-41E0-8CF4-8B7B503E0D35}" sibTransId="{9615B57A-14EC-4E34-ACAE-C271D4D87DE9}"/>
+    <dgm:cxn modelId="{DB8EAE6C-7106-45F1-BF84-82255282170A}" type="presOf" srcId="{1B2331C3-4ED8-496E-B08D-D0298EC66B33}" destId="{F19BD381-30C3-4201-B50A-E41684C9478F}" srcOrd="0" destOrd="3" presId="urn:microsoft.com/office/officeart/2005/8/layout/hProcess4"/>
+    <dgm:cxn modelId="{3927694D-90AE-46FA-B247-C29555D5FA75}" type="presOf" srcId="{A3A0FADB-9E1C-46FA-9954-1A7B414B35B9}" destId="{F05C07F2-711F-4DDA-BF5D-F2D18D771FE6}" srcOrd="0" destOrd="1" presId="urn:microsoft.com/office/officeart/2005/8/layout/hProcess4"/>
+    <dgm:cxn modelId="{51C7ED4E-AB7A-423F-9E83-8D36008285A4}" type="presOf" srcId="{8D030EC8-A772-4D56-8F07-0AE23381547A}" destId="{B6E2E50B-E13E-4164-8844-C48D2241F28F}" srcOrd="1" destOrd="0" presId="urn:microsoft.com/office/officeart/2005/8/layout/hProcess4"/>
+    <dgm:cxn modelId="{8583DF4F-4093-4EB7-BC34-9DEF845ECFD0}" type="presOf" srcId="{0B006AC3-28C8-4288-AFED-91FA3D0A00F9}" destId="{7B6A1E41-DCFE-4AC5-8D88-041D7A647606}" srcOrd="0" destOrd="1" presId="urn:microsoft.com/office/officeart/2005/8/layout/hProcess4"/>
+    <dgm:cxn modelId="{E434B475-7EA1-44D2-8B1A-F82B4C50954D}" type="presOf" srcId="{9979E402-2F88-436A-8282-66EF53786664}" destId="{E878FD4D-12B7-458B-BC0F-B75BEB791108}" srcOrd="0" destOrd="0" presId="urn:microsoft.com/office/officeart/2005/8/layout/hProcess4"/>
+    <dgm:cxn modelId="{83FA1876-1988-4AA7-8772-424EBC865BEE}" srcId="{4EF5B21F-0522-4B37-85D6-CEB430CCB426}" destId="{DE3AD505-65C0-49B0-BBA3-107F8FE3DB83}" srcOrd="0" destOrd="0" parTransId="{3FB8894D-9D06-4462-954B-2CE4DB8E1B44}" sibTransId="{A4CBCBDC-32A9-4FEC-88AF-47A54C5CE209}"/>
+    <dgm:cxn modelId="{DDBD4F76-6AA7-4B92-9805-2A666B8665F2}" type="presOf" srcId="{FBC92019-F9D6-44C7-8FEB-8E1D787D9847}" destId="{46A5BD50-A357-43EB-900E-7628F4E860EB}" srcOrd="0" destOrd="1" presId="urn:microsoft.com/office/officeart/2005/8/layout/hProcess4"/>
+    <dgm:cxn modelId="{C4486479-08EB-4FC4-8DCA-1090C522E791}" type="presOf" srcId="{1B2331C3-4ED8-496E-B08D-D0298EC66B33}" destId="{2B0884EC-019C-489D-80AA-7566A7966A30}" srcOrd="1" destOrd="3" presId="urn:microsoft.com/office/officeart/2005/8/layout/hProcess4"/>
+    <dgm:cxn modelId="{2DE89C59-6E2F-45BA-9D96-C20A8E33861B}" type="presOf" srcId="{609221ED-82FD-45D9-955E-69D98C9F9837}" destId="{2B0884EC-019C-489D-80AA-7566A7966A30}" srcOrd="1" destOrd="2" presId="urn:microsoft.com/office/officeart/2005/8/layout/hProcess4"/>
+    <dgm:cxn modelId="{4532DF9A-C60F-4A31-9302-868AC9FD0915}" type="presOf" srcId="{8B704CD4-C4A3-4CA8-9E6D-3F5A58FB5A6E}" destId="{850FA6B7-9A4F-4AA5-BDED-68AE9D7593C5}" srcOrd="0" destOrd="0" presId="urn:microsoft.com/office/officeart/2005/8/layout/hProcess4"/>
+    <dgm:cxn modelId="{2D59BF9B-C353-4A4E-B246-09D813F235CA}" srcId="{B665338B-645B-41AE-983D-65FFD2CDBEFF}" destId="{9979E402-2F88-436A-8282-66EF53786664}" srcOrd="2" destOrd="0" parTransId="{FB82CA8F-FAAE-4338-B42D-411B71A393D0}" sibTransId="{9847EFBA-07E4-4A28-9C1A-E7667B923BB5}"/>
+    <dgm:cxn modelId="{FB0DD99D-B2BA-4021-9408-65C4A75A33FA}" type="presOf" srcId="{73AD1036-9A58-4EFE-A690-768795CB6028}" destId="{2B0884EC-019C-489D-80AA-7566A7966A30}" srcOrd="1" destOrd="1" presId="urn:microsoft.com/office/officeart/2005/8/layout/hProcess4"/>
+    <dgm:cxn modelId="{57C819A0-FEEF-4499-9215-010A53459E94}" type="presOf" srcId="{DE3AD505-65C0-49B0-BBA3-107F8FE3DB83}" destId="{D401E58F-260B-48C4-8ED1-6DB73FD4E661}" srcOrd="1" destOrd="0" presId="urn:microsoft.com/office/officeart/2005/8/layout/hProcess4"/>
+    <dgm:cxn modelId="{386B6FA2-11AE-4306-87A5-5A0A9AD05545}" type="presOf" srcId="{DE3AD505-65C0-49B0-BBA3-107F8FE3DB83}" destId="{F05C07F2-711F-4DDA-BF5D-F2D18D771FE6}" srcOrd="0" destOrd="0" presId="urn:microsoft.com/office/officeart/2005/8/layout/hProcess4"/>
+    <dgm:cxn modelId="{D15EB9A4-4448-42E4-825C-101418440CCE}" type="presOf" srcId="{3ED2CA7C-8CF3-4C7D-B586-70BE48490C21}" destId="{46A5BD50-A357-43EB-900E-7628F4E860EB}" srcOrd="0" destOrd="0" presId="urn:microsoft.com/office/officeart/2005/8/layout/hProcess4"/>
+    <dgm:cxn modelId="{485B4FA8-4B7A-41EE-805A-0A7F9B58C05F}" srcId="{9979E402-2F88-436A-8282-66EF53786664}" destId="{1B2331C3-4ED8-496E-B08D-D0298EC66B33}" srcOrd="3" destOrd="0" parTransId="{AC82ECB6-EA97-4655-832A-F7DBD845A327}" sibTransId="{DF074269-6B53-4585-A81D-788C397101BD}"/>
+    <dgm:cxn modelId="{A70050AC-16C3-4796-B1D0-E0E254CCE140}" srcId="{B665338B-645B-41AE-983D-65FFD2CDBEFF}" destId="{4EF5B21F-0522-4B37-85D6-CEB430CCB426}" srcOrd="3" destOrd="0" parTransId="{06D2B8CE-436D-4AFF-82EB-8E83CF98C990}" sibTransId="{8AE8FF60-82A8-45AF-820F-8DF44D12B158}"/>
+    <dgm:cxn modelId="{6C129AAC-CE1C-4F68-AB43-850E76371DBF}" type="presOf" srcId="{5A9B94D9-D4F7-4D1D-B7A5-E4EBAEBE5076}" destId="{2B0884EC-019C-489D-80AA-7566A7966A30}" srcOrd="1" destOrd="0" presId="urn:microsoft.com/office/officeart/2005/8/layout/hProcess4"/>
+    <dgm:cxn modelId="{6E8D91AF-8DE7-4F4E-8EAB-E5CED69CEC1F}" type="presOf" srcId="{9847EFBA-07E4-4A28-9C1A-E7667B923BB5}" destId="{1578868B-2CAF-4820-BE2E-8D12F7F7A919}" srcOrd="0" destOrd="0" presId="urn:microsoft.com/office/officeart/2005/8/layout/hProcess4"/>
+    <dgm:cxn modelId="{89E99CB0-D87A-4B3C-9588-85E36DE4E5D4}" type="presOf" srcId="{9AACA625-023E-4357-97C3-04906BC41DD8}" destId="{ADB04D02-A97C-4659-BAB1-BFD732875B6F}" srcOrd="0" destOrd="1" presId="urn:microsoft.com/office/officeart/2005/8/layout/hProcess4"/>
+    <dgm:cxn modelId="{621691B4-DDBD-4DF2-B1B0-FB701B9853D5}" type="presOf" srcId="{A3A0FADB-9E1C-46FA-9954-1A7B414B35B9}" destId="{D401E58F-260B-48C4-8ED1-6DB73FD4E661}" srcOrd="1" destOrd="1" presId="urn:microsoft.com/office/officeart/2005/8/layout/hProcess4"/>
+    <dgm:cxn modelId="{16ECBFB4-04FA-4F01-9B73-FB666D5B3594}" type="presOf" srcId="{39031FE6-9489-43E5-BCCE-9368A5102F41}" destId="{0F7E9FD4-6D4A-4F6B-86E7-3179B41C32BE}" srcOrd="1" destOrd="2" presId="urn:microsoft.com/office/officeart/2005/8/layout/hProcess4"/>
+    <dgm:cxn modelId="{B5D0ECB7-E566-4057-A1EA-FD252152DFE1}" type="presOf" srcId="{59B08BBC-3ABB-47D1-B928-7D3326411A7C}" destId="{7AE20833-C756-4510-9EF0-F24DE50F50DA}" srcOrd="1" destOrd="0" presId="urn:microsoft.com/office/officeart/2005/8/layout/hProcess4"/>
+    <dgm:cxn modelId="{3CB867B9-6F43-4AB6-9530-DB6C5EF59301}" srcId="{D6FB274B-FC90-4E83-AEF4-3C4FAD353500}" destId="{0B006AC3-28C8-4288-AFED-91FA3D0A00F9}" srcOrd="1" destOrd="0" parTransId="{3666285E-AE42-426B-A018-E0BA7E841619}" sibTransId="{80AA56DF-E813-4B21-A7F1-6FEC4A8ABA5B}"/>
+    <dgm:cxn modelId="{512E31BD-BF4D-4053-8171-89D1D2BD3D55}" type="presOf" srcId="{0B006AC3-28C8-4288-AFED-91FA3D0A00F9}" destId="{B6E2E50B-E13E-4164-8844-C48D2241F28F}" srcOrd="1" destOrd="1" presId="urn:microsoft.com/office/officeart/2005/8/layout/hProcess4"/>
+    <dgm:cxn modelId="{20329BC2-7661-4608-A1B3-90DD63C183D1}" type="presOf" srcId="{D6FB274B-FC90-4E83-AEF4-3C4FAD353500}" destId="{B490D780-DC4A-4D63-9BE5-4D77B5D5EE7D}" srcOrd="0" destOrd="0" presId="urn:microsoft.com/office/officeart/2005/8/layout/hProcess4"/>
+    <dgm:cxn modelId="{A76D05C4-A12A-4B98-9194-3F92D8D6E43A}" srcId="{B665338B-645B-41AE-983D-65FFD2CDBEFF}" destId="{D6FB274B-FC90-4E83-AEF4-3C4FAD353500}" srcOrd="0" destOrd="0" parTransId="{5A19F18F-4921-423D-81BF-A1FD0D5AC97B}" sibTransId="{8B704CD4-C4A3-4CA8-9E6D-3F5A58FB5A6E}"/>
+    <dgm:cxn modelId="{500E1CC5-E3EB-48CE-81C8-01B2FF0977A1}" type="presOf" srcId="{609221ED-82FD-45D9-955E-69D98C9F9837}" destId="{F19BD381-30C3-4201-B50A-E41684C9478F}" srcOrd="0" destOrd="2" presId="urn:microsoft.com/office/officeart/2005/8/layout/hProcess4"/>
+    <dgm:cxn modelId="{E51FFEC5-0C48-4BFD-9DD2-0E5F0D9F9B63}" srcId="{B665338B-645B-41AE-983D-65FFD2CDBEFF}" destId="{2207399F-F7A9-4246-825E-CB2F59081A8E}" srcOrd="1" destOrd="0" parTransId="{0BBDA673-1136-4713-8084-109E95915A75}" sibTransId="{4151D506-449B-4309-95E1-51332BF9EED7}"/>
+    <dgm:cxn modelId="{CA233CC6-92B2-4A88-BEFC-46B83D41E595}" srcId="{2207399F-F7A9-4246-825E-CB2F59081A8E}" destId="{39031FE6-9489-43E5-BCCE-9368A5102F41}" srcOrd="2" destOrd="0" parTransId="{8B494894-2007-4090-BB37-185754316FE5}" sibTransId="{894F75BD-961D-4E6E-8B14-1223A8001890}"/>
+    <dgm:cxn modelId="{47FFA8C6-5991-4EDA-8402-967CDCF06D51}" srcId="{4EF5B21F-0522-4B37-85D6-CEB430CCB426}" destId="{A3A0FADB-9E1C-46FA-9954-1A7B414B35B9}" srcOrd="1" destOrd="0" parTransId="{38FAC2C9-419E-4EF5-879C-35B6091251F6}" sibTransId="{F5341326-D575-46DC-A6B0-BD344AD6EE25}"/>
+    <dgm:cxn modelId="{A8E619CC-CD02-4E00-B8C5-610274244D24}" type="presOf" srcId="{C29477DB-93CB-41C5-979C-064DF5F4039B}" destId="{6B4282B9-062B-41C5-898A-A66339751090}" srcOrd="0" destOrd="0" presId="urn:microsoft.com/office/officeart/2005/8/layout/hProcess4"/>
+    <dgm:cxn modelId="{92BD74CD-A52D-439A-B938-51B066954595}" srcId="{B665338B-645B-41AE-983D-65FFD2CDBEFF}" destId="{C29477DB-93CB-41C5-979C-064DF5F4039B}" srcOrd="4" destOrd="0" parTransId="{146D272C-43EF-4C36-BDDC-49E2C0F2BD02}" sibTransId="{D3BF079C-D04F-4E30-9314-BE8D4456213A}"/>
+    <dgm:cxn modelId="{B17DDED1-670D-4B61-B3E7-F712F73AE8BF}" type="presOf" srcId="{39031FE6-9489-43E5-BCCE-9368A5102F41}" destId="{46A5BD50-A357-43EB-900E-7628F4E860EB}" srcOrd="0" destOrd="2" presId="urn:microsoft.com/office/officeart/2005/8/layout/hProcess4"/>
+    <dgm:cxn modelId="{6A727CD2-775C-4511-B002-9C281868F8FC}" type="presOf" srcId="{8D030EC8-A772-4D56-8F07-0AE23381547A}" destId="{7B6A1E41-DCFE-4AC5-8D88-041D7A647606}" srcOrd="0" destOrd="0" presId="urn:microsoft.com/office/officeart/2005/8/layout/hProcess4"/>
+    <dgm:cxn modelId="{9768A2D3-4C6C-49DA-8A2F-78843B19EEF7}" type="presOf" srcId="{73AD1036-9A58-4EFE-A690-768795CB6028}" destId="{F19BD381-30C3-4201-B50A-E41684C9478F}" srcOrd="0" destOrd="1" presId="urn:microsoft.com/office/officeart/2005/8/layout/hProcess4"/>
+    <dgm:cxn modelId="{897409D9-192B-4EDF-8972-02F349E168B0}" type="presOf" srcId="{4EF5B21F-0522-4B37-85D6-CEB430CCB426}" destId="{3EA60A08-F209-4DFD-A8C0-33D58C80F67D}" srcOrd="0" destOrd="0" presId="urn:microsoft.com/office/officeart/2005/8/layout/hProcess4"/>
+    <dgm:cxn modelId="{76A112EF-4F15-4699-96ED-8440111B0D2F}" type="presOf" srcId="{3ED2CA7C-8CF3-4C7D-B586-70BE48490C21}" destId="{0F7E9FD4-6D4A-4F6B-86E7-3179B41C32BE}" srcOrd="1" destOrd="0" presId="urn:microsoft.com/office/officeart/2005/8/layout/hProcess4"/>
+    <dgm:cxn modelId="{DAEEB7EF-C8BB-4E20-B08B-BB49E4076AEB}" type="presOf" srcId="{4151D506-449B-4309-95E1-51332BF9EED7}" destId="{DB00C555-2EA1-4D87-A59D-2B8C4B0D5343}" srcOrd="0" destOrd="0" presId="urn:microsoft.com/office/officeart/2005/8/layout/hProcess4"/>
+    <dgm:cxn modelId="{09CF8BF3-4050-4D48-B720-9B954225D1AE}" type="presOf" srcId="{B665338B-645B-41AE-983D-65FFD2CDBEFF}" destId="{0988CE5C-27CF-4DBE-A10F-ED07BCA1B13B}" srcOrd="0" destOrd="0" presId="urn:microsoft.com/office/officeart/2005/8/layout/hProcess4"/>
+    <dgm:cxn modelId="{BEA7AAF9-73A8-40BA-9938-1032F9ABF083}" type="presOf" srcId="{FBC92019-F9D6-44C7-8FEB-8E1D787D9847}" destId="{0F7E9FD4-6D4A-4F6B-86E7-3179B41C32BE}" srcOrd="1" destOrd="1" presId="urn:microsoft.com/office/officeart/2005/8/layout/hProcess4"/>
+    <dgm:cxn modelId="{8E02247B-249E-4971-8582-4D578DC693B5}" type="presParOf" srcId="{0988CE5C-27CF-4DBE-A10F-ED07BCA1B13B}" destId="{3B42B861-20D8-4D43-90F3-4BC0C7641FEA}" srcOrd="0" destOrd="0" presId="urn:microsoft.com/office/officeart/2005/8/layout/hProcess4"/>
+    <dgm:cxn modelId="{8A984E5A-25BC-457C-8A35-C399DC0FA32C}" type="presParOf" srcId="{0988CE5C-27CF-4DBE-A10F-ED07BCA1B13B}" destId="{130535EF-3ED6-4707-8CDF-434B62E24FB2}" srcOrd="1" destOrd="0" presId="urn:microsoft.com/office/officeart/2005/8/layout/hProcess4"/>
+    <dgm:cxn modelId="{6BDDB780-B06A-4A02-A045-9E0ED006ED79}" type="presParOf" srcId="{0988CE5C-27CF-4DBE-A10F-ED07BCA1B13B}" destId="{1B16AE6F-9C06-44DE-B7B3-443002962661}" srcOrd="2" destOrd="0" presId="urn:microsoft.com/office/officeart/2005/8/layout/hProcess4"/>
+    <dgm:cxn modelId="{284311B6-26B0-4243-8D7B-D38DAC4C268D}" type="presParOf" srcId="{1B16AE6F-9C06-44DE-B7B3-443002962661}" destId="{47783FFD-6B7A-4B16-8B2D-C7BCF1A62BEB}" srcOrd="0" destOrd="0" presId="urn:microsoft.com/office/officeart/2005/8/layout/hProcess4"/>
+    <dgm:cxn modelId="{6CF7F396-8827-4D14-8DA4-69EA159A7927}" type="presParOf" srcId="{47783FFD-6B7A-4B16-8B2D-C7BCF1A62BEB}" destId="{DA10E415-6204-420F-80BD-B31B53E13273}" srcOrd="0" destOrd="0" presId="urn:microsoft.com/office/officeart/2005/8/layout/hProcess4"/>
+    <dgm:cxn modelId="{6840C6C7-18AF-4FA3-B345-E8BDFA5973F2}" type="presParOf" srcId="{47783FFD-6B7A-4B16-8B2D-C7BCF1A62BEB}" destId="{7B6A1E41-DCFE-4AC5-8D88-041D7A647606}" srcOrd="1" destOrd="0" presId="urn:microsoft.com/office/officeart/2005/8/layout/hProcess4"/>
+    <dgm:cxn modelId="{86D63359-65D5-4766-A686-645809ACA013}" type="presParOf" srcId="{47783FFD-6B7A-4B16-8B2D-C7BCF1A62BEB}" destId="{B6E2E50B-E13E-4164-8844-C48D2241F28F}" srcOrd="2" destOrd="0" presId="urn:microsoft.com/office/officeart/2005/8/layout/hProcess4"/>
+    <dgm:cxn modelId="{3C1FE65B-F63C-476D-A462-06C3B488B153}" type="presParOf" srcId="{47783FFD-6B7A-4B16-8B2D-C7BCF1A62BEB}" destId="{B490D780-DC4A-4D63-9BE5-4D77B5D5EE7D}" srcOrd="3" destOrd="0" presId="urn:microsoft.com/office/officeart/2005/8/layout/hProcess4"/>
+    <dgm:cxn modelId="{F200723C-5CF0-4576-B034-C5F7F4DFBE56}" type="presParOf" srcId="{47783FFD-6B7A-4B16-8B2D-C7BCF1A62BEB}" destId="{87DD02B4-7C99-44ED-82C9-CCF60F0E4156}" srcOrd="4" destOrd="0" presId="urn:microsoft.com/office/officeart/2005/8/layout/hProcess4"/>
+    <dgm:cxn modelId="{199FFFF0-6D65-4F9A-B6C0-9510B4DCD180}" type="presParOf" srcId="{1B16AE6F-9C06-44DE-B7B3-443002962661}" destId="{850FA6B7-9A4F-4AA5-BDED-68AE9D7593C5}" srcOrd="1" destOrd="0" presId="urn:microsoft.com/office/officeart/2005/8/layout/hProcess4"/>
+    <dgm:cxn modelId="{97E4FEDA-2837-422C-BF97-0B9F4F4675A1}" type="presParOf" srcId="{1B16AE6F-9C06-44DE-B7B3-443002962661}" destId="{0328E4F2-55DB-49EF-9802-C730AABD0081}" srcOrd="2" destOrd="0" presId="urn:microsoft.com/office/officeart/2005/8/layout/hProcess4"/>
+    <dgm:cxn modelId="{D556B14D-B12A-4BAD-B76F-427687752D7E}" type="presParOf" srcId="{0328E4F2-55DB-49EF-9802-C730AABD0081}" destId="{AD0988AB-4656-45BA-92AB-034657C4B796}" srcOrd="0" destOrd="0" presId="urn:microsoft.com/office/officeart/2005/8/layout/hProcess4"/>
+    <dgm:cxn modelId="{35B16C7A-7A36-4491-A600-2248633CE92E}" type="presParOf" srcId="{0328E4F2-55DB-49EF-9802-C730AABD0081}" destId="{46A5BD50-A357-43EB-900E-7628F4E860EB}" srcOrd="1" destOrd="0" presId="urn:microsoft.com/office/officeart/2005/8/layout/hProcess4"/>
+    <dgm:cxn modelId="{46861D2F-B34E-48EE-86A2-89AAD7B68687}" type="presParOf" srcId="{0328E4F2-55DB-49EF-9802-C730AABD0081}" destId="{0F7E9FD4-6D4A-4F6B-86E7-3179B41C32BE}" srcOrd="2" destOrd="0" presId="urn:microsoft.com/office/officeart/2005/8/layout/hProcess4"/>
+    <dgm:cxn modelId="{F0696B38-CC8E-4F68-8F0C-6307A16AF796}" type="presParOf" srcId="{0328E4F2-55DB-49EF-9802-C730AABD0081}" destId="{DDA911AB-DE02-438A-8E06-1357C3CEF326}" srcOrd="3" destOrd="0" presId="urn:microsoft.com/office/officeart/2005/8/layout/hProcess4"/>
+    <dgm:cxn modelId="{FDB293E5-83F2-4B35-A524-C84FF5568549}" type="presParOf" srcId="{0328E4F2-55DB-49EF-9802-C730AABD0081}" destId="{7804C83F-F9D9-4951-9D31-12A35D659178}" srcOrd="4" destOrd="0" presId="urn:microsoft.com/office/officeart/2005/8/layout/hProcess4"/>
+    <dgm:cxn modelId="{8D3D8840-A11F-4F86-B3D3-BD0DEC9D092D}" type="presParOf" srcId="{1B16AE6F-9C06-44DE-B7B3-443002962661}" destId="{DB00C555-2EA1-4D87-A59D-2B8C4B0D5343}" srcOrd="3" destOrd="0" presId="urn:microsoft.com/office/officeart/2005/8/layout/hProcess4"/>
+    <dgm:cxn modelId="{0ADE820B-90DB-48CC-AF84-55E1B28F3DD4}" type="presParOf" srcId="{1B16AE6F-9C06-44DE-B7B3-443002962661}" destId="{2117CB8B-B23D-45D5-9E33-38B69A7745CD}" srcOrd="4" destOrd="0" presId="urn:microsoft.com/office/officeart/2005/8/layout/hProcess4"/>
+    <dgm:cxn modelId="{B535CAEE-4949-428A-8C91-FC9FD28E5B0D}" type="presParOf" srcId="{2117CB8B-B23D-45D5-9E33-38B69A7745CD}" destId="{C0FF3479-16E6-49BC-A8B8-4C9F990843A7}" srcOrd="0" destOrd="0" presId="urn:microsoft.com/office/officeart/2005/8/layout/hProcess4"/>
+    <dgm:cxn modelId="{713357C0-02CC-4FCC-9CAD-1FF1A82A56DB}" type="presParOf" srcId="{2117CB8B-B23D-45D5-9E33-38B69A7745CD}" destId="{F19BD381-30C3-4201-B50A-E41684C9478F}" srcOrd="1" destOrd="0" presId="urn:microsoft.com/office/officeart/2005/8/layout/hProcess4"/>
+    <dgm:cxn modelId="{EDDA57EF-EF1F-43B9-B468-2E3A41BA07B0}" type="presParOf" srcId="{2117CB8B-B23D-45D5-9E33-38B69A7745CD}" destId="{2B0884EC-019C-489D-80AA-7566A7966A30}" srcOrd="2" destOrd="0" presId="urn:microsoft.com/office/officeart/2005/8/layout/hProcess4"/>
+    <dgm:cxn modelId="{B7A03FFD-9BB8-4113-A6F2-4CD2CE00EFB8}" type="presParOf" srcId="{2117CB8B-B23D-45D5-9E33-38B69A7745CD}" destId="{E878FD4D-12B7-458B-BC0F-B75BEB791108}" srcOrd="3" destOrd="0" presId="urn:microsoft.com/office/officeart/2005/8/layout/hProcess4"/>
+    <dgm:cxn modelId="{C976CD9F-50A8-4F68-81EE-61406A37FF7E}" type="presParOf" srcId="{2117CB8B-B23D-45D5-9E33-38B69A7745CD}" destId="{027CC7A2-E7F3-4B8D-9476-6FC0FC0D42B5}" srcOrd="4" destOrd="0" presId="urn:microsoft.com/office/officeart/2005/8/layout/hProcess4"/>
+    <dgm:cxn modelId="{28114FC8-FE8A-4245-9F99-8C1E93FECBD2}" type="presParOf" srcId="{1B16AE6F-9C06-44DE-B7B3-443002962661}" destId="{1578868B-2CAF-4820-BE2E-8D12F7F7A919}" srcOrd="5" destOrd="0" presId="urn:microsoft.com/office/officeart/2005/8/layout/hProcess4"/>
+    <dgm:cxn modelId="{4512F751-2445-4C67-A021-4D4F78DDA44E}" type="presParOf" srcId="{1B16AE6F-9C06-44DE-B7B3-443002962661}" destId="{578FD416-01AF-4BF7-8392-ADA912499F29}" srcOrd="6" destOrd="0" presId="urn:microsoft.com/office/officeart/2005/8/layout/hProcess4"/>
+    <dgm:cxn modelId="{F4AD7042-6255-4D13-98CB-9ED5E25493DC}" type="presParOf" srcId="{578FD416-01AF-4BF7-8392-ADA912499F29}" destId="{7E780BE3-10E5-46D1-8004-1C601ECFD3D8}" srcOrd="0" destOrd="0" presId="urn:microsoft.com/office/officeart/2005/8/layout/hProcess4"/>
+    <dgm:cxn modelId="{1D18C789-A928-40B5-AB2C-E2659849D4AA}" type="presParOf" srcId="{578FD416-01AF-4BF7-8392-ADA912499F29}" destId="{F05C07F2-711F-4DDA-BF5D-F2D18D771FE6}" srcOrd="1" destOrd="0" presId="urn:microsoft.com/office/officeart/2005/8/layout/hProcess4"/>
+    <dgm:cxn modelId="{3003F9AB-A521-4335-9260-1978D1AD3CB6}" type="presParOf" srcId="{578FD416-01AF-4BF7-8392-ADA912499F29}" destId="{D401E58F-260B-48C4-8ED1-6DB73FD4E661}" srcOrd="2" destOrd="0" presId="urn:microsoft.com/office/officeart/2005/8/layout/hProcess4"/>
+    <dgm:cxn modelId="{7A83E9D0-44EA-44A1-9000-8CECBCF7FFB4}" type="presParOf" srcId="{578FD416-01AF-4BF7-8392-ADA912499F29}" destId="{3EA60A08-F209-4DFD-A8C0-33D58C80F67D}" srcOrd="3" destOrd="0" presId="urn:microsoft.com/office/officeart/2005/8/layout/hProcess4"/>
+    <dgm:cxn modelId="{93679562-A747-405A-B8BB-8C6D60BD8694}" type="presParOf" srcId="{578FD416-01AF-4BF7-8392-ADA912499F29}" destId="{7817C187-EDC9-4BDB-8E07-5816A8486ADC}" srcOrd="4" destOrd="0" presId="urn:microsoft.com/office/officeart/2005/8/layout/hProcess4"/>
+    <dgm:cxn modelId="{D5EE8E5D-BA15-4F09-BD1C-2325FB452574}" type="presParOf" srcId="{1B16AE6F-9C06-44DE-B7B3-443002962661}" destId="{6D128CA8-FD42-4C08-9436-4EB380FD44D3}" srcOrd="7" destOrd="0" presId="urn:microsoft.com/office/officeart/2005/8/layout/hProcess4"/>
+    <dgm:cxn modelId="{11C561E8-3DB9-4233-82E5-7A77C6CB7F97}" type="presParOf" srcId="{1B16AE6F-9C06-44DE-B7B3-443002962661}" destId="{838A943B-5AF7-470A-AED0-8ACF9C66754C}" srcOrd="8" destOrd="0" presId="urn:microsoft.com/office/officeart/2005/8/layout/hProcess4"/>
+    <dgm:cxn modelId="{68E3EDAA-0B34-4001-9103-77A34C041E9C}" type="presParOf" srcId="{838A943B-5AF7-470A-AED0-8ACF9C66754C}" destId="{30F6E697-57B1-4870-BFC9-533B32FBD49C}" srcOrd="0" destOrd="0" presId="urn:microsoft.com/office/officeart/2005/8/layout/hProcess4"/>
+    <dgm:cxn modelId="{E98B8F1A-0BC9-40B0-94F9-23E3CBFFD17F}" type="presParOf" srcId="{838A943B-5AF7-470A-AED0-8ACF9C66754C}" destId="{ADB04D02-A97C-4659-BAB1-BFD732875B6F}" srcOrd="1" destOrd="0" presId="urn:microsoft.com/office/officeart/2005/8/layout/hProcess4"/>
+    <dgm:cxn modelId="{08ECF840-089C-4862-ABAF-C7E6617793E6}" type="presParOf" srcId="{838A943B-5AF7-470A-AED0-8ACF9C66754C}" destId="{7AE20833-C756-4510-9EF0-F24DE50F50DA}" srcOrd="2" destOrd="0" presId="urn:microsoft.com/office/officeart/2005/8/layout/hProcess4"/>
+    <dgm:cxn modelId="{195A2B67-DBF7-495C-AFA0-FB7C558E505D}" type="presParOf" srcId="{838A943B-5AF7-470A-AED0-8ACF9C66754C}" destId="{6B4282B9-062B-41C5-898A-A66339751090}" srcOrd="3" destOrd="0" presId="urn:microsoft.com/office/officeart/2005/8/layout/hProcess4"/>
+    <dgm:cxn modelId="{341B1116-E638-45B0-BA3D-E687D79EBA22}" type="presParOf" srcId="{838A943B-5AF7-470A-AED0-8ACF9C66754C}" destId="{04B1D9E8-A2BC-4D6C-9BD0-5020C9F200A9}" srcOrd="4" destOrd="0" presId="urn:microsoft.com/office/officeart/2005/8/layout/hProcess4"/>
+  </dgm:cxnLst>
+  <dgm:bg/>
+  <dgm:whole/>
+  <dgm:extLst>
+    <a:ext uri="http://schemas.microsoft.com/office/drawing/2008/diagram">
+      <dsp:dataModelExt xmlns:dsp="http://schemas.microsoft.com/office/drawing/2008/diagram" relId="rId6" minVer="http://schemas.openxmlformats.org/drawingml/2006/diagram"/>
+    </a:ext>
+  </dgm:extLst>
+</dgm:dataModel>
+</file>
+
+<file path=ppt/diagrams/drawing1.xml><?xml version="1.0" encoding="utf-8"?>
+<dsp:drawing xmlns:dgm="http://schemas.openxmlformats.org/drawingml/2006/diagram" xmlns:dsp="http://schemas.microsoft.com/office/drawing/2008/diagram" xmlns:a="http://schemas.openxmlformats.org/drawingml/2006/main">
+  <dsp:spTree>
+    <dsp:nvGrpSpPr>
+      <dsp:cNvPr id="0" name=""/>
+      <dsp:cNvGrpSpPr/>
+    </dsp:nvGrpSpPr>
+    <dsp:grpSpPr/>
+    <dsp:sp modelId="{7B6A1E41-DCFE-4AC5-8D88-041D7A647606}">
+      <dsp:nvSpPr>
+        <dsp:cNvPr id="0" name=""/>
+        <dsp:cNvSpPr/>
+      </dsp:nvSpPr>
+      <dsp:spPr>
+        <a:xfrm>
+          <a:off x="1915" y="1365968"/>
+          <a:ext cx="1722640" cy="1420818"/>
+        </a:xfrm>
+        <a:prstGeom prst="roundRect">
+          <a:avLst>
+            <a:gd name="adj" fmla="val 10000"/>
+          </a:avLst>
+        </a:prstGeom>
+        <a:solidFill>
+          <a:schemeClr val="lt1">
+            <a:alpha val="90000"/>
+            <a:hueOff val="0"/>
+            <a:satOff val="0"/>
+            <a:lumOff val="0"/>
+            <a:alphaOff val="0"/>
+          </a:schemeClr>
+        </a:solidFill>
+        <a:ln w="12700" cap="flat" cmpd="sng" algn="ctr">
+          <a:solidFill>
+            <a:schemeClr val="accent1">
+              <a:hueOff val="0"/>
+              <a:satOff val="0"/>
+              <a:lumOff val="0"/>
+              <a:alphaOff val="0"/>
+            </a:schemeClr>
+          </a:solidFill>
+          <a:prstDash val="solid"/>
+          <a:miter lim="800000"/>
+        </a:ln>
+        <a:effectLst/>
+      </dsp:spPr>
+      <dsp:style>
+        <a:lnRef idx="2">
+          <a:scrgbClr r="0" g="0" b="0"/>
+        </a:lnRef>
+        <a:fillRef idx="1">
+          <a:scrgbClr r="0" g="0" b="0"/>
+        </a:fillRef>
+        <a:effectRef idx="0">
+          <a:scrgbClr r="0" g="0" b="0"/>
+        </a:effectRef>
+        <a:fontRef idx="minor"/>
+      </dsp:style>
+      <dsp:txBody>
+        <a:bodyPr spcFirstLastPara="0" vert="horz" wrap="square" lIns="123825" tIns="123825" rIns="123825" bIns="123825" numCol="1" spcCol="1270" anchor="t" anchorCtr="0">
+          <a:noAutofit/>
+        </a:bodyPr>
+        <a:lstStyle/>
+        <a:p>
+          <a:pPr marL="114300" lvl="1" indent="-114300" algn="l" defTabSz="622300">
+            <a:lnSpc>
+              <a:spcPct val="100000"/>
+            </a:lnSpc>
+            <a:spcBef>
+              <a:spcPct val="0"/>
+            </a:spcBef>
+            <a:spcAft>
+              <a:spcPct val="15000"/>
+            </a:spcAft>
+            <a:buChar char="•"/>
+          </a:pPr>
+          <a:r>
+            <a:rPr lang="sk-SK" sz="1400" kern="1200" dirty="0"/>
+            <a:t>Denné ceny akcií</a:t>
+          </a:r>
+        </a:p>
+        <a:p>
+          <a:pPr marL="114300" lvl="1" indent="-114300" algn="l" defTabSz="622300">
+            <a:lnSpc>
+              <a:spcPct val="100000"/>
+            </a:lnSpc>
+            <a:spcBef>
+              <a:spcPct val="0"/>
+            </a:spcBef>
+            <a:spcAft>
+              <a:spcPct val="15000"/>
+            </a:spcAft>
+            <a:buChar char="•"/>
+          </a:pPr>
+          <a:r>
+            <a:rPr lang="sk-SK" sz="1400" kern="1200" dirty="0" err="1"/>
+            <a:t>Exploračná</a:t>
+          </a:r>
+          <a:r>
+            <a:rPr lang="sk-SK" sz="1400" kern="1200" dirty="0"/>
+            <a:t> analýza</a:t>
+          </a:r>
+        </a:p>
+      </dsp:txBody>
+      <dsp:txXfrm>
+        <a:off x="34612" y="1398665"/>
+        <a:ext cx="1657246" cy="1050963"/>
+      </dsp:txXfrm>
+    </dsp:sp>
+    <dsp:sp modelId="{850FA6B7-9A4F-4AA5-BDED-68AE9D7593C5}">
+      <dsp:nvSpPr>
+        <dsp:cNvPr id="0" name=""/>
+        <dsp:cNvSpPr/>
+      </dsp:nvSpPr>
+      <dsp:spPr>
+        <a:xfrm>
+          <a:off x="872929" y="1328870"/>
+          <a:ext cx="2065304" cy="2065304"/>
+        </a:xfrm>
+        <a:prstGeom prst="leftCircularArrow">
+          <a:avLst>
+            <a:gd name="adj1" fmla="val 3950"/>
+            <a:gd name="adj2" fmla="val 495472"/>
+            <a:gd name="adj3" fmla="val 2270983"/>
+            <a:gd name="adj4" fmla="val 9024489"/>
+            <a:gd name="adj5" fmla="val 4609"/>
+          </a:avLst>
+        </a:prstGeom>
+        <a:solidFill>
+          <a:schemeClr val="accent1">
+            <a:tint val="60000"/>
+            <a:hueOff val="0"/>
+            <a:satOff val="0"/>
+            <a:lumOff val="0"/>
+            <a:alphaOff val="0"/>
+          </a:schemeClr>
+        </a:solidFill>
+        <a:ln>
+          <a:noFill/>
+        </a:ln>
+        <a:effectLst/>
+      </dsp:spPr>
+      <dsp:style>
+        <a:lnRef idx="0">
+          <a:scrgbClr r="0" g="0" b="0"/>
+        </a:lnRef>
+        <a:fillRef idx="1">
+          <a:scrgbClr r="0" g="0" b="0"/>
+        </a:fillRef>
+        <a:effectRef idx="0">
+          <a:scrgbClr r="0" g="0" b="0"/>
+        </a:effectRef>
+        <a:fontRef idx="minor">
+          <a:schemeClr val="lt1"/>
+        </a:fontRef>
+      </dsp:style>
+    </dsp:sp>
+    <dsp:sp modelId="{B490D780-DC4A-4D63-9BE5-4D77B5D5EE7D}">
+      <dsp:nvSpPr>
+        <dsp:cNvPr id="0" name=""/>
+        <dsp:cNvSpPr/>
+      </dsp:nvSpPr>
+      <dsp:spPr>
+        <a:xfrm>
+          <a:off x="384724" y="2482326"/>
+          <a:ext cx="1531236" cy="608922"/>
+        </a:xfrm>
+        <a:prstGeom prst="roundRect">
+          <a:avLst>
+            <a:gd name="adj" fmla="val 10000"/>
+          </a:avLst>
+        </a:prstGeom>
+        <a:solidFill>
+          <a:schemeClr val="accent1">
+            <a:hueOff val="0"/>
+            <a:satOff val="0"/>
+            <a:lumOff val="0"/>
+            <a:alphaOff val="0"/>
+          </a:schemeClr>
+        </a:solidFill>
+        <a:ln w="12700" cap="flat" cmpd="sng" algn="ctr">
+          <a:solidFill>
+            <a:schemeClr val="lt1">
+              <a:hueOff val="0"/>
+              <a:satOff val="0"/>
+              <a:lumOff val="0"/>
+              <a:alphaOff val="0"/>
+            </a:schemeClr>
+          </a:solidFill>
+          <a:prstDash val="solid"/>
+          <a:miter lim="800000"/>
+        </a:ln>
+        <a:effectLst/>
+      </dsp:spPr>
+      <dsp:style>
+        <a:lnRef idx="2">
+          <a:scrgbClr r="0" g="0" b="0"/>
+        </a:lnRef>
+        <a:fillRef idx="1">
+          <a:scrgbClr r="0" g="0" b="0"/>
+        </a:fillRef>
+        <a:effectRef idx="0">
+          <a:scrgbClr r="0" g="0" b="0"/>
+        </a:effectRef>
+        <a:fontRef idx="minor">
+          <a:schemeClr val="lt1"/>
+        </a:fontRef>
+      </dsp:style>
+      <dsp:txBody>
+        <a:bodyPr spcFirstLastPara="0" vert="horz" wrap="square" lIns="38100" tIns="25400" rIns="38100" bIns="25400" numCol="1" spcCol="1270" anchor="ctr" anchorCtr="0">
+          <a:noAutofit/>
+        </a:bodyPr>
+        <a:lstStyle/>
+        <a:p>
+          <a:pPr marL="0" lvl="0" indent="0" algn="ctr" defTabSz="889000">
+            <a:lnSpc>
+              <a:spcPct val="90000"/>
+            </a:lnSpc>
+            <a:spcBef>
+              <a:spcPct val="0"/>
+            </a:spcBef>
+            <a:spcAft>
+              <a:spcPct val="35000"/>
+            </a:spcAft>
+            <a:buNone/>
+          </a:pPr>
+          <a:r>
+            <a:rPr lang="sk-SK" sz="2000" b="1" kern="1200" dirty="0">
+              <a:effectLst>
+                <a:outerShdw blurRad="38100" dist="38100" dir="2700000" algn="tl">
+                  <a:srgbClr val="000000">
+                    <a:alpha val="43137"/>
+                  </a:srgbClr>
+                </a:outerShdw>
+              </a:effectLst>
+            </a:rPr>
+            <a:t>Dáta</a:t>
+          </a:r>
+        </a:p>
+      </dsp:txBody>
+      <dsp:txXfrm>
+        <a:off x="402559" y="2500161"/>
+        <a:ext cx="1495566" cy="573252"/>
+      </dsp:txXfrm>
+    </dsp:sp>
+    <dsp:sp modelId="{46A5BD50-A357-43EB-900E-7628F4E860EB}">
+      <dsp:nvSpPr>
+        <dsp:cNvPr id="0" name=""/>
+        <dsp:cNvSpPr/>
+      </dsp:nvSpPr>
+      <dsp:spPr>
+        <a:xfrm>
+          <a:off x="2304465" y="1365968"/>
+          <a:ext cx="1722640" cy="1420818"/>
+        </a:xfrm>
+        <a:prstGeom prst="roundRect">
+          <a:avLst>
+            <a:gd name="adj" fmla="val 10000"/>
+          </a:avLst>
+        </a:prstGeom>
+        <a:solidFill>
+          <a:schemeClr val="lt1">
+            <a:alpha val="90000"/>
+            <a:hueOff val="0"/>
+            <a:satOff val="0"/>
+            <a:lumOff val="0"/>
+            <a:alphaOff val="0"/>
+          </a:schemeClr>
+        </a:solidFill>
+        <a:ln w="12700" cap="flat" cmpd="sng" algn="ctr">
+          <a:solidFill>
+            <a:schemeClr val="accent1">
+              <a:hueOff val="0"/>
+              <a:satOff val="0"/>
+              <a:lumOff val="0"/>
+              <a:alphaOff val="0"/>
+            </a:schemeClr>
+          </a:solidFill>
+          <a:prstDash val="solid"/>
+          <a:miter lim="800000"/>
+        </a:ln>
+        <a:effectLst/>
+      </dsp:spPr>
+      <dsp:style>
+        <a:lnRef idx="2">
+          <a:scrgbClr r="0" g="0" b="0"/>
+        </a:lnRef>
+        <a:fillRef idx="1">
+          <a:scrgbClr r="0" g="0" b="0"/>
+        </a:fillRef>
+        <a:effectRef idx="0">
+          <a:scrgbClr r="0" g="0" b="0"/>
+        </a:effectRef>
+        <a:fontRef idx="minor"/>
+      </dsp:style>
+      <dsp:txBody>
+        <a:bodyPr spcFirstLastPara="0" vert="horz" wrap="square" lIns="123825" tIns="123825" rIns="123825" bIns="123825" numCol="1" spcCol="1270" anchor="t" anchorCtr="0">
+          <a:noAutofit/>
+        </a:bodyPr>
+        <a:lstStyle/>
+        <a:p>
+          <a:pPr marL="114300" lvl="1" indent="-114300" algn="l" defTabSz="622300">
+            <a:lnSpc>
+              <a:spcPct val="100000"/>
+            </a:lnSpc>
+            <a:spcBef>
+              <a:spcPct val="0"/>
+            </a:spcBef>
+            <a:spcAft>
+              <a:spcPct val="15000"/>
+            </a:spcAft>
+            <a:buChar char="•"/>
+          </a:pPr>
+          <a:r>
+            <a:rPr lang="sk-SK" sz="1400" kern="1200" dirty="0"/>
+            <a:t>Log výnosy</a:t>
+          </a:r>
+        </a:p>
+        <a:p>
+          <a:pPr marL="114300" lvl="1" indent="-114300" algn="l" defTabSz="622300">
+            <a:lnSpc>
+              <a:spcPct val="100000"/>
+            </a:lnSpc>
+            <a:spcBef>
+              <a:spcPct val="0"/>
+            </a:spcBef>
+            <a:spcAft>
+              <a:spcPct val="15000"/>
+            </a:spcAft>
+            <a:buChar char="•"/>
+          </a:pPr>
+          <a:r>
+            <a:rPr lang="sk-SK" sz="1400" kern="1200" dirty="0"/>
+            <a:t>Volatilita</a:t>
+          </a:r>
+        </a:p>
+        <a:p>
+          <a:pPr marL="114300" lvl="1" indent="-114300" algn="l" defTabSz="622300">
+            <a:lnSpc>
+              <a:spcPct val="100000"/>
+            </a:lnSpc>
+            <a:spcBef>
+              <a:spcPct val="0"/>
+            </a:spcBef>
+            <a:spcAft>
+              <a:spcPct val="15000"/>
+            </a:spcAft>
+            <a:buChar char="•"/>
+          </a:pPr>
+          <a:r>
+            <a:rPr lang="sk-SK" sz="1400" kern="1200" dirty="0"/>
+            <a:t>Časové obdobia</a:t>
+          </a:r>
+        </a:p>
+      </dsp:txBody>
+      <dsp:txXfrm>
+        <a:off x="2337162" y="1703126"/>
+        <a:ext cx="1657246" cy="1050963"/>
+      </dsp:txXfrm>
+    </dsp:sp>
+    <dsp:sp modelId="{DB00C555-2EA1-4D87-A59D-2B8C4B0D5343}">
+      <dsp:nvSpPr>
+        <dsp:cNvPr id="0" name=""/>
+        <dsp:cNvSpPr/>
+      </dsp:nvSpPr>
+      <dsp:spPr>
+        <a:xfrm>
+          <a:off x="3162058" y="690838"/>
+          <a:ext cx="2285419" cy="2285419"/>
+        </a:xfrm>
+        <a:prstGeom prst="circularArrow">
+          <a:avLst>
+            <a:gd name="adj1" fmla="val 3570"/>
+            <a:gd name="adj2" fmla="val 443675"/>
+            <a:gd name="adj3" fmla="val 19380814"/>
+            <a:gd name="adj4" fmla="val 12575511"/>
+            <a:gd name="adj5" fmla="val 4165"/>
+          </a:avLst>
+        </a:prstGeom>
+        <a:solidFill>
+          <a:schemeClr val="accent1">
+            <a:tint val="60000"/>
+            <a:hueOff val="0"/>
+            <a:satOff val="0"/>
+            <a:lumOff val="0"/>
+            <a:alphaOff val="0"/>
+          </a:schemeClr>
+        </a:solidFill>
+        <a:ln>
+          <a:noFill/>
+        </a:ln>
+        <a:effectLst/>
+      </dsp:spPr>
+      <dsp:style>
+        <a:lnRef idx="0">
+          <a:scrgbClr r="0" g="0" b="0"/>
+        </a:lnRef>
+        <a:fillRef idx="1">
+          <a:scrgbClr r="0" g="0" b="0"/>
+        </a:fillRef>
+        <a:effectRef idx="0">
+          <a:scrgbClr r="0" g="0" b="0"/>
+        </a:effectRef>
+        <a:fontRef idx="minor">
+          <a:schemeClr val="lt1"/>
+        </a:fontRef>
+      </dsp:style>
+    </dsp:sp>
+    <dsp:sp modelId="{DDA911AB-DE02-438A-8E06-1357C3CEF326}">
+      <dsp:nvSpPr>
+        <dsp:cNvPr id="0" name=""/>
+        <dsp:cNvSpPr/>
+      </dsp:nvSpPr>
+      <dsp:spPr>
+        <a:xfrm>
+          <a:off x="2687274" y="1061507"/>
+          <a:ext cx="1531236" cy="608922"/>
+        </a:xfrm>
+        <a:prstGeom prst="roundRect">
+          <a:avLst>
+            <a:gd name="adj" fmla="val 10000"/>
+          </a:avLst>
+        </a:prstGeom>
+        <a:solidFill>
+          <a:schemeClr val="accent1">
+            <a:hueOff val="0"/>
+            <a:satOff val="0"/>
+            <a:lumOff val="0"/>
+            <a:alphaOff val="0"/>
+          </a:schemeClr>
+        </a:solidFill>
+        <a:ln w="12700" cap="flat" cmpd="sng" algn="ctr">
+          <a:solidFill>
+            <a:schemeClr val="lt1">
+              <a:hueOff val="0"/>
+              <a:satOff val="0"/>
+              <a:lumOff val="0"/>
+              <a:alphaOff val="0"/>
+            </a:schemeClr>
+          </a:solidFill>
+          <a:prstDash val="solid"/>
+          <a:miter lim="800000"/>
+        </a:ln>
+        <a:effectLst/>
+      </dsp:spPr>
+      <dsp:style>
+        <a:lnRef idx="2">
+          <a:scrgbClr r="0" g="0" b="0"/>
+        </a:lnRef>
+        <a:fillRef idx="1">
+          <a:scrgbClr r="0" g="0" b="0"/>
+        </a:fillRef>
+        <a:effectRef idx="0">
+          <a:scrgbClr r="0" g="0" b="0"/>
+        </a:effectRef>
+        <a:fontRef idx="minor">
+          <a:schemeClr val="lt1"/>
+        </a:fontRef>
+      </dsp:style>
+      <dsp:txBody>
+        <a:bodyPr spcFirstLastPara="0" vert="horz" wrap="square" lIns="38100" tIns="25400" rIns="38100" bIns="25400" numCol="1" spcCol="1270" anchor="ctr" anchorCtr="0">
+          <a:noAutofit/>
+        </a:bodyPr>
+        <a:lstStyle/>
+        <a:p>
+          <a:pPr marL="0" lvl="0" indent="0" algn="ctr" defTabSz="889000">
+            <a:lnSpc>
+              <a:spcPct val="90000"/>
+            </a:lnSpc>
+            <a:spcBef>
+              <a:spcPct val="0"/>
+            </a:spcBef>
+            <a:spcAft>
+              <a:spcPct val="35000"/>
+            </a:spcAft>
+            <a:buNone/>
+          </a:pPr>
+          <a:r>
+            <a:rPr lang="sk-SK" sz="2000" b="1" kern="1200" dirty="0">
+              <a:effectLst>
+                <a:outerShdw blurRad="38100" dist="38100" dir="2700000" algn="tl">
+                  <a:srgbClr val="000000">
+                    <a:alpha val="43137"/>
+                  </a:srgbClr>
+                </a:outerShdw>
+              </a:effectLst>
+            </a:rPr>
+            <a:t>Volatilita</a:t>
+          </a:r>
+        </a:p>
+      </dsp:txBody>
+      <dsp:txXfrm>
+        <a:off x="2705109" y="1079342"/>
+        <a:ext cx="1495566" cy="573252"/>
+      </dsp:txXfrm>
+    </dsp:sp>
+    <dsp:sp modelId="{F19BD381-30C3-4201-B50A-E41684C9478F}">
+      <dsp:nvSpPr>
+        <dsp:cNvPr id="0" name=""/>
+        <dsp:cNvSpPr/>
+      </dsp:nvSpPr>
+      <dsp:spPr>
+        <a:xfrm>
+          <a:off x="4607015" y="1365968"/>
+          <a:ext cx="1722640" cy="1420818"/>
+        </a:xfrm>
+        <a:prstGeom prst="roundRect">
+          <a:avLst>
+            <a:gd name="adj" fmla="val 10000"/>
+          </a:avLst>
+        </a:prstGeom>
+        <a:solidFill>
+          <a:schemeClr val="lt1">
+            <a:alpha val="90000"/>
+            <a:hueOff val="0"/>
+            <a:satOff val="0"/>
+            <a:lumOff val="0"/>
+            <a:alphaOff val="0"/>
+          </a:schemeClr>
+        </a:solidFill>
+        <a:ln w="12700" cap="flat" cmpd="sng" algn="ctr">
+          <a:solidFill>
+            <a:schemeClr val="accent1">
+              <a:hueOff val="0"/>
+              <a:satOff val="0"/>
+              <a:lumOff val="0"/>
+              <a:alphaOff val="0"/>
+            </a:schemeClr>
+          </a:solidFill>
+          <a:prstDash val="solid"/>
+          <a:miter lim="800000"/>
+        </a:ln>
+        <a:effectLst/>
+      </dsp:spPr>
+      <dsp:style>
+        <a:lnRef idx="2">
+          <a:scrgbClr r="0" g="0" b="0"/>
+        </a:lnRef>
+        <a:fillRef idx="1">
+          <a:scrgbClr r="0" g="0" b="0"/>
+        </a:fillRef>
+        <a:effectRef idx="0">
+          <a:scrgbClr r="0" g="0" b="0"/>
+        </a:effectRef>
+        <a:fontRef idx="minor"/>
+      </dsp:style>
+      <dsp:txBody>
+        <a:bodyPr spcFirstLastPara="0" vert="horz" wrap="square" lIns="123825" tIns="123825" rIns="123825" bIns="123825" numCol="1" spcCol="1270" anchor="t" anchorCtr="0">
+          <a:noAutofit/>
+        </a:bodyPr>
+        <a:lstStyle/>
+        <a:p>
+          <a:pPr marL="114300" lvl="1" indent="-114300" algn="l" defTabSz="622300">
+            <a:lnSpc>
+              <a:spcPct val="100000"/>
+            </a:lnSpc>
+            <a:spcBef>
+              <a:spcPct val="0"/>
+            </a:spcBef>
+            <a:spcAft>
+              <a:spcPct val="15000"/>
+            </a:spcAft>
+            <a:buChar char="•"/>
+          </a:pPr>
+          <a:r>
+            <a:rPr lang="sk-SK" sz="1400" kern="1200" dirty="0"/>
+            <a:t>GARCH</a:t>
+          </a:r>
+        </a:p>
+        <a:p>
+          <a:pPr marL="114300" lvl="1" indent="-114300" algn="l" defTabSz="622300">
+            <a:lnSpc>
+              <a:spcPct val="100000"/>
+            </a:lnSpc>
+            <a:spcBef>
+              <a:spcPct val="0"/>
+            </a:spcBef>
+            <a:spcAft>
+              <a:spcPct val="15000"/>
+            </a:spcAft>
+            <a:buChar char="•"/>
+          </a:pPr>
+          <a:r>
+            <a:rPr lang="sk-SK" sz="1400" kern="1200" dirty="0"/>
+            <a:t>HAR</a:t>
+          </a:r>
+        </a:p>
+        <a:p>
+          <a:pPr marL="114300" lvl="1" indent="-114300" algn="l" defTabSz="622300">
+            <a:lnSpc>
+              <a:spcPct val="100000"/>
+            </a:lnSpc>
+            <a:spcBef>
+              <a:spcPct val="0"/>
+            </a:spcBef>
+            <a:spcAft>
+              <a:spcPct val="15000"/>
+            </a:spcAft>
+            <a:buChar char="•"/>
+          </a:pPr>
+          <a:r>
+            <a:rPr lang="sk-SK" sz="1400" kern="1200" dirty="0" err="1"/>
+            <a:t>XGBoost</a:t>
+          </a:r>
+          <a:endParaRPr lang="sk-SK" sz="1400" kern="1200" dirty="0"/>
+        </a:p>
+        <a:p>
+          <a:pPr marL="114300" lvl="1" indent="-114300" algn="l" defTabSz="622300">
+            <a:lnSpc>
+              <a:spcPct val="100000"/>
+            </a:lnSpc>
+            <a:spcBef>
+              <a:spcPct val="0"/>
+            </a:spcBef>
+            <a:spcAft>
+              <a:spcPct val="15000"/>
+            </a:spcAft>
+            <a:buChar char="•"/>
+          </a:pPr>
+          <a:r>
+            <a:rPr lang="sk-SK" sz="1400" kern="1200" dirty="0"/>
+            <a:t>LSTM</a:t>
+          </a:r>
+        </a:p>
+      </dsp:txBody>
+      <dsp:txXfrm>
+        <a:off x="4639712" y="1398665"/>
+        <a:ext cx="1657246" cy="1050963"/>
+      </dsp:txXfrm>
+    </dsp:sp>
+    <dsp:sp modelId="{1578868B-2CAF-4820-BE2E-8D12F7F7A919}">
+      <dsp:nvSpPr>
+        <dsp:cNvPr id="0" name=""/>
+        <dsp:cNvSpPr/>
+      </dsp:nvSpPr>
+      <dsp:spPr>
+        <a:xfrm>
+          <a:off x="5454113" y="1357102"/>
+          <a:ext cx="2065304" cy="2065304"/>
+        </a:xfrm>
+        <a:prstGeom prst="leftCircularArrow">
+          <a:avLst>
+            <a:gd name="adj1" fmla="val 3950"/>
+            <a:gd name="adj2" fmla="val 495472"/>
+            <a:gd name="adj3" fmla="val 2270983"/>
+            <a:gd name="adj4" fmla="val 9024489"/>
+            <a:gd name="adj5" fmla="val 4609"/>
+          </a:avLst>
+        </a:prstGeom>
+        <a:solidFill>
+          <a:schemeClr val="accent1">
+            <a:tint val="60000"/>
+            <a:hueOff val="0"/>
+            <a:satOff val="0"/>
+            <a:lumOff val="0"/>
+            <a:alphaOff val="0"/>
+          </a:schemeClr>
+        </a:solidFill>
+        <a:ln>
+          <a:noFill/>
+        </a:ln>
+        <a:effectLst/>
+      </dsp:spPr>
+      <dsp:style>
+        <a:lnRef idx="0">
+          <a:scrgbClr r="0" g="0" b="0"/>
+        </a:lnRef>
+        <a:fillRef idx="1">
+          <a:scrgbClr r="0" g="0" b="0"/>
+        </a:fillRef>
+        <a:effectRef idx="0">
+          <a:scrgbClr r="0" g="0" b="0"/>
+        </a:effectRef>
+        <a:fontRef idx="minor">
+          <a:schemeClr val="lt1"/>
+        </a:fontRef>
+      </dsp:style>
+    </dsp:sp>
+    <dsp:sp modelId="{E878FD4D-12B7-458B-BC0F-B75BEB791108}">
+      <dsp:nvSpPr>
+        <dsp:cNvPr id="0" name=""/>
+        <dsp:cNvSpPr/>
+      </dsp:nvSpPr>
+      <dsp:spPr>
+        <a:xfrm>
+          <a:off x="4989824" y="2482326"/>
+          <a:ext cx="1531236" cy="608922"/>
+        </a:xfrm>
+        <a:prstGeom prst="roundRect">
+          <a:avLst>
+            <a:gd name="adj" fmla="val 10000"/>
+          </a:avLst>
+        </a:prstGeom>
+        <a:solidFill>
+          <a:schemeClr val="accent1">
+            <a:hueOff val="0"/>
+            <a:satOff val="0"/>
+            <a:lumOff val="0"/>
+            <a:alphaOff val="0"/>
+          </a:schemeClr>
+        </a:solidFill>
+        <a:ln w="12700" cap="flat" cmpd="sng" algn="ctr">
+          <a:solidFill>
+            <a:schemeClr val="lt1">
+              <a:hueOff val="0"/>
+              <a:satOff val="0"/>
+              <a:lumOff val="0"/>
+              <a:alphaOff val="0"/>
+            </a:schemeClr>
+          </a:solidFill>
+          <a:prstDash val="solid"/>
+          <a:miter lim="800000"/>
+        </a:ln>
+        <a:effectLst/>
+      </dsp:spPr>
+      <dsp:style>
+        <a:lnRef idx="2">
+          <a:scrgbClr r="0" g="0" b="0"/>
+        </a:lnRef>
+        <a:fillRef idx="1">
+          <a:scrgbClr r="0" g="0" b="0"/>
+        </a:fillRef>
+        <a:effectRef idx="0">
+          <a:scrgbClr r="0" g="0" b="0"/>
+        </a:effectRef>
+        <a:fontRef idx="minor">
+          <a:schemeClr val="lt1"/>
+        </a:fontRef>
+      </dsp:style>
+      <dsp:txBody>
+        <a:bodyPr spcFirstLastPara="0" vert="horz" wrap="square" lIns="38100" tIns="25400" rIns="38100" bIns="25400" numCol="1" spcCol="1270" anchor="ctr" anchorCtr="0">
+          <a:noAutofit/>
+        </a:bodyPr>
+        <a:lstStyle/>
+        <a:p>
+          <a:pPr marL="0" lvl="0" indent="0" algn="ctr" defTabSz="889000">
+            <a:lnSpc>
+              <a:spcPct val="90000"/>
+            </a:lnSpc>
+            <a:spcBef>
+              <a:spcPct val="0"/>
+            </a:spcBef>
+            <a:spcAft>
+              <a:spcPct val="35000"/>
+            </a:spcAft>
+            <a:buNone/>
+          </a:pPr>
+          <a:r>
+            <a:rPr lang="sk-SK" sz="2000" b="1" kern="1200" dirty="0">
+              <a:effectLst>
+                <a:outerShdw blurRad="38100" dist="38100" dir="2700000" algn="tl">
+                  <a:srgbClr val="000000">
+                    <a:alpha val="43137"/>
+                  </a:srgbClr>
+                </a:outerShdw>
+              </a:effectLst>
+            </a:rPr>
+            <a:t>Modely</a:t>
+          </a:r>
+        </a:p>
+      </dsp:txBody>
+      <dsp:txXfrm>
+        <a:off x="5007659" y="2500161"/>
+        <a:ext cx="1495566" cy="573252"/>
+      </dsp:txXfrm>
+    </dsp:sp>
+    <dsp:sp modelId="{F05C07F2-711F-4DDA-BF5D-F2D18D771FE6}">
+      <dsp:nvSpPr>
+        <dsp:cNvPr id="0" name=""/>
+        <dsp:cNvSpPr/>
+      </dsp:nvSpPr>
+      <dsp:spPr>
+        <a:xfrm>
+          <a:off x="6909565" y="1365968"/>
+          <a:ext cx="1722640" cy="1420818"/>
+        </a:xfrm>
+        <a:prstGeom prst="roundRect">
+          <a:avLst>
+            <a:gd name="adj" fmla="val 10000"/>
+          </a:avLst>
+        </a:prstGeom>
+        <a:solidFill>
+          <a:schemeClr val="lt1">
+            <a:alpha val="90000"/>
+            <a:hueOff val="0"/>
+            <a:satOff val="0"/>
+            <a:lumOff val="0"/>
+            <a:alphaOff val="0"/>
+          </a:schemeClr>
+        </a:solidFill>
+        <a:ln w="12700" cap="flat" cmpd="sng" algn="ctr">
+          <a:solidFill>
+            <a:schemeClr val="accent1">
+              <a:hueOff val="0"/>
+              <a:satOff val="0"/>
+              <a:lumOff val="0"/>
+              <a:alphaOff val="0"/>
+            </a:schemeClr>
+          </a:solidFill>
+          <a:prstDash val="solid"/>
+          <a:miter lim="800000"/>
+        </a:ln>
+        <a:effectLst/>
+      </dsp:spPr>
+      <dsp:style>
+        <a:lnRef idx="2">
+          <a:scrgbClr r="0" g="0" b="0"/>
+        </a:lnRef>
+        <a:fillRef idx="1">
+          <a:scrgbClr r="0" g="0" b="0"/>
+        </a:fillRef>
+        <a:effectRef idx="0">
+          <a:scrgbClr r="0" g="0" b="0"/>
+        </a:effectRef>
+        <a:fontRef idx="minor"/>
+      </dsp:style>
+      <dsp:txBody>
+        <a:bodyPr spcFirstLastPara="0" vert="horz" wrap="square" lIns="123825" tIns="123825" rIns="123825" bIns="123825" numCol="1" spcCol="1270" anchor="t" anchorCtr="0">
+          <a:noAutofit/>
+        </a:bodyPr>
+        <a:lstStyle/>
+        <a:p>
+          <a:pPr marL="114300" lvl="1" indent="-114300" algn="l" defTabSz="622300">
+            <a:lnSpc>
+              <a:spcPct val="100000"/>
+            </a:lnSpc>
+            <a:spcBef>
+              <a:spcPct val="0"/>
+            </a:spcBef>
+            <a:spcAft>
+              <a:spcPct val="15000"/>
+            </a:spcAft>
+            <a:buChar char="•"/>
+          </a:pPr>
+          <a:r>
+            <a:rPr lang="sk-SK" sz="1400" kern="1200" dirty="0"/>
+            <a:t>RMSE, QLIKE</a:t>
+          </a:r>
+        </a:p>
+        <a:p>
+          <a:pPr marL="114300" lvl="1" indent="-114300" algn="l" defTabSz="622300">
+            <a:lnSpc>
+              <a:spcPct val="100000"/>
+            </a:lnSpc>
+            <a:spcBef>
+              <a:spcPct val="0"/>
+            </a:spcBef>
+            <a:spcAft>
+              <a:spcPct val="15000"/>
+            </a:spcAft>
+            <a:buChar char="•"/>
+          </a:pPr>
+          <a:r>
+            <a:rPr lang="sk-SK" sz="1400" kern="1200" dirty="0" err="1"/>
+            <a:t>Rolling-Window</a:t>
+          </a:r>
+          <a:endParaRPr lang="sk-SK" sz="1400" kern="1200" dirty="0"/>
+        </a:p>
+      </dsp:txBody>
+      <dsp:txXfrm>
+        <a:off x="6942262" y="1703126"/>
+        <a:ext cx="1657246" cy="1050963"/>
+      </dsp:txXfrm>
+    </dsp:sp>
+    <dsp:sp modelId="{6D128CA8-FD42-4C08-9436-4EB380FD44D3}">
+      <dsp:nvSpPr>
+        <dsp:cNvPr id="0" name=""/>
+        <dsp:cNvSpPr/>
+      </dsp:nvSpPr>
+      <dsp:spPr>
+        <a:xfrm>
+          <a:off x="7832087" y="690838"/>
+          <a:ext cx="2285419" cy="2285419"/>
+        </a:xfrm>
+        <a:prstGeom prst="circularArrow">
+          <a:avLst>
+            <a:gd name="adj1" fmla="val 3570"/>
+            <a:gd name="adj2" fmla="val 443675"/>
+            <a:gd name="adj3" fmla="val 19380814"/>
+            <a:gd name="adj4" fmla="val 12575511"/>
+            <a:gd name="adj5" fmla="val 4165"/>
+          </a:avLst>
+        </a:prstGeom>
+        <a:solidFill>
+          <a:schemeClr val="accent1">
+            <a:tint val="60000"/>
+            <a:hueOff val="0"/>
+            <a:satOff val="0"/>
+            <a:lumOff val="0"/>
+            <a:alphaOff val="0"/>
+          </a:schemeClr>
+        </a:solidFill>
+        <a:ln>
+          <a:noFill/>
+        </a:ln>
+        <a:effectLst/>
+      </dsp:spPr>
+      <dsp:style>
+        <a:lnRef idx="0">
+          <a:scrgbClr r="0" g="0" b="0"/>
+        </a:lnRef>
+        <a:fillRef idx="1">
+          <a:scrgbClr r="0" g="0" b="0"/>
+        </a:fillRef>
+        <a:effectRef idx="0">
+          <a:scrgbClr r="0" g="0" b="0"/>
+        </a:effectRef>
+        <a:fontRef idx="minor">
+          <a:schemeClr val="lt1"/>
+        </a:fontRef>
+      </dsp:style>
+    </dsp:sp>
+    <dsp:sp modelId="{3EA60A08-F209-4DFD-A8C0-33D58C80F67D}">
+      <dsp:nvSpPr>
+        <dsp:cNvPr id="0" name=""/>
+        <dsp:cNvSpPr/>
+      </dsp:nvSpPr>
+      <dsp:spPr>
+        <a:xfrm>
+          <a:off x="7292374" y="1061507"/>
+          <a:ext cx="1531236" cy="608922"/>
+        </a:xfrm>
+        <a:prstGeom prst="roundRect">
+          <a:avLst>
+            <a:gd name="adj" fmla="val 10000"/>
+          </a:avLst>
+        </a:prstGeom>
+        <a:solidFill>
+          <a:schemeClr val="accent1">
+            <a:hueOff val="0"/>
+            <a:satOff val="0"/>
+            <a:lumOff val="0"/>
+            <a:alphaOff val="0"/>
+          </a:schemeClr>
+        </a:solidFill>
+        <a:ln w="12700" cap="flat" cmpd="sng" algn="ctr">
+          <a:solidFill>
+            <a:schemeClr val="lt1">
+              <a:hueOff val="0"/>
+              <a:satOff val="0"/>
+              <a:lumOff val="0"/>
+              <a:alphaOff val="0"/>
+            </a:schemeClr>
+          </a:solidFill>
+          <a:prstDash val="solid"/>
+          <a:miter lim="800000"/>
+        </a:ln>
+        <a:effectLst/>
+      </dsp:spPr>
+      <dsp:style>
+        <a:lnRef idx="2">
+          <a:scrgbClr r="0" g="0" b="0"/>
+        </a:lnRef>
+        <a:fillRef idx="1">
+          <a:scrgbClr r="0" g="0" b="0"/>
+        </a:fillRef>
+        <a:effectRef idx="0">
+          <a:scrgbClr r="0" g="0" b="0"/>
+        </a:effectRef>
+        <a:fontRef idx="minor">
+          <a:schemeClr val="lt1"/>
+        </a:fontRef>
+      </dsp:style>
+      <dsp:txBody>
+        <a:bodyPr spcFirstLastPara="0" vert="horz" wrap="square" lIns="38100" tIns="25400" rIns="38100" bIns="25400" numCol="1" spcCol="1270" anchor="ctr" anchorCtr="0">
+          <a:noAutofit/>
+        </a:bodyPr>
+        <a:lstStyle/>
+        <a:p>
+          <a:pPr marL="0" lvl="0" indent="0" algn="ctr" defTabSz="889000">
+            <a:lnSpc>
+              <a:spcPct val="90000"/>
+            </a:lnSpc>
+            <a:spcBef>
+              <a:spcPct val="0"/>
+            </a:spcBef>
+            <a:spcAft>
+              <a:spcPct val="35000"/>
+            </a:spcAft>
+            <a:buNone/>
+          </a:pPr>
+          <a:r>
+            <a:rPr lang="sk-SK" sz="2000" b="1" kern="1200" dirty="0">
+              <a:effectLst>
+                <a:outerShdw blurRad="38100" dist="38100" dir="2700000" algn="tl">
+                  <a:srgbClr val="000000">
+                    <a:alpha val="43137"/>
+                  </a:srgbClr>
+                </a:outerShdw>
+              </a:effectLst>
+            </a:rPr>
+            <a:t>Validácia</a:t>
+          </a:r>
+        </a:p>
+      </dsp:txBody>
+      <dsp:txXfrm>
+        <a:off x="7310209" y="1079342"/>
+        <a:ext cx="1495566" cy="573252"/>
+      </dsp:txXfrm>
+    </dsp:sp>
+    <dsp:sp modelId="{ADB04D02-A97C-4659-BAB1-BFD732875B6F}">
+      <dsp:nvSpPr>
+        <dsp:cNvPr id="0" name=""/>
+        <dsp:cNvSpPr/>
+      </dsp:nvSpPr>
+      <dsp:spPr>
+        <a:xfrm>
+          <a:off x="9212115" y="1365968"/>
+          <a:ext cx="1722640" cy="1420818"/>
+        </a:xfrm>
+        <a:prstGeom prst="roundRect">
+          <a:avLst>
+            <a:gd name="adj" fmla="val 10000"/>
+          </a:avLst>
+        </a:prstGeom>
+        <a:solidFill>
+          <a:schemeClr val="lt1">
+            <a:alpha val="90000"/>
+            <a:hueOff val="0"/>
+            <a:satOff val="0"/>
+            <a:lumOff val="0"/>
+            <a:alphaOff val="0"/>
+          </a:schemeClr>
+        </a:solidFill>
+        <a:ln w="12700" cap="flat" cmpd="sng" algn="ctr">
+          <a:solidFill>
+            <a:schemeClr val="accent1">
+              <a:hueOff val="0"/>
+              <a:satOff val="0"/>
+              <a:lumOff val="0"/>
+              <a:alphaOff val="0"/>
+            </a:schemeClr>
+          </a:solidFill>
+          <a:prstDash val="solid"/>
+          <a:miter lim="800000"/>
+        </a:ln>
+        <a:effectLst/>
+      </dsp:spPr>
+      <dsp:style>
+        <a:lnRef idx="2">
+          <a:scrgbClr r="0" g="0" b="0"/>
+        </a:lnRef>
+        <a:fillRef idx="1">
+          <a:scrgbClr r="0" g="0" b="0"/>
+        </a:fillRef>
+        <a:effectRef idx="0">
+          <a:scrgbClr r="0" g="0" b="0"/>
+        </a:effectRef>
+        <a:fontRef idx="minor"/>
+      </dsp:style>
+      <dsp:txBody>
+        <a:bodyPr spcFirstLastPara="0" vert="horz" wrap="square" lIns="123825" tIns="123825" rIns="123825" bIns="123825" numCol="1" spcCol="1270" anchor="t" anchorCtr="0">
+          <a:noAutofit/>
+        </a:bodyPr>
+        <a:lstStyle/>
+        <a:p>
+          <a:pPr marL="114300" lvl="1" indent="-114300" algn="l" defTabSz="622300">
+            <a:lnSpc>
+              <a:spcPct val="100000"/>
+            </a:lnSpc>
+            <a:spcBef>
+              <a:spcPct val="0"/>
+            </a:spcBef>
+            <a:spcAft>
+              <a:spcPct val="15000"/>
+            </a:spcAft>
+            <a:buChar char="•"/>
+          </a:pPr>
+          <a:r>
+            <a:rPr lang="sk-SK" sz="1400" kern="1200" dirty="0"/>
+            <a:t>Vzory volatility</a:t>
+          </a:r>
+        </a:p>
+        <a:p>
+          <a:pPr marL="114300" lvl="1" indent="-114300" algn="l" defTabSz="622300">
+            <a:lnSpc>
+              <a:spcPct val="100000"/>
+            </a:lnSpc>
+            <a:spcBef>
+              <a:spcPct val="0"/>
+            </a:spcBef>
+            <a:spcAft>
+              <a:spcPct val="15000"/>
+            </a:spcAft>
+            <a:buChar char="•"/>
+          </a:pPr>
+          <a:r>
+            <a:rPr lang="sk-SK" sz="1400" kern="1200" dirty="0"/>
+            <a:t>Komparácia trhov a modelov</a:t>
+          </a:r>
+        </a:p>
+      </dsp:txBody>
+      <dsp:txXfrm>
+        <a:off x="9244812" y="1398665"/>
+        <a:ext cx="1657246" cy="1050963"/>
+      </dsp:txXfrm>
+    </dsp:sp>
+    <dsp:sp modelId="{6B4282B9-062B-41C5-898A-A66339751090}">
+      <dsp:nvSpPr>
+        <dsp:cNvPr id="0" name=""/>
+        <dsp:cNvSpPr/>
+      </dsp:nvSpPr>
+      <dsp:spPr>
+        <a:xfrm>
+          <a:off x="9594924" y="2482326"/>
+          <a:ext cx="1531236" cy="608922"/>
+        </a:xfrm>
+        <a:prstGeom prst="roundRect">
+          <a:avLst>
+            <a:gd name="adj" fmla="val 10000"/>
+          </a:avLst>
+        </a:prstGeom>
+        <a:solidFill>
+          <a:schemeClr val="accent1">
+            <a:hueOff val="0"/>
+            <a:satOff val="0"/>
+            <a:lumOff val="0"/>
+            <a:alphaOff val="0"/>
+          </a:schemeClr>
+        </a:solidFill>
+        <a:ln w="12700" cap="flat" cmpd="sng" algn="ctr">
+          <a:solidFill>
+            <a:schemeClr val="lt1">
+              <a:hueOff val="0"/>
+              <a:satOff val="0"/>
+              <a:lumOff val="0"/>
+              <a:alphaOff val="0"/>
+            </a:schemeClr>
+          </a:solidFill>
+          <a:prstDash val="solid"/>
+          <a:miter lim="800000"/>
+        </a:ln>
+        <a:effectLst/>
+      </dsp:spPr>
+      <dsp:style>
+        <a:lnRef idx="2">
+          <a:scrgbClr r="0" g="0" b="0"/>
+        </a:lnRef>
+        <a:fillRef idx="1">
+          <a:scrgbClr r="0" g="0" b="0"/>
+        </a:fillRef>
+        <a:effectRef idx="0">
+          <a:scrgbClr r="0" g="0" b="0"/>
+        </a:effectRef>
+        <a:fontRef idx="minor">
+          <a:schemeClr val="lt1"/>
+        </a:fontRef>
+      </dsp:style>
+      <dsp:txBody>
+        <a:bodyPr spcFirstLastPara="0" vert="horz" wrap="square" lIns="38100" tIns="25400" rIns="38100" bIns="25400" numCol="1" spcCol="1270" anchor="ctr" anchorCtr="0">
+          <a:noAutofit/>
+        </a:bodyPr>
+        <a:lstStyle/>
+        <a:p>
+          <a:pPr marL="0" lvl="0" indent="0" algn="ctr" defTabSz="889000">
+            <a:lnSpc>
+              <a:spcPct val="90000"/>
+            </a:lnSpc>
+            <a:spcBef>
+              <a:spcPct val="0"/>
+            </a:spcBef>
+            <a:spcAft>
+              <a:spcPct val="35000"/>
+            </a:spcAft>
+            <a:buNone/>
+          </a:pPr>
+          <a:r>
+            <a:rPr lang="sk-SK" sz="2000" b="1" kern="1200" dirty="0">
+              <a:effectLst>
+                <a:outerShdw blurRad="38100" dist="38100" dir="2700000" algn="tl">
+                  <a:srgbClr val="000000">
+                    <a:alpha val="43137"/>
+                  </a:srgbClr>
+                </a:outerShdw>
+              </a:effectLst>
+            </a:rPr>
+            <a:t>Výsledky</a:t>
+          </a:r>
+        </a:p>
+      </dsp:txBody>
+      <dsp:txXfrm>
+        <a:off x="9612759" y="2500161"/>
+        <a:ext cx="1495566" cy="573252"/>
+      </dsp:txXfrm>
+    </dsp:sp>
+  </dsp:spTree>
+</dsp:drawing>
+</file>
+
+<file path=ppt/diagrams/layout1.xml><?xml version="1.0" encoding="utf-8"?>
+<dgm:layoutDef xmlns:dgm="http://schemas.openxmlformats.org/drawingml/2006/diagram" xmlns:a="http://schemas.openxmlformats.org/drawingml/2006/main" uniqueId="urn:microsoft.com/office/officeart/2005/8/layout/hProcess4">
+  <dgm:title val=""/>
+  <dgm:desc val=""/>
+  <dgm:catLst>
+    <dgm:cat type="process" pri="4000"/>
+  </dgm:catLst>
+  <dgm:sampData>
+    <dgm:dataModel>
+      <dgm:ptLst>
+        <dgm:pt modelId="0" type="doc"/>
+        <dgm:pt modelId="1">
+          <dgm:prSet phldr="1"/>
+        </dgm:pt>
+        <dgm:pt modelId="11">
+          <dgm:prSet phldr="1"/>
+        </dgm:pt>
+        <dgm:pt modelId="12">
+          <dgm:prSet phldr="1"/>
+        </dgm:pt>
+        <dgm:pt modelId="2">
+          <dgm:prSet phldr="1"/>
+        </dgm:pt>
+        <dgm:pt modelId="21">
+          <dgm:prSet phldr="1"/>
+        </dgm:pt>
+        <dgm:pt modelId="22">
+          <dgm:prSet phldr="1"/>
+        </dgm:pt>
+        <dgm:pt modelId="3">
+          <dgm:prSet phldr="1"/>
+        </dgm:pt>
+        <dgm:pt modelId="31">
+          <dgm:prSet phldr="1"/>
+        </dgm:pt>
+        <dgm:pt modelId="32">
+          <dgm:prSet phldr="1"/>
+        </dgm:pt>
+      </dgm:ptLst>
+      <dgm:cxnLst>
+        <dgm:cxn modelId="4" srcId="0" destId="1" srcOrd="0" destOrd="0"/>
+        <dgm:cxn modelId="5" srcId="0" destId="2" srcOrd="1" destOrd="0"/>
+        <dgm:cxn modelId="6" srcId="0" destId="3" srcOrd="2" destOrd="0"/>
+        <dgm:cxn modelId="13" srcId="1" destId="11" srcOrd="0" destOrd="0"/>
+        <dgm:cxn modelId="14" srcId="1" destId="12" srcOrd="1" destOrd="0"/>
+        <dgm:cxn modelId="23" srcId="2" destId="21" srcOrd="0" destOrd="0"/>
+        <dgm:cxn modelId="24" srcId="2" destId="22" srcOrd="1" destOrd="0"/>
+        <dgm:cxn modelId="33" srcId="3" destId="31" srcOrd="0" destOrd="0"/>
+        <dgm:cxn modelId="34" srcId="3" destId="32" srcOrd="1" destOrd="0"/>
+      </dgm:cxnLst>
+      <dgm:bg/>
+      <dgm:whole/>
+    </dgm:dataModel>
+  </dgm:sampData>
+  <dgm:styleData>
+    <dgm:dataModel>
+      <dgm:ptLst>
+        <dgm:pt modelId="0" type="doc"/>
+        <dgm:pt modelId="1"/>
+        <dgm:pt modelId="11"/>
+        <dgm:pt modelId="2"/>
+        <dgm:pt modelId="21"/>
+      </dgm:ptLst>
+      <dgm:cxnLst>
+        <dgm:cxn modelId="4" srcId="0" destId="1" srcOrd="0" destOrd="0"/>
+        <dgm:cxn modelId="5" srcId="0" destId="2" srcOrd="1" destOrd="0"/>
+        <dgm:cxn modelId="13" srcId="1" destId="11" srcOrd="0" destOrd="0"/>
+        <dgm:cxn modelId="23" srcId="2" destId="21" srcOrd="0" destOrd="0"/>
+      </dgm:cxnLst>
+      <dgm:bg/>
+      <dgm:whole/>
+    </dgm:dataModel>
+  </dgm:styleData>
+  <dgm:clrData>
+    <dgm:dataModel>
+      <dgm:ptLst>
+        <dgm:pt modelId="0" type="doc"/>
+        <dgm:pt modelId="1"/>
+        <dgm:pt modelId="11"/>
+        <dgm:pt modelId="2"/>
+        <dgm:pt modelId="21"/>
+        <dgm:pt modelId="3"/>
+        <dgm:pt modelId="31"/>
+        <dgm:pt modelId="4"/>
+        <dgm:pt modelId="41"/>
+      </dgm:ptLst>
+      <dgm:cxnLst>
+        <dgm:cxn modelId="5" srcId="0" destId="1" srcOrd="0" destOrd="0"/>
+        <dgm:cxn modelId="6" srcId="0" destId="2" srcOrd="1" destOrd="0"/>
+        <dgm:cxn modelId="7" srcId="0" destId="3" srcOrd="2" destOrd="0"/>
+        <dgm:cxn modelId="8" srcId="0" destId="4" srcOrd="3" destOrd="0"/>
+        <dgm:cxn modelId="13" srcId="1" destId="11" srcOrd="0" destOrd="0"/>
+        <dgm:cxn modelId="23" srcId="2" destId="21" srcOrd="0" destOrd="0"/>
+        <dgm:cxn modelId="33" srcId="3" destId="31" srcOrd="0" destOrd="0"/>
+        <dgm:cxn modelId="43" srcId="4" destId="41" srcOrd="0" destOrd="0"/>
+      </dgm:cxnLst>
+      <dgm:bg/>
+      <dgm:whole/>
+    </dgm:dataModel>
+  </dgm:clrData>
+  <dgm:layoutNode name="Name0">
+    <dgm:varLst>
+      <dgm:dir/>
+      <dgm:animLvl val="lvl"/>
+      <dgm:resizeHandles val="exact"/>
+    </dgm:varLst>
+    <dgm:alg type="composite"/>
+    <dgm:shape xmlns:r="http://schemas.openxmlformats.org/officeDocument/2006/relationships" r:blip="">
+      <dgm:adjLst/>
+    </dgm:shape>
+    <dgm:presOf/>
+    <dgm:constrLst>
+      <dgm:constr type="w" for="ch" forName="tSp" refType="w"/>
+      <dgm:constr type="h" for="ch" forName="tSp" refType="h" fact="0.15"/>
+      <dgm:constr type="l" for="ch" forName="tSp"/>
+      <dgm:constr type="t" for="ch" forName="tSp"/>
+      <dgm:constr type="w" for="ch" forName="bSp" refType="w"/>
+      <dgm:constr type="h" for="ch" forName="bSp" refType="h" fact="0.15"/>
+      <dgm:constr type="l" for="ch" forName="bSp"/>
+      <dgm:constr type="t" for="ch" forName="bSp" refType="h" fact="0.85"/>
+      <dgm:constr type="w" for="ch" forName="process" refType="w"/>
+      <dgm:constr type="h" for="ch" forName="process" refType="h" fact="0.7"/>
+      <dgm:constr type="l" for="ch" forName="process"/>
+      <dgm:constr type="t" for="ch" forName="process" refType="h" fact="0.15"/>
+    </dgm:constrLst>
+    <dgm:ruleLst/>
+    <dgm:layoutNode name="tSp">
+      <dgm:alg type="sp"/>
+      <dgm:shape xmlns:r="http://schemas.openxmlformats.org/officeDocument/2006/relationships" r:blip="">
+        <dgm:adjLst/>
+      </dgm:shape>
+      <dgm:presOf/>
+      <dgm:constrLst/>
+      <dgm:ruleLst/>
+    </dgm:layoutNode>
+    <dgm:layoutNode name="bSp">
+      <dgm:alg type="sp"/>
+      <dgm:shape xmlns:r="http://schemas.openxmlformats.org/officeDocument/2006/relationships" r:blip="">
+        <dgm:adjLst/>
+      </dgm:shape>
+      <dgm:presOf/>
+      <dgm:constrLst/>
+      <dgm:ruleLst/>
+    </dgm:layoutNode>
+    <dgm:layoutNode name="process">
+      <dgm:choose name="Name1">
+        <dgm:if name="Name2" func="var" arg="dir" op="equ" val="norm">
+          <dgm:alg type="lin">
+            <dgm:param type="linDir" val="fromL"/>
+          </dgm:alg>
+        </dgm:if>
+        <dgm:else name="Name3">
+          <dgm:alg type="lin">
+            <dgm:param type="linDir" val="fromR"/>
+          </dgm:alg>
+        </dgm:else>
+      </dgm:choose>
+      <dgm:shape xmlns:r="http://schemas.openxmlformats.org/officeDocument/2006/relationships" r:blip="">
+        <dgm:adjLst/>
+      </dgm:shape>
+      <dgm:presOf/>
+      <dgm:constrLst>
+        <dgm:constr type="w" for="ch" forName="composite1" refType="w"/>
+        <dgm:constr type="w" for="ch" forName="composite2" refType="w" refFor="ch" refForName="composite1" op="equ"/>
+        <dgm:constr type="h" for="ch" forName="composite1" refType="h"/>
+        <dgm:constr type="h" for="ch" forName="composite2" refType="h" refFor="ch" refForName="composite1" op="equ"/>
+        <dgm:constr type="primFontSz" for="des" forName="parentNode1" val="65"/>
+        <dgm:constr type="primFontSz" for="des" forName="parentNode2" refType="primFontSz" refFor="des" refForName="parentNode1" op="equ"/>
+        <dgm:constr type="secFontSz" for="des" forName="childNode1tx" val="65"/>
+        <dgm:constr type="secFontSz" for="des" forName="childNode2tx" refType="secFontSz" refFor="des" refForName="childNode1tx" op="equ"/>
+        <dgm:constr type="w" for="des" ptType="sibTrans" refType="w" refFor="ch" refForName="composite1" op="equ" fact="0.05"/>
+      </dgm:constrLst>
+      <dgm:ruleLst/>
+      <dgm:forEach name="Name4" axis="ch" ptType="node" step="2">
+        <dgm:layoutNode name="composite1">
+          <dgm:alg type="composite">
+            <dgm:param type="ar" val="0.943"/>
+          </dgm:alg>
+          <dgm:shape xmlns:r="http://schemas.openxmlformats.org/officeDocument/2006/relationships" r:blip="">
+            <dgm:adjLst/>
+          </dgm:shape>
+          <dgm:presOf/>
+          <dgm:choose name="Name5">
+            <dgm:if name="Name6" func="var" arg="dir" op="equ" val="norm">
+              <dgm:constrLst>
+                <dgm:constr type="h" refType="w" fact="1.06"/>
+                <dgm:constr type="w" for="ch" forName="dummyNode1" refType="w"/>
+                <dgm:constr type="h" for="ch" forName="dummyNode1" refType="h"/>
+                <dgm:constr type="t" for="ch" forName="dummyNode1"/>
+                <dgm:constr type="l" for="ch" forName="dummyNode1"/>
+                <dgm:constr type="w" for="ch" forName="childNode1" refType="w" fact="0.9"/>
+                <dgm:constr type="h" for="ch" forName="childNode1" refType="h" fact="0.7"/>
+                <dgm:constr type="t" for="ch" forName="childNode1" refType="h" fact="0.15"/>
+                <dgm:constr type="l" for="ch" forName="childNode1"/>
+                <dgm:constr type="w" for="ch" forName="childNode1tx" refType="w" fact="0.9"/>
+                <dgm:constr type="h" for="ch" forName="childNode1tx" refType="h" fact="0.55"/>
+                <dgm:constr type="t" for="ch" forName="childNode1tx" refType="h" fact="0.15"/>
+                <dgm:constr type="l" for="ch" forName="childNode1tx"/>
+                <dgm:constr type="w" for="ch" forName="parentNode1" refType="w" fact="0.8"/>
+                <dgm:constr type="h" for="ch" forName="parentNode1" refType="h" fact="0.3"/>
+                <dgm:constr type="t" for="ch" forName="parentNode1" refType="h" fact="0.7"/>
+                <dgm:constr type="l" for="ch" forName="parentNode1" refType="w" fact="0.2"/>
+                <dgm:constr type="w" for="ch" forName="connSite1" refType="w" fact="0.01"/>
+                <dgm:constr type="h" for="ch" forName="connSite1" refType="h" fact="0.01"/>
+                <dgm:constr type="t" for="ch" forName="connSite1"/>
+                <dgm:constr type="l" for="ch" forName="connSite1" refType="w" fact="0.35"/>
+              </dgm:constrLst>
+            </dgm:if>
+            <dgm:else name="Name7">
+              <dgm:constrLst>
+                <dgm:constr type="h" refType="w" fact="1.06"/>
+                <dgm:constr type="w" for="ch" forName="dummyNode1" refType="w"/>
+                <dgm:constr type="h" for="ch" forName="dummyNode1" refType="h"/>
+                <dgm:constr type="t" for="ch" forName="dummyNode1"/>
+                <dgm:constr type="l" for="ch" forName="dummyNode1"/>
+                <dgm:constr type="w" for="ch" forName="childNode1" refType="w" fact="0.9"/>
+                <dgm:constr type="h" for="ch" forName="childNode1" refType="h" fact="0.7"/>
+                <dgm:constr type="t" for="ch" forName="childNode1" refType="h" fact="0.15"/>
+                <dgm:constr type="l" for="ch" forName="childNode1" refType="w" fact="0.1"/>
+                <dgm:constr type="w" for="ch" forName="childNode1tx" refType="w" fact="0.9"/>
+                <dgm:constr type="h" for="ch" forName="childNode1tx" refType="h" fact="0.55"/>
+                <dgm:constr type="t" for="ch" forName="childNode1tx" refType="h" fact="0.15"/>
+                <dgm:constr type="l" for="ch" forName="childNode1tx" refType="w" fact="0.1"/>
+                <dgm:constr type="w" for="ch" forName="parentNode1" refType="w" fact="0.8"/>
+                <dgm:constr type="h" for="ch" forName="parentNode1" refType="h" fact="0.3"/>
+                <dgm:constr type="t" for="ch" forName="parentNode1" refType="h" fact="0.7"/>
+                <dgm:constr type="l" for="ch" forName="parentNode1"/>
+                <dgm:constr type="w" for="ch" forName="connSite1" refType="w" fact="0.01"/>
+                <dgm:constr type="h" for="ch" forName="connSite1" refType="h" fact="0.01"/>
+                <dgm:constr type="t" for="ch" forName="connSite1"/>
+                <dgm:constr type="l" for="ch" forName="connSite1" refType="w" fact="0.65"/>
+              </dgm:constrLst>
+            </dgm:else>
+          </dgm:choose>
+          <dgm:ruleLst/>
+          <dgm:layoutNode name="dummyNode1">
+            <dgm:alg type="sp"/>
+            <dgm:shape xmlns:r="http://schemas.openxmlformats.org/officeDocument/2006/relationships" type="rect" r:blip="" hideGeom="1">
+              <dgm:adjLst/>
+            </dgm:shape>
+            <dgm:presOf/>
+            <dgm:constrLst/>
+            <dgm:ruleLst/>
+          </dgm:layoutNode>
+          <dgm:layoutNode name="childNode1" styleLbl="bgAcc1">
+            <dgm:varLst>
+              <dgm:bulletEnabled val="1"/>
+            </dgm:varLst>
+            <dgm:alg type="sp"/>
+            <dgm:shape xmlns:r="http://schemas.openxmlformats.org/officeDocument/2006/relationships" type="roundRect" r:blip="">
+              <dgm:adjLst>
+                <dgm:adj idx="1" val="0.1"/>
+              </dgm:adjLst>
+            </dgm:shape>
+            <dgm:presOf axis="des" ptType="node"/>
+            <dgm:constrLst/>
+            <dgm:ruleLst/>
+          </dgm:layoutNode>
+          <dgm:layoutNode name="childNode1tx" styleLbl="bgAcc1">
+            <dgm:varLst>
+              <dgm:bulletEnabled val="1"/>
+            </dgm:varLst>
+            <dgm:alg type="tx">
+              <dgm:param type="stBulletLvl" val="1"/>
+            </dgm:alg>
+            <dgm:shape xmlns:r="http://schemas.openxmlformats.org/officeDocument/2006/relationships" type="roundRect" r:blip="" hideGeom="1">
+              <dgm:adjLst>
+                <dgm:adj idx="1" val="0.1"/>
+              </dgm:adjLst>
+            </dgm:shape>
+            <dgm:presOf axis="des" ptType="node"/>
+            <dgm:constrLst>
+              <dgm:constr type="secFontSz" val="65"/>
+              <dgm:constr type="primFontSz" refType="secFontSz"/>
+              <dgm:constr type="tMarg" refType="secFontSz" fact="0.15"/>
+              <dgm:constr type="bMarg" refType="secFontSz" fact="0.15"/>
+              <dgm:constr type="lMarg" refType="secFontSz" fact="0.15"/>
+              <dgm:constr type="rMarg" refType="secFontSz" fact="0.15"/>
+            </dgm:constrLst>
+            <dgm:ruleLst>
+              <dgm:rule type="secFontSz" val="5" fact="NaN" max="NaN"/>
+            </dgm:ruleLst>
+          </dgm:layoutNode>
+          <dgm:layoutNode name="parentNode1" styleLbl="node1">
+            <dgm:varLst>
+              <dgm:chMax val="1"/>
+              <dgm:bulletEnabled val="1"/>
+            </dgm:varLst>
+            <dgm:alg type="tx"/>
+            <dgm:shape xmlns:r="http://schemas.openxmlformats.org/officeDocument/2006/relationships" type="roundRect" r:blip="">
+              <dgm:adjLst>
+                <dgm:adj idx="1" val="0.1"/>
+              </dgm:adjLst>
+            </dgm:shape>
+            <dgm:presOf axis="self"/>
+            <dgm:constrLst>
+              <dgm:constr type="tMarg" refType="primFontSz" fact="0.1"/>
+              <dgm:constr type="bMarg" refType="primFontSz" fact="0.1"/>
+              <dgm:constr type="lMarg" refType="primFontSz" fact="0.15"/>
+              <dgm:constr type="rMarg" refType="primFontSz" fact="0.15"/>
+            </dgm:constrLst>
+            <dgm:ruleLst>
+              <dgm:rule type="primFontSz" val="5" fact="NaN" max="NaN"/>
+            </dgm:ruleLst>
+          </dgm:layoutNode>
+          <dgm:layoutNode name="connSite1" moveWith="childNode1">
+            <dgm:alg type="sp"/>
+            <dgm:shape xmlns:r="http://schemas.openxmlformats.org/officeDocument/2006/relationships" r:blip="">
+              <dgm:adjLst/>
+            </dgm:shape>
+            <dgm:presOf/>
+            <dgm:constrLst/>
+            <dgm:ruleLst/>
+          </dgm:layoutNode>
+        </dgm:layoutNode>
+        <dgm:forEach name="Name8" axis="followSib" ptType="sibTrans" cnt="1">
+          <dgm:layoutNode name="Name9">
+            <dgm:alg type="conn">
+              <dgm:param type="connRout" val="curve"/>
+              <dgm:param type="srcNode" val="parentNode1"/>
+              <dgm:param type="dstNode" val="connSite2"/>
+              <dgm:param type="begPts" val="bCtr"/>
+              <dgm:param type="endPts" val="bCtr"/>
+            </dgm:alg>
+            <dgm:shape xmlns:r="http://schemas.openxmlformats.org/officeDocument/2006/relationships" type="conn" r:blip="" zOrderOff="-2">
+              <dgm:adjLst/>
+            </dgm:shape>
+            <dgm:presOf axis="self"/>
+            <dgm:choose name="Name10">
+              <dgm:if name="Name11" func="var" arg="dir" op="equ" val="norm">
+                <dgm:constrLst>
+                  <dgm:constr type="h" refType="w" fact="0.35"/>
+                  <dgm:constr type="wArH" refType="h"/>
+                  <dgm:constr type="hArH" refType="h"/>
+                  <dgm:constr type="connDist"/>
+                  <dgm:constr type="diam" refType="connDist" fact="-1.15"/>
+                  <dgm:constr type="begPad"/>
+                  <dgm:constr type="endPad"/>
+                </dgm:constrLst>
+              </dgm:if>
+              <dgm:else name="Name12">
+                <dgm:constrLst>
+                  <dgm:constr type="h" refType="w" fact="0.35"/>
+                  <dgm:constr type="wArH" refType="h"/>
+                  <dgm:constr type="hArH" refType="h"/>
+                  <dgm:constr type="connDist"/>
+                  <dgm:constr type="diam" refType="connDist" fact="1.15"/>
+                  <dgm:constr type="begPad"/>
+                  <dgm:constr type="endPad"/>
+                </dgm:constrLst>
+              </dgm:else>
+            </dgm:choose>
+            <dgm:ruleLst/>
+          </dgm:layoutNode>
+        </dgm:forEach>
+        <dgm:forEach name="Name13" axis="followSib" ptType="node" cnt="1">
+          <dgm:layoutNode name="composite2">
+            <dgm:alg type="composite">
+              <dgm:param type="ar" val="0.943"/>
+            </dgm:alg>
+            <dgm:shape xmlns:r="http://schemas.openxmlformats.org/officeDocument/2006/relationships" r:blip="">
+              <dgm:adjLst/>
+            </dgm:shape>
+            <dgm:presOf/>
+            <dgm:choose name="Name14">
+              <dgm:if name="Name15" func="var" arg="dir" op="equ" val="norm">
+                <dgm:constrLst>
+                  <dgm:constr type="h" refType="w" fact="1.06"/>
+                  <dgm:constr type="w" for="ch" forName="dummyNode2" refType="w"/>
+                  <dgm:constr type="h" for="ch" forName="dummyNode2" refType="h"/>
+                  <dgm:constr type="t" for="ch" forName="dummyNode2"/>
+                  <dgm:constr type="l" for="ch" forName="dummyNode2"/>
+                  <dgm:constr type="w" for="ch" forName="childNode2" refType="w" fact="0.9"/>
+                  <dgm:constr type="h" for="ch" forName="childNode2" refType="h" fact="0.7"/>
+                  <dgm:constr type="t" for="ch" forName="childNode2" refType="h" fact="0.15"/>
+                  <dgm:constr type="l" for="ch" forName="childNode2"/>
+                  <dgm:constr type="w" for="ch" forName="childNode2tx" refType="w" fact="0.9"/>
+                  <dgm:constr type="h" for="ch" forName="childNode2tx" refType="h" fact="0.55"/>
+                  <dgm:constr type="t" for="ch" forName="childNode2tx" refType="h" fact="0.3"/>
+                  <dgm:constr type="l" for="ch" forName="childNode2tx"/>
+                  <dgm:constr type="w" for="ch" forName="parentNode2" refType="w" fact="0.8"/>
+                  <dgm:constr type="h" for="ch" forName="parentNode2" refType="h" fact="0.3"/>
+                  <dgm:constr type="t" for="ch" forName="parentNode2"/>
+                  <dgm:constr type="l" for="ch" forName="parentNode2" refType="w" fact="0.2"/>
+                  <dgm:constr type="w" for="ch" forName="connSite2" refType="w" fact="0.01"/>
+                  <dgm:constr type="h" for="ch" forName="connSite2" refType="h" fact="0.01"/>
+                  <dgm:constr type="t" for="ch" forName="connSite2" refType="h" fact="0.99"/>
+                  <dgm:constr type="l" for="ch" forName="connSite2" refType="w" fact="0.25"/>
+                </dgm:constrLst>
+              </dgm:if>
+              <dgm:else name="Name16">
+                <dgm:constrLst>
+                  <dgm:constr type="h" refType="w" fact="1.06"/>
+                  <dgm:constr type="w" for="ch" forName="dummyNode2" refType="w"/>
+                  <dgm:constr type="h" for="ch" forName="dummyNode2" refType="h"/>
+                  <dgm:constr type="t" for="ch" forName="dummyNode2"/>
+                  <dgm:constr type="l" for="ch" forName="dummyNode2"/>
+                  <dgm:constr type="w" for="ch" forName="childNode2" refType="w" fact="0.9"/>
+                  <dgm:constr type="h" for="ch" forName="childNode2" refType="h" fact="0.7"/>
+                  <dgm:constr type="t" for="ch" forName="childNode2" refType="h" fact="0.15"/>
+                  <dgm:constr type="l" for="ch" forName="childNode2" refType="w" fact="0.1"/>
+                  <dgm:constr type="w" for="ch" forName="childNode2tx" refType="w" fact="0.9"/>
+                  <dgm:constr type="h" for="ch" forName="childNode2tx" refType="h" fact="0.55"/>
+                  <dgm:constr type="t" for="ch" forName="childNode2tx" refType="h" fact="0.3"/>
+                  <dgm:constr type="l" for="ch" forName="childNode2tx" refType="w" fact="0.1"/>
+                  <dgm:constr type="w" for="ch" forName="parentNode2" refType="w" fact="0.8"/>
+                  <dgm:constr type="h" for="ch" forName="parentNode2" refType="h" fact="0.3"/>
+                  <dgm:constr type="t" for="ch" forName="parentNode2"/>
+                  <dgm:constr type="l" for="ch" forName="parentNode2"/>
+                  <dgm:constr type="w" for="ch" forName="connSite2" refType="w" fact="0.01"/>
+                  <dgm:constr type="h" for="ch" forName="connSite2" refType="h" fact="0.01"/>
+                  <dgm:constr type="t" for="ch" forName="connSite2" refType="h" fact="0.99"/>
+                  <dgm:constr type="l" for="ch" forName="connSite2" refType="w" fact="0.85"/>
+                </dgm:constrLst>
+              </dgm:else>
+            </dgm:choose>
+            <dgm:ruleLst/>
+            <dgm:layoutNode name="dummyNode2">
+              <dgm:alg type="sp"/>
+              <dgm:shape xmlns:r="http://schemas.openxmlformats.org/officeDocument/2006/relationships" type="rect" r:blip="" hideGeom="1">
+                <dgm:adjLst/>
+              </dgm:shape>
+              <dgm:presOf/>
+              <dgm:constrLst/>
+              <dgm:ruleLst/>
+            </dgm:layoutNode>
+            <dgm:layoutNode name="childNode2" styleLbl="bgAcc1">
+              <dgm:varLst>
+                <dgm:bulletEnabled val="1"/>
+              </dgm:varLst>
+              <dgm:alg type="sp"/>
+              <dgm:shape xmlns:r="http://schemas.openxmlformats.org/officeDocument/2006/relationships" type="roundRect" r:blip="">
+                <dgm:adjLst>
+                  <dgm:adj idx="1" val="0.1"/>
+                </dgm:adjLst>
+              </dgm:shape>
+              <dgm:presOf axis="des" ptType="node"/>
+              <dgm:constrLst/>
+              <dgm:ruleLst/>
+            </dgm:layoutNode>
+            <dgm:layoutNode name="childNode2tx" styleLbl="bgAcc1">
+              <dgm:varLst>
+                <dgm:bulletEnabled val="1"/>
+              </dgm:varLst>
+              <dgm:alg type="tx">
+                <dgm:param type="stBulletLvl" val="1"/>
+              </dgm:alg>
+              <dgm:shape xmlns:r="http://schemas.openxmlformats.org/officeDocument/2006/relationships" type="roundRect" r:blip="" hideGeom="1">
+                <dgm:adjLst>
+                  <dgm:adj idx="1" val="0.1"/>
+                </dgm:adjLst>
+              </dgm:shape>
+              <dgm:presOf axis="des" ptType="node"/>
+              <dgm:constrLst>
+                <dgm:constr type="secFontSz" val="65"/>
+                <dgm:constr type="primFontSz" refType="secFontSz"/>
+                <dgm:constr type="tMarg" refType="secFontSz" fact="0.15"/>
+                <dgm:constr type="bMarg" refType="secFontSz" fact="0.15"/>
+                <dgm:constr type="lMarg" refType="secFontSz" fact="0.15"/>
+                <dgm:constr type="rMarg" refType="secFontSz" fact="0.15"/>
+              </dgm:constrLst>
+              <dgm:ruleLst>
+                <dgm:rule type="secFontSz" val="5" fact="NaN" max="NaN"/>
+              </dgm:ruleLst>
+            </dgm:layoutNode>
+            <dgm:layoutNode name="parentNode2" styleLbl="node1">
+              <dgm:varLst>
+                <dgm:chMax val="0"/>
+                <dgm:bulletEnabled val="1"/>
+              </dgm:varLst>
+              <dgm:alg type="tx"/>
+              <dgm:shape xmlns:r="http://schemas.openxmlformats.org/officeDocument/2006/relationships" type="roundRect" r:blip="">
+                <dgm:adjLst>
+                  <dgm:adj idx="1" val="0.1"/>
+                </dgm:adjLst>
+              </dgm:shape>
+              <dgm:presOf axis="self"/>
+              <dgm:constrLst>
+                <dgm:constr type="tMarg" refType="primFontSz" fact="0.1"/>
+                <dgm:constr type="bMarg" refType="primFontSz" fact="0.1"/>
+                <dgm:constr type="lMarg" refType="primFontSz" fact="0.15"/>
+                <dgm:constr type="rMarg" refType="primFontSz" fact="0.15"/>
+              </dgm:constrLst>
+              <dgm:ruleLst>
+                <dgm:rule type="primFontSz" val="5" fact="NaN" max="NaN"/>
+              </dgm:ruleLst>
+            </dgm:layoutNode>
+            <dgm:layoutNode name="connSite2" moveWith="childNode2">
+              <dgm:alg type="sp"/>
+              <dgm:shape xmlns:r="http://schemas.openxmlformats.org/officeDocument/2006/relationships" r:blip="">
+                <dgm:adjLst/>
+              </dgm:shape>
+              <dgm:presOf/>
+              <dgm:constrLst/>
+              <dgm:ruleLst/>
+            </dgm:layoutNode>
+          </dgm:layoutNode>
+          <dgm:forEach name="Name17" axis="followSib" ptType="sibTrans" cnt="1">
+            <dgm:layoutNode name="Name18">
+              <dgm:alg type="conn">
+                <dgm:param type="connRout" val="curve"/>
+                <dgm:param type="srcNode" val="parentNode2"/>
+                <dgm:param type="dstNode" val="connSite1"/>
+                <dgm:param type="begPts" val="tCtr"/>
+                <dgm:param type="endPts" val="tCtr"/>
+              </dgm:alg>
+              <dgm:shape xmlns:r="http://schemas.openxmlformats.org/officeDocument/2006/relationships" type="conn" r:blip="" zOrderOff="-2">
+                <dgm:adjLst/>
+              </dgm:shape>
+              <dgm:presOf axis="self"/>
+              <dgm:choose name="Name19">
+                <dgm:if name="Name20" func="var" arg="dir" op="equ" val="norm">
+                  <dgm:constrLst>
+                    <dgm:constr type="h" refType="w" fact="0.35"/>
+                    <dgm:constr type="wArH" refType="h"/>
+                    <dgm:constr type="hArH" refType="h"/>
+                    <dgm:constr type="connDist"/>
+                    <dgm:constr type="diam" refType="connDist" fact="1.15"/>
+                    <dgm:constr type="begPad"/>
+                    <dgm:constr type="endPad"/>
+                  </dgm:constrLst>
+                </dgm:if>
+                <dgm:else name="Name21">
+                  <dgm:constrLst>
+                    <dgm:constr type="h" refType="w" fact="0.35"/>
+                    <dgm:constr type="wArH" refType="h"/>
+                    <dgm:constr type="hArH" refType="h"/>
+                    <dgm:constr type="connDist"/>
+                    <dgm:constr type="diam" refType="connDist" fact="-1.15"/>
+                    <dgm:constr type="begPad"/>
+                    <dgm:constr type="endPad"/>
+                  </dgm:constrLst>
+                </dgm:else>
+              </dgm:choose>
+              <dgm:ruleLst/>
+            </dgm:layoutNode>
+          </dgm:forEach>
+        </dgm:forEach>
+      </dgm:forEach>
+    </dgm:layoutNode>
+  </dgm:layoutNode>
+</dgm:layoutDef>
+</file>
+
+<file path=ppt/diagrams/quickStyle1.xml><?xml version="1.0" encoding="utf-8"?>
+<dgm:styleDef xmlns:dgm="http://schemas.openxmlformats.org/drawingml/2006/diagram" xmlns:a="http://schemas.openxmlformats.org/drawingml/2006/main" uniqueId="urn:microsoft.com/office/officeart/2005/8/quickstyle/simple1">
+  <dgm:title val=""/>
+  <dgm:desc val=""/>
+  <dgm:catLst>
+    <dgm:cat type="simple" pri="10100"/>
+  </dgm:catLst>
+  <dgm:scene3d>
+    <a:camera prst="orthographicFront"/>
+    <a:lightRig rig="threePt" dir="t"/>
+  </dgm:scene3d>
+  <dgm:styleLbl name="node0">
+    <dgm:scene3d>
+      <a:camera prst="orthographicFront"/>
+      <a:lightRig rig="threePt" dir="t"/>
+    </dgm:scene3d>
+    <dgm:sp3d/>
+    <dgm:txPr/>
+    <dgm:style>
+      <a:lnRef idx="2">
+        <a:scrgbClr r="0" g="0" b="0"/>
+      </a:lnRef>
+      <a:fillRef idx="1">
+        <a:scrgbClr r="0" g="0" b="0"/>
+      </a:fillRef>
+      <a:effectRef idx="0">
+        <a:scrgbClr r="0" g="0" b="0"/>
+      </a:effectRef>
+      <a:fontRef idx="minor">
+        <a:schemeClr val="lt1"/>
+      </a:fontRef>
+    </dgm:style>
+  </dgm:styleLbl>
+  <dgm:styleLbl name="lnNode1">
+    <dgm:scene3d>
+      <a:camera prst="orthographicFront"/>
+      <a:lightRig rig="threePt" dir="t"/>
+    </dgm:scene3d>
+    <dgm:sp3d/>
+    <dgm:txPr/>
+    <dgm:style>
+      <a:lnRef idx="2">
+        <a:scrgbClr r="0" g="0" b="0"/>
+      </a:lnRef>
+      <a:fillRef idx="1">
+        <a:scrgbClr r="0" g="0" b="0"/>
+      </a:fillRef>
+      <a:effectRef idx="0">
+        <a:scrgbClr r="0" g="0" b="0"/>
+      </a:effectRef>
+      <a:fontRef idx="minor">
+        <a:schemeClr val="lt1"/>
+      </a:fontRef>
+    </dgm:style>
+  </dgm:styleLbl>
+  <dgm:styleLbl name="vennNode1">
+    <dgm:scene3d>
+      <a:camera prst="orthographicFront"/>
+      <a:lightRig rig="threePt" dir="t"/>
+    </dgm:scene3d>
+    <dgm:sp3d/>
+    <dgm:txPr/>
+    <dgm:style>
+      <a:lnRef idx="2">
+        <a:scrgbClr r="0" g="0" b="0"/>
+      </a:lnRef>
+      <a:fillRef idx="1">
+        <a:scrgbClr r="0" g="0" b="0"/>
+      </a:fillRef>
+      <a:effectRef idx="0">
+        <a:scrgbClr r="0" g="0" b="0"/>
+      </a:effectRef>
+      <a:fontRef idx="minor">
+        <a:schemeClr val="tx1"/>
+      </a:fontRef>
+    </dgm:style>
+  </dgm:styleLbl>
+  <dgm:styleLbl name="alignNode1">
+    <dgm:scene3d>
+      <a:camera prst="orthographicFront"/>
+      <a:lightRig rig="threePt" dir="t"/>
+    </dgm:scene3d>
+    <dgm:sp3d/>
+    <dgm:txPr/>
+    <dgm:style>
+      <a:lnRef idx="2">
+        <a:scrgbClr r="0" g="0" b="0"/>
+      </a:lnRef>
+      <a:fillRef idx="1">
+        <a:scrgbClr r="0" g="0" b="0"/>
+      </a:fillRef>
+      <a:effectRef idx="0">
+        <a:scrgbClr r="0" g="0" b="0"/>
+      </a:effectRef>
+      <a:fontRef idx="minor">
+        <a:schemeClr val="lt1"/>
+      </a:fontRef>
+    </dgm:style>
+  </dgm:styleLbl>
+  <dgm:styleLbl name="node1">
+    <dgm:scene3d>
+      <a:camera prst="orthographicFront"/>
+      <a:lightRig rig="threePt" dir="t"/>
+    </dgm:scene3d>
+    <dgm:sp3d/>
+    <dgm:txPr/>
+    <dgm:style>
+      <a:lnRef idx="2">
+        <a:scrgbClr r="0" g="0" b="0"/>
+      </a:lnRef>
+      <a:fillRef idx="1">
+        <a:scrgbClr r="0" g="0" b="0"/>
+      </a:fillRef>
+      <a:effectRef idx="0">
+        <a:scrgbClr r="0" g="0" b="0"/>
+      </a:effectRef>
+      <a:fontRef idx="minor">
+        <a:schemeClr val="lt1"/>
+      </a:fontRef>
+    </dgm:style>
+  </dgm:styleLbl>
+  <dgm:styleLbl name="node2">
+    <dgm:scene3d>
+      <a:camera prst="orthographicFront"/>
+      <a:lightRig rig="threePt" dir="t"/>
+    </dgm:scene3d>
+    <dgm:sp3d/>
+    <dgm:txPr/>
+    <dgm:style>
+      <a:lnRef idx="2">
+        <a:scrgbClr r="0" g="0" b="0"/>
+      </a:lnRef>
+      <a:fillRef idx="1">
+        <a:scrgbClr r="0" g="0" b="0"/>
+      </a:fillRef>
+      <a:effectRef idx="0">
+        <a:scrgbClr r="0" g="0" b="0"/>
+      </a:effectRef>
+      <a:fontRef idx="minor">
+        <a:schemeClr val="lt1"/>
+      </a:fontRef>
+    </dgm:style>
+  </dgm:styleLbl>
+  <dgm:styleLbl name="node3">
+    <dgm:scene3d>
+      <a:camera prst="orthographicFront"/>
+      <a:lightRig rig="threePt" dir="t"/>
+    </dgm:scene3d>
+    <dgm:sp3d/>
+    <dgm:txPr/>
+    <dgm:style>
+      <a:lnRef idx="2">
+        <a:scrgbClr r="0" g="0" b="0"/>
+      </a:lnRef>
+      <a:fillRef idx="1">
+        <a:scrgbClr r="0" g="0" b="0"/>
+      </a:fillRef>
+      <a:effectRef idx="0">
+        <a:scrgbClr r="0" g="0" b="0"/>
+      </a:effectRef>
+      <a:fontRef idx="minor">
+        <a:schemeClr val="lt1"/>
+      </a:fontRef>
+    </dgm:style>
+  </dgm:styleLbl>
+  <dgm:styleLbl name="node4">
+    <dgm:scene3d>
+      <a:camera prst="orthographicFront"/>
+      <a:lightRig rig="threePt" dir="t"/>
+    </dgm:scene3d>
+    <dgm:sp3d/>
+    <dgm:txPr/>
+    <dgm:style>
+      <a:lnRef idx="2">
+        <a:scrgbClr r="0" g="0" b="0"/>
+      </a:lnRef>
+      <a:fillRef idx="1">
+        <a:scrgbClr r="0" g="0" b="0"/>
+      </a:fillRef>
+      <a:effectRef idx="0">
+        <a:scrgbClr r="0" g="0" b="0"/>
+      </a:effectRef>
+      <a:fontRef idx="minor">
+        <a:schemeClr val="lt1"/>
+      </a:fontRef>
+    </dgm:style>
+  </dgm:styleLbl>
+  <dgm:styleLbl name="fgImgPlace1">
+    <dgm:scene3d>
+      <a:camera prst="orthographicFront"/>
+      <a:lightRig rig="threePt" dir="t"/>
+    </dgm:scene3d>
+    <dgm:sp3d/>
+    <dgm:txPr/>
+    <dgm:style>
+      <a:lnRef idx="2">
+        <a:scrgbClr r="0" g="0" b="0"/>
+      </a:lnRef>
+      <a:fillRef idx="1">
+        <a:scrgbClr r="0" g="0" b="0"/>
+      </a:fillRef>
+      <a:effectRef idx="0">
+        <a:scrgbClr r="0" g="0" b="0"/>
+      </a:effectRef>
+      <a:fontRef idx="minor"/>
+    </dgm:style>
+  </dgm:styleLbl>
+  <dgm:styleLbl name="alignImgPlace1">
+    <dgm:scene3d>
+      <a:camera prst="orthographicFront"/>
+      <a:lightRig rig="threePt" dir="t"/>
+    </dgm:scene3d>
+    <dgm:sp3d/>
+    <dgm:txPr/>
+    <dgm:style>
+      <a:lnRef idx="2">
+        <a:scrgbClr r="0" g="0" b="0"/>
+      </a:lnRef>
+      <a:fillRef idx="1">
+        <a:scrgbClr r="0" g="0" b="0"/>
+      </a:fillRef>
+      <a:effectRef idx="0">
+        <a:scrgbClr r="0" g="0" b="0"/>
+      </a:effectRef>
+      <a:fontRef idx="minor"/>
+    </dgm:style>
+  </dgm:styleLbl>
+  <dgm:styleLbl name="bgImgPlace1">
+    <dgm:scene3d>
+      <a:camera prst="orthographicFront"/>
+      <a:lightRig rig="threePt" dir="t"/>
+    </dgm:scene3d>
+    <dgm:sp3d/>
+    <dgm:txPr/>
+    <dgm:style>
+      <a:lnRef idx="2">
+        <a:scrgbClr r="0" g="0" b="0"/>
+      </a:lnRef>
+      <a:fillRef idx="1">
+        <a:scrgbClr r="0" g="0" b="0"/>
+      </a:fillRef>
+      <a:effectRef idx="0">
+        <a:scrgbClr r="0" g="0" b="0"/>
+      </a:effectRef>
+      <a:fontRef idx="minor"/>
+    </dgm:style>
+  </dgm:styleLbl>
+  <dgm:styleLbl name="sibTrans2D1">
+    <dgm:scene3d>
+      <a:camera prst="orthographicFront"/>
+      <a:lightRig rig="threePt" dir="t"/>
+    </dgm:scene3d>
+    <dgm:sp3d/>
+    <dgm:txPr/>
+    <dgm:style>
+      <a:lnRef idx="0">
+        <a:scrgbClr r="0" g="0" b="0"/>
+      </a:lnRef>
+      <a:fillRef idx="1">
+        <a:scrgbClr r="0" g="0" b="0"/>
+      </a:fillRef>
+      <a:effectRef idx="0">
+        <a:scrgbClr r="0" g="0" b="0"/>
+      </a:effectRef>
+      <a:fontRef idx="minor">
+        <a:schemeClr val="lt1"/>
+      </a:fontRef>
+    </dgm:style>
+  </dgm:styleLbl>
+  <dgm:styleLbl name="fgSibTrans2D1">
+    <dgm:scene3d>
+      <a:camera prst="orthographicFront"/>
+      <a:lightRig rig="threePt" dir="t"/>
+    </dgm:scene3d>
+    <dgm:sp3d/>
+    <dgm:txPr/>
+    <dgm:style>
+      <a:lnRef idx="0">
+        <a:scrgbClr r="0" g="0" b="0"/>
+      </a:lnRef>
+      <a:fillRef idx="1">
+        <a:scrgbClr r="0" g="0" b="0"/>
+      </a:fillRef>
+      <a:effectRef idx="0">
+        <a:scrgbClr r="0" g="0" b="0"/>
+      </a:effectRef>
+      <a:fontRef idx="minor">
+        <a:schemeClr val="lt1"/>
+      </a:fontRef>
+    </dgm:style>
+  </dgm:styleLbl>
+  <dgm:styleLbl name="bgSibTrans2D1">
+    <dgm:scene3d>
+      <a:camera prst="orthographicFront"/>
+      <a:lightRig rig="threePt" dir="t"/>
+    </dgm:scene3d>
+    <dgm:sp3d/>
+    <dgm:txPr/>
+    <dgm:style>
+      <a:lnRef idx="0">
+        <a:scrgbClr r="0" g="0" b="0"/>
+      </a:lnRef>
+      <a:fillRef idx="1">
+        <a:scrgbClr r="0" g="0" b="0"/>
+      </a:fillRef>
+      <a:effectRef idx="0">
+        <a:scrgbClr r="0" g="0" b="0"/>
+      </a:effectRef>
+      <a:fontRef idx="minor">
+        <a:schemeClr val="lt1"/>
+      </a:fontRef>
+    </dgm:style>
+  </dgm:styleLbl>
+  <dgm:styleLbl name="sibTrans1D1">
+    <dgm:scene3d>
+      <a:camera prst="orthographicFront"/>
+      <a:lightRig rig="threePt" dir="t"/>
+    </dgm:scene3d>
+    <dgm:sp3d/>
+    <dgm:txPr/>
+    <dgm:style>
+      <a:lnRef idx="1">
+        <a:scrgbClr r="0" g="0" b="0"/>
+      </a:lnRef>
+      <a:fillRef idx="0">
+        <a:scrgbClr r="0" g="0" b="0"/>
+      </a:fillRef>
+      <a:effectRef idx="0">
+        <a:scrgbClr r="0" g="0" b="0"/>
+      </a:effectRef>
+      <a:fontRef idx="minor"/>
+    </dgm:style>
+  </dgm:styleLbl>
+  <dgm:styleLbl name="callout">
+    <dgm:scene3d>
+      <a:camera prst="orthographicFront"/>
+      <a:lightRig rig="threePt" dir="t"/>
+    </dgm:scene3d>
+    <dgm:sp3d/>
+    <dgm:txPr/>
+    <dgm:style>
+      <a:lnRef idx="2">
+        <a:scrgbClr r="0" g="0" b="0"/>
+      </a:lnRef>
+      <a:fillRef idx="1">
+        <a:scrgbClr r="0" g="0" b="0"/>
+      </a:fillRef>
+      <a:effectRef idx="0">
+        <a:scrgbClr r="0" g="0" b="0"/>
+      </a:effectRef>
+      <a:fontRef idx="minor"/>
+    </dgm:style>
+  </dgm:styleLbl>
+  <dgm:styleLbl name="asst0">
+    <dgm:scene3d>
+      <a:camera prst="orthographicFront"/>
+      <a:lightRig rig="threePt" dir="t"/>
+    </dgm:scene3d>
+    <dgm:sp3d/>
+    <dgm:txPr/>
+    <dgm:style>
+      <a:lnRef idx="2">
+        <a:scrgbClr r="0" g="0" b="0"/>
+      </a:lnRef>
+      <a:fillRef idx="1">
+        <a:scrgbClr r="0" g="0" b="0"/>
+      </a:fillRef>
+      <a:effectRef idx="0">
+        <a:scrgbClr r="0" g="0" b="0"/>
+      </a:effectRef>
+      <a:fontRef idx="minor">
+        <a:schemeClr val="lt1"/>
+      </a:fontRef>
+    </dgm:style>
+  </dgm:styleLbl>
+  <dgm:styleLbl name="asst1">
+    <dgm:scene3d>
+      <a:camera prst="orthographicFront"/>
+      <a:lightRig rig="threePt" dir="t"/>
+    </dgm:scene3d>
+    <dgm:sp3d/>
+    <dgm:txPr/>
+    <dgm:style>
+      <a:lnRef idx="2">
+        <a:scrgbClr r="0" g="0" b="0"/>
+      </a:lnRef>
+      <a:fillRef idx="1">
+        <a:scrgbClr r="0" g="0" b="0"/>
+      </a:fillRef>
+      <a:effectRef idx="0">
+        <a:scrgbClr r="0" g="0" b="0"/>
+      </a:effectRef>
+      <a:fontRef idx="minor">
+        <a:schemeClr val="lt1"/>
+      </a:fontRef>
+    </dgm:style>
+  </dgm:styleLbl>
+  <dgm:styleLbl name="asst2">
+    <dgm:scene3d>
+      <a:camera prst="orthographicFront"/>
+      <a:lightRig rig="threePt" dir="t"/>
+    </dgm:scene3d>
+    <dgm:sp3d/>
+    <dgm:txPr/>
+    <dgm:style>
+      <a:lnRef idx="2">
+        <a:scrgbClr r="0" g="0" b="0"/>
+      </a:lnRef>
+      <a:fillRef idx="1">
+        <a:scrgbClr r="0" g="0" b="0"/>
+      </a:fillRef>
+      <a:effectRef idx="0">
+        <a:scrgbClr r="0" g="0" b="0"/>
+      </a:effectRef>
+      <a:fontRef idx="minor">
+        <a:schemeClr val="lt1"/>
+      </a:fontRef>
+    </dgm:style>
+  </dgm:styleLbl>
+  <dgm:styleLbl name="asst3">
+    <dgm:scene3d>
+      <a:camera prst="orthographicFront"/>
+      <a:lightRig rig="threePt" dir="t"/>
+    </dgm:scene3d>
+    <dgm:sp3d/>
+    <dgm:txPr/>
+    <dgm:style>
+      <a:lnRef idx="2">
+        <a:scrgbClr r="0" g="0" b="0"/>
+      </a:lnRef>
+      <a:fillRef idx="1">
+        <a:scrgbClr r="0" g="0" b="0"/>
+      </a:fillRef>
+      <a:effectRef idx="0">
+        <a:scrgbClr r="0" g="0" b="0"/>
+      </a:effectRef>
+      <a:fontRef idx="minor">
+        <a:schemeClr val="lt1"/>
+      </a:fontRef>
+    </dgm:style>
+  </dgm:styleLbl>
+  <dgm:styleLbl name="asst4">
+    <dgm:scene3d>
+      <a:camera prst="orthographicFront"/>
+      <a:lightRig rig="threePt" dir="t"/>
+    </dgm:scene3d>
+    <dgm:sp3d/>
+    <dgm:txPr/>
+    <dgm:style>
+      <a:lnRef idx="2">
+        <a:scrgbClr r="0" g="0" b="0"/>
+      </a:lnRef>
+      <a:fillRef idx="1">
+        <a:scrgbClr r="0" g="0" b="0"/>
+      </a:fillRef>
+      <a:effectRef idx="0">
+        <a:scrgbClr r="0" g="0" b="0"/>
+      </a:effectRef>
+      <a:fontRef idx="minor">
+        <a:schemeClr val="lt1"/>
+      </a:fontRef>
+    </dgm:style>
+  </dgm:styleLbl>
+  <dgm:styleLbl name="parChTrans2D1">
+    <dgm:scene3d>
+      <a:camera prst="orthographicFront"/>
+      <a:lightRig rig="threePt" dir="t"/>
+    </dgm:scene3d>
+    <dgm:sp3d/>
+    <dgm:txPr/>
+    <dgm:style>
+      <a:lnRef idx="2">
+        <a:scrgbClr r="0" g="0" b="0"/>
+      </a:lnRef>
+      <a:fillRef idx="1">
+        <a:scrgbClr r="0" g="0" b="0"/>
+      </a:fillRef>
+      <a:effectRef idx="0">
+        <a:scrgbClr r="0" g="0" b="0"/>
+      </a:effectRef>
+      <a:fontRef idx="minor">
+        <a:schemeClr val="lt1"/>
+      </a:fontRef>
+    </dgm:style>
+  </dgm:styleLbl>
+  <dgm:styleLbl name="parChTrans2D2">
+    <dgm:scene3d>
+      <a:camera prst="orthographicFront"/>
+      <a:lightRig rig="threePt" dir="t"/>
+    </dgm:scene3d>
+    <dgm:sp3d/>
+    <dgm:txPr/>
+    <dgm:style>
+      <a:lnRef idx="2">
+        <a:scrgbClr r="0" g="0" b="0"/>
+      </a:lnRef>
+      <a:fillRef idx="1">
+        <a:scrgbClr r="0" g="0" b="0"/>
+      </a:fillRef>
+      <a:effectRef idx="0">
+        <a:scrgbClr r="0" g="0" b="0"/>
+      </a:effectRef>
+      <a:fontRef idx="minor">
+        <a:schemeClr val="lt1"/>
+      </a:fontRef>
+    </dgm:style>
+  </dgm:styleLbl>
+  <dgm:styleLbl name="parChTrans2D3">
+    <dgm:scene3d>
+      <a:camera prst="orthographicFront"/>
+      <a:lightRig rig="threePt" dir="t"/>
+    </dgm:scene3d>
+    <dgm:sp3d/>
+    <dgm:txPr/>
+    <dgm:style>
+      <a:lnRef idx="2">
+        <a:scrgbClr r="0" g="0" b="0"/>
+      </a:lnRef>
+      <a:fillRef idx="1">
+        <a:scrgbClr r="0" g="0" b="0"/>
+      </a:fillRef>
+      <a:effectRef idx="0">
+        <a:scrgbClr r="0" g="0" b="0"/>
+      </a:effectRef>
+      <a:fontRef idx="minor">
+        <a:schemeClr val="lt1"/>
+      </a:fontRef>
+    </dgm:style>
+  </dgm:styleLbl>
+  <dgm:styleLbl name="parChTrans2D4">
+    <dgm:scene3d>
+      <a:camera prst="orthographicFront"/>
+      <a:lightRig rig="threePt" dir="t"/>
+    </dgm:scene3d>
+    <dgm:sp3d/>
+    <dgm:txPr/>
+    <dgm:style>
+      <a:lnRef idx="2">
+        <a:scrgbClr r="0" g="0" b="0"/>
+      </a:lnRef>
+      <a:fillRef idx="1">
+        <a:scrgbClr r="0" g="0" b="0"/>
+      </a:fillRef>
+      <a:effectRef idx="0">
+        <a:scrgbClr r="0" g="0" b="0"/>
+      </a:effectRef>
+      <a:fontRef idx="minor">
+        <a:schemeClr val="lt1"/>
+      </a:fontRef>
+    </dgm:style>
+  </dgm:styleLbl>
+  <dgm:styleLbl name="parChTrans1D1">
+    <dgm:scene3d>
+      <a:camera prst="orthographicFront"/>
+      <a:lightRig rig="threePt" dir="t"/>
+    </dgm:scene3d>
+    <dgm:sp3d/>
+    <dgm:txPr/>
+    <dgm:style>
+      <a:lnRef idx="2">
+        <a:scrgbClr r="0" g="0" b="0"/>
+      </a:lnRef>
+      <a:fillRef idx="0">
+        <a:scrgbClr r="0" g="0" b="0"/>
+      </a:fillRef>
+      <a:effectRef idx="0">
+        <a:scrgbClr r="0" g="0" b="0"/>
+      </a:effectRef>
+      <a:fontRef idx="minor"/>
+    </dgm:style>
+  </dgm:styleLbl>
+  <dgm:styleLbl name="parChTrans1D2">
+    <dgm:scene3d>
+      <a:camera prst="orthographicFront"/>
+      <a:lightRig rig="threePt" dir="t"/>
+    </dgm:scene3d>
+    <dgm:sp3d/>
+    <dgm:txPr/>
+    <dgm:style>
+      <a:lnRef idx="2">
+        <a:scrgbClr r="0" g="0" b="0"/>
+      </a:lnRef>
+      <a:fillRef idx="0">
+        <a:scrgbClr r="0" g="0" b="0"/>
+      </a:fillRef>
+      <a:effectRef idx="0">
+        <a:scrgbClr r="0" g="0" b="0"/>
+      </a:effectRef>
+      <a:fontRef idx="minor"/>
+    </dgm:style>
+  </dgm:styleLbl>
+  <dgm:styleLbl name="parChTrans1D3">
+    <dgm:scene3d>
+      <a:camera prst="orthographicFront"/>
+      <a:lightRig rig="threePt" dir="t"/>
+    </dgm:scene3d>
+    <dgm:sp3d/>
+    <dgm:txPr/>
+    <dgm:style>
+      <a:lnRef idx="2">
+        <a:scrgbClr r="0" g="0" b="0"/>
+      </a:lnRef>
+      <a:fillRef idx="0">
+        <a:scrgbClr r="0" g="0" b="0"/>
+      </a:fillRef>
+      <a:effectRef idx="0">
+        <a:scrgbClr r="0" g="0" b="0"/>
+      </a:effectRef>
+      <a:fontRef idx="minor"/>
+    </dgm:style>
+  </dgm:styleLbl>
+  <dgm:styleLbl name="parChTrans1D4">
+    <dgm:scene3d>
+      <a:camera prst="orthographicFront"/>
+      <a:lightRig rig="threePt" dir="t"/>
+    </dgm:scene3d>
+    <dgm:sp3d/>
+    <dgm:txPr/>
+    <dgm:style>
+      <a:lnRef idx="2">
+        <a:scrgbClr r="0" g="0" b="0"/>
+      </a:lnRef>
+      <a:fillRef idx="0">
+        <a:scrgbClr r="0" g="0" b="0"/>
+      </a:fillRef>
+      <a:effectRef idx="0">
+        <a:scrgbClr r="0" g="0" b="0"/>
+      </a:effectRef>
+      <a:fontRef idx="minor"/>
+    </dgm:style>
+  </dgm:styleLbl>
+  <dgm:styleLbl name="fgAcc1">
+    <dgm:scene3d>
+      <a:camera prst="orthographicFront"/>
+      <a:lightRig rig="threePt" dir="t"/>
+    </dgm:scene3d>
+    <dgm:sp3d/>
+    <dgm:txPr/>
+    <dgm:style>
+      <a:lnRef idx="2">
+        <a:scrgbClr r="0" g="0" b="0"/>
+      </a:lnRef>
+      <a:fillRef idx="1">
+        <a:scrgbClr r="0" g="0" b="0"/>
+      </a:fillRef>
+      <a:effectRef idx="0">
+        <a:scrgbClr r="0" g="0" b="0"/>
+      </a:effectRef>
+      <a:fontRef idx="minor"/>
+    </dgm:style>
+  </dgm:styleLbl>
+  <dgm:styleLbl name="conFgAcc1">
+    <dgm:scene3d>
+      <a:camera prst="orthographicFront"/>
+      <a:lightRig rig="threePt" dir="t"/>
+    </dgm:scene3d>
+    <dgm:sp3d/>
+    <dgm:txPr/>
+    <dgm:style>
+      <a:lnRef idx="2">
+        <a:scrgbClr r="0" g="0" b="0"/>
+      </a:lnRef>
+      <a:fillRef idx="1">
+        <a:scrgbClr r="0" g="0" b="0"/>
+      </a:fillRef>
+      <a:effectRef idx="0">
+        <a:scrgbClr r="0" g="0" b="0"/>
+      </a:effectRef>
+      <a:fontRef idx="minor"/>
+    </dgm:style>
+  </dgm:styleLbl>
+  <dgm:styleLbl name="alignAcc1">
+    <dgm:scene3d>
+      <a:camera prst="orthographicFront"/>
+      <a:lightRig rig="threePt" dir="t"/>
+    </dgm:scene3d>
+    <dgm:sp3d/>
+    <dgm:txPr/>
+    <dgm:style>
+      <a:lnRef idx="2">
+        <a:scrgbClr r="0" g="0" b="0"/>
+      </a:lnRef>
+      <a:fillRef idx="1">
+        <a:scrgbClr r="0" g="0" b="0"/>
+      </a:fillRef>
+      <a:effectRef idx="0">
+        <a:scrgbClr r="0" g="0" b="0"/>
+      </a:effectRef>
+      <a:fontRef idx="minor"/>
+    </dgm:style>
+  </dgm:styleLbl>
+  <dgm:styleLbl name="trAlignAcc1">
+    <dgm:scene3d>
+      <a:camera prst="orthographicFront"/>
+      <a:lightRig rig="threePt" dir="t"/>
+    </dgm:scene3d>
+    <dgm:sp3d/>
+    <dgm:txPr/>
+    <dgm:style>
+      <a:lnRef idx="1">
+        <a:scrgbClr r="0" g="0" b="0"/>
+      </a:lnRef>
+      <a:fillRef idx="1">
+        <a:scrgbClr r="0" g="0" b="0"/>
+      </a:fillRef>
+      <a:effectRef idx="0">
+        <a:scrgbClr r="0" g="0" b="0"/>
+      </a:effectRef>
+      <a:fontRef idx="minor"/>
+    </dgm:style>
+  </dgm:styleLbl>
+  <dgm:styleLbl name="bgAcc1">
+    <dgm:scene3d>
+      <a:camera prst="orthographicFront"/>
+      <a:lightRig rig="threePt" dir="t"/>
+    </dgm:scene3d>
+    <dgm:sp3d/>
+    <dgm:txPr/>
+    <dgm:style>
+      <a:lnRef idx="2">
+        <a:scrgbClr r="0" g="0" b="0"/>
+      </a:lnRef>
+      <a:fillRef idx="1">
+        <a:scrgbClr r="0" g="0" b="0"/>
+      </a:fillRef>
+      <a:effectRef idx="0">
+        <a:scrgbClr r="0" g="0" b="0"/>
+      </a:effectRef>
+      <a:fontRef idx="minor"/>
+    </dgm:style>
+  </dgm:styleLbl>
+  <dgm:styleLbl name="solidFgAcc1">
+    <dgm:scene3d>
+      <a:camera prst="orthographicFront"/>
+      <a:lightRig rig="threePt" dir="t"/>
+    </dgm:scene3d>
+    <dgm:sp3d/>
+    <dgm:txPr/>
+    <dgm:style>
+      <a:lnRef idx="2">
+        <a:scrgbClr r="0" g="0" b="0"/>
+      </a:lnRef>
+      <a:fillRef idx="1">
+        <a:scrgbClr r="0" g="0" b="0"/>
+      </a:fillRef>
+      <a:effectRef idx="0">
+        <a:scrgbClr r="0" g="0" b="0"/>
+      </a:effectRef>
+      <a:fontRef idx="minor"/>
+    </dgm:style>
+  </dgm:styleLbl>
+  <dgm:styleLbl name="solidAlignAcc1">
+    <dgm:scene3d>
+      <a:camera prst="orthographicFront"/>
+      <a:lightRig rig="threePt" dir="t"/>
+    </dgm:scene3d>
+    <dgm:sp3d/>
+    <dgm:txPr/>
+    <dgm:style>
+      <a:lnRef idx="2">
+        <a:scrgbClr r="0" g="0" b="0"/>
+      </a:lnRef>
+      <a:fillRef idx="1">
+        <a:scrgbClr r="0" g="0" b="0"/>
+      </a:fillRef>
+      <a:effectRef idx="0">
+        <a:scrgbClr r="0" g="0" b="0"/>
+      </a:effectRef>
+      <a:fontRef idx="minor"/>
+    </dgm:style>
+  </dgm:styleLbl>
+  <dgm:styleLbl name="solidBgAcc1">
+    <dgm:scene3d>
+      <a:camera prst="orthographicFront"/>
+      <a:lightRig rig="threePt" dir="t"/>
+    </dgm:scene3d>
+    <dgm:sp3d/>
+    <dgm:txPr/>
+    <dgm:style>
+      <a:lnRef idx="2">
+        <a:scrgbClr r="0" g="0" b="0"/>
+      </a:lnRef>
+      <a:fillRef idx="1">
+        <a:scrgbClr r="0" g="0" b="0"/>
+      </a:fillRef>
+      <a:effectRef idx="0">
+        <a:scrgbClr r="0" g="0" b="0"/>
+      </a:effectRef>
+      <a:fontRef idx="minor"/>
+    </dgm:style>
+  </dgm:styleLbl>
+  <dgm:styleLbl name="fgAccFollowNode1">
+    <dgm:scene3d>
+      <a:camera prst="orthographicFront"/>
+      <a:lightRig rig="threePt" dir="t"/>
+    </dgm:scene3d>
+    <dgm:sp3d/>
+    <dgm:txPr/>
+    <dgm:style>
+      <a:lnRef idx="2">
+        <a:scrgbClr r="0" g="0" b="0"/>
+      </a:lnRef>
+      <a:fillRef idx="1">
+        <a:scrgbClr r="0" g="0" b="0"/>
+      </a:fillRef>
+      <a:effectRef idx="0">
+        <a:scrgbClr r="0" g="0" b="0"/>
+      </a:effectRef>
+      <a:fontRef idx="minor"/>
+    </dgm:style>
+  </dgm:styleLbl>
+  <dgm:styleLbl name="alignAccFollowNode1">
+    <dgm:scene3d>
+      <a:camera prst="orthographicFront"/>
+      <a:lightRig rig="threePt" dir="t"/>
+    </dgm:scene3d>
+    <dgm:sp3d/>
+    <dgm:txPr/>
+    <dgm:style>
+      <a:lnRef idx="2">
+        <a:scrgbClr r="0" g="0" b="0"/>
+      </a:lnRef>
+      <a:fillRef idx="1">
+        <a:scrgbClr r="0" g="0" b="0"/>
+      </a:fillRef>
+      <a:effectRef idx="0">
+        <a:scrgbClr r="0" g="0" b="0"/>
+      </a:effectRef>
+      <a:fontRef idx="minor"/>
+    </dgm:style>
+  </dgm:styleLbl>
+  <dgm:styleLbl name="bgAccFollowNode1">
+    <dgm:scene3d>
+      <a:camera prst="orthographicFront"/>
+      <a:lightRig rig="threePt" dir="t"/>
+    </dgm:scene3d>
+    <dgm:sp3d/>
+    <dgm:txPr/>
+    <dgm:style>
+      <a:lnRef idx="2">
+        <a:scrgbClr r="0" g="0" b="0"/>
+      </a:lnRef>
+      <a:fillRef idx="1">
+        <a:scrgbClr r="0" g="0" b="0"/>
+      </a:fillRef>
+      <a:effectRef idx="0">
+        <a:scrgbClr r="0" g="0" b="0"/>
+      </a:effectRef>
+      <a:fontRef idx="minor"/>
+    </dgm:style>
+  </dgm:styleLbl>
+  <dgm:styleLbl name="fgAcc0">
+    <dgm:scene3d>
+      <a:camera prst="orthographicFront"/>
+      <a:lightRig rig="threePt" dir="t"/>
+    </dgm:scene3d>
+    <dgm:sp3d/>
+    <dgm:txPr/>
+    <dgm:style>
+      <a:lnRef idx="2">
+        <a:scrgbClr r="0" g="0" b="0"/>
+      </a:lnRef>
+      <a:fillRef idx="1">
+        <a:scrgbClr r="0" g="0" b="0"/>
+      </a:fillRef>
+      <a:effectRef idx="0">
+        <a:scrgbClr r="0" g="0" b="0"/>
+      </a:effectRef>
+      <a:fontRef idx="minor"/>
+    </dgm:style>
+  </dgm:styleLbl>
+  <dgm:styleLbl name="fgAcc2">
+    <dgm:scene3d>
+      <a:camera prst="orthographicFront"/>
+      <a:lightRig rig="threePt" dir="t"/>
+    </dgm:scene3d>
+    <dgm:sp3d/>
+    <dgm:txPr/>
+    <dgm:style>
+      <a:lnRef idx="2">
+        <a:scrgbClr r="0" g="0" b="0"/>
+      </a:lnRef>
+      <a:fillRef idx="1">
+        <a:scrgbClr r="0" g="0" b="0"/>
+      </a:fillRef>
+      <a:effectRef idx="0">
+        <a:scrgbClr r="0" g="0" b="0"/>
+      </a:effectRef>
+      <a:fontRef idx="minor"/>
+    </dgm:style>
+  </dgm:styleLbl>
+  <dgm:styleLbl name="fgAcc3">
+    <dgm:scene3d>
+      <a:camera prst="orthographicFront"/>
+      <a:lightRig rig="threePt" dir="t"/>
+    </dgm:scene3d>
+    <dgm:sp3d/>
+    <dgm:txPr/>
+    <dgm:style>
+      <a:lnRef idx="2">
+        <a:scrgbClr r="0" g="0" b="0"/>
+      </a:lnRef>
+      <a:fillRef idx="1">
+        <a:scrgbClr r="0" g="0" b="0"/>
+      </a:fillRef>
+      <a:effectRef idx="0">
+        <a:scrgbClr r="0" g="0" b="0"/>
+      </a:effectRef>
+      <a:fontRef idx="minor"/>
+    </dgm:style>
+  </dgm:styleLbl>
+  <dgm:styleLbl name="fgAcc4">
+    <dgm:scene3d>
+      <a:camera prst="orthographicFront"/>
+      <a:lightRig rig="threePt" dir="t"/>
+    </dgm:scene3d>
+    <dgm:sp3d/>
+    <dgm:txPr/>
+    <dgm:style>
+      <a:lnRef idx="2">
+        <a:scrgbClr r="0" g="0" b="0"/>
+      </a:lnRef>
+      <a:fillRef idx="1">
+        <a:scrgbClr r="0" g="0" b="0"/>
+      </a:fillRef>
+      <a:effectRef idx="0">
+        <a:scrgbClr r="0" g="0" b="0"/>
+      </a:effectRef>
+      <a:fontRef idx="minor"/>
+    </dgm:style>
+  </dgm:styleLbl>
+  <dgm:styleLbl name="bgShp">
+    <dgm:scene3d>
+      <a:camera prst="orthographicFront"/>
+      <a:lightRig rig="threePt" dir="t"/>
+    </dgm:scene3d>
+    <dgm:sp3d/>
+    <dgm:txPr/>
+    <dgm:style>
+      <a:lnRef idx="0">
+        <a:scrgbClr r="0" g="0" b="0"/>
+      </a:lnRef>
+      <a:fillRef idx="1">
+        <a:scrgbClr r="0" g="0" b="0"/>
+      </a:fillRef>
+      <a:effectRef idx="0">
+        <a:scrgbClr r="0" g="0" b="0"/>
+      </a:effectRef>
+      <a:fontRef idx="minor"/>
+    </dgm:style>
+  </dgm:styleLbl>
+  <dgm:styleLbl name="dkBgShp">
+    <dgm:scene3d>
+      <a:camera prst="orthographicFront"/>
+      <a:lightRig rig="threePt" dir="t"/>
+    </dgm:scene3d>
+    <dgm:sp3d/>
+    <dgm:txPr/>
+    <dgm:style>
+      <a:lnRef idx="0">
+        <a:scrgbClr r="0" g="0" b="0"/>
+      </a:lnRef>
+      <a:fillRef idx="1">
+        <a:scrgbClr r="0" g="0" b="0"/>
+      </a:fillRef>
+      <a:effectRef idx="0">
+        <a:scrgbClr r="0" g="0" b="0"/>
+      </a:effectRef>
+      <a:fontRef idx="minor"/>
+    </dgm:style>
+  </dgm:styleLbl>
+  <dgm:styleLbl name="trBgShp">
+    <dgm:scene3d>
+      <a:camera prst="orthographicFront"/>
+      <a:lightRig rig="threePt" dir="t"/>
+    </dgm:scene3d>
+    <dgm:sp3d/>
+    <dgm:txPr/>
+    <dgm:style>
+      <a:lnRef idx="0">
+        <a:scrgbClr r="0" g="0" b="0"/>
+      </a:lnRef>
+      <a:fillRef idx="1">
+        <a:scrgbClr r="0" g="0" b="0"/>
+      </a:fillRef>
+      <a:effectRef idx="0">
+        <a:scrgbClr r="0" g="0" b="0"/>
+      </a:effectRef>
+      <a:fontRef idx="minor"/>
+    </dgm:style>
+  </dgm:styleLbl>
+  <dgm:styleLbl name="fgShp">
+    <dgm:scene3d>
+      <a:camera prst="orthographicFront"/>
+      <a:lightRig rig="threePt" dir="t"/>
+    </dgm:scene3d>
+    <dgm:sp3d/>
+    <dgm:txPr/>
+    <dgm:style>
+      <a:lnRef idx="2">
+        <a:scrgbClr r="0" g="0" b="0"/>
+      </a:lnRef>
+      <a:fillRef idx="1">
+        <a:scrgbClr r="0" g="0" b="0"/>
+      </a:fillRef>
+      <a:effectRef idx="0">
+        <a:scrgbClr r="0" g="0" b="0"/>
+      </a:effectRef>
+      <a:fontRef idx="minor"/>
+    </dgm:style>
+  </dgm:styleLbl>
+  <dgm:styleLbl name="revTx">
+    <dgm:scene3d>
+      <a:camera prst="orthographicFront"/>
+      <a:lightRig rig="threePt" dir="t"/>
+    </dgm:scene3d>
+    <dgm:sp3d/>
+    <dgm:txPr/>
+    <dgm:style>
+      <a:lnRef idx="0">
+        <a:scrgbClr r="0" g="0" b="0"/>
+      </a:lnRef>
+      <a:fillRef idx="0">
+        <a:scrgbClr r="0" g="0" b="0"/>
+      </a:fillRef>
+      <a:effectRef idx="0">
+        <a:scrgbClr r="0" g="0" b="0"/>
+      </a:effectRef>
+      <a:fontRef idx="minor"/>
+    </dgm:style>
+  </dgm:styleLbl>
+</dgm:styleDef>
+</file>
+
 <file path=ppt/slideLayouts/slideLayout1.xml><?xml version="1.0" encoding="utf-8"?>
 <p:sldLayout xmlns:a="http://schemas.openxmlformats.org/drawingml/2006/main" xmlns:r="http://schemas.openxmlformats.org/officeDocument/2006/relationships" xmlns:p="http://schemas.openxmlformats.org/presentationml/2006/main" type="title" preserve="1">
   <p:cSld name="Úvodná snímka">
@@ -278,7 +4896,7 @@
           <a:p>
             <a:fld id="{02AC24A9-CCB6-4F8D-B8DB-C2F3692CFA5A}" type="datetimeFigureOut">
               <a:rPr lang="en-US" smtClean="0"/>
-              <a:t>6/10/2026</a:t>
+              <a:t>6/20/2026</a:t>
             </a:fld>
             <a:endParaRPr lang="en-US" dirty="0"/>
           </a:p>
@@ -649,7 +5267,7 @@
           <a:p>
             <a:fld id="{02AC24A9-CCB6-4F8D-B8DB-C2F3692CFA5A}" type="datetimeFigureOut">
               <a:rPr lang="en-US" smtClean="0"/>
-              <a:t>6/10/2026</a:t>
+              <a:t>6/20/2026</a:t>
             </a:fld>
             <a:endParaRPr lang="en-US" dirty="0"/>
           </a:p>
@@ -859,7 +5477,7 @@
           <a:p>
             <a:fld id="{02AC24A9-CCB6-4F8D-B8DB-C2F3692CFA5A}" type="datetimeFigureOut">
               <a:rPr lang="en-US" smtClean="0"/>
-              <a:t>6/10/2026</a:t>
+              <a:t>6/20/2026</a:t>
             </a:fld>
             <a:endParaRPr lang="en-US" dirty="0"/>
           </a:p>
@@ -1331,7 +5949,7 @@
           <a:p>
             <a:fld id="{02AC24A9-CCB6-4F8D-B8DB-C2F3692CFA5A}" type="datetimeFigureOut">
               <a:rPr lang="en-US" smtClean="0"/>
-              <a:t>6/10/2026</a:t>
+              <a:t>6/20/2026</a:t>
             </a:fld>
             <a:endParaRPr lang="en-US" dirty="0"/>
           </a:p>
@@ -1786,7 +6404,7 @@
           <a:p>
             <a:fld id="{02AC24A9-CCB6-4F8D-B8DB-C2F3692CFA5A}" type="datetimeFigureOut">
               <a:rPr lang="en-US" smtClean="0"/>
-              <a:t>6/10/2026</a:t>
+              <a:t>6/20/2026</a:t>
             </a:fld>
             <a:endParaRPr lang="en-US" dirty="0"/>
           </a:p>
@@ -2321,7 +6939,7 @@
           <a:p>
             <a:fld id="{02AC24A9-CCB6-4F8D-B8DB-C2F3692CFA5A}" type="datetimeFigureOut">
               <a:rPr lang="en-US" smtClean="0"/>
-              <a:t>6/10/2026</a:t>
+              <a:t>6/20/2026</a:t>
             </a:fld>
             <a:endParaRPr lang="en-US" dirty="0"/>
           </a:p>
@@ -3023,7 +7641,7 @@
           <a:p>
             <a:fld id="{02AC24A9-CCB6-4F8D-B8DB-C2F3692CFA5A}" type="datetimeFigureOut">
               <a:rPr lang="en-US" smtClean="0"/>
-              <a:t>6/10/2026</a:t>
+              <a:t>6/20/2026</a:t>
             </a:fld>
             <a:endParaRPr lang="en-US" dirty="0"/>
           </a:p>
@@ -3353,7 +7971,7 @@
           <a:p>
             <a:fld id="{02AC24A9-CCB6-4F8D-B8DB-C2F3692CFA5A}" type="datetimeFigureOut">
               <a:rPr lang="en-US" smtClean="0"/>
-              <a:t>6/10/2026</a:t>
+              <a:t>6/20/2026</a:t>
             </a:fld>
             <a:endParaRPr lang="en-US" dirty="0"/>
           </a:p>
@@ -3466,7 +8084,7 @@
           <a:p>
             <a:fld id="{02AC24A9-CCB6-4F8D-B8DB-C2F3692CFA5A}" type="datetimeFigureOut">
               <a:rPr lang="en-US" smtClean="0"/>
-              <a:t>6/10/2026</a:t>
+              <a:t>6/20/2026</a:t>
             </a:fld>
             <a:endParaRPr lang="en-US" dirty="0"/>
           </a:p>
@@ -3963,7 +8581,7 @@
           <a:p>
             <a:fld id="{02AC24A9-CCB6-4F8D-B8DB-C2F3692CFA5A}" type="datetimeFigureOut">
               <a:rPr lang="en-US" smtClean="0"/>
-              <a:t>6/10/2026</a:t>
+              <a:t>6/20/2026</a:t>
             </a:fld>
             <a:endParaRPr lang="en-US" dirty="0"/>
           </a:p>
@@ -4442,7 +9060,7 @@
           <a:p>
             <a:fld id="{02AC24A9-CCB6-4F8D-B8DB-C2F3692CFA5A}" type="datetimeFigureOut">
               <a:rPr lang="en-US" smtClean="0"/>
-              <a:t>6/10/2026</a:t>
+              <a:t>6/20/2026</a:t>
             </a:fld>
             <a:endParaRPr lang="en-US" dirty="0"/>
           </a:p>
@@ -4685,7 +9303,7 @@
           <a:p>
             <a:fld id="{02AC24A9-CCB6-4F8D-B8DB-C2F3692CFA5A}" type="datetimeFigureOut">
               <a:rPr lang="en-US" smtClean="0"/>
-              <a:t>6/10/2026</a:t>
+              <a:t>6/20/2026</a:t>
             </a:fld>
             <a:endParaRPr lang="en-US" dirty="0"/>
           </a:p>
@@ -5132,10 +9750,26 @@
           <a:p>
             <a:pPr algn="ctr"/>
             <a:r>
-              <a:rPr lang="sk-SK" sz="3200" b="1" dirty="0"/>
+              <a:rPr lang="sk-SK" sz="3200" b="1" dirty="0">
+                <a:effectLst>
+                  <a:outerShdw blurRad="38100" dist="38100" dir="2700000" algn="tl">
+                    <a:srgbClr val="000000">
+                      <a:alpha val="43137"/>
+                    </a:srgbClr>
+                  </a:outerShdw>
+                </a:effectLst>
+              </a:rPr>
               <a:t>Identifikácia vzorov v časových radoch pre komparáciu volatility akciových trhov USA, Číny a Európy pomocou metód umelej inteligencie</a:t>
             </a:r>
-            <a:endParaRPr lang="sk-SK" sz="3200" dirty="0"/>
+            <a:endParaRPr lang="sk-SK" sz="3200" dirty="0">
+              <a:effectLst>
+                <a:outerShdw blurRad="38100" dist="38100" dir="2700000" algn="tl">
+                  <a:srgbClr val="000000">
+                    <a:alpha val="43137"/>
+                  </a:srgbClr>
+                </a:outerShdw>
+              </a:effectLst>
+            </a:endParaRPr>
           </a:p>
         </p:txBody>
       </p:sp>
@@ -5184,7 +9818,7 @@
           <a:p>
             <a:r>
               <a:rPr lang="sk-SK" sz="2000" b="1" dirty="0"/>
-              <a:t>doc. PaeDr. </a:t>
+              <a:t>doc. PaedDr. </a:t>
             </a:r>
             <a:r>
               <a:rPr lang="sk-SK" sz="2000" dirty="0"/>
@@ -5196,7 +9830,7 @@
             </a:r>
             <a:r>
               <a:rPr lang="sk-SK" sz="2000" dirty="0"/>
-              <a:t>                                                                  </a:t>
+              <a:t>                                                                </a:t>
             </a:r>
             <a:r>
               <a:rPr lang="sk-SK" sz="2000" b="1" dirty="0"/>
@@ -5265,7 +9899,15 @@
           <a:lstStyle/>
           <a:p>
             <a:r>
-              <a:rPr lang="sk-SK" dirty="0"/>
+              <a:rPr lang="sk-SK" dirty="0">
+                <a:effectLst>
+                  <a:outerShdw blurRad="38100" dist="38100" dir="2700000" algn="tl">
+                    <a:srgbClr val="000000">
+                      <a:alpha val="43137"/>
+                    </a:srgbClr>
+                  </a:outerShdw>
+                </a:effectLst>
+              </a:rPr>
               <a:t>Ciele výskumu</a:t>
             </a:r>
           </a:p>
@@ -5303,14 +9945,54 @@
               <a:buNone/>
             </a:pPr>
             <a:r>
+              <a:rPr lang="sk-SK" sz="1800" b="1" dirty="0">
+                <a:effectLst>
+                  <a:outerShdw blurRad="38100" dist="38100" dir="2700000" algn="tl">
+                    <a:srgbClr val="000000">
+                      <a:alpha val="43137"/>
+                    </a:srgbClr>
+                  </a:outerShdw>
+                </a:effectLst>
+              </a:rPr>
+              <a:t>Hlavný cieľ</a:t>
+            </a:r>
+          </a:p>
+          <a:p>
+            <a:r>
+              <a:rPr lang="sk-SK" sz="1800" dirty="0"/>
+              <a:t>Analyzovať a porovnať volatilitu akciových trhov v </a:t>
+            </a:r>
+            <a:r>
               <a:rPr lang="sk-SK" sz="1800" b="1" dirty="0"/>
-              <a:t>Hlavný cieľ</a:t>
-            </a:r>
-          </a:p>
-          <a:p>
+              <a:t>USA</a:t>
+            </a:r>
             <a:r>
               <a:rPr lang="sk-SK" sz="1800" dirty="0"/>
-              <a:t>Analyzovať a porovnať volatilitu akciových trhov v USA, Číne a Európe v období pred pandémiou COVID-19, počas nej a v post-covidovom období s využitím metód umelej inteligencie na identifikáciu vzorov v časových radoch. </a:t>
+              <a:t>, </a:t>
+            </a:r>
+            <a:r>
+              <a:rPr lang="sk-SK" sz="1800" b="1" dirty="0"/>
+              <a:t>Číne</a:t>
+            </a:r>
+            <a:r>
+              <a:rPr lang="sk-SK" sz="1800" dirty="0"/>
+              <a:t> a </a:t>
+            </a:r>
+            <a:r>
+              <a:rPr lang="sk-SK" sz="1800" b="1" dirty="0"/>
+              <a:t>Európe</a:t>
+            </a:r>
+            <a:r>
+              <a:rPr lang="sk-SK" sz="1800" dirty="0"/>
+              <a:t> v období pred pandémiou </a:t>
+            </a:r>
+            <a:r>
+              <a:rPr lang="sk-SK" sz="1800" b="1" dirty="0"/>
+              <a:t>COVID-19</a:t>
+            </a:r>
+            <a:r>
+              <a:rPr lang="sk-SK" sz="1800" dirty="0"/>
+              <a:t>, počas nej a v post-covidovom období s využitím metód umelej inteligencie na identifikáciu vzorov v časových radoch. </a:t>
             </a:r>
           </a:p>
           <a:p>
@@ -5318,14 +10000,46 @@
               <a:buNone/>
             </a:pPr>
             <a:r>
+              <a:rPr lang="sk-SK" sz="1800" b="1" dirty="0">
+                <a:effectLst>
+                  <a:outerShdw blurRad="38100" dist="38100" dir="2700000" algn="tl">
+                    <a:srgbClr val="000000">
+                      <a:alpha val="43137"/>
+                    </a:srgbClr>
+                  </a:outerShdw>
+                </a:effectLst>
+              </a:rPr>
+              <a:t>Čiastkové ciele</a:t>
+            </a:r>
+          </a:p>
+          <a:p>
+            <a:r>
+              <a:rPr lang="sk-SK" sz="1800" dirty="0"/>
+              <a:t>Získať vhodné časové rady akciových trhov </a:t>
+            </a:r>
+            <a:r>
               <a:rPr lang="sk-SK" sz="1800" b="1" dirty="0"/>
-              <a:t>Čiastkové ciele</a:t>
-            </a:r>
-          </a:p>
-          <a:p>
+              <a:t>USA</a:t>
+            </a:r>
             <a:r>
               <a:rPr lang="sk-SK" sz="1800" dirty="0"/>
-              <a:t>Získať vhodné časové rady akciových trhov USA, Európy a Číny,</a:t>
+              <a:t>, </a:t>
+            </a:r>
+            <a:r>
+              <a:rPr lang="sk-SK" sz="1800" b="1" dirty="0"/>
+              <a:t>Európy</a:t>
+            </a:r>
+            <a:r>
+              <a:rPr lang="sk-SK" sz="1800" dirty="0"/>
+              <a:t> a </a:t>
+            </a:r>
+            <a:r>
+              <a:rPr lang="sk-SK" sz="1800" b="1" dirty="0"/>
+              <a:t>Číny</a:t>
+            </a:r>
+            <a:r>
+              <a:rPr lang="sk-SK" sz="1800" dirty="0"/>
+              <a:t>,</a:t>
             </a:r>
           </a:p>
           <a:p>
@@ -5343,7 +10057,7 @@
           <a:p>
             <a:r>
               <a:rPr lang="sk-SK" sz="1800" dirty="0"/>
-              <a:t>Natrénovať ekonometrické modely a modely strojového učenia,</a:t>
+              <a:t>Natrénovať modely strojového učenia,</a:t>
             </a:r>
           </a:p>
           <a:p>
@@ -5406,7 +10120,15 @@
           <a:lstStyle/>
           <a:p>
             <a:r>
-              <a:rPr lang="sk-SK" dirty="0"/>
+              <a:rPr lang="sk-SK" dirty="0">
+                <a:effectLst>
+                  <a:outerShdw blurRad="38100" dist="38100" dir="2700000" algn="tl">
+                    <a:srgbClr val="000000">
+                      <a:alpha val="43137"/>
+                    </a:srgbClr>
+                  </a:outerShdw>
+                </a:effectLst>
+              </a:rPr>
               <a:t>Hypotézy</a:t>
             </a:r>
           </a:p>
@@ -5428,59 +10150,152 @@
             <p:ph idx="1"/>
           </p:nvPr>
         </p:nvSpPr>
-        <p:spPr/>
+        <p:spPr>
+          <a:xfrm>
+            <a:off x="1115568" y="2478024"/>
+            <a:ext cx="10650862" cy="3831336"/>
+          </a:xfrm>
+        </p:spPr>
         <p:txBody>
           <a:bodyPr>
-            <a:normAutofit/>
+            <a:normAutofit lnSpcReduction="10000"/>
           </a:bodyPr>
           <a:lstStyle/>
           <a:p>
             <a:r>
-              <a:rPr lang="sk-SK" sz="1800" b="1" dirty="0"/>
+              <a:rPr lang="sk-SK" sz="2000" b="1" dirty="0"/>
               <a:t>H1: </a:t>
             </a:r>
             <a:r>
-              <a:rPr lang="sk-SK" sz="1800" dirty="0"/>
-              <a:t>Obdobie pandémie COVID-19 viedlo k štatisticky významnému zvýšeniu volatility vybraných akciových indexov USA, Európy a Číny.</a:t>
-            </a:r>
-          </a:p>
-          <a:p>
-            <a:r>
-              <a:rPr lang="sk-SK" sz="1800" b="1" dirty="0"/>
+              <a:rPr lang="sk-SK" sz="2000" dirty="0"/>
+              <a:t>Obdobie pandémie </a:t>
+            </a:r>
+            <a:r>
+              <a:rPr lang="sk-SK" sz="2000" i="1" dirty="0"/>
+              <a:t>COVID-19</a:t>
+            </a:r>
+            <a:r>
+              <a:rPr lang="sk-SK" sz="2000" dirty="0"/>
+              <a:t> viedlo k štatisticky významnému zvýšeniu volatility vybraných akciových indexov </a:t>
+            </a:r>
+            <a:r>
+              <a:rPr lang="sk-SK" sz="2000" i="1" dirty="0"/>
+              <a:t>USA</a:t>
+            </a:r>
+            <a:r>
+              <a:rPr lang="sk-SK" sz="2000" dirty="0"/>
+              <a:t>, </a:t>
+            </a:r>
+            <a:r>
+              <a:rPr lang="sk-SK" sz="2000" i="1" dirty="0"/>
+              <a:t>Európy</a:t>
+            </a:r>
+            <a:r>
+              <a:rPr lang="sk-SK" sz="2000" dirty="0"/>
+              <a:t> a </a:t>
+            </a:r>
+            <a:r>
+              <a:rPr lang="sk-SK" sz="2000" i="1" dirty="0"/>
+              <a:t>Číny</a:t>
+            </a:r>
+            <a:r>
+              <a:rPr lang="sk-SK" sz="2000" dirty="0"/>
+              <a:t>.</a:t>
+            </a:r>
+          </a:p>
+          <a:p>
+            <a:r>
+              <a:rPr lang="sk-SK" sz="2000" b="1" dirty="0">
+                <a:effectLst>
+                  <a:outerShdw blurRad="38100" dist="38100" dir="2700000" algn="tl">
+                    <a:srgbClr val="000000">
+                      <a:alpha val="43137"/>
+                    </a:srgbClr>
+                  </a:outerShdw>
+                </a:effectLst>
+              </a:rPr>
               <a:t>H2: </a:t>
             </a:r>
             <a:r>
-              <a:rPr lang="sk-SK" sz="1800" dirty="0"/>
-              <a:t>Dynamika volatility sa medzi vybranými trhmi USA, Európy a Číny štatisticky významne líši.</a:t>
-            </a:r>
-          </a:p>
-          <a:p>
-            <a:r>
-              <a:rPr lang="sk-SK" sz="1800" b="1" dirty="0"/>
+              <a:rPr lang="sk-SK" sz="2000" dirty="0"/>
+              <a:t>Dynamika volatility sa medzi vybranými trhmi </a:t>
+            </a:r>
+            <a:r>
+              <a:rPr lang="sk-SK" sz="2000" i="1" dirty="0"/>
+              <a:t>USA</a:t>
+            </a:r>
+            <a:r>
+              <a:rPr lang="sk-SK" sz="2000" dirty="0"/>
+              <a:t>, </a:t>
+            </a:r>
+            <a:r>
+              <a:rPr lang="sk-SK" sz="2000" i="1" dirty="0"/>
+              <a:t>Európy</a:t>
+            </a:r>
+            <a:r>
+              <a:rPr lang="sk-SK" sz="2000" dirty="0"/>
+              <a:t> a </a:t>
+            </a:r>
+            <a:r>
+              <a:rPr lang="sk-SK" sz="2000" i="1" dirty="0"/>
+              <a:t>Číny</a:t>
+            </a:r>
+            <a:r>
+              <a:rPr lang="sk-SK" sz="2000" dirty="0"/>
+              <a:t> štatisticky významne líši.</a:t>
+            </a:r>
+          </a:p>
+          <a:p>
+            <a:r>
+              <a:rPr lang="sk-SK" sz="2000" b="1" dirty="0">
+                <a:effectLst>
+                  <a:outerShdw blurRad="38100" dist="38100" dir="2700000" algn="tl">
+                    <a:srgbClr val="000000">
+                      <a:alpha val="43137"/>
+                    </a:srgbClr>
+                  </a:outerShdw>
+                </a:effectLst>
+              </a:rPr>
               <a:t>H3: </a:t>
             </a:r>
             <a:r>
-              <a:rPr lang="sk-SK" sz="1800" dirty="0"/>
+              <a:rPr lang="sk-SK" sz="2000" dirty="0"/>
               <a:t>Asymetrické modely volatility dosahujú lepšiu výkonnosť počas krízových období ako symetrické modely volatility.</a:t>
             </a:r>
           </a:p>
           <a:p>
             <a:r>
-              <a:rPr lang="sk-SK" sz="1800" b="1" dirty="0"/>
+              <a:rPr lang="sk-SK" sz="2000" b="1" dirty="0">
+                <a:effectLst>
+                  <a:outerShdw blurRad="38100" dist="38100" dir="2700000" algn="tl">
+                    <a:srgbClr val="000000">
+                      <a:alpha val="43137"/>
+                    </a:srgbClr>
+                  </a:outerShdw>
+                </a:effectLst>
+              </a:rPr>
               <a:t>H4: </a:t>
             </a:r>
             <a:r>
-              <a:rPr lang="sk-SK" sz="1800" dirty="0"/>
+              <a:rPr lang="sk-SK" sz="2000" dirty="0"/>
               <a:t>Metódy strojového a hlbokého učenia nemajú štatisticky významne vyššiu predikčnú výkonnosť ako vybrané ekonometrické modely volatility.</a:t>
             </a:r>
           </a:p>
           <a:p>
             <a:r>
-              <a:rPr lang="sk-SK" sz="1800" b="1" dirty="0"/>
+              <a:rPr lang="sk-SK" sz="2000" b="1" dirty="0">
+                <a:effectLst>
+                  <a:outerShdw blurRad="38100" dist="38100" dir="2700000" algn="tl">
+                    <a:srgbClr val="000000">
+                      <a:alpha val="43137"/>
+                    </a:srgbClr>
+                  </a:outerShdw>
+                </a:effectLst>
+              </a:rPr>
               <a:t>H5: </a:t>
             </a:r>
             <a:r>
-              <a:rPr lang="sk-SK" sz="1800" dirty="0"/>
+              <a:rPr lang="sk-SK" sz="2000" dirty="0"/>
               <a:t>Identifikované vzory volatility akciových trhov sa pri použití porovnateľných zdrojov dát štatisticky významne nemenia.</a:t>
             </a:r>
           </a:p>
@@ -5538,7 +10353,15 @@
           <a:lstStyle/>
           <a:p>
             <a:r>
-              <a:rPr lang="sk-SK" dirty="0"/>
+              <a:rPr lang="sk-SK" dirty="0">
+                <a:effectLst>
+                  <a:outerShdw blurRad="38100" dist="38100" dir="2700000" algn="tl">
+                    <a:srgbClr val="000000">
+                      <a:alpha val="43137"/>
+                    </a:srgbClr>
+                  </a:outerShdw>
+                </a:effectLst>
+              </a:rPr>
               <a:t>Očakávané prínosy výskumu</a:t>
             </a:r>
           </a:p>
@@ -5562,54 +10385,198 @@
         </p:nvSpPr>
         <p:spPr>
           <a:xfrm>
-            <a:off x="1115568" y="2478024"/>
-            <a:ext cx="10168128" cy="3284421"/>
+            <a:off x="1115568" y="2478023"/>
+            <a:ext cx="10650862" cy="3698489"/>
           </a:xfrm>
         </p:spPr>
         <p:txBody>
-          <a:bodyPr/>
+          <a:bodyPr>
+            <a:normAutofit/>
+          </a:bodyPr>
           <a:lstStyle/>
           <a:p>
-            <a:r>
-              <a:rPr lang="sk-SK" sz="1800" dirty="0"/>
+            <a:pPr>
+              <a:buClr>
+                <a:schemeClr val="tx1">
+                  <a:lumMod val="95000"/>
+                  <a:lumOff val="5000"/>
+                </a:schemeClr>
+              </a:buClr>
+              <a:buSzPct val="110000"/>
+            </a:pPr>
+            <a:r>
+              <a:rPr lang="sk-SK" sz="2000" b="1" dirty="0">
+                <a:effectLst>
+                  <a:outerShdw blurRad="38100" dist="38100" dir="2700000" algn="tl">
+                    <a:srgbClr val="000000">
+                      <a:alpha val="43137"/>
+                    </a:srgbClr>
+                  </a:outerShdw>
+                </a:effectLst>
+              </a:rPr>
+              <a:t>1. </a:t>
+            </a:r>
+            <a:r>
+              <a:rPr lang="sk-SK" sz="2000" dirty="0"/>
               <a:t>Empirické porovnanie modelov strojového učenia s ekonometrickými riešeniami,</a:t>
             </a:r>
           </a:p>
           <a:p>
-            <a:r>
-              <a:rPr lang="sk-SK" sz="1800" dirty="0"/>
-              <a:t>Praktické poznatky o správaní akciových trhov počas období so zvýšeným rizikom </a:t>
-            </a:r>
-            <a:r>
-              <a:rPr lang="en-GB" sz="1800" dirty="0"/>
-              <a:t>(COVID-19)</a:t>
-            </a:r>
-            <a:r>
-              <a:rPr lang="sk-SK" sz="1800" dirty="0"/>
+            <a:pPr>
+              <a:buClr>
+                <a:schemeClr val="tx1">
+                  <a:lumMod val="95000"/>
+                  <a:lumOff val="5000"/>
+                </a:schemeClr>
+              </a:buClr>
+              <a:buSzPct val="110000"/>
+            </a:pPr>
+            <a:r>
+              <a:rPr lang="sk-SK" sz="2000" b="1" dirty="0">
+                <a:effectLst>
+                  <a:outerShdw blurRad="38100" dist="38100" dir="2700000" algn="tl">
+                    <a:srgbClr val="000000">
+                      <a:alpha val="43137"/>
+                    </a:srgbClr>
+                  </a:outerShdw>
+                </a:effectLst>
+              </a:rPr>
+              <a:t>2. </a:t>
+            </a:r>
+            <a:r>
+              <a:rPr lang="sk-SK" sz="2000" dirty="0"/>
+              <a:t>Praktické poznatky o správaní akciových trhov počas období so zvýšeným rizikom, </a:t>
+            </a:r>
+          </a:p>
+          <a:p>
+            <a:pPr>
+              <a:buClr>
+                <a:schemeClr val="tx1">
+                  <a:lumMod val="95000"/>
+                  <a:lumOff val="5000"/>
+                </a:schemeClr>
+              </a:buClr>
+              <a:buSzPct val="110000"/>
+            </a:pPr>
+            <a:r>
+              <a:rPr lang="sk-SK" sz="2000" b="1" dirty="0">
+                <a:effectLst>
+                  <a:outerShdw blurRad="38100" dist="38100" dir="2700000" algn="tl">
+                    <a:srgbClr val="000000">
+                      <a:alpha val="43137"/>
+                    </a:srgbClr>
+                  </a:outerShdw>
+                </a:effectLst>
+              </a:rPr>
+              <a:t>3. </a:t>
+            </a:r>
+            <a:r>
+              <a:rPr lang="sk-SK" sz="2000" dirty="0"/>
+              <a:t>Komparatívna analýza volatility akciových trhov </a:t>
+            </a:r>
+            <a:r>
+              <a:rPr lang="sk-SK" sz="2000" i="1" dirty="0"/>
+              <a:t>USA</a:t>
+            </a:r>
+            <a:r>
+              <a:rPr lang="sk-SK" sz="2000" dirty="0"/>
+              <a:t>, </a:t>
+            </a:r>
+            <a:r>
+              <a:rPr lang="sk-SK" sz="2000" i="1" dirty="0"/>
+              <a:t>Európy</a:t>
+            </a:r>
+            <a:r>
+              <a:rPr lang="sk-SK" sz="2000" dirty="0"/>
+              <a:t> a </a:t>
+            </a:r>
+            <a:r>
+              <a:rPr lang="sk-SK" sz="2000" i="1" dirty="0"/>
+              <a:t>Číny</a:t>
+            </a:r>
+            <a:r>
+              <a:rPr lang="sk-SK" sz="2000" dirty="0"/>
               <a:t>,</a:t>
             </a:r>
           </a:p>
           <a:p>
-            <a:r>
-              <a:rPr lang="sk-SK" sz="1800" dirty="0"/>
-              <a:t>Komparatívna analýza volatility akciových trhov USA, Európy a Číny,</a:t>
-            </a:r>
-          </a:p>
-          <a:p>
-            <a:r>
-              <a:rPr lang="sk-SK" sz="1800" dirty="0"/>
+            <a:pPr>
+              <a:buClr>
+                <a:schemeClr val="tx1">
+                  <a:lumMod val="95000"/>
+                  <a:lumOff val="5000"/>
+                </a:schemeClr>
+              </a:buClr>
+              <a:buSzPct val="110000"/>
+            </a:pPr>
+            <a:r>
+              <a:rPr lang="sk-SK" sz="2000" b="1" dirty="0">
+                <a:effectLst>
+                  <a:outerShdw blurRad="38100" dist="38100" dir="2700000" algn="tl">
+                    <a:srgbClr val="000000">
+                      <a:alpha val="43137"/>
+                    </a:srgbClr>
+                  </a:outerShdw>
+                </a:effectLst>
+              </a:rPr>
+              <a:t>4. </a:t>
+            </a:r>
+            <a:r>
+              <a:rPr lang="sk-SK" sz="2000" dirty="0"/>
               <a:t>Identifikácia faktorov, ktoré vplývajú na dynamiku volatility,</a:t>
             </a:r>
           </a:p>
           <a:p>
-            <a:r>
-              <a:rPr lang="sk-SK" sz="1800" dirty="0"/>
+            <a:pPr>
+              <a:buClr>
+                <a:schemeClr val="tx1">
+                  <a:lumMod val="95000"/>
+                  <a:lumOff val="5000"/>
+                </a:schemeClr>
+              </a:buClr>
+              <a:buSzPct val="110000"/>
+            </a:pPr>
+            <a:r>
+              <a:rPr lang="sk-SK" sz="2000" b="1" dirty="0">
+                <a:effectLst>
+                  <a:outerShdw blurRad="38100" dist="38100" dir="2700000" algn="tl">
+                    <a:srgbClr val="000000">
+                      <a:alpha val="43137"/>
+                    </a:srgbClr>
+                  </a:outerShdw>
+                </a:effectLst>
+              </a:rPr>
+              <a:t>5. </a:t>
+            </a:r>
+            <a:r>
+              <a:rPr lang="sk-SK" sz="2000" dirty="0"/>
               <a:t>Definícia metodiky pre identifikáciu vzorov v časových radoch akciových trhov s dôrazom na metódy umelej inteligencie,</a:t>
             </a:r>
           </a:p>
           <a:p>
-            <a:r>
-              <a:rPr lang="sk-SK" sz="1800" dirty="0"/>
+            <a:pPr>
+              <a:buClr>
+                <a:schemeClr val="tx1">
+                  <a:lumMod val="95000"/>
+                  <a:lumOff val="5000"/>
+                </a:schemeClr>
+              </a:buClr>
+              <a:buSzPct val="110000"/>
+            </a:pPr>
+            <a:r>
+              <a:rPr lang="sk-SK" sz="2000" b="1" dirty="0">
+                <a:effectLst>
+                  <a:outerShdw blurRad="38100" dist="38100" dir="2700000" algn="tl">
+                    <a:srgbClr val="000000">
+                      <a:alpha val="43137"/>
+                    </a:srgbClr>
+                  </a:outerShdw>
+                </a:effectLst>
+              </a:rPr>
+              <a:t>6. </a:t>
+            </a:r>
+            <a:r>
+              <a:rPr lang="sk-SK" sz="2000" dirty="0"/>
               <a:t>Poznatky o robustnosti definovanej metodiky vzhľadom na zdroj dát akciových indexov.</a:t>
             </a:r>
           </a:p>
@@ -5667,116 +10634,51 @@
           <a:lstStyle/>
           <a:p>
             <a:r>
-              <a:rPr lang="sk-SK" dirty="0"/>
+              <a:rPr lang="sk-SK" dirty="0">
+                <a:effectLst>
+                  <a:outerShdw blurRad="38100" dist="38100" dir="2700000" algn="tl">
+                    <a:srgbClr val="000000">
+                      <a:alpha val="43137"/>
+                    </a:srgbClr>
+                  </a:outerShdw>
+                </a:effectLst>
+              </a:rPr>
               <a:t>Návrh metodológie výskumu</a:t>
             </a:r>
           </a:p>
         </p:txBody>
       </p:sp>
-      <p:sp>
-        <p:nvSpPr>
-          <p:cNvPr id="3" name="Zástupný objekt pre obsah 2">
+      <p:graphicFrame>
+        <p:nvGraphicFramePr>
+          <p:cNvPr id="8" name="Zástupný objekt pre obsah 7">
             <a:extLst>
               <a:ext uri="{FF2B5EF4-FFF2-40B4-BE49-F238E27FC236}">
-                <a16:creationId xmlns:a16="http://schemas.microsoft.com/office/drawing/2014/main" id="{F857EBD8-C4CD-26FC-663A-3841679729A0}"/>
+                <a16:creationId xmlns:a16="http://schemas.microsoft.com/office/drawing/2014/main" id="{74CB2277-2A64-6542-6E7C-F87CD325718D}"/>
               </a:ext>
             </a:extLst>
           </p:cNvPr>
-          <p:cNvSpPr>
-            <a:spLocks noGrp="1"/>
-          </p:cNvSpPr>
+          <p:cNvGraphicFramePr>
+            <a:graphicFrameLocks noGrp="1"/>
+          </p:cNvGraphicFramePr>
           <p:nvPr>
             <p:ph idx="1"/>
+            <p:extLst>
+              <p:ext uri="{D42A27DB-BD31-4B8C-83A1-F6EECF244321}">
+                <p14:modId xmlns:p14="http://schemas.microsoft.com/office/powerpoint/2010/main" val="4249491686"/>
+              </p:ext>
+            </p:extLst>
           </p:nvPr>
-        </p:nvSpPr>
-        <p:spPr/>
-        <p:txBody>
-          <a:bodyPr>
-            <a:normAutofit/>
-          </a:bodyPr>
-          <a:lstStyle/>
-          <a:p>
-            <a:pPr marL="0" indent="0">
-              <a:buNone/>
-            </a:pPr>
-            <a:r>
-              <a:rPr lang="sk-SK" sz="1800" b="1" dirty="0"/>
-              <a:t>Príprava dát</a:t>
-            </a:r>
-          </a:p>
-          <a:p>
-            <a:r>
-              <a:rPr lang="sk-SK" sz="1800" dirty="0"/>
-              <a:t>Získanie a predspracovanie dát,</a:t>
-            </a:r>
-          </a:p>
-          <a:p>
-            <a:pPr marL="0" indent="0">
-              <a:buNone/>
-            </a:pPr>
-            <a:r>
-              <a:rPr lang="sk-SK" sz="1800" b="1" dirty="0"/>
-              <a:t>Modelovanie</a:t>
-            </a:r>
-          </a:p>
-          <a:p>
-            <a:r>
-              <a:rPr lang="sk-SK" sz="1800" dirty="0"/>
-              <a:t>Ekonometrické modely volatility,</a:t>
-            </a:r>
-          </a:p>
-          <a:p>
-            <a:r>
-              <a:rPr lang="sk-SK" sz="1800" dirty="0"/>
-              <a:t>Modely strojového učenia.</a:t>
-            </a:r>
-          </a:p>
-          <a:p>
-            <a:pPr marL="0" indent="0">
-              <a:buNone/>
-            </a:pPr>
-            <a:r>
-              <a:rPr lang="sk-SK" sz="1800" b="1" dirty="0"/>
-              <a:t>Testovanie</a:t>
-            </a:r>
-          </a:p>
-          <a:p>
-            <a:r>
-              <a:rPr lang="en-US" sz="1800" dirty="0" err="1"/>
-              <a:t>Testovanie</a:t>
-            </a:r>
-            <a:r>
-              <a:rPr lang="en-US" sz="1800" dirty="0"/>
-              <a:t> </a:t>
-            </a:r>
-            <a:r>
-              <a:rPr lang="en-US" sz="1800" dirty="0" err="1"/>
-              <a:t>modelov</a:t>
-            </a:r>
-            <a:r>
-              <a:rPr lang="en-US" sz="1800" dirty="0"/>
-              <a:t>,</a:t>
-            </a:r>
-          </a:p>
-          <a:p>
-            <a:r>
-              <a:rPr lang="en-US" sz="1800" dirty="0" err="1"/>
-              <a:t>Vyhodnotenie</a:t>
-            </a:r>
-            <a:r>
-              <a:rPr lang="en-US" sz="1800" dirty="0"/>
-              <a:t> volatility.</a:t>
-            </a:r>
-            <a:endParaRPr lang="sk-SK" sz="1800" dirty="0"/>
-          </a:p>
-          <a:p>
-            <a:pPr marL="0" indent="0">
-              <a:buNone/>
-            </a:pPr>
-            <a:endParaRPr lang="sk-SK" sz="1800" dirty="0"/>
-          </a:p>
-        </p:txBody>
-      </p:sp>
+        </p:nvGraphicFramePr>
+        <p:xfrm>
+          <a:off x="586596" y="2156604"/>
+          <a:ext cx="11128076" cy="4152756"/>
+        </p:xfrm>
+        <a:graphic>
+          <a:graphicData uri="http://schemas.openxmlformats.org/drawingml/2006/diagram">
+            <dgm:relIds xmlns:dgm="http://schemas.openxmlformats.org/drawingml/2006/diagram" xmlns:r="http://schemas.openxmlformats.org/officeDocument/2006/relationships" r:dm="rId2" r:lo="rId3" r:qs="rId4" r:cs="rId5"/>
+          </a:graphicData>
+        </a:graphic>
+      </p:graphicFrame>
     </p:spTree>
     <p:extLst>
       <p:ext uri="{BB962C8B-B14F-4D97-AF65-F5344CB8AC3E}">
@@ -5829,7 +10731,15 @@
           <a:lstStyle/>
           <a:p>
             <a:r>
-              <a:rPr lang="sk-SK" dirty="0"/>
+              <a:rPr lang="sk-SK" dirty="0">
+                <a:effectLst>
+                  <a:outerShdw blurRad="38100" dist="38100" dir="2700000" algn="tl">
+                    <a:srgbClr val="000000">
+                      <a:alpha val="43137"/>
+                    </a:srgbClr>
+                  </a:outerShdw>
+                </a:effectLst>
+              </a:rPr>
               <a:t>Získanie a predspracovanie dát</a:t>
             </a:r>
           </a:p>
@@ -5862,17 +10772,33 @@
               <a:buNone/>
             </a:pPr>
             <a:r>
-              <a:rPr lang="sk-SK" sz="1900" b="1" dirty="0"/>
+              <a:rPr lang="sk-SK" sz="1900" b="1" dirty="0">
+                <a:effectLst>
+                  <a:outerShdw blurRad="38100" dist="38100" dir="2700000" algn="tl">
+                    <a:srgbClr val="000000">
+                      <a:alpha val="43137"/>
+                    </a:srgbClr>
+                  </a:outerShdw>
+                </a:effectLst>
+              </a:rPr>
               <a:t>Zdroje dát</a:t>
             </a:r>
           </a:p>
           <a:p>
             <a:r>
+              <a:rPr lang="sk-SK" sz="1800" i="1" dirty="0"/>
+              <a:t>Stooq.pl</a:t>
+            </a:r>
+            <a:r>
               <a:rPr lang="sk-SK" sz="1800" dirty="0"/>
-              <a:t>Stooq.pl a Yahoo </a:t>
-            </a:r>
-            <a:r>
-              <a:rPr lang="sk-SK" sz="1800" dirty="0" err="1"/>
+              <a:t> a </a:t>
+            </a:r>
+            <a:r>
+              <a:rPr lang="sk-SK" sz="1800" i="1" dirty="0"/>
+              <a:t>Yahoo </a:t>
+            </a:r>
+            <a:r>
+              <a:rPr lang="sk-SK" sz="1800" i="1" dirty="0" err="1"/>
               <a:t>Finance</a:t>
             </a:r>
             <a:r>
@@ -5885,15 +10811,39 @@
               <a:buNone/>
             </a:pPr>
             <a:r>
-              <a:rPr lang="sk-SK" sz="1800" b="1" dirty="0"/>
+              <a:rPr lang="sk-SK" sz="1800" b="1" dirty="0">
+                <a:effectLst>
+                  <a:outerShdw blurRad="38100" dist="38100" dir="2700000" algn="tl">
+                    <a:srgbClr val="000000">
+                      <a:alpha val="43137"/>
+                    </a:srgbClr>
+                  </a:outerShdw>
+                </a:effectLst>
+              </a:rPr>
               <a:t>Vybrané akciové indexy</a:t>
             </a:r>
-            <a:endParaRPr lang="sk-SK" sz="1800" dirty="0"/>
+            <a:endParaRPr lang="sk-SK" sz="1800" dirty="0">
+              <a:effectLst>
+                <a:outerShdw blurRad="38100" dist="38100" dir="2700000" algn="tl">
+                  <a:srgbClr val="000000">
+                    <a:alpha val="43137"/>
+                  </a:srgbClr>
+                </a:outerShdw>
+              </a:effectLst>
+            </a:endParaRPr>
           </a:p>
           <a:p>
             <a:r>
               <a:rPr lang="sk-SK" sz="1800" dirty="0"/>
-              <a:t>Indexy top firiem pre daný trh.</a:t>
+              <a:t>Indexy top </a:t>
+            </a:r>
+            <a:r>
+              <a:rPr lang="sk-SK" sz="1800" i="1" dirty="0"/>
+              <a:t>30</a:t>
+            </a:r>
+            <a:r>
+              <a:rPr lang="sk-SK" sz="1800" dirty="0"/>
+              <a:t> firiem pre daný trh.</a:t>
             </a:r>
           </a:p>
           <a:p>
@@ -5901,7 +10851,15 @@
               <a:buNone/>
             </a:pPr>
             <a:r>
-              <a:rPr lang="sk-SK" sz="1800" b="1" dirty="0"/>
+              <a:rPr lang="sk-SK" sz="1800" b="1" dirty="0">
+                <a:effectLst>
+                  <a:outerShdw blurRad="38100" dist="38100" dir="2700000" algn="tl">
+                    <a:srgbClr val="000000">
+                      <a:alpha val="43137"/>
+                    </a:srgbClr>
+                  </a:outerShdw>
+                </a:effectLst>
+              </a:rPr>
               <a:t>Rozdelenie dát</a:t>
             </a:r>
           </a:p>
@@ -5909,14 +10867,38 @@
             <a:pPr lvl="0"/>
             <a:r>
               <a:rPr lang="sk-SK" sz="1800" dirty="0"/>
-              <a:t>Obdobie pred pandémiou (2016-2019),</a:t>
+              <a:t>Obdobie pred pandémiou (</a:t>
+            </a:r>
+            <a:r>
+              <a:rPr lang="sk-SK" sz="1800" i="1" dirty="0"/>
+              <a:t>2016-2019</a:t>
+            </a:r>
+            <a:r>
+              <a:rPr lang="sk-SK" sz="1800" dirty="0"/>
+              <a:t>),</a:t>
             </a:r>
           </a:p>
           <a:p>
             <a:pPr lvl="0"/>
             <a:r>
               <a:rPr lang="sk-SK" sz="1800" dirty="0"/>
-              <a:t>Obdobie COVID-19 (2020-2022),</a:t>
+              <a:t>Obdobie </a:t>
+            </a:r>
+            <a:r>
+              <a:rPr lang="sk-SK" sz="1800" i="1" dirty="0"/>
+              <a:t>COVID-19</a:t>
+            </a:r>
+            <a:r>
+              <a:rPr lang="sk-SK" sz="1800" dirty="0"/>
+              <a:t> (</a:t>
+            </a:r>
+            <a:r>
+              <a:rPr lang="sk-SK" sz="1800" i="1" dirty="0"/>
+              <a:t>2020-2022</a:t>
+            </a:r>
+            <a:r>
+              <a:rPr lang="sk-SK" sz="1800" dirty="0"/>
+              <a:t>),</a:t>
             </a:r>
           </a:p>
           <a:p>
@@ -5927,7 +10909,15 @@
             </a:r>
             <a:r>
               <a:rPr lang="sk-SK" sz="1800" dirty="0"/>
-              <a:t> obdobie (2023-2026).</a:t>
+              <a:t> obdobie (</a:t>
+            </a:r>
+            <a:r>
+              <a:rPr lang="sk-SK" sz="1800" i="1" dirty="0"/>
+              <a:t>2023-2026</a:t>
+            </a:r>
+            <a:r>
+              <a:rPr lang="sk-SK" sz="1800" dirty="0"/>
+              <a:t>).</a:t>
             </a:r>
           </a:p>
           <a:p>
@@ -6018,7 +11008,7 @@
               <a:t>(</a:t>
             </a:r>
             <a:r>
-              <a:rPr lang="sk-SK" sz="1400" dirty="0"/>
+              <a:rPr lang="sk-SK" sz="1400" i="1" dirty="0"/>
               <a:t>Nemecký DAX, Stooq.pl</a:t>
             </a:r>
             <a:r>
@@ -6081,7 +11071,15 @@
           <a:lstStyle/>
           <a:p>
             <a:r>
-              <a:rPr lang="sk-SK" dirty="0"/>
+              <a:rPr lang="sk-SK" dirty="0">
+                <a:effectLst>
+                  <a:outerShdw blurRad="38100" dist="38100" dir="2700000" algn="tl">
+                    <a:srgbClr val="000000">
+                      <a:alpha val="43137"/>
+                    </a:srgbClr>
+                  </a:outerShdw>
+                </a:effectLst>
+              </a:rPr>
               <a:t>Modelovanie</a:t>
             </a:r>
           </a:p>
@@ -6114,7 +11112,15 @@
               <a:buNone/>
             </a:pPr>
             <a:r>
-              <a:rPr lang="sk-SK" sz="1800" b="1" dirty="0"/>
+              <a:rPr lang="sk-SK" sz="1800" b="1" dirty="0">
+                <a:effectLst>
+                  <a:outerShdw blurRad="38100" dist="38100" dir="2700000" algn="tl">
+                    <a:srgbClr val="000000">
+                      <a:alpha val="43137"/>
+                    </a:srgbClr>
+                  </a:outerShdw>
+                </a:effectLst>
+              </a:rPr>
               <a:t>Ekonometrické modely volatility</a:t>
             </a:r>
           </a:p>
@@ -6163,7 +11169,15 @@
               <a:buNone/>
             </a:pPr>
             <a:r>
-              <a:rPr lang="sk-SK" sz="1800" b="1" dirty="0"/>
+              <a:rPr lang="sk-SK" sz="1800" b="1" dirty="0">
+                <a:effectLst>
+                  <a:outerShdw blurRad="38100" dist="38100" dir="2700000" algn="tl">
+                    <a:srgbClr val="000000">
+                      <a:alpha val="43137"/>
+                    </a:srgbClr>
+                  </a:outerShdw>
+                </a:effectLst>
+              </a:rPr>
               <a:t>Modely strojového učenia</a:t>
             </a:r>
           </a:p>
@@ -6192,7 +11206,15 @@
               <a:buNone/>
             </a:pPr>
             <a:r>
-              <a:rPr lang="sk-SK" sz="1800" b="1" dirty="0"/>
+              <a:rPr lang="sk-SK" sz="1800" b="1" dirty="0">
+                <a:effectLst>
+                  <a:outerShdw blurRad="38100" dist="38100" dir="2700000" algn="tl">
+                    <a:srgbClr val="000000">
+                      <a:alpha val="43137"/>
+                    </a:srgbClr>
+                  </a:outerShdw>
+                </a:effectLst>
+              </a:rPr>
               <a:t>Trénovanie</a:t>
             </a:r>
           </a:p>
@@ -6263,7 +11285,15 @@
           <a:lstStyle/>
           <a:p>
             <a:r>
-              <a:rPr lang="sk-SK" dirty="0"/>
+              <a:rPr lang="sk-SK" dirty="0">
+                <a:effectLst>
+                  <a:outerShdw blurRad="38100" dist="38100" dir="2700000" algn="tl">
+                    <a:srgbClr val="000000">
+                      <a:alpha val="43137"/>
+                    </a:srgbClr>
+                  </a:outerShdw>
+                </a:effectLst>
+              </a:rPr>
               <a:t>Vyhodnotenie výsledkov</a:t>
             </a:r>
           </a:p>
@@ -6296,23 +11326,59 @@
               <a:buNone/>
             </a:pPr>
             <a:r>
-              <a:rPr lang="sk-SK" sz="1800" b="1" dirty="0"/>
+              <a:rPr lang="sk-SK" sz="1800" b="1" dirty="0">
+                <a:effectLst>
+                  <a:outerShdw blurRad="38100" dist="38100" dir="2700000" algn="tl">
+                    <a:srgbClr val="000000">
+                      <a:alpha val="43137"/>
+                    </a:srgbClr>
+                  </a:outerShdw>
+                </a:effectLst>
+              </a:rPr>
               <a:t>Testovanie modelov</a:t>
             </a:r>
           </a:p>
           <a:p>
             <a:r>
               <a:rPr lang="sk-SK" sz="1800" dirty="0"/>
-              <a:t>Metriky RMSE a QLIKE,</a:t>
-            </a:r>
-          </a:p>
-          <a:p>
+              <a:t>Metriky </a:t>
+            </a:r>
+            <a:r>
+              <a:rPr lang="sk-SK" sz="1800" i="1" dirty="0"/>
+              <a:t>RMSE</a:t>
+            </a:r>
             <a:r>
               <a:rPr lang="sk-SK" sz="1800" dirty="0"/>
-              <a:t>Porovnanie výsledkov Stooq.pl a Yahoo </a:t>
-            </a:r>
-            <a:r>
-              <a:rPr lang="sk-SK" sz="1800" dirty="0" err="1"/>
+              <a:t> a </a:t>
+            </a:r>
+            <a:r>
+              <a:rPr lang="sk-SK" sz="1800" i="1" dirty="0"/>
+              <a:t>QLIKE</a:t>
+            </a:r>
+            <a:r>
+              <a:rPr lang="sk-SK" sz="1800" dirty="0"/>
+              <a:t>,</a:t>
+            </a:r>
+          </a:p>
+          <a:p>
+            <a:r>
+              <a:rPr lang="sk-SK" sz="1800" dirty="0"/>
+              <a:t>Porovnanie výsledkov </a:t>
+            </a:r>
+            <a:r>
+              <a:rPr lang="sk-SK" sz="1800" i="1" dirty="0"/>
+              <a:t>Stooq.pl</a:t>
+            </a:r>
+            <a:r>
+              <a:rPr lang="sk-SK" sz="1800" dirty="0"/>
+              <a:t> a </a:t>
+            </a:r>
+            <a:r>
+              <a:rPr lang="sk-SK" sz="1800" i="1" dirty="0"/>
+              <a:t>Yahoo </a:t>
+            </a:r>
+            <a:r>
+              <a:rPr lang="sk-SK" sz="1800" i="1" dirty="0" err="1"/>
               <a:t>Finance</a:t>
             </a:r>
             <a:r>
@@ -6325,15 +11391,39 @@
               <a:buNone/>
             </a:pPr>
             <a:r>
-              <a:rPr lang="en-US" sz="1800" b="1" dirty="0"/>
+              <a:rPr lang="en-US" sz="1800" b="1" dirty="0">
+                <a:effectLst>
+                  <a:outerShdw blurRad="38100" dist="38100" dir="2700000" algn="tl">
+                    <a:srgbClr val="000000">
+                      <a:alpha val="43137"/>
+                    </a:srgbClr>
+                  </a:outerShdw>
+                </a:effectLst>
+              </a:rPr>
               <a:t>V</a:t>
             </a:r>
             <a:r>
-              <a:rPr lang="sk-SK" sz="1800" b="1" dirty="0" err="1"/>
+              <a:rPr lang="sk-SK" sz="1800" b="1" dirty="0" err="1">
+                <a:effectLst>
+                  <a:outerShdw blurRad="38100" dist="38100" dir="2700000" algn="tl">
+                    <a:srgbClr val="000000">
+                      <a:alpha val="43137"/>
+                    </a:srgbClr>
+                  </a:outerShdw>
+                </a:effectLst>
+              </a:rPr>
               <a:t>yhodnotenie</a:t>
             </a:r>
             <a:r>
-              <a:rPr lang="sk-SK" sz="1800" b="1" dirty="0"/>
+              <a:rPr lang="sk-SK" sz="1800" b="1" dirty="0">
+                <a:effectLst>
+                  <a:outerShdw blurRad="38100" dist="38100" dir="2700000" algn="tl">
+                    <a:srgbClr val="000000">
+                      <a:alpha val="43137"/>
+                    </a:srgbClr>
+                  </a:outerShdw>
+                </a:effectLst>
+              </a:rPr>
               <a:t> volatility</a:t>
             </a:r>
           </a:p>
@@ -6423,10 +11513,26 @@
           <a:p>
             <a:pPr algn="ctr"/>
             <a:r>
-              <a:rPr lang="sk-SK" sz="4400" b="1" dirty="0"/>
+              <a:rPr lang="sk-SK" sz="4400" b="1" dirty="0">
+                <a:effectLst>
+                  <a:outerShdw blurRad="38100" dist="38100" dir="2700000" algn="tl">
+                    <a:srgbClr val="000000">
+                      <a:alpha val="43137"/>
+                    </a:srgbClr>
+                  </a:outerShdw>
+                </a:effectLst>
+              </a:rPr>
               <a:t>Ďakujem za pozornosť</a:t>
             </a:r>
-            <a:endParaRPr lang="sk-SK" sz="4400" dirty="0"/>
+            <a:endParaRPr lang="sk-SK" sz="4400" dirty="0">
+              <a:effectLst>
+                <a:outerShdw blurRad="38100" dist="38100" dir="2700000" algn="tl">
+                  <a:srgbClr val="000000">
+                    <a:alpha val="43137"/>
+                  </a:srgbClr>
+                </a:outerShdw>
+              </a:effectLst>
+            </a:endParaRPr>
           </a:p>
         </p:txBody>
       </p:sp>

--- a/Identifikácia vzorov v časových radoch pre komparáciu volatility.pptx
+++ b/Identifikácia vzorov v časových radoch pre komparáciu volatility.pptx
@@ -4,11 +4,14 @@
   <p:sldMasterIdLst>
     <p:sldMasterId id="2147483660" r:id="rId1"/>
   </p:sldMasterIdLst>
+  <p:notesMasterIdLst>
+    <p:notesMasterId r:id="rId11"/>
+  </p:notesMasterIdLst>
   <p:sldIdLst>
     <p:sldId id="256" r:id="rId2"/>
     <p:sldId id="258" r:id="rId3"/>
-    <p:sldId id="259" r:id="rId4"/>
-    <p:sldId id="257" r:id="rId5"/>
+    <p:sldId id="257" r:id="rId4"/>
+    <p:sldId id="259" r:id="rId5"/>
     <p:sldId id="260" r:id="rId6"/>
     <p:sldId id="261" r:id="rId7"/>
     <p:sldId id="262" r:id="rId8"/>
@@ -1965,7 +1968,7 @@
   <dgm:whole/>
   <dgm:extLst>
     <a:ext uri="http://schemas.microsoft.com/office/drawing/2008/diagram">
-      <dsp:dataModelExt xmlns:dsp="http://schemas.microsoft.com/office/drawing/2008/diagram" relId="rId6" minVer="http://schemas.openxmlformats.org/drawingml/2006/diagram"/>
+      <dsp:dataModelExt xmlns:dsp="http://schemas.microsoft.com/office/drawing/2008/diagram" relId="rId7" minVer="http://schemas.openxmlformats.org/drawingml/2006/diagram"/>
     </a:ext>
   </dgm:extLst>
 </dgm:dataModel>
@@ -4738,6 +4741,1564 @@
 </dgm:styleDef>
 </file>
 
+<file path=ppt/notesMasters/notesMaster1.xml><?xml version="1.0" encoding="utf-8"?>
+<p:notesMaster xmlns:a="http://schemas.openxmlformats.org/drawingml/2006/main" xmlns:r="http://schemas.openxmlformats.org/officeDocument/2006/relationships" xmlns:p="http://schemas.openxmlformats.org/presentationml/2006/main">
+  <p:cSld>
+    <p:bg>
+      <p:bgRef idx="1001">
+        <a:schemeClr val="bg1"/>
+      </p:bgRef>
+    </p:bg>
+    <p:spTree>
+      <p:nvGrpSpPr>
+        <p:cNvPr id="1" name=""/>
+        <p:cNvGrpSpPr/>
+        <p:nvPr/>
+      </p:nvGrpSpPr>
+      <p:grpSpPr>
+        <a:xfrm>
+          <a:off x="0" y="0"/>
+          <a:ext cx="0" cy="0"/>
+          <a:chOff x="0" y="0"/>
+          <a:chExt cx="0" cy="0"/>
+        </a:xfrm>
+      </p:grpSpPr>
+      <p:sp>
+        <p:nvSpPr>
+          <p:cNvPr id="2" name="Zástupný objekt pre hlavičku 1"/>
+          <p:cNvSpPr>
+            <a:spLocks noGrp="1"/>
+          </p:cNvSpPr>
+          <p:nvPr>
+            <p:ph type="hdr" sz="quarter"/>
+          </p:nvPr>
+        </p:nvSpPr>
+        <p:spPr>
+          <a:xfrm>
+            <a:off x="0" y="0"/>
+            <a:ext cx="2971800" cy="458788"/>
+          </a:xfrm>
+          <a:prstGeom prst="rect">
+            <a:avLst/>
+          </a:prstGeom>
+        </p:spPr>
+        <p:txBody>
+          <a:bodyPr vert="horz" lIns="91440" tIns="45720" rIns="91440" bIns="45720" rtlCol="0"/>
+          <a:lstStyle>
+            <a:lvl1pPr algn="l">
+              <a:defRPr sz="1200"/>
+            </a:lvl1pPr>
+          </a:lstStyle>
+          <a:p>
+            <a:endParaRPr lang="sk-SK"/>
+          </a:p>
+        </p:txBody>
+      </p:sp>
+      <p:sp>
+        <p:nvSpPr>
+          <p:cNvPr id="3" name="Zástupný objekt pre dátum 2"/>
+          <p:cNvSpPr>
+            <a:spLocks noGrp="1"/>
+          </p:cNvSpPr>
+          <p:nvPr>
+            <p:ph type="dt" idx="1"/>
+          </p:nvPr>
+        </p:nvSpPr>
+        <p:spPr>
+          <a:xfrm>
+            <a:off x="3884613" y="0"/>
+            <a:ext cx="2971800" cy="458788"/>
+          </a:xfrm>
+          <a:prstGeom prst="rect">
+            <a:avLst/>
+          </a:prstGeom>
+        </p:spPr>
+        <p:txBody>
+          <a:bodyPr vert="horz" lIns="91440" tIns="45720" rIns="91440" bIns="45720" rtlCol="0"/>
+          <a:lstStyle>
+            <a:lvl1pPr algn="r">
+              <a:defRPr sz="1200"/>
+            </a:lvl1pPr>
+          </a:lstStyle>
+          <a:p>
+            <a:fld id="{AD9B504B-8E04-47AE-BBD5-0260BCE63BC0}" type="datetimeFigureOut">
+              <a:rPr lang="sk-SK" smtClean="0"/>
+              <a:t>21. 6. 2026</a:t>
+            </a:fld>
+            <a:endParaRPr lang="sk-SK"/>
+          </a:p>
+        </p:txBody>
+      </p:sp>
+      <p:sp>
+        <p:nvSpPr>
+          <p:cNvPr id="4" name="Zástupný objekt pre obrázok snímky 3"/>
+          <p:cNvSpPr>
+            <a:spLocks noGrp="1" noRot="1" noChangeAspect="1"/>
+          </p:cNvSpPr>
+          <p:nvPr>
+            <p:ph type="sldImg" idx="2"/>
+          </p:nvPr>
+        </p:nvSpPr>
+        <p:spPr>
+          <a:xfrm>
+            <a:off x="685800" y="1143000"/>
+            <a:ext cx="5486400" cy="3086100"/>
+          </a:xfrm>
+          <a:prstGeom prst="rect">
+            <a:avLst/>
+          </a:prstGeom>
+          <a:noFill/>
+          <a:ln w="12700">
+            <a:solidFill>
+              <a:prstClr val="black"/>
+            </a:solidFill>
+          </a:ln>
+        </p:spPr>
+        <p:txBody>
+          <a:bodyPr vert="horz" lIns="91440" tIns="45720" rIns="91440" bIns="45720" rtlCol="0" anchor="ctr"/>
+          <a:lstStyle/>
+          <a:p>
+            <a:endParaRPr lang="sk-SK"/>
+          </a:p>
+        </p:txBody>
+      </p:sp>
+      <p:sp>
+        <p:nvSpPr>
+          <p:cNvPr id="5" name="Zástupný objekt pre poznámky 4"/>
+          <p:cNvSpPr>
+            <a:spLocks noGrp="1"/>
+          </p:cNvSpPr>
+          <p:nvPr>
+            <p:ph type="body" sz="quarter" idx="3"/>
+          </p:nvPr>
+        </p:nvSpPr>
+        <p:spPr>
+          <a:xfrm>
+            <a:off x="685800" y="4400550"/>
+            <a:ext cx="5486400" cy="3600450"/>
+          </a:xfrm>
+          <a:prstGeom prst="rect">
+            <a:avLst/>
+          </a:prstGeom>
+        </p:spPr>
+        <p:txBody>
+          <a:bodyPr vert="horz" lIns="91440" tIns="45720" rIns="91440" bIns="45720" rtlCol="0"/>
+          <a:lstStyle/>
+          <a:p>
+            <a:pPr lvl="0"/>
+            <a:r>
+              <a:rPr lang="sk-SK"/>
+              <a:t>Kliknite sem a upravte štýly predlohy textu</a:t>
+            </a:r>
+          </a:p>
+          <a:p>
+            <a:pPr lvl="1"/>
+            <a:r>
+              <a:rPr lang="sk-SK"/>
+              <a:t>Druhá úroveň</a:t>
+            </a:r>
+          </a:p>
+          <a:p>
+            <a:pPr lvl="2"/>
+            <a:r>
+              <a:rPr lang="sk-SK"/>
+              <a:t>Tretia úroveň</a:t>
+            </a:r>
+          </a:p>
+          <a:p>
+            <a:pPr lvl="3"/>
+            <a:r>
+              <a:rPr lang="sk-SK"/>
+              <a:t>Štvrtá úroveň</a:t>
+            </a:r>
+          </a:p>
+          <a:p>
+            <a:pPr lvl="4"/>
+            <a:r>
+              <a:rPr lang="sk-SK"/>
+              <a:t>Piata úroveň</a:t>
+            </a:r>
+          </a:p>
+        </p:txBody>
+      </p:sp>
+      <p:sp>
+        <p:nvSpPr>
+          <p:cNvPr id="6" name="Zástupný objekt pre pätu 5"/>
+          <p:cNvSpPr>
+            <a:spLocks noGrp="1"/>
+          </p:cNvSpPr>
+          <p:nvPr>
+            <p:ph type="ftr" sz="quarter" idx="4"/>
+          </p:nvPr>
+        </p:nvSpPr>
+        <p:spPr>
+          <a:xfrm>
+            <a:off x="0" y="8685213"/>
+            <a:ext cx="2971800" cy="458787"/>
+          </a:xfrm>
+          <a:prstGeom prst="rect">
+            <a:avLst/>
+          </a:prstGeom>
+        </p:spPr>
+        <p:txBody>
+          <a:bodyPr vert="horz" lIns="91440" tIns="45720" rIns="91440" bIns="45720" rtlCol="0" anchor="b"/>
+          <a:lstStyle>
+            <a:lvl1pPr algn="l">
+              <a:defRPr sz="1200"/>
+            </a:lvl1pPr>
+          </a:lstStyle>
+          <a:p>
+            <a:endParaRPr lang="sk-SK"/>
+          </a:p>
+        </p:txBody>
+      </p:sp>
+      <p:sp>
+        <p:nvSpPr>
+          <p:cNvPr id="7" name="Zástupný objekt pre číslo snímky 6"/>
+          <p:cNvSpPr>
+            <a:spLocks noGrp="1"/>
+          </p:cNvSpPr>
+          <p:nvPr>
+            <p:ph type="sldNum" sz="quarter" idx="5"/>
+          </p:nvPr>
+        </p:nvSpPr>
+        <p:spPr>
+          <a:xfrm>
+            <a:off x="3884613" y="8685213"/>
+            <a:ext cx="2971800" cy="458787"/>
+          </a:xfrm>
+          <a:prstGeom prst="rect">
+            <a:avLst/>
+          </a:prstGeom>
+        </p:spPr>
+        <p:txBody>
+          <a:bodyPr vert="horz" lIns="91440" tIns="45720" rIns="91440" bIns="45720" rtlCol="0" anchor="b"/>
+          <a:lstStyle>
+            <a:lvl1pPr algn="r">
+              <a:defRPr sz="1200"/>
+            </a:lvl1pPr>
+          </a:lstStyle>
+          <a:p>
+            <a:fld id="{720C6227-A214-42BB-84EB-9C7415895DDE}" type="slidenum">
+              <a:rPr lang="sk-SK" smtClean="0"/>
+              <a:t>‹#›</a:t>
+            </a:fld>
+            <a:endParaRPr lang="sk-SK"/>
+          </a:p>
+        </p:txBody>
+      </p:sp>
+    </p:spTree>
+    <p:extLst>
+      <p:ext uri="{BB962C8B-B14F-4D97-AF65-F5344CB8AC3E}">
+        <p14:creationId xmlns:p14="http://schemas.microsoft.com/office/powerpoint/2010/main" val="4120199202"/>
+      </p:ext>
+    </p:extLst>
+  </p:cSld>
+  <p:clrMap bg1="lt1" tx1="dk1" bg2="lt2" tx2="dk2" accent1="accent1" accent2="accent2" accent3="accent3" accent4="accent4" accent5="accent5" accent6="accent6" hlink="hlink" folHlink="folHlink"/>
+  <p:notesStyle>
+    <a:lvl1pPr marL="0" algn="l" defTabSz="914400" rtl="0" eaLnBrk="1" latinLnBrk="0" hangingPunct="1">
+      <a:defRPr sz="1200" kern="1200">
+        <a:solidFill>
+          <a:schemeClr val="tx1"/>
+        </a:solidFill>
+        <a:latin typeface="+mn-lt"/>
+        <a:ea typeface="+mn-ea"/>
+        <a:cs typeface="+mn-cs"/>
+      </a:defRPr>
+    </a:lvl1pPr>
+    <a:lvl2pPr marL="457200" algn="l" defTabSz="914400" rtl="0" eaLnBrk="1" latinLnBrk="0" hangingPunct="1">
+      <a:defRPr sz="1200" kern="1200">
+        <a:solidFill>
+          <a:schemeClr val="tx1"/>
+        </a:solidFill>
+        <a:latin typeface="+mn-lt"/>
+        <a:ea typeface="+mn-ea"/>
+        <a:cs typeface="+mn-cs"/>
+      </a:defRPr>
+    </a:lvl2pPr>
+    <a:lvl3pPr marL="914400" algn="l" defTabSz="914400" rtl="0" eaLnBrk="1" latinLnBrk="0" hangingPunct="1">
+      <a:defRPr sz="1200" kern="1200">
+        <a:solidFill>
+          <a:schemeClr val="tx1"/>
+        </a:solidFill>
+        <a:latin typeface="+mn-lt"/>
+        <a:ea typeface="+mn-ea"/>
+        <a:cs typeface="+mn-cs"/>
+      </a:defRPr>
+    </a:lvl3pPr>
+    <a:lvl4pPr marL="1371600" algn="l" defTabSz="914400" rtl="0" eaLnBrk="1" latinLnBrk="0" hangingPunct="1">
+      <a:defRPr sz="1200" kern="1200">
+        <a:solidFill>
+          <a:schemeClr val="tx1"/>
+        </a:solidFill>
+        <a:latin typeface="+mn-lt"/>
+        <a:ea typeface="+mn-ea"/>
+        <a:cs typeface="+mn-cs"/>
+      </a:defRPr>
+    </a:lvl4pPr>
+    <a:lvl5pPr marL="1828800" algn="l" defTabSz="914400" rtl="0" eaLnBrk="1" latinLnBrk="0" hangingPunct="1">
+      <a:defRPr sz="1200" kern="1200">
+        <a:solidFill>
+          <a:schemeClr val="tx1"/>
+        </a:solidFill>
+        <a:latin typeface="+mn-lt"/>
+        <a:ea typeface="+mn-ea"/>
+        <a:cs typeface="+mn-cs"/>
+      </a:defRPr>
+    </a:lvl5pPr>
+    <a:lvl6pPr marL="2286000" algn="l" defTabSz="914400" rtl="0" eaLnBrk="1" latinLnBrk="0" hangingPunct="1">
+      <a:defRPr sz="1200" kern="1200">
+        <a:solidFill>
+          <a:schemeClr val="tx1"/>
+        </a:solidFill>
+        <a:latin typeface="+mn-lt"/>
+        <a:ea typeface="+mn-ea"/>
+        <a:cs typeface="+mn-cs"/>
+      </a:defRPr>
+    </a:lvl6pPr>
+    <a:lvl7pPr marL="2743200" algn="l" defTabSz="914400" rtl="0" eaLnBrk="1" latinLnBrk="0" hangingPunct="1">
+      <a:defRPr sz="1200" kern="1200">
+        <a:solidFill>
+          <a:schemeClr val="tx1"/>
+        </a:solidFill>
+        <a:latin typeface="+mn-lt"/>
+        <a:ea typeface="+mn-ea"/>
+        <a:cs typeface="+mn-cs"/>
+      </a:defRPr>
+    </a:lvl7pPr>
+    <a:lvl8pPr marL="3200400" algn="l" defTabSz="914400" rtl="0" eaLnBrk="1" latinLnBrk="0" hangingPunct="1">
+      <a:defRPr sz="1200" kern="1200">
+        <a:solidFill>
+          <a:schemeClr val="tx1"/>
+        </a:solidFill>
+        <a:latin typeface="+mn-lt"/>
+        <a:ea typeface="+mn-ea"/>
+        <a:cs typeface="+mn-cs"/>
+      </a:defRPr>
+    </a:lvl8pPr>
+    <a:lvl9pPr marL="3657600" algn="l" defTabSz="914400" rtl="0" eaLnBrk="1" latinLnBrk="0" hangingPunct="1">
+      <a:defRPr sz="1200" kern="1200">
+        <a:solidFill>
+          <a:schemeClr val="tx1"/>
+        </a:solidFill>
+        <a:latin typeface="+mn-lt"/>
+        <a:ea typeface="+mn-ea"/>
+        <a:cs typeface="+mn-cs"/>
+      </a:defRPr>
+    </a:lvl9pPr>
+  </p:notesStyle>
+</p:notesMaster>
+</file>
+
+<file path=ppt/notesSlides/notesSlide1.xml><?xml version="1.0" encoding="utf-8"?>
+<p:notes xmlns:a="http://schemas.openxmlformats.org/drawingml/2006/main" xmlns:r="http://schemas.openxmlformats.org/officeDocument/2006/relationships" xmlns:p="http://schemas.openxmlformats.org/presentationml/2006/main">
+  <p:cSld>
+    <p:spTree>
+      <p:nvGrpSpPr>
+        <p:cNvPr id="1" name=""/>
+        <p:cNvGrpSpPr/>
+        <p:nvPr/>
+      </p:nvGrpSpPr>
+      <p:grpSpPr>
+        <a:xfrm>
+          <a:off x="0" y="0"/>
+          <a:ext cx="0" cy="0"/>
+          <a:chOff x="0" y="0"/>
+          <a:chExt cx="0" cy="0"/>
+        </a:xfrm>
+      </p:grpSpPr>
+      <p:sp>
+        <p:nvSpPr>
+          <p:cNvPr id="2" name="Zástupný objekt pre obrázok snímky 1"/>
+          <p:cNvSpPr>
+            <a:spLocks noGrp="1" noRot="1" noChangeAspect="1"/>
+          </p:cNvSpPr>
+          <p:nvPr>
+            <p:ph type="sldImg"/>
+          </p:nvPr>
+        </p:nvSpPr>
+        <p:spPr/>
+      </p:sp>
+      <p:sp>
+        <p:nvSpPr>
+          <p:cNvPr id="3" name="Zástupný objekt pre poznámky 2"/>
+          <p:cNvSpPr>
+            <a:spLocks noGrp="1"/>
+          </p:cNvSpPr>
+          <p:nvPr>
+            <p:ph type="body" idx="1"/>
+          </p:nvPr>
+        </p:nvSpPr>
+        <p:spPr/>
+        <p:txBody>
+          <a:bodyPr/>
+          <a:lstStyle/>
+          <a:p>
+            <a:r>
+              <a:rPr lang="sk-SK" dirty="0"/>
+              <a:t>Vážená komisia, rád by som Vám predstavil môj koncept dizertačnej práce s názvom:</a:t>
+            </a:r>
+          </a:p>
+        </p:txBody>
+      </p:sp>
+      <p:sp>
+        <p:nvSpPr>
+          <p:cNvPr id="4" name="Zástupný objekt pre číslo snímky 3"/>
+          <p:cNvSpPr>
+            <a:spLocks noGrp="1"/>
+          </p:cNvSpPr>
+          <p:nvPr>
+            <p:ph type="sldNum" sz="quarter" idx="5"/>
+          </p:nvPr>
+        </p:nvSpPr>
+        <p:spPr/>
+        <p:txBody>
+          <a:bodyPr/>
+          <a:lstStyle/>
+          <a:p>
+            <a:fld id="{720C6227-A214-42BB-84EB-9C7415895DDE}" type="slidenum">
+              <a:rPr lang="sk-SK" smtClean="0"/>
+              <a:t>1</a:t>
+            </a:fld>
+            <a:endParaRPr lang="sk-SK"/>
+          </a:p>
+        </p:txBody>
+      </p:sp>
+    </p:spTree>
+    <p:extLst>
+      <p:ext uri="{BB962C8B-B14F-4D97-AF65-F5344CB8AC3E}">
+        <p14:creationId xmlns:p14="http://schemas.microsoft.com/office/powerpoint/2010/main" val="3822607468"/>
+      </p:ext>
+    </p:extLst>
+  </p:cSld>
+  <p:clrMapOvr>
+    <a:masterClrMapping/>
+  </p:clrMapOvr>
+</p:notes>
+</file>
+
+<file path=ppt/notesSlides/notesSlide2.xml><?xml version="1.0" encoding="utf-8"?>
+<p:notes xmlns:a="http://schemas.openxmlformats.org/drawingml/2006/main" xmlns:r="http://schemas.openxmlformats.org/officeDocument/2006/relationships" xmlns:p="http://schemas.openxmlformats.org/presentationml/2006/main">
+  <p:cSld>
+    <p:spTree>
+      <p:nvGrpSpPr>
+        <p:cNvPr id="1" name=""/>
+        <p:cNvGrpSpPr/>
+        <p:nvPr/>
+      </p:nvGrpSpPr>
+      <p:grpSpPr>
+        <a:xfrm>
+          <a:off x="0" y="0"/>
+          <a:ext cx="0" cy="0"/>
+          <a:chOff x="0" y="0"/>
+          <a:chExt cx="0" cy="0"/>
+        </a:xfrm>
+      </p:grpSpPr>
+      <p:sp>
+        <p:nvSpPr>
+          <p:cNvPr id="2" name="Zástupný objekt pre obrázok snímky 1"/>
+          <p:cNvSpPr>
+            <a:spLocks noGrp="1" noRot="1" noChangeAspect="1"/>
+          </p:cNvSpPr>
+          <p:nvPr>
+            <p:ph type="sldImg"/>
+          </p:nvPr>
+        </p:nvSpPr>
+        <p:spPr/>
+      </p:sp>
+      <p:sp>
+        <p:nvSpPr>
+          <p:cNvPr id="3" name="Zástupný objekt pre poznámky 2"/>
+          <p:cNvSpPr>
+            <a:spLocks noGrp="1"/>
+          </p:cNvSpPr>
+          <p:nvPr>
+            <p:ph type="body" idx="1"/>
+          </p:nvPr>
+        </p:nvSpPr>
+        <p:spPr/>
+        <p:txBody>
+          <a:bodyPr/>
+          <a:lstStyle/>
+          <a:p>
+            <a:r>
+              <a:rPr lang="en-US" dirty="0" err="1"/>
+              <a:t>Definova</a:t>
+            </a:r>
+            <a:r>
+              <a:rPr lang="sk-SK" dirty="0"/>
+              <a:t>ť cieľ a načrtnúť metodiku.</a:t>
+            </a:r>
+          </a:p>
+        </p:txBody>
+      </p:sp>
+      <p:sp>
+        <p:nvSpPr>
+          <p:cNvPr id="4" name="Zástupný objekt pre číslo snímky 3"/>
+          <p:cNvSpPr>
+            <a:spLocks noGrp="1"/>
+          </p:cNvSpPr>
+          <p:nvPr>
+            <p:ph type="sldNum" sz="quarter" idx="5"/>
+          </p:nvPr>
+        </p:nvSpPr>
+        <p:spPr/>
+        <p:txBody>
+          <a:bodyPr/>
+          <a:lstStyle/>
+          <a:p>
+            <a:fld id="{720C6227-A214-42BB-84EB-9C7415895DDE}" type="slidenum">
+              <a:rPr lang="sk-SK" smtClean="0"/>
+              <a:t>2</a:t>
+            </a:fld>
+            <a:endParaRPr lang="sk-SK"/>
+          </a:p>
+        </p:txBody>
+      </p:sp>
+    </p:spTree>
+    <p:extLst>
+      <p:ext uri="{BB962C8B-B14F-4D97-AF65-F5344CB8AC3E}">
+        <p14:creationId xmlns:p14="http://schemas.microsoft.com/office/powerpoint/2010/main" val="3795803306"/>
+      </p:ext>
+    </p:extLst>
+  </p:cSld>
+  <p:clrMapOvr>
+    <a:masterClrMapping/>
+  </p:clrMapOvr>
+</p:notes>
+</file>
+
+<file path=ppt/notesSlides/notesSlide3.xml><?xml version="1.0" encoding="utf-8"?>
+<p:notes xmlns:a="http://schemas.openxmlformats.org/drawingml/2006/main" xmlns:r="http://schemas.openxmlformats.org/officeDocument/2006/relationships" xmlns:p="http://schemas.openxmlformats.org/presentationml/2006/main">
+  <p:cSld>
+    <p:spTree>
+      <p:nvGrpSpPr>
+        <p:cNvPr id="1" name=""/>
+        <p:cNvGrpSpPr/>
+        <p:nvPr/>
+      </p:nvGrpSpPr>
+      <p:grpSpPr>
+        <a:xfrm>
+          <a:off x="0" y="0"/>
+          <a:ext cx="0" cy="0"/>
+          <a:chOff x="0" y="0"/>
+          <a:chExt cx="0" cy="0"/>
+        </a:xfrm>
+      </p:grpSpPr>
+      <p:sp>
+        <p:nvSpPr>
+          <p:cNvPr id="2" name="Zástupný objekt pre obrázok snímky 1"/>
+          <p:cNvSpPr>
+            <a:spLocks noGrp="1" noRot="1" noChangeAspect="1"/>
+          </p:cNvSpPr>
+          <p:nvPr>
+            <p:ph type="sldImg"/>
+          </p:nvPr>
+        </p:nvSpPr>
+        <p:spPr/>
+      </p:sp>
+      <p:sp>
+        <p:nvSpPr>
+          <p:cNvPr id="3" name="Zástupný objekt pre poznámky 2"/>
+          <p:cNvSpPr>
+            <a:spLocks noGrp="1"/>
+          </p:cNvSpPr>
+          <p:nvPr>
+            <p:ph type="body" idx="1"/>
+          </p:nvPr>
+        </p:nvSpPr>
+        <p:spPr/>
+        <p:txBody>
+          <a:bodyPr/>
+          <a:lstStyle/>
+          <a:p>
+            <a:r>
+              <a:rPr lang="sk-SK" dirty="0"/>
+              <a:t>Popísať analýzu súčasného stavu a vyplývajúce medzery vo výskume.</a:t>
+            </a:r>
+          </a:p>
+          <a:p>
+            <a:endParaRPr lang="sk-SK" dirty="0"/>
+          </a:p>
+          <a:p>
+            <a:r>
+              <a:rPr lang="sk-SK" dirty="0"/>
+              <a:t>Medzery:</a:t>
+            </a:r>
+          </a:p>
+          <a:p>
+            <a:r>
+              <a:rPr lang="sk-SK" sz="1200" kern="1200" dirty="0">
+                <a:solidFill>
+                  <a:schemeClr val="tx1"/>
+                </a:solidFill>
+                <a:effectLst/>
+                <a:latin typeface="+mn-lt"/>
+                <a:ea typeface="+mn-ea"/>
+                <a:cs typeface="+mn-cs"/>
+              </a:rPr>
+              <a:t>Z analýzy súčasného stavu je zrejmé, že metódy umelej inteligencie nielen trpia nízkou interpretovateľnosťou, ale ani konzistentne neprekonávajú štandardné ekonometrické modely. Preto je potrebný ďalší výskum. Doterajší výskum sa sústredí najmä na modelovanie globálnych trhových indexov ako SP500, STOXX600a SSE </a:t>
+            </a:r>
+            <a:r>
+              <a:rPr lang="sk-SK" sz="1200" kern="1200" dirty="0" err="1">
+                <a:solidFill>
+                  <a:schemeClr val="tx1"/>
+                </a:solidFill>
+                <a:effectLst/>
+                <a:latin typeface="+mn-lt"/>
+                <a:ea typeface="+mn-ea"/>
+                <a:cs typeface="+mn-cs"/>
+              </a:rPr>
+              <a:t>Composite</a:t>
+            </a:r>
+            <a:r>
+              <a:rPr lang="sk-SK" sz="1200" kern="1200" dirty="0">
+                <a:solidFill>
+                  <a:schemeClr val="tx1"/>
+                </a:solidFill>
+                <a:effectLst/>
+                <a:latin typeface="+mn-lt"/>
+                <a:ea typeface="+mn-ea"/>
+                <a:cs typeface="+mn-cs"/>
+              </a:rPr>
+              <a:t>, pričom chýba podrobná analýza konkrétnych firiem naprieč USA, Európou a Čínou. Taktiež spoľahlivosť zdrojov denných cien je dosť neprebádané teritórium. Vyhodnotenie výsledkov a porovnanie rôznych zdrojov dát preto prinesie nové poznatky užitočné pre budúci výskum.</a:t>
+            </a:r>
+            <a:endParaRPr lang="sk-SK" dirty="0"/>
+          </a:p>
+        </p:txBody>
+      </p:sp>
+      <p:sp>
+        <p:nvSpPr>
+          <p:cNvPr id="4" name="Zástupný objekt pre číslo snímky 3"/>
+          <p:cNvSpPr>
+            <a:spLocks noGrp="1"/>
+          </p:cNvSpPr>
+          <p:nvPr>
+            <p:ph type="sldNum" sz="quarter" idx="5"/>
+          </p:nvPr>
+        </p:nvSpPr>
+        <p:spPr/>
+        <p:txBody>
+          <a:bodyPr/>
+          <a:lstStyle/>
+          <a:p>
+            <a:fld id="{720C6227-A214-42BB-84EB-9C7415895DDE}" type="slidenum">
+              <a:rPr lang="sk-SK" smtClean="0"/>
+              <a:t>3</a:t>
+            </a:fld>
+            <a:endParaRPr lang="sk-SK"/>
+          </a:p>
+        </p:txBody>
+      </p:sp>
+    </p:spTree>
+    <p:extLst>
+      <p:ext uri="{BB962C8B-B14F-4D97-AF65-F5344CB8AC3E}">
+        <p14:creationId xmlns:p14="http://schemas.microsoft.com/office/powerpoint/2010/main" val="635978654"/>
+      </p:ext>
+    </p:extLst>
+  </p:cSld>
+  <p:clrMapOvr>
+    <a:masterClrMapping/>
+  </p:clrMapOvr>
+</p:notes>
+</file>
+
+<file path=ppt/notesSlides/notesSlide4.xml><?xml version="1.0" encoding="utf-8"?>
+<p:notes xmlns:a="http://schemas.openxmlformats.org/drawingml/2006/main" xmlns:r="http://schemas.openxmlformats.org/officeDocument/2006/relationships" xmlns:p="http://schemas.openxmlformats.org/presentationml/2006/main">
+  <p:cSld>
+    <p:spTree>
+      <p:nvGrpSpPr>
+        <p:cNvPr id="1" name=""/>
+        <p:cNvGrpSpPr/>
+        <p:nvPr/>
+      </p:nvGrpSpPr>
+      <p:grpSpPr>
+        <a:xfrm>
+          <a:off x="0" y="0"/>
+          <a:ext cx="0" cy="0"/>
+          <a:chOff x="0" y="0"/>
+          <a:chExt cx="0" cy="0"/>
+        </a:xfrm>
+      </p:grpSpPr>
+      <p:sp>
+        <p:nvSpPr>
+          <p:cNvPr id="2" name="Zástupný objekt pre obrázok snímky 1"/>
+          <p:cNvSpPr>
+            <a:spLocks noGrp="1" noRot="1" noChangeAspect="1"/>
+          </p:cNvSpPr>
+          <p:nvPr>
+            <p:ph type="sldImg"/>
+          </p:nvPr>
+        </p:nvSpPr>
+        <p:spPr/>
+      </p:sp>
+      <p:sp>
+        <p:nvSpPr>
+          <p:cNvPr id="3" name="Zástupný objekt pre poznámky 2"/>
+          <p:cNvSpPr>
+            <a:spLocks noGrp="1"/>
+          </p:cNvSpPr>
+          <p:nvPr>
+            <p:ph type="body" idx="1"/>
+          </p:nvPr>
+        </p:nvSpPr>
+        <p:spPr/>
+        <p:txBody>
+          <a:bodyPr/>
+          <a:lstStyle/>
+          <a:p>
+            <a:r>
+              <a:rPr lang="sk-SK" dirty="0"/>
+              <a:t>Z analýzy je zrejmé, že obdobie pandémie viedlo k zvýšenej volatilite trhov, pričom dynamika volatility sa medzi trhmi líši. </a:t>
+            </a:r>
+          </a:p>
+        </p:txBody>
+      </p:sp>
+      <p:sp>
+        <p:nvSpPr>
+          <p:cNvPr id="4" name="Zástupný objekt pre číslo snímky 3"/>
+          <p:cNvSpPr>
+            <a:spLocks noGrp="1"/>
+          </p:cNvSpPr>
+          <p:nvPr>
+            <p:ph type="sldNum" sz="quarter" idx="5"/>
+          </p:nvPr>
+        </p:nvSpPr>
+        <p:spPr/>
+        <p:txBody>
+          <a:bodyPr/>
+          <a:lstStyle/>
+          <a:p>
+            <a:fld id="{720C6227-A214-42BB-84EB-9C7415895DDE}" type="slidenum">
+              <a:rPr lang="sk-SK" smtClean="0"/>
+              <a:t>4</a:t>
+            </a:fld>
+            <a:endParaRPr lang="sk-SK"/>
+          </a:p>
+        </p:txBody>
+      </p:sp>
+    </p:spTree>
+    <p:extLst>
+      <p:ext uri="{BB962C8B-B14F-4D97-AF65-F5344CB8AC3E}">
+        <p14:creationId xmlns:p14="http://schemas.microsoft.com/office/powerpoint/2010/main" val="528411888"/>
+      </p:ext>
+    </p:extLst>
+  </p:cSld>
+  <p:clrMapOvr>
+    <a:masterClrMapping/>
+  </p:clrMapOvr>
+</p:notes>
+</file>
+
+<file path=ppt/notesSlides/notesSlide5.xml><?xml version="1.0" encoding="utf-8"?>
+<p:notes xmlns:a="http://schemas.openxmlformats.org/drawingml/2006/main" xmlns:r="http://schemas.openxmlformats.org/officeDocument/2006/relationships" xmlns:p="http://schemas.openxmlformats.org/presentationml/2006/main">
+  <p:cSld>
+    <p:spTree>
+      <p:nvGrpSpPr>
+        <p:cNvPr id="1" name=""/>
+        <p:cNvGrpSpPr/>
+        <p:nvPr/>
+      </p:nvGrpSpPr>
+      <p:grpSpPr>
+        <a:xfrm>
+          <a:off x="0" y="0"/>
+          <a:ext cx="0" cy="0"/>
+          <a:chOff x="0" y="0"/>
+          <a:chExt cx="0" cy="0"/>
+        </a:xfrm>
+      </p:grpSpPr>
+      <p:sp>
+        <p:nvSpPr>
+          <p:cNvPr id="2" name="Zástupný objekt pre obrázok snímky 1"/>
+          <p:cNvSpPr>
+            <a:spLocks noGrp="1" noRot="1" noChangeAspect="1"/>
+          </p:cNvSpPr>
+          <p:nvPr>
+            <p:ph type="sldImg"/>
+          </p:nvPr>
+        </p:nvSpPr>
+        <p:spPr/>
+      </p:sp>
+      <p:sp>
+        <p:nvSpPr>
+          <p:cNvPr id="3" name="Zástupný objekt pre poznámky 2"/>
+          <p:cNvSpPr>
+            <a:spLocks noGrp="1"/>
+          </p:cNvSpPr>
+          <p:nvPr>
+            <p:ph type="body" idx="1"/>
+          </p:nvPr>
+        </p:nvSpPr>
+        <p:spPr/>
+        <p:txBody>
+          <a:bodyPr/>
+          <a:lstStyle/>
+          <a:p>
+            <a:r>
+              <a:rPr lang="sk-SK" dirty="0"/>
+              <a:t>Podrobnejšie popísať navrhovanú metodiku výskumu.</a:t>
+            </a:r>
+          </a:p>
+        </p:txBody>
+      </p:sp>
+      <p:sp>
+        <p:nvSpPr>
+          <p:cNvPr id="4" name="Zástupný objekt pre číslo snímky 3"/>
+          <p:cNvSpPr>
+            <a:spLocks noGrp="1"/>
+          </p:cNvSpPr>
+          <p:nvPr>
+            <p:ph type="sldNum" sz="quarter" idx="5"/>
+          </p:nvPr>
+        </p:nvSpPr>
+        <p:spPr/>
+        <p:txBody>
+          <a:bodyPr/>
+          <a:lstStyle/>
+          <a:p>
+            <a:fld id="{720C6227-A214-42BB-84EB-9C7415895DDE}" type="slidenum">
+              <a:rPr lang="sk-SK" smtClean="0"/>
+              <a:t>5</a:t>
+            </a:fld>
+            <a:endParaRPr lang="sk-SK"/>
+          </a:p>
+        </p:txBody>
+      </p:sp>
+    </p:spTree>
+    <p:extLst>
+      <p:ext uri="{BB962C8B-B14F-4D97-AF65-F5344CB8AC3E}">
+        <p14:creationId xmlns:p14="http://schemas.microsoft.com/office/powerpoint/2010/main" val="433587241"/>
+      </p:ext>
+    </p:extLst>
+  </p:cSld>
+  <p:clrMapOvr>
+    <a:masterClrMapping/>
+  </p:clrMapOvr>
+</p:notes>
+</file>
+
+<file path=ppt/notesSlides/notesSlide6.xml><?xml version="1.0" encoding="utf-8"?>
+<p:notes xmlns:a="http://schemas.openxmlformats.org/drawingml/2006/main" xmlns:r="http://schemas.openxmlformats.org/officeDocument/2006/relationships" xmlns:p="http://schemas.openxmlformats.org/presentationml/2006/main">
+  <p:cSld>
+    <p:spTree>
+      <p:nvGrpSpPr>
+        <p:cNvPr id="1" name=""/>
+        <p:cNvGrpSpPr/>
+        <p:nvPr/>
+      </p:nvGrpSpPr>
+      <p:grpSpPr>
+        <a:xfrm>
+          <a:off x="0" y="0"/>
+          <a:ext cx="0" cy="0"/>
+          <a:chOff x="0" y="0"/>
+          <a:chExt cx="0" cy="0"/>
+        </a:xfrm>
+      </p:grpSpPr>
+      <p:sp>
+        <p:nvSpPr>
+          <p:cNvPr id="2" name="Zástupný objekt pre obrázok snímky 1"/>
+          <p:cNvSpPr>
+            <a:spLocks noGrp="1" noRot="1" noChangeAspect="1"/>
+          </p:cNvSpPr>
+          <p:nvPr>
+            <p:ph type="sldImg"/>
+          </p:nvPr>
+        </p:nvSpPr>
+        <p:spPr/>
+      </p:sp>
+      <p:sp>
+        <p:nvSpPr>
+          <p:cNvPr id="3" name="Zástupný objekt pre poznámky 2"/>
+          <p:cNvSpPr>
+            <a:spLocks noGrp="1"/>
+          </p:cNvSpPr>
+          <p:nvPr>
+            <p:ph type="body" idx="1"/>
+          </p:nvPr>
+        </p:nvSpPr>
+        <p:spPr/>
+        <p:txBody>
+          <a:bodyPr/>
+          <a:lstStyle/>
+          <a:p>
+            <a:r>
+              <a:rPr lang="sk-SK" dirty="0"/>
+              <a:t>Popísať získanie dát firiem, rozdelenie do sektorov a porovnanie zdrojov dát. Uviesť rozdelenie na základe období.</a:t>
+            </a:r>
+          </a:p>
+          <a:p>
+            <a:endParaRPr lang="sk-SK" dirty="0"/>
+          </a:p>
+          <a:p>
+            <a:r>
+              <a:rPr lang="sk-SK" dirty="0"/>
+              <a:t>Vybraná firma musí mať denné dáta počas celého obdobia, neobsahuje veľa chýbajúcich dát a patrí medzi veľké firmy s vysokou likviditou. Firmy budú vybrané naprieč viacerými sektormi, napríklad: IT, Financie, Priemysel, Spotrebný tovar, Energie, Zdravotníctvo. Firmy budú taktiež zvolené na základe obsiahnutia v globálnych trhových indexoch ako SP500, STOXX600 a SSE </a:t>
+            </a:r>
+            <a:r>
+              <a:rPr lang="sk-SK" dirty="0" err="1"/>
+              <a:t>Composite</a:t>
+            </a:r>
+            <a:r>
+              <a:rPr lang="sk-SK" dirty="0"/>
+              <a:t>.</a:t>
+            </a:r>
+          </a:p>
+        </p:txBody>
+      </p:sp>
+      <p:sp>
+        <p:nvSpPr>
+          <p:cNvPr id="4" name="Zástupný objekt pre číslo snímky 3"/>
+          <p:cNvSpPr>
+            <a:spLocks noGrp="1"/>
+          </p:cNvSpPr>
+          <p:nvPr>
+            <p:ph type="sldNum" sz="quarter" idx="5"/>
+          </p:nvPr>
+        </p:nvSpPr>
+        <p:spPr/>
+        <p:txBody>
+          <a:bodyPr/>
+          <a:lstStyle/>
+          <a:p>
+            <a:fld id="{720C6227-A214-42BB-84EB-9C7415895DDE}" type="slidenum">
+              <a:rPr lang="sk-SK" smtClean="0"/>
+              <a:t>6</a:t>
+            </a:fld>
+            <a:endParaRPr lang="sk-SK"/>
+          </a:p>
+        </p:txBody>
+      </p:sp>
+    </p:spTree>
+    <p:extLst>
+      <p:ext uri="{BB962C8B-B14F-4D97-AF65-F5344CB8AC3E}">
+        <p14:creationId xmlns:p14="http://schemas.microsoft.com/office/powerpoint/2010/main" val="3287932988"/>
+      </p:ext>
+    </p:extLst>
+  </p:cSld>
+  <p:clrMapOvr>
+    <a:masterClrMapping/>
+  </p:clrMapOvr>
+</p:notes>
+</file>
+
+<file path=ppt/notesSlides/notesSlide7.xml><?xml version="1.0" encoding="utf-8"?>
+<p:notes xmlns:a="http://schemas.openxmlformats.org/drawingml/2006/main" xmlns:r="http://schemas.openxmlformats.org/officeDocument/2006/relationships" xmlns:p="http://schemas.openxmlformats.org/presentationml/2006/main">
+  <p:cSld>
+    <p:spTree>
+      <p:nvGrpSpPr>
+        <p:cNvPr id="1" name=""/>
+        <p:cNvGrpSpPr/>
+        <p:nvPr/>
+      </p:nvGrpSpPr>
+      <p:grpSpPr>
+        <a:xfrm>
+          <a:off x="0" y="0"/>
+          <a:ext cx="0" cy="0"/>
+          <a:chOff x="0" y="0"/>
+          <a:chExt cx="0" cy="0"/>
+        </a:xfrm>
+      </p:grpSpPr>
+      <p:sp>
+        <p:nvSpPr>
+          <p:cNvPr id="2" name="Zástupný objekt pre obrázok snímky 1"/>
+          <p:cNvSpPr>
+            <a:spLocks noGrp="1" noRot="1" noChangeAspect="1"/>
+          </p:cNvSpPr>
+          <p:nvPr>
+            <p:ph type="sldImg"/>
+          </p:nvPr>
+        </p:nvSpPr>
+        <p:spPr/>
+      </p:sp>
+      <p:sp>
+        <p:nvSpPr>
+          <p:cNvPr id="3" name="Zástupný objekt pre poznámky 2"/>
+          <p:cNvSpPr>
+            <a:spLocks noGrp="1"/>
+          </p:cNvSpPr>
+          <p:nvPr>
+            <p:ph type="body" idx="1"/>
+          </p:nvPr>
+        </p:nvSpPr>
+        <p:spPr/>
+        <p:txBody>
+          <a:bodyPr/>
+          <a:lstStyle/>
+          <a:p>
+            <a:r>
+              <a:rPr lang="sk-SK" dirty="0"/>
+              <a:t>Popísať jednotlivé ekonometrické modely a vybrané modely strojového učenia. Vysvetliť voľbu </a:t>
+            </a:r>
+            <a:r>
+              <a:rPr lang="sk-SK" dirty="0" err="1"/>
+              <a:t>rolling-window</a:t>
+            </a:r>
+            <a:r>
+              <a:rPr lang="sk-SK" dirty="0"/>
+              <a:t> prístupu.</a:t>
+            </a:r>
+          </a:p>
+          <a:p>
+            <a:endParaRPr lang="sk-SK" dirty="0"/>
+          </a:p>
+          <a:p>
+            <a:r>
+              <a:rPr lang="sk-SK" dirty="0"/>
+              <a:t>Modely:</a:t>
+            </a:r>
+          </a:p>
+          <a:p>
+            <a:r>
+              <a:rPr lang="sk-SK" dirty="0"/>
+              <a:t>GARCH modeluje očakávanú volatilitu v čase na základe minulých šokov a hodnôt volatility. V podstate modeluje na základe „pamäti“ volatility.</a:t>
+            </a:r>
+          </a:p>
+          <a:p>
+            <a:r>
+              <a:rPr lang="sk-SK" dirty="0"/>
+              <a:t>GJR-GARCH je rozšírenie GARCH modelu, ktorý dokáže zachytiť asymetriu volatility. To je zásadné pretože vo všeobecnosti platí, že vysoká volatilita ovplyvňuje trh viac ako nízka volatilita.</a:t>
+            </a:r>
+          </a:p>
+          <a:p>
+            <a:r>
+              <a:rPr lang="sk-SK" dirty="0"/>
+              <a:t>HAR model je </a:t>
+            </a:r>
+            <a:r>
+              <a:rPr lang="sk-SK" dirty="0" err="1"/>
+              <a:t>autoregresívny</a:t>
+            </a:r>
+            <a:r>
+              <a:rPr lang="sk-SK" dirty="0"/>
+              <a:t> model volatility, ktorý pracuje s predikciou realizovanej volatility. Je ľahko interpretovateľný.</a:t>
+            </a:r>
+          </a:p>
+          <a:p>
+            <a:r>
+              <a:rPr lang="sk-SK" dirty="0" err="1"/>
+              <a:t>XGBoost</a:t>
+            </a:r>
+            <a:r>
+              <a:rPr lang="sk-SK" dirty="0"/>
+              <a:t> alebo </a:t>
+            </a:r>
+            <a:r>
+              <a:rPr lang="sk-SK" dirty="0" err="1"/>
+              <a:t>Extreme</a:t>
+            </a:r>
+            <a:r>
+              <a:rPr lang="sk-SK" dirty="0"/>
+              <a:t> Gradient </a:t>
+            </a:r>
+            <a:r>
+              <a:rPr lang="sk-SK" dirty="0" err="1"/>
+              <a:t>Boosting</a:t>
+            </a:r>
+            <a:r>
+              <a:rPr lang="sk-SK" dirty="0"/>
+              <a:t> je model strojového učenia založený na rozhodovacích stromoch, ktorý dokáže zachytiť nelineárne vzťahy medzi premennými. Dokáže určiť dôležitosť jednotlivých premenných.</a:t>
+            </a:r>
+          </a:p>
+          <a:p>
+            <a:r>
+              <a:rPr lang="sk-SK" dirty="0"/>
+              <a:t>LSTM je </a:t>
+            </a:r>
+            <a:r>
+              <a:rPr lang="sk-SK" dirty="0" err="1"/>
+              <a:t>rekurentná</a:t>
+            </a:r>
+            <a:r>
+              <a:rPr lang="sk-SK" dirty="0"/>
+              <a:t> neurónová sieť založená na sekvenčné dáta. Na základe predchádzajúcich dát volatility dokáže predikovať budúcu volatilitu.</a:t>
+            </a:r>
+          </a:p>
+          <a:p>
+            <a:endParaRPr lang="sk-SK" dirty="0"/>
+          </a:p>
+          <a:p>
+            <a:r>
+              <a:rPr lang="sk-SK" dirty="0"/>
+              <a:t>Spomenúť:</a:t>
+            </a:r>
+          </a:p>
+          <a:p>
+            <a:r>
+              <a:rPr lang="sk-SK" sz="1200" kern="1200" dirty="0">
+                <a:solidFill>
+                  <a:schemeClr val="tx1"/>
+                </a:solidFill>
+                <a:effectLst/>
+                <a:latin typeface="+mn-lt"/>
+                <a:ea typeface="+mn-ea"/>
+                <a:cs typeface="+mn-cs"/>
+              </a:rPr>
+              <a:t>„Dáta budú transformované na logaritmické výnosy a následne budú analyzované ich vlastnosti ako </a:t>
+            </a:r>
+            <a:r>
+              <a:rPr lang="sk-SK" sz="1200" kern="1200" dirty="0" err="1">
+                <a:solidFill>
+                  <a:schemeClr val="tx1"/>
+                </a:solidFill>
+                <a:effectLst/>
+                <a:latin typeface="+mn-lt"/>
+                <a:ea typeface="+mn-ea"/>
+                <a:cs typeface="+mn-cs"/>
+              </a:rPr>
+              <a:t>stacionarita</a:t>
+            </a:r>
+            <a:r>
+              <a:rPr lang="sk-SK" sz="1200" kern="1200" dirty="0">
+                <a:solidFill>
+                  <a:schemeClr val="tx1"/>
+                </a:solidFill>
+                <a:effectLst/>
+                <a:latin typeface="+mn-lt"/>
+                <a:ea typeface="+mn-ea"/>
+                <a:cs typeface="+mn-cs"/>
+              </a:rPr>
+              <a:t>, </a:t>
+            </a:r>
+            <a:r>
+              <a:rPr lang="sk-SK" sz="1200" kern="1200" dirty="0" err="1">
+                <a:solidFill>
+                  <a:schemeClr val="tx1"/>
+                </a:solidFill>
+                <a:effectLst/>
+                <a:latin typeface="+mn-lt"/>
+                <a:ea typeface="+mn-ea"/>
+                <a:cs typeface="+mn-cs"/>
+              </a:rPr>
+              <a:t>autokorelácia</a:t>
+            </a:r>
+            <a:r>
+              <a:rPr lang="sk-SK" sz="1200" kern="1200" dirty="0">
+                <a:solidFill>
+                  <a:schemeClr val="tx1"/>
+                </a:solidFill>
+                <a:effectLst/>
+                <a:latin typeface="+mn-lt"/>
+                <a:ea typeface="+mn-ea"/>
+                <a:cs typeface="+mn-cs"/>
+              </a:rPr>
+              <a:t> a </a:t>
+            </a:r>
+            <a:r>
+              <a:rPr lang="sk-SK" sz="1200" kern="1200" dirty="0" err="1">
+                <a:solidFill>
+                  <a:schemeClr val="tx1"/>
+                </a:solidFill>
+                <a:effectLst/>
+                <a:latin typeface="+mn-lt"/>
+                <a:ea typeface="+mn-ea"/>
+                <a:cs typeface="+mn-cs"/>
+              </a:rPr>
+              <a:t>heteroskedasticita</a:t>
+            </a:r>
+            <a:r>
+              <a:rPr lang="sk-SK" sz="1200" kern="1200" dirty="0">
+                <a:solidFill>
+                  <a:schemeClr val="tx1"/>
+                </a:solidFill>
+                <a:effectLst/>
+                <a:latin typeface="+mn-lt"/>
+                <a:ea typeface="+mn-ea"/>
+                <a:cs typeface="+mn-cs"/>
+              </a:rPr>
+              <a:t>.</a:t>
+            </a:r>
+          </a:p>
+          <a:p>
+            <a:r>
+              <a:rPr lang="sk-SK" sz="1200" kern="1200" dirty="0">
+                <a:solidFill>
+                  <a:schemeClr val="tx1"/>
+                </a:solidFill>
+                <a:effectLst/>
+                <a:latin typeface="+mn-lt"/>
+                <a:ea typeface="+mn-ea"/>
+                <a:cs typeface="+mn-cs"/>
+              </a:rPr>
+              <a:t>Takto predspracované dáta budú ďalej vhodné ako vstup pre ekonometrické modely a metódy umelej inteligencie.“</a:t>
+            </a:r>
+            <a:r>
+              <a:rPr lang="en-US" sz="1200" kern="1200" dirty="0">
+                <a:solidFill>
+                  <a:schemeClr val="tx1"/>
+                </a:solidFill>
+                <a:effectLst/>
+                <a:latin typeface="+mn-lt"/>
+                <a:ea typeface="+mn-ea"/>
+                <a:cs typeface="+mn-cs"/>
+              </a:rPr>
+              <a:t> </a:t>
+            </a:r>
+            <a:r>
+              <a:rPr lang="en-US" sz="1200" kern="1200" dirty="0" err="1">
+                <a:solidFill>
+                  <a:schemeClr val="tx1"/>
+                </a:solidFill>
+                <a:effectLst/>
+                <a:latin typeface="+mn-lt"/>
+                <a:ea typeface="+mn-ea"/>
+                <a:cs typeface="+mn-cs"/>
+              </a:rPr>
+              <a:t>Logaritmick</a:t>
+            </a:r>
+            <a:r>
+              <a:rPr lang="sk-SK" sz="1200" kern="1200" dirty="0">
+                <a:solidFill>
+                  <a:schemeClr val="tx1"/>
+                </a:solidFill>
+                <a:effectLst/>
+                <a:latin typeface="+mn-lt"/>
+                <a:ea typeface="+mn-ea"/>
+                <a:cs typeface="+mn-cs"/>
+              </a:rPr>
+              <a:t>é výnosy sú: </a:t>
+            </a:r>
+            <a:r>
+              <a:rPr lang="sk-SK" sz="1200" kern="1200" dirty="0" err="1">
+                <a:solidFill>
+                  <a:schemeClr val="tx1"/>
+                </a:solidFill>
+                <a:effectLst/>
+                <a:latin typeface="+mn-lt"/>
+                <a:ea typeface="+mn-ea"/>
+                <a:cs typeface="+mn-cs"/>
+              </a:rPr>
+              <a:t>ln</a:t>
+            </a:r>
+            <a:r>
+              <a:rPr lang="en-US" sz="1200" kern="1200" dirty="0">
+                <a:solidFill>
+                  <a:schemeClr val="tx1"/>
+                </a:solidFill>
+                <a:effectLst/>
+                <a:latin typeface="+mn-lt"/>
+                <a:ea typeface="+mn-ea"/>
+                <a:cs typeface="+mn-cs"/>
+              </a:rPr>
+              <a:t>(</a:t>
+            </a:r>
+            <a:r>
+              <a:rPr lang="en-US" sz="1200" kern="1200" dirty="0" err="1">
+                <a:solidFill>
+                  <a:schemeClr val="tx1"/>
+                </a:solidFill>
+                <a:effectLst/>
+                <a:latin typeface="+mn-lt"/>
+                <a:ea typeface="+mn-ea"/>
+                <a:cs typeface="+mn-cs"/>
+              </a:rPr>
+              <a:t>CLOSEt</a:t>
+            </a:r>
+            <a:r>
+              <a:rPr lang="en-US" sz="1200" kern="1200" dirty="0">
+                <a:solidFill>
+                  <a:schemeClr val="tx1"/>
+                </a:solidFill>
+                <a:effectLst/>
+                <a:latin typeface="+mn-lt"/>
+                <a:ea typeface="+mn-ea"/>
+                <a:cs typeface="+mn-cs"/>
+              </a:rPr>
+              <a:t>) - ln(CLOSEt-1)</a:t>
+            </a:r>
+            <a:endParaRPr lang="sk-SK" dirty="0"/>
+          </a:p>
+        </p:txBody>
+      </p:sp>
+      <p:sp>
+        <p:nvSpPr>
+          <p:cNvPr id="4" name="Zástupný objekt pre číslo snímky 3"/>
+          <p:cNvSpPr>
+            <a:spLocks noGrp="1"/>
+          </p:cNvSpPr>
+          <p:nvPr>
+            <p:ph type="sldNum" sz="quarter" idx="5"/>
+          </p:nvPr>
+        </p:nvSpPr>
+        <p:spPr/>
+        <p:txBody>
+          <a:bodyPr/>
+          <a:lstStyle/>
+          <a:p>
+            <a:fld id="{720C6227-A214-42BB-84EB-9C7415895DDE}" type="slidenum">
+              <a:rPr lang="sk-SK" smtClean="0"/>
+              <a:t>7</a:t>
+            </a:fld>
+            <a:endParaRPr lang="sk-SK"/>
+          </a:p>
+        </p:txBody>
+      </p:sp>
+    </p:spTree>
+    <p:extLst>
+      <p:ext uri="{BB962C8B-B14F-4D97-AF65-F5344CB8AC3E}">
+        <p14:creationId xmlns:p14="http://schemas.microsoft.com/office/powerpoint/2010/main" val="1744240258"/>
+      </p:ext>
+    </p:extLst>
+  </p:cSld>
+  <p:clrMapOvr>
+    <a:masterClrMapping/>
+  </p:clrMapOvr>
+</p:notes>
+</file>
+
+<file path=ppt/notesSlides/notesSlide8.xml><?xml version="1.0" encoding="utf-8"?>
+<p:notes xmlns:a="http://schemas.openxmlformats.org/drawingml/2006/main" xmlns:r="http://schemas.openxmlformats.org/officeDocument/2006/relationships" xmlns:p="http://schemas.openxmlformats.org/presentationml/2006/main">
+  <p:cSld>
+    <p:spTree>
+      <p:nvGrpSpPr>
+        <p:cNvPr id="1" name=""/>
+        <p:cNvGrpSpPr/>
+        <p:nvPr/>
+      </p:nvGrpSpPr>
+      <p:grpSpPr>
+        <a:xfrm>
+          <a:off x="0" y="0"/>
+          <a:ext cx="0" cy="0"/>
+          <a:chOff x="0" y="0"/>
+          <a:chExt cx="0" cy="0"/>
+        </a:xfrm>
+      </p:grpSpPr>
+      <p:sp>
+        <p:nvSpPr>
+          <p:cNvPr id="2" name="Zástupný objekt pre obrázok snímky 1"/>
+          <p:cNvSpPr>
+            <a:spLocks noGrp="1" noRot="1" noChangeAspect="1"/>
+          </p:cNvSpPr>
+          <p:nvPr>
+            <p:ph type="sldImg"/>
+          </p:nvPr>
+        </p:nvSpPr>
+        <p:spPr/>
+      </p:sp>
+      <p:sp>
+        <p:nvSpPr>
+          <p:cNvPr id="3" name="Zástupný objekt pre poznámky 2"/>
+          <p:cNvSpPr>
+            <a:spLocks noGrp="1"/>
+          </p:cNvSpPr>
+          <p:nvPr>
+            <p:ph type="body" idx="1"/>
+          </p:nvPr>
+        </p:nvSpPr>
+        <p:spPr/>
+        <p:txBody>
+          <a:bodyPr/>
+          <a:lstStyle/>
+          <a:p>
+            <a:r>
+              <a:rPr lang="en-US" dirty="0"/>
+              <a:t>Vy</a:t>
+            </a:r>
+            <a:r>
+              <a:rPr lang="sk-SK" dirty="0"/>
+              <a:t>svetliť metriky a spôsob vyhodnotenia.</a:t>
+            </a:r>
+          </a:p>
+          <a:p>
+            <a:endParaRPr lang="sk-SK" dirty="0"/>
+          </a:p>
+          <a:p>
+            <a:r>
+              <a:rPr lang="sk-SK" dirty="0"/>
+              <a:t>Metriky:</a:t>
+            </a:r>
+          </a:p>
+          <a:p>
+            <a:r>
+              <a:rPr lang="sk-SK" dirty="0"/>
+              <a:t>RMSE alebo </a:t>
+            </a:r>
+            <a:r>
+              <a:rPr lang="sk-SK" dirty="0" err="1"/>
+              <a:t>Root</a:t>
+            </a:r>
+            <a:r>
+              <a:rPr lang="sk-SK" dirty="0"/>
+              <a:t> </a:t>
+            </a:r>
+            <a:r>
+              <a:rPr lang="sk-SK" dirty="0" err="1"/>
+              <a:t>Mean</a:t>
+            </a:r>
+            <a:r>
+              <a:rPr lang="sk-SK" dirty="0"/>
+              <a:t> </a:t>
+            </a:r>
+            <a:r>
+              <a:rPr lang="sk-SK" dirty="0" err="1"/>
+              <a:t>Squared</a:t>
+            </a:r>
+            <a:r>
+              <a:rPr lang="sk-SK" dirty="0"/>
+              <a:t> </a:t>
+            </a:r>
+            <a:r>
+              <a:rPr lang="sk-SK" dirty="0" err="1"/>
+              <a:t>Error</a:t>
+            </a:r>
+            <a:r>
+              <a:rPr lang="sk-SK" dirty="0"/>
+              <a:t> je odmocnina priemernej štvorcovej chyby. Meria priemernú chybu modelu pričom veľké chyby trestá silnejšie.</a:t>
+            </a:r>
+          </a:p>
+          <a:p>
+            <a:r>
+              <a:rPr lang="sk-SK" dirty="0"/>
+              <a:t>QLIKE sleduje pomer medzi skutočnou a predikovanou </a:t>
+            </a:r>
+            <a:r>
+              <a:rPr lang="sk-SK" dirty="0" err="1"/>
+              <a:t>varianciou</a:t>
+            </a:r>
+            <a:r>
+              <a:rPr lang="sk-SK" dirty="0"/>
+              <a:t>, pričom rovnako ako RMSE výrazne trestá veľké odchýlky.</a:t>
+            </a:r>
+          </a:p>
+          <a:p>
+            <a:endParaRPr lang="sk-SK" dirty="0"/>
+          </a:p>
+          <a:p>
+            <a:r>
+              <a:rPr lang="sk-SK" dirty="0"/>
+              <a:t>Porovnanie správania volatility:</a:t>
+            </a:r>
+          </a:p>
+          <a:p>
+            <a:r>
+              <a:rPr lang="sk-SK" dirty="0"/>
+              <a:t>- priemerná volatilita,</a:t>
+            </a:r>
+          </a:p>
+          <a:p>
+            <a:r>
+              <a:rPr lang="sk-SK" dirty="0"/>
+              <a:t>- maximálna volatilita,</a:t>
+            </a:r>
+          </a:p>
+          <a:p>
+            <a:r>
+              <a:rPr lang="sk-SK" dirty="0"/>
+              <a:t>- </a:t>
+            </a:r>
+            <a:r>
+              <a:rPr lang="sk-SK" dirty="0" err="1"/>
+              <a:t>perzistencia</a:t>
+            </a:r>
+            <a:r>
+              <a:rPr lang="sk-SK" dirty="0"/>
+              <a:t> volatility,</a:t>
+            </a:r>
+          </a:p>
+          <a:p>
+            <a:r>
+              <a:rPr lang="sk-SK" dirty="0"/>
+              <a:t>- presnosť modelov,</a:t>
+            </a:r>
+          </a:p>
+          <a:p>
+            <a:pPr marL="0" indent="0">
+              <a:buFontTx/>
+              <a:buNone/>
+            </a:pPr>
+            <a:r>
+              <a:rPr lang="sk-SK" dirty="0"/>
+              <a:t>- identifikácia najdôležitejších vstupných premenných</a:t>
+            </a:r>
+          </a:p>
+          <a:p>
+            <a:pPr marL="0" indent="0">
+              <a:buFontTx/>
+              <a:buNone/>
+            </a:pPr>
+            <a:endParaRPr lang="sk-SK" dirty="0"/>
+          </a:p>
+          <a:p>
+            <a:pPr marL="0" indent="0">
+              <a:buFontTx/>
+              <a:buNone/>
+            </a:pPr>
+            <a:r>
+              <a:rPr lang="sk-SK" dirty="0"/>
+              <a:t>Identifikácia vplyvu geopolitických šokov na volatilitu bude robená porovnaním spomínaných časových období, s dôrazom na pandémiu COVID-19.</a:t>
+            </a:r>
+          </a:p>
+          <a:p>
+            <a:pPr marL="0" indent="0">
+              <a:buFontTx/>
+              <a:buNone/>
+            </a:pPr>
+            <a:r>
+              <a:rPr lang="sk-SK" dirty="0"/>
+              <a:t>Identifikácia faktorov vplývajúcich na volatilitu trhov bude robená cez dostupné vyhlásenia, vyjadrenia politických predstaviteľov, alebo stanoviská konkrétnych firiem.</a:t>
+            </a:r>
+          </a:p>
+          <a:p>
+            <a:pPr marL="0" indent="0">
+              <a:buFontTx/>
+              <a:buNone/>
+            </a:pPr>
+            <a:endParaRPr lang="sk-SK" dirty="0"/>
+          </a:p>
+          <a:p>
+            <a:pPr marL="0" indent="0">
+              <a:buFontTx/>
+              <a:buNone/>
+            </a:pPr>
+            <a:r>
+              <a:rPr lang="sk-SK" dirty="0"/>
+              <a:t>Výsledkom výskumu bude nielen definovaná metodiky na spracovanie časových radov, ale aj identifikované vzory v časových radoch indexov akcií, faktory vplývajúce na volatilitu trhov, porovnanie ekonometrických modelov a modelov strojového a hlbokého učenia a dôkaz o robustnosti výsledkov naprieč rôznymi zdrojmi dát. </a:t>
+            </a:r>
+          </a:p>
+          <a:p>
+            <a:pPr marL="0" indent="0">
+              <a:buFontTx/>
+              <a:buNone/>
+            </a:pPr>
+            <a:endParaRPr lang="sk-SK" dirty="0"/>
+          </a:p>
+        </p:txBody>
+      </p:sp>
+      <p:sp>
+        <p:nvSpPr>
+          <p:cNvPr id="4" name="Zástupný objekt pre číslo snímky 3"/>
+          <p:cNvSpPr>
+            <a:spLocks noGrp="1"/>
+          </p:cNvSpPr>
+          <p:nvPr>
+            <p:ph type="sldNum" sz="quarter" idx="5"/>
+          </p:nvPr>
+        </p:nvSpPr>
+        <p:spPr/>
+        <p:txBody>
+          <a:bodyPr/>
+          <a:lstStyle/>
+          <a:p>
+            <a:fld id="{720C6227-A214-42BB-84EB-9C7415895DDE}" type="slidenum">
+              <a:rPr lang="sk-SK" smtClean="0"/>
+              <a:t>8</a:t>
+            </a:fld>
+            <a:endParaRPr lang="sk-SK"/>
+          </a:p>
+        </p:txBody>
+      </p:sp>
+    </p:spTree>
+    <p:extLst>
+      <p:ext uri="{BB962C8B-B14F-4D97-AF65-F5344CB8AC3E}">
+        <p14:creationId xmlns:p14="http://schemas.microsoft.com/office/powerpoint/2010/main" val="1225414240"/>
+      </p:ext>
+    </p:extLst>
+  </p:cSld>
+  <p:clrMapOvr>
+    <a:masterClrMapping/>
+  </p:clrMapOvr>
+</p:notes>
+</file>
+
 <file path=ppt/slideLayouts/slideLayout1.xml><?xml version="1.0" encoding="utf-8"?>
 <p:sldLayout xmlns:a="http://schemas.openxmlformats.org/drawingml/2006/main" xmlns:r="http://schemas.openxmlformats.org/officeDocument/2006/relationships" xmlns:p="http://schemas.openxmlformats.org/presentationml/2006/main" type="title" preserve="1">
   <p:cSld name="Úvodná snímka">
@@ -4896,7 +6457,7 @@
           <a:p>
             <a:fld id="{02AC24A9-CCB6-4F8D-B8DB-C2F3692CFA5A}" type="datetimeFigureOut">
               <a:rPr lang="en-US" smtClean="0"/>
-              <a:t>6/20/2026</a:t>
+              <a:t>6/21/2026</a:t>
             </a:fld>
             <a:endParaRPr lang="en-US" dirty="0"/>
           </a:p>
@@ -5267,7 +6828,7 @@
           <a:p>
             <a:fld id="{02AC24A9-CCB6-4F8D-B8DB-C2F3692CFA5A}" type="datetimeFigureOut">
               <a:rPr lang="en-US" smtClean="0"/>
-              <a:t>6/20/2026</a:t>
+              <a:t>6/21/2026</a:t>
             </a:fld>
             <a:endParaRPr lang="en-US" dirty="0"/>
           </a:p>
@@ -5477,7 +7038,7 @@
           <a:p>
             <a:fld id="{02AC24A9-CCB6-4F8D-B8DB-C2F3692CFA5A}" type="datetimeFigureOut">
               <a:rPr lang="en-US" smtClean="0"/>
-              <a:t>6/20/2026</a:t>
+              <a:t>6/21/2026</a:t>
             </a:fld>
             <a:endParaRPr lang="en-US" dirty="0"/>
           </a:p>
@@ -5949,7 +7510,7 @@
           <a:p>
             <a:fld id="{02AC24A9-CCB6-4F8D-B8DB-C2F3692CFA5A}" type="datetimeFigureOut">
               <a:rPr lang="en-US" smtClean="0"/>
-              <a:t>6/20/2026</a:t>
+              <a:t>6/21/2026</a:t>
             </a:fld>
             <a:endParaRPr lang="en-US" dirty="0"/>
           </a:p>
@@ -6404,7 +7965,7 @@
           <a:p>
             <a:fld id="{02AC24A9-CCB6-4F8D-B8DB-C2F3692CFA5A}" type="datetimeFigureOut">
               <a:rPr lang="en-US" smtClean="0"/>
-              <a:t>6/20/2026</a:t>
+              <a:t>6/21/2026</a:t>
             </a:fld>
             <a:endParaRPr lang="en-US" dirty="0"/>
           </a:p>
@@ -6939,7 +8500,7 @@
           <a:p>
             <a:fld id="{02AC24A9-CCB6-4F8D-B8DB-C2F3692CFA5A}" type="datetimeFigureOut">
               <a:rPr lang="en-US" smtClean="0"/>
-              <a:t>6/20/2026</a:t>
+              <a:t>6/21/2026</a:t>
             </a:fld>
             <a:endParaRPr lang="en-US" dirty="0"/>
           </a:p>
@@ -7641,7 +9202,7 @@
           <a:p>
             <a:fld id="{02AC24A9-CCB6-4F8D-B8DB-C2F3692CFA5A}" type="datetimeFigureOut">
               <a:rPr lang="en-US" smtClean="0"/>
-              <a:t>6/20/2026</a:t>
+              <a:t>6/21/2026</a:t>
             </a:fld>
             <a:endParaRPr lang="en-US" dirty="0"/>
           </a:p>
@@ -7971,7 +9532,7 @@
           <a:p>
             <a:fld id="{02AC24A9-CCB6-4F8D-B8DB-C2F3692CFA5A}" type="datetimeFigureOut">
               <a:rPr lang="en-US" smtClean="0"/>
-              <a:t>6/20/2026</a:t>
+              <a:t>6/21/2026</a:t>
             </a:fld>
             <a:endParaRPr lang="en-US" dirty="0"/>
           </a:p>
@@ -8084,7 +9645,7 @@
           <a:p>
             <a:fld id="{02AC24A9-CCB6-4F8D-B8DB-C2F3692CFA5A}" type="datetimeFigureOut">
               <a:rPr lang="en-US" smtClean="0"/>
-              <a:t>6/20/2026</a:t>
+              <a:t>6/21/2026</a:t>
             </a:fld>
             <a:endParaRPr lang="en-US" dirty="0"/>
           </a:p>
@@ -8581,7 +10142,7 @@
           <a:p>
             <a:fld id="{02AC24A9-CCB6-4F8D-B8DB-C2F3692CFA5A}" type="datetimeFigureOut">
               <a:rPr lang="en-US" smtClean="0"/>
-              <a:t>6/20/2026</a:t>
+              <a:t>6/21/2026</a:t>
             </a:fld>
             <a:endParaRPr lang="en-US" dirty="0"/>
           </a:p>
@@ -9060,7 +10621,7 @@
           <a:p>
             <a:fld id="{02AC24A9-CCB6-4F8D-B8DB-C2F3692CFA5A}" type="datetimeFigureOut">
               <a:rPr lang="en-US" smtClean="0"/>
-              <a:t>6/20/2026</a:t>
+              <a:t>6/21/2026</a:t>
             </a:fld>
             <a:endParaRPr lang="en-US" dirty="0"/>
           </a:p>
@@ -9303,7 +10864,7 @@
           <a:p>
             <a:fld id="{02AC24A9-CCB6-4F8D-B8DB-C2F3692CFA5A}" type="datetimeFigureOut">
               <a:rPr lang="en-US" smtClean="0"/>
-              <a:t>6/20/2026</a:t>
+              <a:t>6/21/2026</a:t>
             </a:fld>
             <a:endParaRPr lang="en-US" dirty="0"/>
           </a:p>
@@ -10103,7 +11664,7 @@
           <p:cNvPr id="2" name="Nadpis 1">
             <a:extLst>
               <a:ext uri="{FF2B5EF4-FFF2-40B4-BE49-F238E27FC236}">
-                <a16:creationId xmlns:a16="http://schemas.microsoft.com/office/drawing/2014/main" id="{3969CCF5-1DBC-D64F-A418-E0D3525AF056}"/>
+                <a16:creationId xmlns:a16="http://schemas.microsoft.com/office/drawing/2014/main" id="{FF10AEA6-20C5-7F84-4661-BE5DBE2AC4D7}"/>
               </a:ext>
             </a:extLst>
           </p:cNvPr>
@@ -10129,7 +11690,7 @@
                   </a:outerShdw>
                 </a:effectLst>
               </a:rPr>
-              <a:t>Hypotézy</a:t>
+              <a:t>Očakávané prínosy výskumu</a:t>
             </a:r>
           </a:p>
         </p:txBody>
@@ -10139,7 +11700,7 @@
           <p:cNvPr id="3" name="Zástupný objekt pre obsah 2">
             <a:extLst>
               <a:ext uri="{FF2B5EF4-FFF2-40B4-BE49-F238E27FC236}">
-                <a16:creationId xmlns:a16="http://schemas.microsoft.com/office/drawing/2014/main" id="{D299E122-982E-024E-9B3B-050AE20DA6B9}"/>
+                <a16:creationId xmlns:a16="http://schemas.microsoft.com/office/drawing/2014/main" id="{1E207072-0098-DFCC-2110-537C30EE2679}"/>
               </a:ext>
             </a:extLst>
           </p:cNvPr>
@@ -10152,58 +11713,25 @@
         </p:nvSpPr>
         <p:spPr>
           <a:xfrm>
-            <a:off x="1115568" y="2478024"/>
-            <a:ext cx="10650862" cy="3831336"/>
+            <a:off x="1115568" y="2478023"/>
+            <a:ext cx="10650862" cy="3698489"/>
           </a:xfrm>
         </p:spPr>
         <p:txBody>
           <a:bodyPr>
-            <a:normAutofit lnSpcReduction="10000"/>
+            <a:normAutofit/>
           </a:bodyPr>
           <a:lstStyle/>
           <a:p>
-            <a:r>
-              <a:rPr lang="sk-SK" sz="2000" b="1" dirty="0"/>
-              <a:t>H1: </a:t>
-            </a:r>
-            <a:r>
-              <a:rPr lang="sk-SK" sz="2000" dirty="0"/>
-              <a:t>Obdobie pandémie </a:t>
-            </a:r>
-            <a:r>
-              <a:rPr lang="sk-SK" sz="2000" i="1" dirty="0"/>
-              <a:t>COVID-19</a:t>
-            </a:r>
-            <a:r>
-              <a:rPr lang="sk-SK" sz="2000" dirty="0"/>
-              <a:t> viedlo k štatisticky významnému zvýšeniu volatility vybraných akciových indexov </a:t>
-            </a:r>
-            <a:r>
-              <a:rPr lang="sk-SK" sz="2000" i="1" dirty="0"/>
-              <a:t>USA</a:t>
-            </a:r>
-            <a:r>
-              <a:rPr lang="sk-SK" sz="2000" dirty="0"/>
-              <a:t>, </a:t>
-            </a:r>
-            <a:r>
-              <a:rPr lang="sk-SK" sz="2000" i="1" dirty="0"/>
-              <a:t>Európy</a:t>
-            </a:r>
-            <a:r>
-              <a:rPr lang="sk-SK" sz="2000" dirty="0"/>
-              <a:t> a </a:t>
-            </a:r>
-            <a:r>
-              <a:rPr lang="sk-SK" sz="2000" i="1" dirty="0"/>
-              <a:t>Číny</a:t>
-            </a:r>
-            <a:r>
-              <a:rPr lang="sk-SK" sz="2000" dirty="0"/>
-              <a:t>.</a:t>
-            </a:r>
-          </a:p>
-          <a:p>
+            <a:pPr>
+              <a:buClr>
+                <a:schemeClr val="tx1">
+                  <a:lumMod val="95000"/>
+                  <a:lumOff val="5000"/>
+                </a:schemeClr>
+              </a:buClr>
+              <a:buSzPct val="110000"/>
+            </a:pPr>
             <a:r>
               <a:rPr lang="sk-SK" sz="2000" b="1" dirty="0">
                 <a:effectLst>
@@ -10214,38 +11742,23 @@
                   </a:outerShdw>
                 </a:effectLst>
               </a:rPr>
-              <a:t>H2: </a:t>
+              <a:t>1. </a:t>
             </a:r>
             <a:r>
               <a:rPr lang="sk-SK" sz="2000" dirty="0"/>
-              <a:t>Dynamika volatility sa medzi vybranými trhmi </a:t>
-            </a:r>
-            <a:r>
-              <a:rPr lang="sk-SK" sz="2000" i="1" dirty="0"/>
-              <a:t>USA</a:t>
-            </a:r>
-            <a:r>
-              <a:rPr lang="sk-SK" sz="2000" dirty="0"/>
-              <a:t>, </a:t>
-            </a:r>
-            <a:r>
-              <a:rPr lang="sk-SK" sz="2000" i="1" dirty="0"/>
-              <a:t>Európy</a:t>
-            </a:r>
-            <a:r>
-              <a:rPr lang="sk-SK" sz="2000" dirty="0"/>
-              <a:t> a </a:t>
-            </a:r>
-            <a:r>
-              <a:rPr lang="sk-SK" sz="2000" i="1" dirty="0"/>
-              <a:t>Číny</a:t>
-            </a:r>
-            <a:r>
-              <a:rPr lang="sk-SK" sz="2000" dirty="0"/>
-              <a:t> štatisticky významne líši.</a:t>
-            </a:r>
-          </a:p>
-          <a:p>
+              <a:t>Empirické porovnanie modelov strojového učenia s ekonometrickými riešeniami,</a:t>
+            </a:r>
+          </a:p>
+          <a:p>
+            <a:pPr>
+              <a:buClr>
+                <a:schemeClr val="tx1">
+                  <a:lumMod val="95000"/>
+                  <a:lumOff val="5000"/>
+                </a:schemeClr>
+              </a:buClr>
+              <a:buSzPct val="110000"/>
+            </a:pPr>
             <a:r>
               <a:rPr lang="sk-SK" sz="2000" b="1" dirty="0">
                 <a:effectLst>
@@ -10256,14 +11769,23 @@
                   </a:outerShdw>
                 </a:effectLst>
               </a:rPr>
-              <a:t>H3: </a:t>
+              <a:t>2. </a:t>
             </a:r>
             <a:r>
               <a:rPr lang="sk-SK" sz="2000" dirty="0"/>
-              <a:t>Asymetrické modely volatility dosahujú lepšiu výkonnosť počas krízových období ako symetrické modely volatility.</a:t>
-            </a:r>
-          </a:p>
-          <a:p>
+              <a:t>Praktické poznatky o správaní akciových trhov počas období so zvýšeným rizikom, </a:t>
+            </a:r>
+          </a:p>
+          <a:p>
+            <a:pPr>
+              <a:buClr>
+                <a:schemeClr val="tx1">
+                  <a:lumMod val="95000"/>
+                  <a:lumOff val="5000"/>
+                </a:schemeClr>
+              </a:buClr>
+              <a:buSzPct val="110000"/>
+            </a:pPr>
             <a:r>
               <a:rPr lang="sk-SK" sz="2000" b="1" dirty="0">
                 <a:effectLst>
@@ -10274,14 +11796,47 @@
                   </a:outerShdw>
                 </a:effectLst>
               </a:rPr>
-              <a:t>H4: </a:t>
+              <a:t>3. </a:t>
             </a:r>
             <a:r>
               <a:rPr lang="sk-SK" sz="2000" dirty="0"/>
-              <a:t>Metódy strojového a hlbokého učenia nemajú štatisticky významne vyššiu predikčnú výkonnosť ako vybrané ekonometrické modely volatility.</a:t>
-            </a:r>
-          </a:p>
-          <a:p>
+              <a:t>Komparatívna analýza volatility akciových trhov </a:t>
+            </a:r>
+            <a:r>
+              <a:rPr lang="sk-SK" sz="2000" i="1" dirty="0"/>
+              <a:t>USA</a:t>
+            </a:r>
+            <a:r>
+              <a:rPr lang="sk-SK" sz="2000" dirty="0"/>
+              <a:t>, </a:t>
+            </a:r>
+            <a:r>
+              <a:rPr lang="sk-SK" sz="2000" i="1" dirty="0"/>
+              <a:t>Európy</a:t>
+            </a:r>
+            <a:r>
+              <a:rPr lang="sk-SK" sz="2000" dirty="0"/>
+              <a:t> a </a:t>
+            </a:r>
+            <a:r>
+              <a:rPr lang="sk-SK" sz="2000" i="1" dirty="0"/>
+              <a:t>Číny</a:t>
+            </a:r>
+            <a:r>
+              <a:rPr lang="sk-SK" sz="2000" dirty="0"/>
+              <a:t>,</a:t>
+            </a:r>
+          </a:p>
+          <a:p>
+            <a:pPr>
+              <a:buClr>
+                <a:schemeClr val="tx1">
+                  <a:lumMod val="95000"/>
+                  <a:lumOff val="5000"/>
+                </a:schemeClr>
+              </a:buClr>
+              <a:buSzPct val="110000"/>
+            </a:pPr>
             <a:r>
               <a:rPr lang="sk-SK" sz="2000" b="1" dirty="0">
                 <a:effectLst>
@@ -10292,11 +11847,65 @@
                   </a:outerShdw>
                 </a:effectLst>
               </a:rPr>
-              <a:t>H5: </a:t>
+              <a:t>4. </a:t>
             </a:r>
             <a:r>
               <a:rPr lang="sk-SK" sz="2000" dirty="0"/>
-              <a:t>Identifikované vzory volatility akciových trhov sa pri použití porovnateľných zdrojov dát štatisticky významne nemenia.</a:t>
+              <a:t>Identifikácia faktorov, ktoré vplývajú na dynamiku volatility,</a:t>
+            </a:r>
+          </a:p>
+          <a:p>
+            <a:pPr>
+              <a:buClr>
+                <a:schemeClr val="tx1">
+                  <a:lumMod val="95000"/>
+                  <a:lumOff val="5000"/>
+                </a:schemeClr>
+              </a:buClr>
+              <a:buSzPct val="110000"/>
+            </a:pPr>
+            <a:r>
+              <a:rPr lang="sk-SK" sz="2000" b="1" dirty="0">
+                <a:effectLst>
+                  <a:outerShdw blurRad="38100" dist="38100" dir="2700000" algn="tl">
+                    <a:srgbClr val="000000">
+                      <a:alpha val="43137"/>
+                    </a:srgbClr>
+                  </a:outerShdw>
+                </a:effectLst>
+              </a:rPr>
+              <a:t>5. </a:t>
+            </a:r>
+            <a:r>
+              <a:rPr lang="sk-SK" sz="2000" dirty="0"/>
+              <a:t>Definícia metodiky pre identifikáciu vzorov v časových radoch akciových trhov s dôrazom na metódy umelej inteligencie,</a:t>
+            </a:r>
+          </a:p>
+          <a:p>
+            <a:pPr>
+              <a:buClr>
+                <a:schemeClr val="tx1">
+                  <a:lumMod val="95000"/>
+                  <a:lumOff val="5000"/>
+                </a:schemeClr>
+              </a:buClr>
+              <a:buSzPct val="110000"/>
+            </a:pPr>
+            <a:r>
+              <a:rPr lang="sk-SK" sz="2000" b="1" dirty="0">
+                <a:effectLst>
+                  <a:outerShdw blurRad="38100" dist="38100" dir="2700000" algn="tl">
+                    <a:srgbClr val="000000">
+                      <a:alpha val="43137"/>
+                    </a:srgbClr>
+                  </a:outerShdw>
+                </a:effectLst>
+              </a:rPr>
+              <a:t>6. </a:t>
+            </a:r>
+            <a:r>
+              <a:rPr lang="sk-SK" sz="2000" dirty="0"/>
+              <a:t>Poznatky o robustnosti definovanej metodiky vzhľadom na zdroj dát akciových indexov.</a:t>
             </a:r>
           </a:p>
         </p:txBody>
@@ -10304,7 +11913,7 @@
     </p:spTree>
     <p:extLst>
       <p:ext uri="{BB962C8B-B14F-4D97-AF65-F5344CB8AC3E}">
-        <p14:creationId xmlns:p14="http://schemas.microsoft.com/office/powerpoint/2010/main" val="1087255654"/>
+        <p14:creationId xmlns:p14="http://schemas.microsoft.com/office/powerpoint/2010/main" val="2170357634"/>
       </p:ext>
     </p:extLst>
   </p:cSld>
@@ -10336,7 +11945,7 @@
           <p:cNvPr id="2" name="Nadpis 1">
             <a:extLst>
               <a:ext uri="{FF2B5EF4-FFF2-40B4-BE49-F238E27FC236}">
-                <a16:creationId xmlns:a16="http://schemas.microsoft.com/office/drawing/2014/main" id="{FF10AEA6-20C5-7F84-4661-BE5DBE2AC4D7}"/>
+                <a16:creationId xmlns:a16="http://schemas.microsoft.com/office/drawing/2014/main" id="{3969CCF5-1DBC-D64F-A418-E0D3525AF056}"/>
               </a:ext>
             </a:extLst>
           </p:cNvPr>
@@ -10362,7 +11971,7 @@
                   </a:outerShdw>
                 </a:effectLst>
               </a:rPr>
-              <a:t>Očakávané prínosy výskumu</a:t>
+              <a:t>Hypotézy</a:t>
             </a:r>
           </a:p>
         </p:txBody>
@@ -10372,7 +11981,7 @@
           <p:cNvPr id="3" name="Zástupný objekt pre obsah 2">
             <a:extLst>
               <a:ext uri="{FF2B5EF4-FFF2-40B4-BE49-F238E27FC236}">
-                <a16:creationId xmlns:a16="http://schemas.microsoft.com/office/drawing/2014/main" id="{1E207072-0098-DFCC-2110-537C30EE2679}"/>
+                <a16:creationId xmlns:a16="http://schemas.microsoft.com/office/drawing/2014/main" id="{D299E122-982E-024E-9B3B-050AE20DA6B9}"/>
               </a:ext>
             </a:extLst>
           </p:cNvPr>
@@ -10385,25 +11994,58 @@
         </p:nvSpPr>
         <p:spPr>
           <a:xfrm>
-            <a:off x="1115568" y="2478023"/>
-            <a:ext cx="10650862" cy="3698489"/>
+            <a:off x="1115568" y="2478024"/>
+            <a:ext cx="10650862" cy="3831336"/>
           </a:xfrm>
         </p:spPr>
         <p:txBody>
           <a:bodyPr>
-            <a:normAutofit/>
+            <a:normAutofit lnSpcReduction="10000"/>
           </a:bodyPr>
           <a:lstStyle/>
           <a:p>
-            <a:pPr>
-              <a:buClr>
-                <a:schemeClr val="tx1">
-                  <a:lumMod val="95000"/>
-                  <a:lumOff val="5000"/>
-                </a:schemeClr>
-              </a:buClr>
-              <a:buSzPct val="110000"/>
-            </a:pPr>
+            <a:r>
+              <a:rPr lang="sk-SK" sz="2000" b="1" dirty="0"/>
+              <a:t>H1: </a:t>
+            </a:r>
+            <a:r>
+              <a:rPr lang="sk-SK" sz="2000" dirty="0"/>
+              <a:t>Obdobie pandémie </a:t>
+            </a:r>
+            <a:r>
+              <a:rPr lang="sk-SK" sz="2000" i="1" dirty="0"/>
+              <a:t>COVID-19</a:t>
+            </a:r>
+            <a:r>
+              <a:rPr lang="sk-SK" sz="2000" dirty="0"/>
+              <a:t> viedlo k štatisticky významnému zvýšeniu volatility vybraných akciových indexov </a:t>
+            </a:r>
+            <a:r>
+              <a:rPr lang="sk-SK" sz="2000" i="1" dirty="0"/>
+              <a:t>USA</a:t>
+            </a:r>
+            <a:r>
+              <a:rPr lang="sk-SK" sz="2000" dirty="0"/>
+              <a:t>, </a:t>
+            </a:r>
+            <a:r>
+              <a:rPr lang="sk-SK" sz="2000" i="1" dirty="0"/>
+              <a:t>Európy</a:t>
+            </a:r>
+            <a:r>
+              <a:rPr lang="sk-SK" sz="2000" dirty="0"/>
+              <a:t> a </a:t>
+            </a:r>
+            <a:r>
+              <a:rPr lang="sk-SK" sz="2000" i="1" dirty="0"/>
+              <a:t>Číny</a:t>
+            </a:r>
+            <a:r>
+              <a:rPr lang="sk-SK" sz="2000" dirty="0"/>
+              <a:t>.</a:t>
+            </a:r>
+          </a:p>
+          <a:p>
             <a:r>
               <a:rPr lang="sk-SK" sz="2000" b="1" dirty="0">
                 <a:effectLst>
@@ -10414,23 +12056,38 @@
                   </a:outerShdw>
                 </a:effectLst>
               </a:rPr>
-              <a:t>1. </a:t>
+              <a:t>H2: </a:t>
             </a:r>
             <a:r>
               <a:rPr lang="sk-SK" sz="2000" dirty="0"/>
-              <a:t>Empirické porovnanie modelov strojového učenia s ekonometrickými riešeniami,</a:t>
-            </a:r>
-          </a:p>
-          <a:p>
-            <a:pPr>
-              <a:buClr>
-                <a:schemeClr val="tx1">
-                  <a:lumMod val="95000"/>
-                  <a:lumOff val="5000"/>
-                </a:schemeClr>
-              </a:buClr>
-              <a:buSzPct val="110000"/>
-            </a:pPr>
+              <a:t>Dynamika volatility sa medzi vybranými trhmi </a:t>
+            </a:r>
+            <a:r>
+              <a:rPr lang="sk-SK" sz="2000" i="1" dirty="0"/>
+              <a:t>USA</a:t>
+            </a:r>
+            <a:r>
+              <a:rPr lang="sk-SK" sz="2000" dirty="0"/>
+              <a:t>, </a:t>
+            </a:r>
+            <a:r>
+              <a:rPr lang="sk-SK" sz="2000" i="1" dirty="0"/>
+              <a:t>Európy</a:t>
+            </a:r>
+            <a:r>
+              <a:rPr lang="sk-SK" sz="2000" dirty="0"/>
+              <a:t> a </a:t>
+            </a:r>
+            <a:r>
+              <a:rPr lang="sk-SK" sz="2000" i="1" dirty="0"/>
+              <a:t>Číny</a:t>
+            </a:r>
+            <a:r>
+              <a:rPr lang="sk-SK" sz="2000" dirty="0"/>
+              <a:t> štatisticky významne líši.</a:t>
+            </a:r>
+          </a:p>
+          <a:p>
             <a:r>
               <a:rPr lang="sk-SK" sz="2000" b="1" dirty="0">
                 <a:effectLst>
@@ -10441,23 +12098,14 @@
                   </a:outerShdw>
                 </a:effectLst>
               </a:rPr>
-              <a:t>2. </a:t>
+              <a:t>H3: </a:t>
             </a:r>
             <a:r>
               <a:rPr lang="sk-SK" sz="2000" dirty="0"/>
-              <a:t>Praktické poznatky o správaní akciových trhov počas období so zvýšeným rizikom, </a:t>
-            </a:r>
-          </a:p>
-          <a:p>
-            <a:pPr>
-              <a:buClr>
-                <a:schemeClr val="tx1">
-                  <a:lumMod val="95000"/>
-                  <a:lumOff val="5000"/>
-                </a:schemeClr>
-              </a:buClr>
-              <a:buSzPct val="110000"/>
-            </a:pPr>
+              <a:t>Asymetrické modely volatility dosahujú lepšiu výkonnosť počas krízových období ako symetrické modely volatility.</a:t>
+            </a:r>
+          </a:p>
+          <a:p>
             <a:r>
               <a:rPr lang="sk-SK" sz="2000" b="1" dirty="0">
                 <a:effectLst>
@@ -10468,47 +12116,14 @@
                   </a:outerShdw>
                 </a:effectLst>
               </a:rPr>
-              <a:t>3. </a:t>
+              <a:t>H4: </a:t>
             </a:r>
             <a:r>
               <a:rPr lang="sk-SK" sz="2000" dirty="0"/>
-              <a:t>Komparatívna analýza volatility akciových trhov </a:t>
-            </a:r>
-            <a:r>
-              <a:rPr lang="sk-SK" sz="2000" i="1" dirty="0"/>
-              <a:t>USA</a:t>
-            </a:r>
-            <a:r>
-              <a:rPr lang="sk-SK" sz="2000" dirty="0"/>
-              <a:t>, </a:t>
-            </a:r>
-            <a:r>
-              <a:rPr lang="sk-SK" sz="2000" i="1" dirty="0"/>
-              <a:t>Európy</a:t>
-            </a:r>
-            <a:r>
-              <a:rPr lang="sk-SK" sz="2000" dirty="0"/>
-              <a:t> a </a:t>
-            </a:r>
-            <a:r>
-              <a:rPr lang="sk-SK" sz="2000" i="1" dirty="0"/>
-              <a:t>Číny</a:t>
-            </a:r>
-            <a:r>
-              <a:rPr lang="sk-SK" sz="2000" dirty="0"/>
-              <a:t>,</a:t>
-            </a:r>
-          </a:p>
-          <a:p>
-            <a:pPr>
-              <a:buClr>
-                <a:schemeClr val="tx1">
-                  <a:lumMod val="95000"/>
-                  <a:lumOff val="5000"/>
-                </a:schemeClr>
-              </a:buClr>
-              <a:buSzPct val="110000"/>
-            </a:pPr>
+              <a:t>Metódy strojového a hlbokého učenia nemajú štatisticky významne vyššiu predikčnú výkonnosť ako vybrané ekonometrické modely volatility.</a:t>
+            </a:r>
+          </a:p>
+          <a:p>
             <a:r>
               <a:rPr lang="sk-SK" sz="2000" b="1" dirty="0">
                 <a:effectLst>
@@ -10519,65 +12134,11 @@
                   </a:outerShdw>
                 </a:effectLst>
               </a:rPr>
-              <a:t>4. </a:t>
+              <a:t>H5: </a:t>
             </a:r>
             <a:r>
               <a:rPr lang="sk-SK" sz="2000" dirty="0"/>
-              <a:t>Identifikácia faktorov, ktoré vplývajú na dynamiku volatility,</a:t>
-            </a:r>
-          </a:p>
-          <a:p>
-            <a:pPr>
-              <a:buClr>
-                <a:schemeClr val="tx1">
-                  <a:lumMod val="95000"/>
-                  <a:lumOff val="5000"/>
-                </a:schemeClr>
-              </a:buClr>
-              <a:buSzPct val="110000"/>
-            </a:pPr>
-            <a:r>
-              <a:rPr lang="sk-SK" sz="2000" b="1" dirty="0">
-                <a:effectLst>
-                  <a:outerShdw blurRad="38100" dist="38100" dir="2700000" algn="tl">
-                    <a:srgbClr val="000000">
-                      <a:alpha val="43137"/>
-                    </a:srgbClr>
-                  </a:outerShdw>
-                </a:effectLst>
-              </a:rPr>
-              <a:t>5. </a:t>
-            </a:r>
-            <a:r>
-              <a:rPr lang="sk-SK" sz="2000" dirty="0"/>
-              <a:t>Definícia metodiky pre identifikáciu vzorov v časových radoch akciových trhov s dôrazom na metódy umelej inteligencie,</a:t>
-            </a:r>
-          </a:p>
-          <a:p>
-            <a:pPr>
-              <a:buClr>
-                <a:schemeClr val="tx1">
-                  <a:lumMod val="95000"/>
-                  <a:lumOff val="5000"/>
-                </a:schemeClr>
-              </a:buClr>
-              <a:buSzPct val="110000"/>
-            </a:pPr>
-            <a:r>
-              <a:rPr lang="sk-SK" sz="2000" b="1" dirty="0">
-                <a:effectLst>
-                  <a:outerShdw blurRad="38100" dist="38100" dir="2700000" algn="tl">
-                    <a:srgbClr val="000000">
-                      <a:alpha val="43137"/>
-                    </a:srgbClr>
-                  </a:outerShdw>
-                </a:effectLst>
-              </a:rPr>
-              <a:t>6. </a:t>
-            </a:r>
-            <a:r>
-              <a:rPr lang="sk-SK" sz="2000" dirty="0"/>
-              <a:t>Poznatky o robustnosti definovanej metodiky vzhľadom na zdroj dát akciových indexov.</a:t>
+              <a:t>Identifikované vzory volatility akciových trhov sa pri použití porovnateľných zdrojov dát štatisticky významne nemenia.</a:t>
             </a:r>
           </a:p>
         </p:txBody>
@@ -10585,7 +12146,7 @@
     </p:spTree>
     <p:extLst>
       <p:ext uri="{BB962C8B-B14F-4D97-AF65-F5344CB8AC3E}">
-        <p14:creationId xmlns:p14="http://schemas.microsoft.com/office/powerpoint/2010/main" val="2170357634"/>
+        <p14:creationId xmlns:p14="http://schemas.microsoft.com/office/powerpoint/2010/main" val="1087255654"/>
       </p:ext>
     </p:extLst>
   </p:cSld>
@@ -10675,7 +12236,7 @@
         </p:xfrm>
         <a:graphic>
           <a:graphicData uri="http://schemas.openxmlformats.org/drawingml/2006/diagram">
-            <dgm:relIds xmlns:dgm="http://schemas.openxmlformats.org/drawingml/2006/diagram" xmlns:r="http://schemas.openxmlformats.org/officeDocument/2006/relationships" r:dm="rId2" r:lo="rId3" r:qs="rId4" r:cs="rId5"/>
+            <dgm:relIds xmlns:dgm="http://schemas.openxmlformats.org/drawingml/2006/diagram" xmlns:r="http://schemas.openxmlformats.org/officeDocument/2006/relationships" r:dm="rId3" r:lo="rId4" r:qs="rId5" r:cs="rId6"/>
           </a:graphicData>
         </a:graphic>
       </p:graphicFrame>
@@ -10946,7 +12507,7 @@
           <p:nvPr/>
         </p:nvPicPr>
         <p:blipFill>
-          <a:blip r:embed="rId2"/>
+          <a:blip r:embed="rId3"/>
           <a:stretch>
             <a:fillRect/>
           </a:stretch>
@@ -11178,7 +12739,7 @@
                   </a:outerShdw>
                 </a:effectLst>
               </a:rPr>
-              <a:t>Modely strojového učenia</a:t>
+              <a:t>Metódy umelej inteligencie</a:t>
             </a:r>
           </a:p>
           <a:p>
@@ -11748,4 +13309,319 @@
     </a:ext>
   </a:extLst>
 </a:theme>
+</file>
+
+<file path=ppt/theme/theme2.xml><?xml version="1.0" encoding="utf-8"?>
+<a:theme xmlns:a="http://schemas.openxmlformats.org/drawingml/2006/main" name="Motív Office">
+  <a:themeElements>
+    <a:clrScheme name="Office">
+      <a:dk1>
+        <a:sysClr val="windowText" lastClr="000000"/>
+      </a:dk1>
+      <a:lt1>
+        <a:sysClr val="window" lastClr="FFFFFF"/>
+      </a:lt1>
+      <a:dk2>
+        <a:srgbClr val="0E2841"/>
+      </a:dk2>
+      <a:lt2>
+        <a:srgbClr val="E8E8E8"/>
+      </a:lt2>
+      <a:accent1>
+        <a:srgbClr val="156082"/>
+      </a:accent1>
+      <a:accent2>
+        <a:srgbClr val="E97132"/>
+      </a:accent2>
+      <a:accent3>
+        <a:srgbClr val="196B24"/>
+      </a:accent3>
+      <a:accent4>
+        <a:srgbClr val="0F9ED5"/>
+      </a:accent4>
+      <a:accent5>
+        <a:srgbClr val="A02B93"/>
+      </a:accent5>
+      <a:accent6>
+        <a:srgbClr val="4EA72E"/>
+      </a:accent6>
+      <a:hlink>
+        <a:srgbClr val="467886"/>
+      </a:hlink>
+      <a:folHlink>
+        <a:srgbClr val="96607D"/>
+      </a:folHlink>
+    </a:clrScheme>
+    <a:fontScheme name="Office">
+      <a:majorFont>
+        <a:latin typeface="Aptos Display" panose="02110004020202020204"/>
+        <a:ea typeface=""/>
+        <a:cs typeface=""/>
+        <a:font script="Jpan" typeface="游ゴシック Light"/>
+        <a:font script="Hang" typeface="맑은 고딕"/>
+        <a:font script="Hans" typeface="等线 Light"/>
+        <a:font script="Hant" typeface="新細明體"/>
+        <a:font script="Arab" typeface="Times New Roman"/>
+        <a:font script="Hebr" typeface="Times New Roman"/>
+        <a:font script="Thai" typeface="Angsana New"/>
+        <a:font script="Ethi" typeface="Nyala"/>
+        <a:font script="Beng" typeface="Vrinda"/>
+        <a:font script="Gujr" typeface="Shruti"/>
+        <a:font script="Khmr" typeface="MoolBoran"/>
+        <a:font script="Knda" typeface="Tunga"/>
+        <a:font script="Guru" typeface="Raavi"/>
+        <a:font script="Cans" typeface="Euphemia"/>
+        <a:font script="Cher" typeface="Plantagenet Cherokee"/>
+        <a:font script="Yiii" typeface="Microsoft Yi Baiti"/>
+        <a:font script="Tibt" typeface="Microsoft Himalaya"/>
+        <a:font script="Thaa" typeface="MV Boli"/>
+        <a:font script="Deva" typeface="Mangal"/>
+        <a:font script="Telu" typeface="Gautami"/>
+        <a:font script="Taml" typeface="Latha"/>
+        <a:font script="Syrc" typeface="Estrangelo Edessa"/>
+        <a:font script="Orya" typeface="Kalinga"/>
+        <a:font script="Mlym" typeface="Kartika"/>
+        <a:font script="Laoo" typeface="DokChampa"/>
+        <a:font script="Sinh" typeface="Iskoola Pota"/>
+        <a:font script="Mong" typeface="Mongolian Baiti"/>
+        <a:font script="Viet" typeface="Times New Roman"/>
+        <a:font script="Uigh" typeface="Microsoft Uighur"/>
+        <a:font script="Geor" typeface="Sylfaen"/>
+        <a:font script="Armn" typeface="Arial"/>
+        <a:font script="Bugi" typeface="Leelawadee UI"/>
+        <a:font script="Bopo" typeface="Microsoft JhengHei"/>
+        <a:font script="Java" typeface="Javanese Text"/>
+        <a:font script="Lisu" typeface="Segoe UI"/>
+        <a:font script="Mymr" typeface="Myanmar Text"/>
+        <a:font script="Nkoo" typeface="Ebrima"/>
+        <a:font script="Olck" typeface="Nirmala UI"/>
+        <a:font script="Osma" typeface="Ebrima"/>
+        <a:font script="Phag" typeface="Phagspa"/>
+        <a:font script="Syrn" typeface="Estrangelo Edessa"/>
+        <a:font script="Syrj" typeface="Estrangelo Edessa"/>
+        <a:font script="Syre" typeface="Estrangelo Edessa"/>
+        <a:font script="Sora" typeface="Nirmala UI"/>
+        <a:font script="Tale" typeface="Microsoft Tai Le"/>
+        <a:font script="Talu" typeface="Microsoft New Tai Lue"/>
+        <a:font script="Tfng" typeface="Ebrima"/>
+      </a:majorFont>
+      <a:minorFont>
+        <a:latin typeface="Aptos" panose="02110004020202020204"/>
+        <a:ea typeface=""/>
+        <a:cs typeface=""/>
+        <a:font script="Jpan" typeface="游ゴシック"/>
+        <a:font script="Hang" typeface="맑은 고딕"/>
+        <a:font script="Hans" typeface="等线"/>
+        <a:font script="Hant" typeface="新細明體"/>
+        <a:font script="Arab" typeface="Arial"/>
+        <a:font script="Hebr" typeface="Arial"/>
+        <a:font script="Thai" typeface="Cordia New"/>
+        <a:font script="Ethi" typeface="Nyala"/>
+        <a:font script="Beng" typeface="Vrinda"/>
+        <a:font script="Gujr" typeface="Shruti"/>
+        <a:font script="Khmr" typeface="DaunPenh"/>
+        <a:font script="Knda" typeface="Tunga"/>
+        <a:font script="Guru" typeface="Raavi"/>
+        <a:font script="Cans" typeface="Euphemia"/>
+        <a:font script="Cher" typeface="Plantagenet Cherokee"/>
+        <a:font script="Yiii" typeface="Microsoft Yi Baiti"/>
+        <a:font script="Tibt" typeface="Microsoft Himalaya"/>
+        <a:font script="Thaa" typeface="MV Boli"/>
+        <a:font script="Deva" typeface="Mangal"/>
+        <a:font script="Telu" typeface="Gautami"/>
+        <a:font script="Taml" typeface="Latha"/>
+        <a:font script="Syrc" typeface="Estrangelo Edessa"/>
+        <a:font script="Orya" typeface="Kalinga"/>
+        <a:font script="Mlym" typeface="Kartika"/>
+        <a:font script="Laoo" typeface="DokChampa"/>
+        <a:font script="Sinh" typeface="Iskoola Pota"/>
+        <a:font script="Mong" typeface="Mongolian Baiti"/>
+        <a:font script="Viet" typeface="Arial"/>
+        <a:font script="Uigh" typeface="Microsoft Uighur"/>
+        <a:font script="Geor" typeface="Sylfaen"/>
+        <a:font script="Armn" typeface="Arial"/>
+        <a:font script="Bugi" typeface="Leelawadee UI"/>
+        <a:font script="Bopo" typeface="Microsoft JhengHei"/>
+        <a:font script="Java" typeface="Javanese Text"/>
+        <a:font script="Lisu" typeface="Segoe UI"/>
+        <a:font script="Mymr" typeface="Myanmar Text"/>
+        <a:font script="Nkoo" typeface="Ebrima"/>
+        <a:font script="Olck" typeface="Nirmala UI"/>
+        <a:font script="Osma" typeface="Ebrima"/>
+        <a:font script="Phag" typeface="Phagspa"/>
+        <a:font script="Syrn" typeface="Estrangelo Edessa"/>
+        <a:font script="Syrj" typeface="Estrangelo Edessa"/>
+        <a:font script="Syre" typeface="Estrangelo Edessa"/>
+        <a:font script="Sora" typeface="Nirmala UI"/>
+        <a:font script="Tale" typeface="Microsoft Tai Le"/>
+        <a:font script="Talu" typeface="Microsoft New Tai Lue"/>
+        <a:font script="Tfng" typeface="Ebrima"/>
+      </a:minorFont>
+    </a:fontScheme>
+    <a:fmtScheme name="Office">
+      <a:fillStyleLst>
+        <a:solidFill>
+          <a:schemeClr val="phClr"/>
+        </a:solidFill>
+        <a:gradFill rotWithShape="1">
+          <a:gsLst>
+            <a:gs pos="0">
+              <a:schemeClr val="phClr">
+                <a:lumMod val="110000"/>
+                <a:satMod val="105000"/>
+                <a:tint val="67000"/>
+              </a:schemeClr>
+            </a:gs>
+            <a:gs pos="50000">
+              <a:schemeClr val="phClr">
+                <a:lumMod val="105000"/>
+                <a:satMod val="103000"/>
+                <a:tint val="73000"/>
+              </a:schemeClr>
+            </a:gs>
+            <a:gs pos="100000">
+              <a:schemeClr val="phClr">
+                <a:lumMod val="105000"/>
+                <a:satMod val="109000"/>
+                <a:tint val="81000"/>
+              </a:schemeClr>
+            </a:gs>
+          </a:gsLst>
+          <a:lin ang="5400000" scaled="0"/>
+        </a:gradFill>
+        <a:gradFill rotWithShape="1">
+          <a:gsLst>
+            <a:gs pos="0">
+              <a:schemeClr val="phClr">
+                <a:satMod val="103000"/>
+                <a:lumMod val="102000"/>
+                <a:tint val="94000"/>
+              </a:schemeClr>
+            </a:gs>
+            <a:gs pos="50000">
+              <a:schemeClr val="phClr">
+                <a:satMod val="110000"/>
+                <a:lumMod val="100000"/>
+                <a:shade val="100000"/>
+              </a:schemeClr>
+            </a:gs>
+            <a:gs pos="100000">
+              <a:schemeClr val="phClr">
+                <a:lumMod val="99000"/>
+                <a:satMod val="120000"/>
+                <a:shade val="78000"/>
+              </a:schemeClr>
+            </a:gs>
+          </a:gsLst>
+          <a:lin ang="5400000" scaled="0"/>
+        </a:gradFill>
+      </a:fillStyleLst>
+      <a:lnStyleLst>
+        <a:ln w="12700" cap="flat" cmpd="sng" algn="ctr">
+          <a:solidFill>
+            <a:schemeClr val="phClr"/>
+          </a:solidFill>
+          <a:prstDash val="solid"/>
+          <a:miter lim="800000"/>
+        </a:ln>
+        <a:ln w="19050" cap="flat" cmpd="sng" algn="ctr">
+          <a:solidFill>
+            <a:schemeClr val="phClr"/>
+          </a:solidFill>
+          <a:prstDash val="solid"/>
+          <a:miter lim="800000"/>
+        </a:ln>
+        <a:ln w="25400" cap="flat" cmpd="sng" algn="ctr">
+          <a:solidFill>
+            <a:schemeClr val="phClr"/>
+          </a:solidFill>
+          <a:prstDash val="solid"/>
+          <a:miter lim="800000"/>
+        </a:ln>
+      </a:lnStyleLst>
+      <a:effectStyleLst>
+        <a:effectStyle>
+          <a:effectLst/>
+        </a:effectStyle>
+        <a:effectStyle>
+          <a:effectLst/>
+        </a:effectStyle>
+        <a:effectStyle>
+          <a:effectLst>
+            <a:outerShdw blurRad="57150" dist="19050" dir="5400000" algn="ctr" rotWithShape="0">
+              <a:srgbClr val="000000">
+                <a:alpha val="63000"/>
+              </a:srgbClr>
+            </a:outerShdw>
+          </a:effectLst>
+        </a:effectStyle>
+      </a:effectStyleLst>
+      <a:bgFillStyleLst>
+        <a:solidFill>
+          <a:schemeClr val="phClr"/>
+        </a:solidFill>
+        <a:solidFill>
+          <a:schemeClr val="phClr">
+            <a:tint val="95000"/>
+            <a:satMod val="170000"/>
+          </a:schemeClr>
+        </a:solidFill>
+        <a:gradFill rotWithShape="1">
+          <a:gsLst>
+            <a:gs pos="0">
+              <a:schemeClr val="phClr">
+                <a:tint val="93000"/>
+                <a:satMod val="150000"/>
+                <a:shade val="98000"/>
+                <a:lumMod val="102000"/>
+              </a:schemeClr>
+            </a:gs>
+            <a:gs pos="50000">
+              <a:schemeClr val="phClr">
+                <a:tint val="98000"/>
+                <a:satMod val="130000"/>
+                <a:shade val="90000"/>
+                <a:lumMod val="103000"/>
+              </a:schemeClr>
+            </a:gs>
+            <a:gs pos="100000">
+              <a:schemeClr val="phClr">
+                <a:shade val="63000"/>
+                <a:satMod val="120000"/>
+              </a:schemeClr>
+            </a:gs>
+          </a:gsLst>
+          <a:lin ang="5400000" scaled="0"/>
+        </a:gradFill>
+      </a:bgFillStyleLst>
+    </a:fmtScheme>
+  </a:themeElements>
+  <a:objectDefaults>
+    <a:lnDef>
+      <a:spPr/>
+      <a:bodyPr/>
+      <a:lstStyle/>
+      <a:style>
+        <a:lnRef idx="2">
+          <a:schemeClr val="accent1"/>
+        </a:lnRef>
+        <a:fillRef idx="0">
+          <a:schemeClr val="accent1"/>
+        </a:fillRef>
+        <a:effectRef idx="1">
+          <a:schemeClr val="accent1"/>
+        </a:effectRef>
+        <a:fontRef idx="minor">
+          <a:schemeClr val="tx1"/>
+        </a:fontRef>
+      </a:style>
+    </a:lnDef>
+  </a:objectDefaults>
+  <a:extraClrSchemeLst/>
+  <a:extLst>
+    <a:ext uri="{05A4C25C-085E-4340-85A3-A5531E510DB2}">
+      <thm15:themeFamily xmlns:thm15="http://schemas.microsoft.com/office/thememl/2012/main" name="Office Theme" id="{2E142A2C-CD16-42D6-873A-C26D2A0506FA}" vid="{1BDDFF52-6CD6-40A5-AB3C-68EB2F1E4D0A}"/>
+    </a:ext>
+  </a:extLst>
+</a:theme>
 </file>
--- a/Identifikácia vzorov v časových radoch pre komparáciu volatility.pptx
+++ b/Identifikácia vzorov v časových radoch pre komparáciu volatility.pptx
@@ -1523,47 +1523,6 @@
         </a:p>
       </dgm:t>
     </dgm:pt>
-    <dgm:pt modelId="{FBC92019-F9D6-44C7-8FEB-8E1D787D9847}">
-      <dgm:prSet phldrT="[Text]" phldr="0" custT="1"/>
-      <dgm:spPr/>
-      <dgm:t>
-        <a:bodyPr/>
-        <a:lstStyle/>
-        <a:p>
-          <a:pPr>
-            <a:lnSpc>
-              <a:spcPct val="100000"/>
-            </a:lnSpc>
-          </a:pPr>
-          <a:r>
-            <a:rPr lang="sk-SK" sz="1400" dirty="0"/>
-            <a:t>Volatilita</a:t>
-          </a:r>
-        </a:p>
-      </dgm:t>
-    </dgm:pt>
-    <dgm:pt modelId="{5EAB6389-7D50-4C94-99A4-37938FFC0698}" type="parTrans" cxnId="{92279661-C1E7-4D1F-9157-1BD84C41BF85}">
-      <dgm:prSet/>
-      <dgm:spPr/>
-      <dgm:t>
-        <a:bodyPr/>
-        <a:lstStyle/>
-        <a:p>
-          <a:endParaRPr lang="sk-SK"/>
-        </a:p>
-      </dgm:t>
-    </dgm:pt>
-    <dgm:pt modelId="{EE1255BA-5F89-4775-9AE5-613A99589471}" type="sibTrans" cxnId="{92279661-C1E7-4D1F-9157-1BD84C41BF85}">
-      <dgm:prSet/>
-      <dgm:spPr/>
-      <dgm:t>
-        <a:bodyPr/>
-        <a:lstStyle/>
-        <a:p>
-          <a:endParaRPr lang="sk-SK"/>
-        </a:p>
-      </dgm:t>
-    </dgm:pt>
     <dgm:pt modelId="{609221ED-82FD-45D9-955E-69D98C9F9837}">
       <dgm:prSet phldrT="[Text]" phldr="0" custT="1"/>
       <dgm:spPr/>
@@ -1882,7 +1841,6 @@
     <dgm:cxn modelId="{EF930D35-4B86-4E80-85DC-7B6BC7AA9496}" srcId="{9979E402-2F88-436A-8282-66EF53786664}" destId="{73AD1036-9A58-4EFE-A690-768795CB6028}" srcOrd="1" destOrd="0" parTransId="{D74B432F-AB74-4B64-BFA2-E32BDA98B222}" sibTransId="{408C3476-FF68-4201-93EA-3E782D733A5A}"/>
     <dgm:cxn modelId="{5EA18F3F-8C95-4516-A78B-E998C72E980A}" type="presOf" srcId="{59B08BBC-3ABB-47D1-B928-7D3326411A7C}" destId="{ADB04D02-A97C-4659-BAB1-BFD732875B6F}" srcOrd="0" destOrd="0" presId="urn:microsoft.com/office/officeart/2005/8/layout/hProcess4"/>
     <dgm:cxn modelId="{2F37565F-A296-488B-93B3-B1A833772821}" type="presOf" srcId="{5A9B94D9-D4F7-4D1D-B7A5-E4EBAEBE5076}" destId="{F19BD381-30C3-4201-B50A-E41684C9478F}" srcOrd="0" destOrd="0" presId="urn:microsoft.com/office/officeart/2005/8/layout/hProcess4"/>
-    <dgm:cxn modelId="{92279661-C1E7-4D1F-9157-1BD84C41BF85}" srcId="{2207399F-F7A9-4246-825E-CB2F59081A8E}" destId="{FBC92019-F9D6-44C7-8FEB-8E1D787D9847}" srcOrd="1" destOrd="0" parTransId="{5EAB6389-7D50-4C94-99A4-37938FFC0698}" sibTransId="{EE1255BA-5F89-4775-9AE5-613A99589471}"/>
     <dgm:cxn modelId="{BEB58F67-6203-4934-ACB6-24E5DE29A637}" srcId="{2207399F-F7A9-4246-825E-CB2F59081A8E}" destId="{3ED2CA7C-8CF3-4C7D-B586-70BE48490C21}" srcOrd="0" destOrd="0" parTransId="{30A02569-3B28-4898-83E1-9F52CF2D5DF7}" sibTransId="{65491649-8A43-4755-8BC5-745B3DE7A686}"/>
     <dgm:cxn modelId="{23328F69-7A3A-4E22-9E08-42F9C489C67F}" srcId="{C29477DB-93CB-41C5-979C-064DF5F4039B}" destId="{9AACA625-023E-4357-97C3-04906BC41DD8}" srcOrd="1" destOrd="0" parTransId="{0AB24F2C-DCB6-41E0-8CF4-8B7B503E0D35}" sibTransId="{9615B57A-14EC-4E34-ACAE-C271D4D87DE9}"/>
     <dgm:cxn modelId="{DB8EAE6C-7106-45F1-BF84-82255282170A}" type="presOf" srcId="{1B2331C3-4ED8-496E-B08D-D0298EC66B33}" destId="{F19BD381-30C3-4201-B50A-E41684C9478F}" srcOrd="0" destOrd="3" presId="urn:microsoft.com/office/officeart/2005/8/layout/hProcess4"/>
@@ -1891,7 +1849,6 @@
     <dgm:cxn modelId="{8583DF4F-4093-4EB7-BC34-9DEF845ECFD0}" type="presOf" srcId="{0B006AC3-28C8-4288-AFED-91FA3D0A00F9}" destId="{7B6A1E41-DCFE-4AC5-8D88-041D7A647606}" srcOrd="0" destOrd="1" presId="urn:microsoft.com/office/officeart/2005/8/layout/hProcess4"/>
     <dgm:cxn modelId="{E434B475-7EA1-44D2-8B1A-F82B4C50954D}" type="presOf" srcId="{9979E402-2F88-436A-8282-66EF53786664}" destId="{E878FD4D-12B7-458B-BC0F-B75BEB791108}" srcOrd="0" destOrd="0" presId="urn:microsoft.com/office/officeart/2005/8/layout/hProcess4"/>
     <dgm:cxn modelId="{83FA1876-1988-4AA7-8772-424EBC865BEE}" srcId="{4EF5B21F-0522-4B37-85D6-CEB430CCB426}" destId="{DE3AD505-65C0-49B0-BBA3-107F8FE3DB83}" srcOrd="0" destOrd="0" parTransId="{3FB8894D-9D06-4462-954B-2CE4DB8E1B44}" sibTransId="{A4CBCBDC-32A9-4FEC-88AF-47A54C5CE209}"/>
-    <dgm:cxn modelId="{DDBD4F76-6AA7-4B92-9805-2A666B8665F2}" type="presOf" srcId="{FBC92019-F9D6-44C7-8FEB-8E1D787D9847}" destId="{46A5BD50-A357-43EB-900E-7628F4E860EB}" srcOrd="0" destOrd="1" presId="urn:microsoft.com/office/officeart/2005/8/layout/hProcess4"/>
     <dgm:cxn modelId="{C4486479-08EB-4FC4-8DCA-1090C522E791}" type="presOf" srcId="{1B2331C3-4ED8-496E-B08D-D0298EC66B33}" destId="{2B0884EC-019C-489D-80AA-7566A7966A30}" srcOrd="1" destOrd="3" presId="urn:microsoft.com/office/officeart/2005/8/layout/hProcess4"/>
     <dgm:cxn modelId="{2DE89C59-6E2F-45BA-9D96-C20A8E33861B}" type="presOf" srcId="{609221ED-82FD-45D9-955E-69D98C9F9837}" destId="{2B0884EC-019C-489D-80AA-7566A7966A30}" srcOrd="1" destOrd="2" presId="urn:microsoft.com/office/officeart/2005/8/layout/hProcess4"/>
     <dgm:cxn modelId="{4532DF9A-C60F-4A31-9302-868AC9FD0915}" type="presOf" srcId="{8B704CD4-C4A3-4CA8-9E6D-3F5A58FB5A6E}" destId="{850FA6B7-9A4F-4AA5-BDED-68AE9D7593C5}" srcOrd="0" destOrd="0" presId="urn:microsoft.com/office/officeart/2005/8/layout/hProcess4"/>
@@ -1906,7 +1863,7 @@
     <dgm:cxn modelId="{6E8D91AF-8DE7-4F4E-8EAB-E5CED69CEC1F}" type="presOf" srcId="{9847EFBA-07E4-4A28-9C1A-E7667B923BB5}" destId="{1578868B-2CAF-4820-BE2E-8D12F7F7A919}" srcOrd="0" destOrd="0" presId="urn:microsoft.com/office/officeart/2005/8/layout/hProcess4"/>
     <dgm:cxn modelId="{89E99CB0-D87A-4B3C-9588-85E36DE4E5D4}" type="presOf" srcId="{9AACA625-023E-4357-97C3-04906BC41DD8}" destId="{ADB04D02-A97C-4659-BAB1-BFD732875B6F}" srcOrd="0" destOrd="1" presId="urn:microsoft.com/office/officeart/2005/8/layout/hProcess4"/>
     <dgm:cxn modelId="{621691B4-DDBD-4DF2-B1B0-FB701B9853D5}" type="presOf" srcId="{A3A0FADB-9E1C-46FA-9954-1A7B414B35B9}" destId="{D401E58F-260B-48C4-8ED1-6DB73FD4E661}" srcOrd="1" destOrd="1" presId="urn:microsoft.com/office/officeart/2005/8/layout/hProcess4"/>
-    <dgm:cxn modelId="{16ECBFB4-04FA-4F01-9B73-FB666D5B3594}" type="presOf" srcId="{39031FE6-9489-43E5-BCCE-9368A5102F41}" destId="{0F7E9FD4-6D4A-4F6B-86E7-3179B41C32BE}" srcOrd="1" destOrd="2" presId="urn:microsoft.com/office/officeart/2005/8/layout/hProcess4"/>
+    <dgm:cxn modelId="{16ECBFB4-04FA-4F01-9B73-FB666D5B3594}" type="presOf" srcId="{39031FE6-9489-43E5-BCCE-9368A5102F41}" destId="{0F7E9FD4-6D4A-4F6B-86E7-3179B41C32BE}" srcOrd="1" destOrd="1" presId="urn:microsoft.com/office/officeart/2005/8/layout/hProcess4"/>
     <dgm:cxn modelId="{B5D0ECB7-E566-4057-A1EA-FD252152DFE1}" type="presOf" srcId="{59B08BBC-3ABB-47D1-B928-7D3326411A7C}" destId="{7AE20833-C756-4510-9EF0-F24DE50F50DA}" srcOrd="1" destOrd="0" presId="urn:microsoft.com/office/officeart/2005/8/layout/hProcess4"/>
     <dgm:cxn modelId="{3CB867B9-6F43-4AB6-9530-DB6C5EF59301}" srcId="{D6FB274B-FC90-4E83-AEF4-3C4FAD353500}" destId="{0B006AC3-28C8-4288-AFED-91FA3D0A00F9}" srcOrd="1" destOrd="0" parTransId="{3666285E-AE42-426B-A018-E0BA7E841619}" sibTransId="{80AA56DF-E813-4B21-A7F1-6FEC4A8ABA5B}"/>
     <dgm:cxn modelId="{512E31BD-BF4D-4053-8171-89D1D2BD3D55}" type="presOf" srcId="{0B006AC3-28C8-4288-AFED-91FA3D0A00F9}" destId="{B6E2E50B-E13E-4164-8844-C48D2241F28F}" srcOrd="1" destOrd="1" presId="urn:microsoft.com/office/officeart/2005/8/layout/hProcess4"/>
@@ -1914,18 +1871,17 @@
     <dgm:cxn modelId="{A76D05C4-A12A-4B98-9194-3F92D8D6E43A}" srcId="{B665338B-645B-41AE-983D-65FFD2CDBEFF}" destId="{D6FB274B-FC90-4E83-AEF4-3C4FAD353500}" srcOrd="0" destOrd="0" parTransId="{5A19F18F-4921-423D-81BF-A1FD0D5AC97B}" sibTransId="{8B704CD4-C4A3-4CA8-9E6D-3F5A58FB5A6E}"/>
     <dgm:cxn modelId="{500E1CC5-E3EB-48CE-81C8-01B2FF0977A1}" type="presOf" srcId="{609221ED-82FD-45D9-955E-69D98C9F9837}" destId="{F19BD381-30C3-4201-B50A-E41684C9478F}" srcOrd="0" destOrd="2" presId="urn:microsoft.com/office/officeart/2005/8/layout/hProcess4"/>
     <dgm:cxn modelId="{E51FFEC5-0C48-4BFD-9DD2-0E5F0D9F9B63}" srcId="{B665338B-645B-41AE-983D-65FFD2CDBEFF}" destId="{2207399F-F7A9-4246-825E-CB2F59081A8E}" srcOrd="1" destOrd="0" parTransId="{0BBDA673-1136-4713-8084-109E95915A75}" sibTransId="{4151D506-449B-4309-95E1-51332BF9EED7}"/>
-    <dgm:cxn modelId="{CA233CC6-92B2-4A88-BEFC-46B83D41E595}" srcId="{2207399F-F7A9-4246-825E-CB2F59081A8E}" destId="{39031FE6-9489-43E5-BCCE-9368A5102F41}" srcOrd="2" destOrd="0" parTransId="{8B494894-2007-4090-BB37-185754316FE5}" sibTransId="{894F75BD-961D-4E6E-8B14-1223A8001890}"/>
+    <dgm:cxn modelId="{CA233CC6-92B2-4A88-BEFC-46B83D41E595}" srcId="{2207399F-F7A9-4246-825E-CB2F59081A8E}" destId="{39031FE6-9489-43E5-BCCE-9368A5102F41}" srcOrd="1" destOrd="0" parTransId="{8B494894-2007-4090-BB37-185754316FE5}" sibTransId="{894F75BD-961D-4E6E-8B14-1223A8001890}"/>
     <dgm:cxn modelId="{47FFA8C6-5991-4EDA-8402-967CDCF06D51}" srcId="{4EF5B21F-0522-4B37-85D6-CEB430CCB426}" destId="{A3A0FADB-9E1C-46FA-9954-1A7B414B35B9}" srcOrd="1" destOrd="0" parTransId="{38FAC2C9-419E-4EF5-879C-35B6091251F6}" sibTransId="{F5341326-D575-46DC-A6B0-BD344AD6EE25}"/>
     <dgm:cxn modelId="{A8E619CC-CD02-4E00-B8C5-610274244D24}" type="presOf" srcId="{C29477DB-93CB-41C5-979C-064DF5F4039B}" destId="{6B4282B9-062B-41C5-898A-A66339751090}" srcOrd="0" destOrd="0" presId="urn:microsoft.com/office/officeart/2005/8/layout/hProcess4"/>
     <dgm:cxn modelId="{92BD74CD-A52D-439A-B938-51B066954595}" srcId="{B665338B-645B-41AE-983D-65FFD2CDBEFF}" destId="{C29477DB-93CB-41C5-979C-064DF5F4039B}" srcOrd="4" destOrd="0" parTransId="{146D272C-43EF-4C36-BDDC-49E2C0F2BD02}" sibTransId="{D3BF079C-D04F-4E30-9314-BE8D4456213A}"/>
-    <dgm:cxn modelId="{B17DDED1-670D-4B61-B3E7-F712F73AE8BF}" type="presOf" srcId="{39031FE6-9489-43E5-BCCE-9368A5102F41}" destId="{46A5BD50-A357-43EB-900E-7628F4E860EB}" srcOrd="0" destOrd="2" presId="urn:microsoft.com/office/officeart/2005/8/layout/hProcess4"/>
+    <dgm:cxn modelId="{B17DDED1-670D-4B61-B3E7-F712F73AE8BF}" type="presOf" srcId="{39031FE6-9489-43E5-BCCE-9368A5102F41}" destId="{46A5BD50-A357-43EB-900E-7628F4E860EB}" srcOrd="0" destOrd="1" presId="urn:microsoft.com/office/officeart/2005/8/layout/hProcess4"/>
     <dgm:cxn modelId="{6A727CD2-775C-4511-B002-9C281868F8FC}" type="presOf" srcId="{8D030EC8-A772-4D56-8F07-0AE23381547A}" destId="{7B6A1E41-DCFE-4AC5-8D88-041D7A647606}" srcOrd="0" destOrd="0" presId="urn:microsoft.com/office/officeart/2005/8/layout/hProcess4"/>
     <dgm:cxn modelId="{9768A2D3-4C6C-49DA-8A2F-78843B19EEF7}" type="presOf" srcId="{73AD1036-9A58-4EFE-A690-768795CB6028}" destId="{F19BD381-30C3-4201-B50A-E41684C9478F}" srcOrd="0" destOrd="1" presId="urn:microsoft.com/office/officeart/2005/8/layout/hProcess4"/>
     <dgm:cxn modelId="{897409D9-192B-4EDF-8972-02F349E168B0}" type="presOf" srcId="{4EF5B21F-0522-4B37-85D6-CEB430CCB426}" destId="{3EA60A08-F209-4DFD-A8C0-33D58C80F67D}" srcOrd="0" destOrd="0" presId="urn:microsoft.com/office/officeart/2005/8/layout/hProcess4"/>
     <dgm:cxn modelId="{76A112EF-4F15-4699-96ED-8440111B0D2F}" type="presOf" srcId="{3ED2CA7C-8CF3-4C7D-B586-70BE48490C21}" destId="{0F7E9FD4-6D4A-4F6B-86E7-3179B41C32BE}" srcOrd="1" destOrd="0" presId="urn:microsoft.com/office/officeart/2005/8/layout/hProcess4"/>
     <dgm:cxn modelId="{DAEEB7EF-C8BB-4E20-B08B-BB49E4076AEB}" type="presOf" srcId="{4151D506-449B-4309-95E1-51332BF9EED7}" destId="{DB00C555-2EA1-4D87-A59D-2B8C4B0D5343}" srcOrd="0" destOrd="0" presId="urn:microsoft.com/office/officeart/2005/8/layout/hProcess4"/>
     <dgm:cxn modelId="{09CF8BF3-4050-4D48-B720-9B954225D1AE}" type="presOf" srcId="{B665338B-645B-41AE-983D-65FFD2CDBEFF}" destId="{0988CE5C-27CF-4DBE-A10F-ED07BCA1B13B}" srcOrd="0" destOrd="0" presId="urn:microsoft.com/office/officeart/2005/8/layout/hProcess4"/>
-    <dgm:cxn modelId="{BEA7AAF9-73A8-40BA-9938-1032F9ABF083}" type="presOf" srcId="{FBC92019-F9D6-44C7-8FEB-8E1D787D9847}" destId="{0F7E9FD4-6D4A-4F6B-86E7-3179B41C32BE}" srcOrd="1" destOrd="1" presId="urn:microsoft.com/office/officeart/2005/8/layout/hProcess4"/>
     <dgm:cxn modelId="{8E02247B-249E-4971-8582-4D578DC693B5}" type="presParOf" srcId="{0988CE5C-27CF-4DBE-A10F-ED07BCA1B13B}" destId="{3B42B861-20D8-4D43-90F3-4BC0C7641FEA}" srcOrd="0" destOrd="0" presId="urn:microsoft.com/office/officeart/2005/8/layout/hProcess4"/>
     <dgm:cxn modelId="{8A984E5A-25BC-457C-8A35-C399DC0FA32C}" type="presParOf" srcId="{0988CE5C-27CF-4DBE-A10F-ED07BCA1B13B}" destId="{130535EF-3ED6-4707-8CDF-434B62E24FB2}" srcOrd="1" destOrd="0" presId="urn:microsoft.com/office/officeart/2005/8/layout/hProcess4"/>
     <dgm:cxn modelId="{6BDDB780-B06A-4A02-A045-9E0ED006ED79}" type="presParOf" srcId="{0988CE5C-27CF-4DBE-A10F-ED07BCA1B13B}" destId="{1B16AE6F-9C06-44DE-B7B3-443002962661}" srcOrd="2" destOrd="0" presId="urn:microsoft.com/office/officeart/2005/8/layout/hProcess4"/>
@@ -2290,24 +2246,6 @@
           <a:r>
             <a:rPr lang="sk-SK" sz="1400" kern="1200" dirty="0"/>
             <a:t>Log výnosy</a:t>
-          </a:r>
-        </a:p>
-        <a:p>
-          <a:pPr marL="114300" lvl="1" indent="-114300" algn="l" defTabSz="622300">
-            <a:lnSpc>
-              <a:spcPct val="100000"/>
-            </a:lnSpc>
-            <a:spcBef>
-              <a:spcPct val="0"/>
-            </a:spcBef>
-            <a:spcAft>
-              <a:spcPct val="15000"/>
-            </a:spcAft>
-            <a:buChar char="•"/>
-          </a:pPr>
-          <a:r>
-            <a:rPr lang="sk-SK" sz="1400" kern="1200" dirty="0"/>
-            <a:t>Volatilita</a:t>
           </a:r>
         </a:p>
         <a:p>
@@ -4823,7 +4761,7 @@
           <a:p>
             <a:fld id="{AD9B504B-8E04-47AE-BBD5-0260BCE63BC0}" type="datetimeFigureOut">
               <a:rPr lang="sk-SK" smtClean="0"/>
-              <a:t>21. 6. 2026</a:t>
+              <a:t>24. 6. 2026</a:t>
             </a:fld>
             <a:endParaRPr lang="sk-SK"/>
           </a:p>
@@ -5539,6 +5477,203 @@
               <a:t>Podrobnejšie popísať navrhovanú metodiku výskumu.</a:t>
             </a:r>
           </a:p>
+          <a:p>
+            <a:endParaRPr lang="sk-SK" dirty="0"/>
+          </a:p>
+          <a:p>
+            <a:r>
+              <a:rPr lang="sk-SK" dirty="0"/>
+              <a:t>Spomenúť:</a:t>
+            </a:r>
+          </a:p>
+          <a:p>
+            <a:r>
+              <a:rPr lang="sk-SK" sz="1200" kern="1200" dirty="0">
+                <a:solidFill>
+                  <a:schemeClr val="tx1"/>
+                </a:solidFill>
+                <a:effectLst/>
+                <a:latin typeface="+mn-lt"/>
+                <a:ea typeface="+mn-ea"/>
+                <a:cs typeface="+mn-cs"/>
+              </a:rPr>
+              <a:t>„Dáta budú transformované na logaritmické výnosy a následne budú analyzované ich vlastnosti ako </a:t>
+            </a:r>
+            <a:r>
+              <a:rPr lang="sk-SK" sz="1200" kern="1200" dirty="0" err="1">
+                <a:solidFill>
+                  <a:schemeClr val="tx1"/>
+                </a:solidFill>
+                <a:effectLst/>
+                <a:latin typeface="+mn-lt"/>
+                <a:ea typeface="+mn-ea"/>
+                <a:cs typeface="+mn-cs"/>
+              </a:rPr>
+              <a:t>stacionarita</a:t>
+            </a:r>
+            <a:r>
+              <a:rPr lang="sk-SK" sz="1200" kern="1200" dirty="0">
+                <a:solidFill>
+                  <a:schemeClr val="tx1"/>
+                </a:solidFill>
+                <a:effectLst/>
+                <a:latin typeface="+mn-lt"/>
+                <a:ea typeface="+mn-ea"/>
+                <a:cs typeface="+mn-cs"/>
+              </a:rPr>
+              <a:t>, </a:t>
+            </a:r>
+            <a:r>
+              <a:rPr lang="sk-SK" sz="1200" kern="1200" dirty="0" err="1">
+                <a:solidFill>
+                  <a:schemeClr val="tx1"/>
+                </a:solidFill>
+                <a:effectLst/>
+                <a:latin typeface="+mn-lt"/>
+                <a:ea typeface="+mn-ea"/>
+                <a:cs typeface="+mn-cs"/>
+              </a:rPr>
+              <a:t>autokorelácia</a:t>
+            </a:r>
+            <a:r>
+              <a:rPr lang="sk-SK" sz="1200" kern="1200" dirty="0">
+                <a:solidFill>
+                  <a:schemeClr val="tx1"/>
+                </a:solidFill>
+                <a:effectLst/>
+                <a:latin typeface="+mn-lt"/>
+                <a:ea typeface="+mn-ea"/>
+                <a:cs typeface="+mn-cs"/>
+              </a:rPr>
+              <a:t> a </a:t>
+            </a:r>
+            <a:r>
+              <a:rPr lang="sk-SK" sz="1200" kern="1200" dirty="0" err="1">
+                <a:solidFill>
+                  <a:schemeClr val="tx1"/>
+                </a:solidFill>
+                <a:effectLst/>
+                <a:latin typeface="+mn-lt"/>
+                <a:ea typeface="+mn-ea"/>
+                <a:cs typeface="+mn-cs"/>
+              </a:rPr>
+              <a:t>heteroskedasticita</a:t>
+            </a:r>
+            <a:r>
+              <a:rPr lang="sk-SK" sz="1200" kern="1200" dirty="0">
+                <a:solidFill>
+                  <a:schemeClr val="tx1"/>
+                </a:solidFill>
+                <a:effectLst/>
+                <a:latin typeface="+mn-lt"/>
+                <a:ea typeface="+mn-ea"/>
+                <a:cs typeface="+mn-cs"/>
+              </a:rPr>
+              <a:t>.</a:t>
+            </a:r>
+          </a:p>
+          <a:p>
+            <a:r>
+              <a:rPr lang="sk-SK" sz="1200" kern="1200" dirty="0">
+                <a:solidFill>
+                  <a:schemeClr val="tx1"/>
+                </a:solidFill>
+                <a:effectLst/>
+                <a:latin typeface="+mn-lt"/>
+                <a:ea typeface="+mn-ea"/>
+                <a:cs typeface="+mn-cs"/>
+              </a:rPr>
+              <a:t>Takto predspracované dáta budú ďalej vhodné ako vstup pre ekonometrické modely a metódy umelej inteligencie.“</a:t>
+            </a:r>
+            <a:r>
+              <a:rPr lang="en-US" sz="1200" kern="1200" dirty="0">
+                <a:solidFill>
+                  <a:schemeClr val="tx1"/>
+                </a:solidFill>
+                <a:effectLst/>
+                <a:latin typeface="+mn-lt"/>
+                <a:ea typeface="+mn-ea"/>
+                <a:cs typeface="+mn-cs"/>
+              </a:rPr>
+              <a:t> </a:t>
+            </a:r>
+            <a:r>
+              <a:rPr lang="en-US" sz="1200" kern="1200" dirty="0" err="1">
+                <a:solidFill>
+                  <a:schemeClr val="tx1"/>
+                </a:solidFill>
+                <a:effectLst/>
+                <a:latin typeface="+mn-lt"/>
+                <a:ea typeface="+mn-ea"/>
+                <a:cs typeface="+mn-cs"/>
+              </a:rPr>
+              <a:t>Logaritmick</a:t>
+            </a:r>
+            <a:r>
+              <a:rPr lang="sk-SK" sz="1200" kern="1200" dirty="0">
+                <a:solidFill>
+                  <a:schemeClr val="tx1"/>
+                </a:solidFill>
+                <a:effectLst/>
+                <a:latin typeface="+mn-lt"/>
+                <a:ea typeface="+mn-ea"/>
+                <a:cs typeface="+mn-cs"/>
+              </a:rPr>
+              <a:t>é výnosy sú: </a:t>
+            </a:r>
+            <a:r>
+              <a:rPr lang="sk-SK" sz="1200" kern="1200" dirty="0" err="1">
+                <a:solidFill>
+                  <a:schemeClr val="tx1"/>
+                </a:solidFill>
+                <a:effectLst/>
+                <a:latin typeface="+mn-lt"/>
+                <a:ea typeface="+mn-ea"/>
+                <a:cs typeface="+mn-cs"/>
+              </a:rPr>
+              <a:t>ln</a:t>
+            </a:r>
+            <a:r>
+              <a:rPr lang="en-US" sz="1200" kern="1200" dirty="0">
+                <a:solidFill>
+                  <a:schemeClr val="tx1"/>
+                </a:solidFill>
+                <a:effectLst/>
+                <a:latin typeface="+mn-lt"/>
+                <a:ea typeface="+mn-ea"/>
+                <a:cs typeface="+mn-cs"/>
+              </a:rPr>
+              <a:t>(</a:t>
+            </a:r>
+            <a:r>
+              <a:rPr lang="en-US" sz="1200" kern="1200" dirty="0" err="1">
+                <a:solidFill>
+                  <a:schemeClr val="tx1"/>
+                </a:solidFill>
+                <a:effectLst/>
+                <a:latin typeface="+mn-lt"/>
+                <a:ea typeface="+mn-ea"/>
+                <a:cs typeface="+mn-cs"/>
+              </a:rPr>
+              <a:t>CLOSEt</a:t>
+            </a:r>
+            <a:r>
+              <a:rPr lang="en-US" sz="1200" kern="1200" dirty="0">
+                <a:solidFill>
+                  <a:schemeClr val="tx1"/>
+                </a:solidFill>
+                <a:effectLst/>
+                <a:latin typeface="+mn-lt"/>
+                <a:ea typeface="+mn-ea"/>
+                <a:cs typeface="+mn-cs"/>
+              </a:rPr>
+              <a:t>) - ln(CLOSEt-1)</a:t>
+            </a:r>
+            <a:endParaRPr lang="sk-SK"/>
+          </a:p>
+          <a:p>
+            <a:endParaRPr lang="sk-SK" dirty="0"/>
+          </a:p>
         </p:txBody>
       </p:sp>
       <p:sp>
@@ -5812,200 +5947,6 @@
               <a:rPr lang="sk-SK" dirty="0"/>
               <a:t> neurónová sieť založená na sekvenčné dáta. Na základe predchádzajúcich dát volatility dokáže predikovať budúcu volatilitu.</a:t>
             </a:r>
-          </a:p>
-          <a:p>
-            <a:endParaRPr lang="sk-SK" dirty="0"/>
-          </a:p>
-          <a:p>
-            <a:r>
-              <a:rPr lang="sk-SK" dirty="0"/>
-              <a:t>Spomenúť:</a:t>
-            </a:r>
-          </a:p>
-          <a:p>
-            <a:r>
-              <a:rPr lang="sk-SK" sz="1200" kern="1200" dirty="0">
-                <a:solidFill>
-                  <a:schemeClr val="tx1"/>
-                </a:solidFill>
-                <a:effectLst/>
-                <a:latin typeface="+mn-lt"/>
-                <a:ea typeface="+mn-ea"/>
-                <a:cs typeface="+mn-cs"/>
-              </a:rPr>
-              <a:t>„Dáta budú transformované na logaritmické výnosy a následne budú analyzované ich vlastnosti ako </a:t>
-            </a:r>
-            <a:r>
-              <a:rPr lang="sk-SK" sz="1200" kern="1200" dirty="0" err="1">
-                <a:solidFill>
-                  <a:schemeClr val="tx1"/>
-                </a:solidFill>
-                <a:effectLst/>
-                <a:latin typeface="+mn-lt"/>
-                <a:ea typeface="+mn-ea"/>
-                <a:cs typeface="+mn-cs"/>
-              </a:rPr>
-              <a:t>stacionarita</a:t>
-            </a:r>
-            <a:r>
-              <a:rPr lang="sk-SK" sz="1200" kern="1200" dirty="0">
-                <a:solidFill>
-                  <a:schemeClr val="tx1"/>
-                </a:solidFill>
-                <a:effectLst/>
-                <a:latin typeface="+mn-lt"/>
-                <a:ea typeface="+mn-ea"/>
-                <a:cs typeface="+mn-cs"/>
-              </a:rPr>
-              <a:t>, </a:t>
-            </a:r>
-            <a:r>
-              <a:rPr lang="sk-SK" sz="1200" kern="1200" dirty="0" err="1">
-                <a:solidFill>
-                  <a:schemeClr val="tx1"/>
-                </a:solidFill>
-                <a:effectLst/>
-                <a:latin typeface="+mn-lt"/>
-                <a:ea typeface="+mn-ea"/>
-                <a:cs typeface="+mn-cs"/>
-              </a:rPr>
-              <a:t>autokorelácia</a:t>
-            </a:r>
-            <a:r>
-              <a:rPr lang="sk-SK" sz="1200" kern="1200" dirty="0">
-                <a:solidFill>
-                  <a:schemeClr val="tx1"/>
-                </a:solidFill>
-                <a:effectLst/>
-                <a:latin typeface="+mn-lt"/>
-                <a:ea typeface="+mn-ea"/>
-                <a:cs typeface="+mn-cs"/>
-              </a:rPr>
-              <a:t> a </a:t>
-            </a:r>
-            <a:r>
-              <a:rPr lang="sk-SK" sz="1200" kern="1200" dirty="0" err="1">
-                <a:solidFill>
-                  <a:schemeClr val="tx1"/>
-                </a:solidFill>
-                <a:effectLst/>
-                <a:latin typeface="+mn-lt"/>
-                <a:ea typeface="+mn-ea"/>
-                <a:cs typeface="+mn-cs"/>
-              </a:rPr>
-              <a:t>heteroskedasticita</a:t>
-            </a:r>
-            <a:r>
-              <a:rPr lang="sk-SK" sz="1200" kern="1200" dirty="0">
-                <a:solidFill>
-                  <a:schemeClr val="tx1"/>
-                </a:solidFill>
-                <a:effectLst/>
-                <a:latin typeface="+mn-lt"/>
-                <a:ea typeface="+mn-ea"/>
-                <a:cs typeface="+mn-cs"/>
-              </a:rPr>
-              <a:t>.</a:t>
-            </a:r>
-          </a:p>
-          <a:p>
-            <a:r>
-              <a:rPr lang="sk-SK" sz="1200" kern="1200" dirty="0">
-                <a:solidFill>
-                  <a:schemeClr val="tx1"/>
-                </a:solidFill>
-                <a:effectLst/>
-                <a:latin typeface="+mn-lt"/>
-                <a:ea typeface="+mn-ea"/>
-                <a:cs typeface="+mn-cs"/>
-              </a:rPr>
-              <a:t>Takto predspracované dáta budú ďalej vhodné ako vstup pre ekonometrické modely a metódy umelej inteligencie.“</a:t>
-            </a:r>
-            <a:r>
-              <a:rPr lang="en-US" sz="1200" kern="1200" dirty="0">
-                <a:solidFill>
-                  <a:schemeClr val="tx1"/>
-                </a:solidFill>
-                <a:effectLst/>
-                <a:latin typeface="+mn-lt"/>
-                <a:ea typeface="+mn-ea"/>
-                <a:cs typeface="+mn-cs"/>
-              </a:rPr>
-              <a:t> </a:t>
-            </a:r>
-            <a:r>
-              <a:rPr lang="en-US" sz="1200" kern="1200" dirty="0" err="1">
-                <a:solidFill>
-                  <a:schemeClr val="tx1"/>
-                </a:solidFill>
-                <a:effectLst/>
-                <a:latin typeface="+mn-lt"/>
-                <a:ea typeface="+mn-ea"/>
-                <a:cs typeface="+mn-cs"/>
-              </a:rPr>
-              <a:t>Logaritmick</a:t>
-            </a:r>
-            <a:r>
-              <a:rPr lang="sk-SK" sz="1200" kern="1200" dirty="0">
-                <a:solidFill>
-                  <a:schemeClr val="tx1"/>
-                </a:solidFill>
-                <a:effectLst/>
-                <a:latin typeface="+mn-lt"/>
-                <a:ea typeface="+mn-ea"/>
-                <a:cs typeface="+mn-cs"/>
-              </a:rPr>
-              <a:t>é výnosy sú: </a:t>
-            </a:r>
-            <a:r>
-              <a:rPr lang="sk-SK" sz="1200" kern="1200" dirty="0" err="1">
-                <a:solidFill>
-                  <a:schemeClr val="tx1"/>
-                </a:solidFill>
-                <a:effectLst/>
-                <a:latin typeface="+mn-lt"/>
-                <a:ea typeface="+mn-ea"/>
-                <a:cs typeface="+mn-cs"/>
-              </a:rPr>
-              <a:t>ln</a:t>
-            </a:r>
-            <a:r>
-              <a:rPr lang="en-US" sz="1200" kern="1200" dirty="0">
-                <a:solidFill>
-                  <a:schemeClr val="tx1"/>
-                </a:solidFill>
-                <a:effectLst/>
-                <a:latin typeface="+mn-lt"/>
-                <a:ea typeface="+mn-ea"/>
-                <a:cs typeface="+mn-cs"/>
-              </a:rPr>
-              <a:t>(</a:t>
-            </a:r>
-            <a:r>
-              <a:rPr lang="en-US" sz="1200" kern="1200" dirty="0" err="1">
-                <a:solidFill>
-                  <a:schemeClr val="tx1"/>
-                </a:solidFill>
-                <a:effectLst/>
-                <a:latin typeface="+mn-lt"/>
-                <a:ea typeface="+mn-ea"/>
-                <a:cs typeface="+mn-cs"/>
-              </a:rPr>
-              <a:t>CLOSEt</a:t>
-            </a:r>
-            <a:r>
-              <a:rPr lang="en-US" sz="1200" kern="1200" dirty="0">
-                <a:solidFill>
-                  <a:schemeClr val="tx1"/>
-                </a:solidFill>
-                <a:effectLst/>
-                <a:latin typeface="+mn-lt"/>
-                <a:ea typeface="+mn-ea"/>
-                <a:cs typeface="+mn-cs"/>
-              </a:rPr>
-              <a:t>) - ln(CLOSEt-1)</a:t>
-            </a:r>
-            <a:endParaRPr lang="sk-SK" dirty="0"/>
           </a:p>
         </p:txBody>
       </p:sp>
@@ -6457,7 +6398,7 @@
           <a:p>
             <a:fld id="{02AC24A9-CCB6-4F8D-B8DB-C2F3692CFA5A}" type="datetimeFigureOut">
               <a:rPr lang="en-US" smtClean="0"/>
-              <a:t>6/21/2026</a:t>
+              <a:t>6/24/2026</a:t>
             </a:fld>
             <a:endParaRPr lang="en-US" dirty="0"/>
           </a:p>
@@ -6828,7 +6769,7 @@
           <a:p>
             <a:fld id="{02AC24A9-CCB6-4F8D-B8DB-C2F3692CFA5A}" type="datetimeFigureOut">
               <a:rPr lang="en-US" smtClean="0"/>
-              <a:t>6/21/2026</a:t>
+              <a:t>6/24/2026</a:t>
             </a:fld>
             <a:endParaRPr lang="en-US" dirty="0"/>
           </a:p>
@@ -7038,7 +6979,7 @@
           <a:p>
             <a:fld id="{02AC24A9-CCB6-4F8D-B8DB-C2F3692CFA5A}" type="datetimeFigureOut">
               <a:rPr lang="en-US" smtClean="0"/>
-              <a:t>6/21/2026</a:t>
+              <a:t>6/24/2026</a:t>
             </a:fld>
             <a:endParaRPr lang="en-US" dirty="0"/>
           </a:p>
@@ -7510,7 +7451,7 @@
           <a:p>
             <a:fld id="{02AC24A9-CCB6-4F8D-B8DB-C2F3692CFA5A}" type="datetimeFigureOut">
               <a:rPr lang="en-US" smtClean="0"/>
-              <a:t>6/21/2026</a:t>
+              <a:t>6/24/2026</a:t>
             </a:fld>
             <a:endParaRPr lang="en-US" dirty="0"/>
           </a:p>
@@ -7965,7 +7906,7 @@
           <a:p>
             <a:fld id="{02AC24A9-CCB6-4F8D-B8DB-C2F3692CFA5A}" type="datetimeFigureOut">
               <a:rPr lang="en-US" smtClean="0"/>
-              <a:t>6/21/2026</a:t>
+              <a:t>6/24/2026</a:t>
             </a:fld>
             <a:endParaRPr lang="en-US" dirty="0"/>
           </a:p>
@@ -8500,7 +8441,7 @@
           <a:p>
             <a:fld id="{02AC24A9-CCB6-4F8D-B8DB-C2F3692CFA5A}" type="datetimeFigureOut">
               <a:rPr lang="en-US" smtClean="0"/>
-              <a:t>6/21/2026</a:t>
+              <a:t>6/24/2026</a:t>
             </a:fld>
             <a:endParaRPr lang="en-US" dirty="0"/>
           </a:p>
@@ -9202,7 +9143,7 @@
           <a:p>
             <a:fld id="{02AC24A9-CCB6-4F8D-B8DB-C2F3692CFA5A}" type="datetimeFigureOut">
               <a:rPr lang="en-US" smtClean="0"/>
-              <a:t>6/21/2026</a:t>
+              <a:t>6/24/2026</a:t>
             </a:fld>
             <a:endParaRPr lang="en-US" dirty="0"/>
           </a:p>
@@ -9532,7 +9473,7 @@
           <a:p>
             <a:fld id="{02AC24A9-CCB6-4F8D-B8DB-C2F3692CFA5A}" type="datetimeFigureOut">
               <a:rPr lang="en-US" smtClean="0"/>
-              <a:t>6/21/2026</a:t>
+              <a:t>6/24/2026</a:t>
             </a:fld>
             <a:endParaRPr lang="en-US" dirty="0"/>
           </a:p>
@@ -9645,7 +9586,7 @@
           <a:p>
             <a:fld id="{02AC24A9-CCB6-4F8D-B8DB-C2F3692CFA5A}" type="datetimeFigureOut">
               <a:rPr lang="en-US" smtClean="0"/>
-              <a:t>6/21/2026</a:t>
+              <a:t>6/24/2026</a:t>
             </a:fld>
             <a:endParaRPr lang="en-US" dirty="0"/>
           </a:p>
@@ -10142,7 +10083,7 @@
           <a:p>
             <a:fld id="{02AC24A9-CCB6-4F8D-B8DB-C2F3692CFA5A}" type="datetimeFigureOut">
               <a:rPr lang="en-US" smtClean="0"/>
-              <a:t>6/21/2026</a:t>
+              <a:t>6/24/2026</a:t>
             </a:fld>
             <a:endParaRPr lang="en-US" dirty="0"/>
           </a:p>
@@ -10621,7 +10562,7 @@
           <a:p>
             <a:fld id="{02AC24A9-CCB6-4F8D-B8DB-C2F3692CFA5A}" type="datetimeFigureOut">
               <a:rPr lang="en-US" smtClean="0"/>
-              <a:t>6/21/2026</a:t>
+              <a:t>6/24/2026</a:t>
             </a:fld>
             <a:endParaRPr lang="en-US" dirty="0"/>
           </a:p>
@@ -10864,7 +10805,7 @@
           <a:p>
             <a:fld id="{02AC24A9-CCB6-4F8D-B8DB-C2F3692CFA5A}" type="datetimeFigureOut">
               <a:rPr lang="en-US" smtClean="0"/>
-              <a:t>6/21/2026</a:t>
+              <a:t>6/24/2026</a:t>
             </a:fld>
             <a:endParaRPr lang="en-US" dirty="0"/>
           </a:p>
@@ -11618,7 +11559,7 @@
           <a:p>
             <a:r>
               <a:rPr lang="sk-SK" sz="1800" dirty="0"/>
-              <a:t>Natrénovať modely strojového učenia,</a:t>
+              <a:t>Natrénovať modely strojového a hlbokého učenia,</a:t>
             </a:r>
           </a:p>
           <a:p>
@@ -11714,7 +11655,7 @@
         <p:spPr>
           <a:xfrm>
             <a:off x="1115568" y="2478023"/>
-            <a:ext cx="10650862" cy="3698489"/>
+            <a:ext cx="10650862" cy="3831337"/>
           </a:xfrm>
         </p:spPr>
         <p:txBody>
@@ -11746,7 +11687,7 @@
             </a:r>
             <a:r>
               <a:rPr lang="sk-SK" sz="2000" dirty="0"/>
-              <a:t>Empirické porovnanie modelov strojového učenia s ekonometrickými riešeniami,</a:t>
+              <a:t>Definícia metodiky pre identifikáciu vzorov v časových radoch akciových trhov s dôrazom na metódy umelej inteligencie,</a:t>
             </a:r>
           </a:p>
           <a:p>
@@ -11878,7 +11819,7 @@
             </a:r>
             <a:r>
               <a:rPr lang="sk-SK" sz="2000" dirty="0"/>
-              <a:t>Definícia metodiky pre identifikáciu vzorov v časových radoch akciových trhov s dôrazom na metódy umelej inteligencie,</a:t>
+              <a:t>Empirické porovnanie modelov strojového a hlbokého učenia s ekonometrickými metódami,</a:t>
             </a:r>
           </a:p>
           <a:p>
@@ -12225,7 +12166,7 @@
             <p:ph idx="1"/>
             <p:extLst>
               <p:ext uri="{D42A27DB-BD31-4B8C-83A1-F6EECF244321}">
-                <p14:modId xmlns:p14="http://schemas.microsoft.com/office/powerpoint/2010/main" val="4249491686"/>
+                <p14:modId xmlns:p14="http://schemas.microsoft.com/office/powerpoint/2010/main" val="3087682289"/>
               </p:ext>
             </p:extLst>
           </p:nvPr>
@@ -13003,7 +12944,7 @@
           <a:p>
             <a:r>
               <a:rPr lang="sk-SK" sz="1800" dirty="0"/>
-              <a:t>Identifikácia faktorov vplývajúcich na volatilitu trhov.</a:t>
+              <a:t>Identifikácia faktorov vplývajúcich na dynamiku trhov.</a:t>
             </a:r>
           </a:p>
         </p:txBody>

--- a/Identifikácia vzorov v časových radoch pre komparáciu volatility.pptx
+++ b/Identifikácia vzorov v časových radoch pre komparáciu volatility.pptx
@@ -4761,7 +4761,7 @@
           <a:p>
             <a:fld id="{AD9B504B-8E04-47AE-BBD5-0260BCE63BC0}" type="datetimeFigureOut">
               <a:rPr lang="sk-SK" smtClean="0"/>
-              <a:t>24. 6. 2026</a:t>
+              <a:t>25. 6. 2026</a:t>
             </a:fld>
             <a:endParaRPr lang="sk-SK"/>
           </a:p>
@@ -6398,7 +6398,7 @@
           <a:p>
             <a:fld id="{02AC24A9-CCB6-4F8D-B8DB-C2F3692CFA5A}" type="datetimeFigureOut">
               <a:rPr lang="en-US" smtClean="0"/>
-              <a:t>6/24/2026</a:t>
+              <a:t>6/25/2026</a:t>
             </a:fld>
             <a:endParaRPr lang="en-US" dirty="0"/>
           </a:p>
@@ -6769,7 +6769,7 @@
           <a:p>
             <a:fld id="{02AC24A9-CCB6-4F8D-B8DB-C2F3692CFA5A}" type="datetimeFigureOut">
               <a:rPr lang="en-US" smtClean="0"/>
-              <a:t>6/24/2026</a:t>
+              <a:t>6/25/2026</a:t>
             </a:fld>
             <a:endParaRPr lang="en-US" dirty="0"/>
           </a:p>
@@ -6979,7 +6979,7 @@
           <a:p>
             <a:fld id="{02AC24A9-CCB6-4F8D-B8DB-C2F3692CFA5A}" type="datetimeFigureOut">
               <a:rPr lang="en-US" smtClean="0"/>
-              <a:t>6/24/2026</a:t>
+              <a:t>6/25/2026</a:t>
             </a:fld>
             <a:endParaRPr lang="en-US" dirty="0"/>
           </a:p>
@@ -7451,7 +7451,7 @@
           <a:p>
             <a:fld id="{02AC24A9-CCB6-4F8D-B8DB-C2F3692CFA5A}" type="datetimeFigureOut">
               <a:rPr lang="en-US" smtClean="0"/>
-              <a:t>6/24/2026</a:t>
+              <a:t>6/25/2026</a:t>
             </a:fld>
             <a:endParaRPr lang="en-US" dirty="0"/>
           </a:p>
@@ -7906,7 +7906,7 @@
           <a:p>
             <a:fld id="{02AC24A9-CCB6-4F8D-B8DB-C2F3692CFA5A}" type="datetimeFigureOut">
               <a:rPr lang="en-US" smtClean="0"/>
-              <a:t>6/24/2026</a:t>
+              <a:t>6/25/2026</a:t>
             </a:fld>
             <a:endParaRPr lang="en-US" dirty="0"/>
           </a:p>
@@ -8441,7 +8441,7 @@
           <a:p>
             <a:fld id="{02AC24A9-CCB6-4F8D-B8DB-C2F3692CFA5A}" type="datetimeFigureOut">
               <a:rPr lang="en-US" smtClean="0"/>
-              <a:t>6/24/2026</a:t>
+              <a:t>6/25/2026</a:t>
             </a:fld>
             <a:endParaRPr lang="en-US" dirty="0"/>
           </a:p>
@@ -9143,7 +9143,7 @@
           <a:p>
             <a:fld id="{02AC24A9-CCB6-4F8D-B8DB-C2F3692CFA5A}" type="datetimeFigureOut">
               <a:rPr lang="en-US" smtClean="0"/>
-              <a:t>6/24/2026</a:t>
+              <a:t>6/25/2026</a:t>
             </a:fld>
             <a:endParaRPr lang="en-US" dirty="0"/>
           </a:p>
@@ -9473,7 +9473,7 @@
           <a:p>
             <a:fld id="{02AC24A9-CCB6-4F8D-B8DB-C2F3692CFA5A}" type="datetimeFigureOut">
               <a:rPr lang="en-US" smtClean="0"/>
-              <a:t>6/24/2026</a:t>
+              <a:t>6/25/2026</a:t>
             </a:fld>
             <a:endParaRPr lang="en-US" dirty="0"/>
           </a:p>
@@ -9586,7 +9586,7 @@
           <a:p>
             <a:fld id="{02AC24A9-CCB6-4F8D-B8DB-C2F3692CFA5A}" type="datetimeFigureOut">
               <a:rPr lang="en-US" smtClean="0"/>
-              <a:t>6/24/2026</a:t>
+              <a:t>6/25/2026</a:t>
             </a:fld>
             <a:endParaRPr lang="en-US" dirty="0"/>
           </a:p>
@@ -10083,7 +10083,7 @@
           <a:p>
             <a:fld id="{02AC24A9-CCB6-4F8D-B8DB-C2F3692CFA5A}" type="datetimeFigureOut">
               <a:rPr lang="en-US" smtClean="0"/>
-              <a:t>6/24/2026</a:t>
+              <a:t>6/25/2026</a:t>
             </a:fld>
             <a:endParaRPr lang="en-US" dirty="0"/>
           </a:p>
@@ -10562,7 +10562,7 @@
           <a:p>
             <a:fld id="{02AC24A9-CCB6-4F8D-B8DB-C2F3692CFA5A}" type="datetimeFigureOut">
               <a:rPr lang="en-US" smtClean="0"/>
-              <a:t>6/24/2026</a:t>
+              <a:t>6/25/2026</a:t>
             </a:fld>
             <a:endParaRPr lang="en-US" dirty="0"/>
           </a:p>
@@ -10805,7 +10805,7 @@
           <a:p>
             <a:fld id="{02AC24A9-CCB6-4F8D-B8DB-C2F3692CFA5A}" type="datetimeFigureOut">
               <a:rPr lang="en-US" smtClean="0"/>
-              <a:t>6/24/2026</a:t>
+              <a:t>6/25/2026</a:t>
             </a:fld>
             <a:endParaRPr lang="en-US" dirty="0"/>
           </a:p>
@@ -12606,7 +12606,7 @@
         <p:spPr/>
         <p:txBody>
           <a:bodyPr>
-            <a:normAutofit lnSpcReduction="10000"/>
+            <a:normAutofit/>
           </a:bodyPr>
           <a:lstStyle/>
           <a:p>
@@ -12701,33 +12701,6 @@
             <a:r>
               <a:rPr lang="sk-SK" sz="1800" dirty="0"/>
               <a:t>.</a:t>
-            </a:r>
-          </a:p>
-          <a:p>
-            <a:pPr marL="0" indent="0">
-              <a:buNone/>
-            </a:pPr>
-            <a:r>
-              <a:rPr lang="sk-SK" sz="1800" b="1" dirty="0">
-                <a:effectLst>
-                  <a:outerShdw blurRad="38100" dist="38100" dir="2700000" algn="tl">
-                    <a:srgbClr val="000000">
-                      <a:alpha val="43137"/>
-                    </a:srgbClr>
-                  </a:outerShdw>
-                </a:effectLst>
-              </a:rPr>
-              <a:t>Trénovanie</a:t>
-            </a:r>
-          </a:p>
-          <a:p>
-            <a:r>
-              <a:rPr lang="sk-SK" sz="1800" dirty="0" err="1"/>
-              <a:t>Rolling-window</a:t>
-            </a:r>
-            <a:r>
-              <a:rPr lang="sk-SK" sz="1800" dirty="0"/>
-              <a:t> prístup.</a:t>
             </a:r>
           </a:p>
           <a:p>
